--- a/Foundation_F4/F4-L12_Review_and_Unit_Assessment_School_Life.pptx
+++ b/Foundation_F4/F4-L12_Review_and_Unit_Assessment_School_Life.pptx
@@ -1,6 +1,6 @@
 
 <file path=ppt/presentation.xml><?xml version="1.0" encoding="utf-8"?>
-<p:presentation xmlns:a="http://schemas.openxmlformats.org/drawingml/2006/main" xmlns:r="http://schemas.openxmlformats.org/officeDocument/2006/relationships" xmlns:p="http://schemas.openxmlformats.org/presentationml/2006/main" saveSubsetFonts="1" autoCompressPictures="0">
+<p:presentation xmlns:a="http://schemas.openxmlformats.org/drawingml/2006/main" xmlns:r="http://schemas.openxmlformats.org/officeDocument/2006/relationships" xmlns:p="http://schemas.openxmlformats.org/presentationml/2006/main" embedTrueTypeFonts="1" saveSubsetFonts="1" autoCompressPictures="0">
   <p:sldMasterIdLst>
     <p:sldMasterId id="2147483648" r:id="rId1"/>
   </p:sldMasterIdLst>
@@ -34,6 +34,13 @@
   </p:notesMasterIdLst>
   <p:sldSz cx="12192000" cy="6858000"/>
   <p:notesSz cx="6858000" cy="12192000"/>
+  <p:embeddedFontLst>
+    <p:embeddedFont>
+      <p:font typeface="Amiri" pitchFamily="2" charset="-78"/>
+      <p:regular r:id="rIdFont1"/>
+      <p:bold r:id="rIdFont2"/>
+    </p:embeddedFont>
+  </p:embeddedFontLst>
   <p:defaultTextStyle>
     <a:lvl1pPr marL="0" algn="l" defTabSz="914400" rtl="0" eaLnBrk="1" latinLnBrk="0" hangingPunct="1">
       <a:defRPr sz="1800" kern="1200">
@@ -390,8 +397,7 @@
           <a:schemeClr val="tx1"/>
         </a:solidFill>
         <a:latin typeface="+mn-lt"/>
-        <a:ea typeface="+mn-ea"/>
-        <a:cs typeface="+mn-cs"/>
+        <a:cs typeface="Amiri" pitchFamily="2" charset="-78"/>
       </a:defRPr>
     </a:lvl1pPr>
     <a:lvl2pPr marL="457200" algn="l" defTabSz="914400" rtl="0" eaLnBrk="1" latinLnBrk="0" hangingPunct="1">
@@ -400,8 +406,7 @@
           <a:schemeClr val="tx1"/>
         </a:solidFill>
         <a:latin typeface="+mn-lt"/>
-        <a:ea typeface="+mn-ea"/>
-        <a:cs typeface="+mn-cs"/>
+        <a:cs typeface="Amiri" pitchFamily="2" charset="-78"/>
       </a:defRPr>
     </a:lvl2pPr>
     <a:lvl3pPr marL="914400" algn="l" defTabSz="914400" rtl="0" eaLnBrk="1" latinLnBrk="0" hangingPunct="1">
@@ -410,8 +415,7 @@
           <a:schemeClr val="tx1"/>
         </a:solidFill>
         <a:latin typeface="+mn-lt"/>
-        <a:ea typeface="+mn-ea"/>
-        <a:cs typeface="+mn-cs"/>
+        <a:cs typeface="Amiri" pitchFamily="2" charset="-78"/>
       </a:defRPr>
     </a:lvl3pPr>
     <a:lvl4pPr marL="1371600" algn="l" defTabSz="914400" rtl="0" eaLnBrk="1" latinLnBrk="0" hangingPunct="1">
@@ -420,8 +424,7 @@
           <a:schemeClr val="tx1"/>
         </a:solidFill>
         <a:latin typeface="+mn-lt"/>
-        <a:ea typeface="+mn-ea"/>
-        <a:cs typeface="+mn-cs"/>
+        <a:cs typeface="Amiri" pitchFamily="2" charset="-78"/>
       </a:defRPr>
     </a:lvl4pPr>
     <a:lvl5pPr marL="1828800" algn="l" defTabSz="914400" rtl="0" eaLnBrk="1" latinLnBrk="0" hangingPunct="1">
@@ -430,8 +433,7 @@
           <a:schemeClr val="tx1"/>
         </a:solidFill>
         <a:latin typeface="+mn-lt"/>
-        <a:ea typeface="+mn-ea"/>
-        <a:cs typeface="+mn-cs"/>
+        <a:cs typeface="Amiri" pitchFamily="2" charset="-78"/>
       </a:defRPr>
     </a:lvl5pPr>
     <a:lvl6pPr marL="2286000" algn="l" defTabSz="914400" rtl="0" eaLnBrk="1" latinLnBrk="0" hangingPunct="1">
@@ -440,8 +442,7 @@
           <a:schemeClr val="tx1"/>
         </a:solidFill>
         <a:latin typeface="+mn-lt"/>
-        <a:ea typeface="+mn-ea"/>
-        <a:cs typeface="+mn-cs"/>
+        <a:cs typeface="Amiri" pitchFamily="2" charset="-78"/>
       </a:defRPr>
     </a:lvl6pPr>
     <a:lvl7pPr marL="2743200" algn="l" defTabSz="914400" rtl="0" eaLnBrk="1" latinLnBrk="0" hangingPunct="1">
@@ -450,8 +451,7 @@
           <a:schemeClr val="tx1"/>
         </a:solidFill>
         <a:latin typeface="+mn-lt"/>
-        <a:ea typeface="+mn-ea"/>
-        <a:cs typeface="+mn-cs"/>
+        <a:cs typeface="Amiri" pitchFamily="2" charset="-78"/>
       </a:defRPr>
     </a:lvl7pPr>
     <a:lvl8pPr marL="3200400" algn="l" defTabSz="914400" rtl="0" eaLnBrk="1" latinLnBrk="0" hangingPunct="1">
@@ -460,8 +460,7 @@
           <a:schemeClr val="tx1"/>
         </a:solidFill>
         <a:latin typeface="+mn-lt"/>
-        <a:ea typeface="+mn-ea"/>
-        <a:cs typeface="+mn-cs"/>
+        <a:cs typeface="Amiri" pitchFamily="2" charset="-78"/>
       </a:defRPr>
     </a:lvl8pPr>
     <a:lvl9pPr marL="3657600" algn="l" defTabSz="914400" rtl="0" eaLnBrk="1" latinLnBrk="0" hangingPunct="1">
@@ -470,8 +469,7 @@
           <a:schemeClr val="tx1"/>
         </a:solidFill>
         <a:latin typeface="+mn-lt"/>
-        <a:ea typeface="+mn-ea"/>
-        <a:cs typeface="+mn-cs"/>
+        <a:cs typeface="Amiri" pitchFamily="2" charset="-78"/>
       </a:defRPr>
     </a:lvl9pPr>
   </p:notesStyle>
@@ -2610,8 +2608,7 @@
             <a:schemeClr val="tx1"/>
           </a:solidFill>
           <a:latin typeface="+mj-lt"/>
-          <a:ea typeface="+mj-ea"/>
-          <a:cs typeface="+mj-cs"/>
+          <a:cs typeface="Amiri" pitchFamily="2" charset="-78"/>
         </a:defRPr>
       </a:lvl1pPr>
     </p:titleStyle>
@@ -2627,8 +2624,7 @@
             <a:schemeClr val="tx1"/>
           </a:solidFill>
           <a:latin typeface="+mn-lt"/>
-          <a:ea typeface="+mn-ea"/>
-          <a:cs typeface="+mn-cs"/>
+          <a:cs typeface="Amiri" pitchFamily="2" charset="-78"/>
         </a:defRPr>
       </a:lvl1pPr>
       <a:lvl2pPr marL="742950" indent="-285750" algn="l" defTabSz="914400" rtl="0" eaLnBrk="1" latinLnBrk="0" hangingPunct="1">
@@ -2642,8 +2638,7 @@
             <a:schemeClr val="tx1"/>
           </a:solidFill>
           <a:latin typeface="+mn-lt"/>
-          <a:ea typeface="+mn-ea"/>
-          <a:cs typeface="+mn-cs"/>
+          <a:cs typeface="Amiri" pitchFamily="2" charset="-78"/>
         </a:defRPr>
       </a:lvl2pPr>
       <a:lvl3pPr marL="1143000" indent="-228600" algn="l" defTabSz="914400" rtl="0" eaLnBrk="1" latinLnBrk="0" hangingPunct="1">
@@ -2657,8 +2652,7 @@
             <a:schemeClr val="tx1"/>
           </a:solidFill>
           <a:latin typeface="+mn-lt"/>
-          <a:ea typeface="+mn-ea"/>
-          <a:cs typeface="+mn-cs"/>
+          <a:cs typeface="Amiri" pitchFamily="2" charset="-78"/>
         </a:defRPr>
       </a:lvl3pPr>
       <a:lvl4pPr marL="1600200" indent="-228600" algn="l" defTabSz="914400" rtl="0" eaLnBrk="1" latinLnBrk="0" hangingPunct="1">
@@ -2672,8 +2666,7 @@
             <a:schemeClr val="tx1"/>
           </a:solidFill>
           <a:latin typeface="+mn-lt"/>
-          <a:ea typeface="+mn-ea"/>
-          <a:cs typeface="+mn-cs"/>
+          <a:cs typeface="Amiri" pitchFamily="2" charset="-78"/>
         </a:defRPr>
       </a:lvl4pPr>
       <a:lvl5pPr marL="2057400" indent="-228600" algn="l" defTabSz="914400" rtl="0" eaLnBrk="1" latinLnBrk="0" hangingPunct="1">
@@ -2687,8 +2680,7 @@
             <a:schemeClr val="tx1"/>
           </a:solidFill>
           <a:latin typeface="+mn-lt"/>
-          <a:ea typeface="+mn-ea"/>
-          <a:cs typeface="+mn-cs"/>
+          <a:cs typeface="Amiri" pitchFamily="2" charset="-78"/>
         </a:defRPr>
       </a:lvl5pPr>
       <a:lvl6pPr marL="2514600" indent="-228600" algn="l" defTabSz="914400" rtl="0" eaLnBrk="1" latinLnBrk="0" hangingPunct="1">
@@ -2702,8 +2694,7 @@
             <a:schemeClr val="tx1"/>
           </a:solidFill>
           <a:latin typeface="+mn-lt"/>
-          <a:ea typeface="+mn-ea"/>
-          <a:cs typeface="+mn-cs"/>
+          <a:cs typeface="Amiri" pitchFamily="2" charset="-78"/>
         </a:defRPr>
       </a:lvl6pPr>
       <a:lvl7pPr marL="2971800" indent="-228600" algn="l" defTabSz="914400" rtl="0" eaLnBrk="1" latinLnBrk="0" hangingPunct="1">
@@ -2717,8 +2708,7 @@
             <a:schemeClr val="tx1"/>
           </a:solidFill>
           <a:latin typeface="+mn-lt"/>
-          <a:ea typeface="+mn-ea"/>
-          <a:cs typeface="+mn-cs"/>
+          <a:cs typeface="Amiri" pitchFamily="2" charset="-78"/>
         </a:defRPr>
       </a:lvl7pPr>
       <a:lvl8pPr marL="3429000" indent="-228600" algn="l" defTabSz="914400" rtl="0" eaLnBrk="1" latinLnBrk="0" hangingPunct="1">
@@ -2732,8 +2722,7 @@
             <a:schemeClr val="tx1"/>
           </a:solidFill>
           <a:latin typeface="+mn-lt"/>
-          <a:ea typeface="+mn-ea"/>
-          <a:cs typeface="+mn-cs"/>
+          <a:cs typeface="Amiri" pitchFamily="2" charset="-78"/>
         </a:defRPr>
       </a:lvl8pPr>
       <a:lvl9pPr marL="3886200" indent="-228600" algn="l" defTabSz="914400" rtl="0" eaLnBrk="1" latinLnBrk="0" hangingPunct="1">
@@ -2747,8 +2736,7 @@
             <a:schemeClr val="tx1"/>
           </a:solidFill>
           <a:latin typeface="+mn-lt"/>
-          <a:ea typeface="+mn-ea"/>
-          <a:cs typeface="+mn-cs"/>
+          <a:cs typeface="Amiri" pitchFamily="2" charset="-78"/>
         </a:defRPr>
       </a:lvl9pPr>
     </p:bodyStyle>
@@ -2762,8 +2750,7 @@
             <a:schemeClr val="tx1"/>
           </a:solidFill>
           <a:latin typeface="+mn-lt"/>
-          <a:ea typeface="+mn-ea"/>
-          <a:cs typeface="+mn-cs"/>
+          <a:cs typeface="Amiri" pitchFamily="2" charset="-78"/>
         </a:defRPr>
       </a:lvl1pPr>
       <a:lvl2pPr marL="457200" algn="l" defTabSz="914400" rtl="0" eaLnBrk="1" latinLnBrk="0" hangingPunct="1">
@@ -2772,8 +2759,7 @@
             <a:schemeClr val="tx1"/>
           </a:solidFill>
           <a:latin typeface="+mn-lt"/>
-          <a:ea typeface="+mn-ea"/>
-          <a:cs typeface="+mn-cs"/>
+          <a:cs typeface="Amiri" pitchFamily="2" charset="-78"/>
         </a:defRPr>
       </a:lvl2pPr>
       <a:lvl3pPr marL="914400" algn="l" defTabSz="914400" rtl="0" eaLnBrk="1" latinLnBrk="0" hangingPunct="1">
@@ -2782,8 +2768,7 @@
             <a:schemeClr val="tx1"/>
           </a:solidFill>
           <a:latin typeface="+mn-lt"/>
-          <a:ea typeface="+mn-ea"/>
-          <a:cs typeface="+mn-cs"/>
+          <a:cs typeface="Amiri" pitchFamily="2" charset="-78"/>
         </a:defRPr>
       </a:lvl3pPr>
       <a:lvl4pPr marL="1371600" algn="l" defTabSz="914400" rtl="0" eaLnBrk="1" latinLnBrk="0" hangingPunct="1">
@@ -2792,8 +2777,7 @@
             <a:schemeClr val="tx1"/>
           </a:solidFill>
           <a:latin typeface="+mn-lt"/>
-          <a:ea typeface="+mn-ea"/>
-          <a:cs typeface="+mn-cs"/>
+          <a:cs typeface="Amiri" pitchFamily="2" charset="-78"/>
         </a:defRPr>
       </a:lvl4pPr>
       <a:lvl5pPr marL="1828800" algn="l" defTabSz="914400" rtl="0" eaLnBrk="1" latinLnBrk="0" hangingPunct="1">
@@ -2802,8 +2786,7 @@
             <a:schemeClr val="tx1"/>
           </a:solidFill>
           <a:latin typeface="+mn-lt"/>
-          <a:ea typeface="+mn-ea"/>
-          <a:cs typeface="+mn-cs"/>
+          <a:cs typeface="Amiri" pitchFamily="2" charset="-78"/>
         </a:defRPr>
       </a:lvl5pPr>
       <a:lvl6pPr marL="2286000" algn="l" defTabSz="914400" rtl="0" eaLnBrk="1" latinLnBrk="0" hangingPunct="1">
@@ -2812,8 +2795,7 @@
             <a:schemeClr val="tx1"/>
           </a:solidFill>
           <a:latin typeface="+mn-lt"/>
-          <a:ea typeface="+mn-ea"/>
-          <a:cs typeface="+mn-cs"/>
+          <a:cs typeface="Amiri" pitchFamily="2" charset="-78"/>
         </a:defRPr>
       </a:lvl6pPr>
       <a:lvl7pPr marL="2743200" algn="l" defTabSz="914400" rtl="0" eaLnBrk="1" latinLnBrk="0" hangingPunct="1">
@@ -2822,8 +2804,7 @@
             <a:schemeClr val="tx1"/>
           </a:solidFill>
           <a:latin typeface="+mn-lt"/>
-          <a:ea typeface="+mn-ea"/>
-          <a:cs typeface="+mn-cs"/>
+          <a:cs typeface="Amiri" pitchFamily="2" charset="-78"/>
         </a:defRPr>
       </a:lvl7pPr>
       <a:lvl8pPr marL="3200400" algn="l" defTabSz="914400" rtl="0" eaLnBrk="1" latinLnBrk="0" hangingPunct="1">
@@ -2832,8 +2813,7 @@
             <a:schemeClr val="tx1"/>
           </a:solidFill>
           <a:latin typeface="+mn-lt"/>
-          <a:ea typeface="+mn-ea"/>
-          <a:cs typeface="+mn-cs"/>
+          <a:cs typeface="Amiri" pitchFamily="2" charset="-78"/>
         </a:defRPr>
       </a:lvl8pPr>
       <a:lvl9pPr marL="3657600" algn="l" defTabSz="914400" rtl="0" eaLnBrk="1" latinLnBrk="0" hangingPunct="1">
@@ -2842,8 +2822,7 @@
             <a:schemeClr val="tx1"/>
           </a:solidFill>
           <a:latin typeface="+mn-lt"/>
-          <a:ea typeface="+mn-ea"/>
-          <a:cs typeface="+mn-cs"/>
+          <a:cs typeface="Amiri" pitchFamily="2" charset="-78"/>
         </a:defRPr>
       </a:lvl9pPr>
     </p:otherStyle>
@@ -3003,9 +2982,8 @@
                 <a:solidFill>
                   <a:srgbClr val="D4AF37"/>
                 </a:solidFill>
-                <a:latin typeface="Amiri" pitchFamily="34" charset="0"/>
-                <a:ea typeface="Amiri" pitchFamily="34" charset="-122"/>
-                <a:cs typeface="Amiri" pitchFamily="34" charset="-120"/>
+                <a:latin typeface="Amiri" pitchFamily="2" charset="-78"/>
+                <a:cs typeface="Amiri" pitchFamily="2" charset="-78"/>
               </a:rPr>
               <a:t>م</a:t>
             </a:r>
@@ -3043,8 +3021,7 @@
                   <a:srgbClr val="FFFFFF"/>
                 </a:solidFill>
                 <a:latin typeface="Cambria" pitchFamily="34" charset="0"/>
-                <a:ea typeface="Cambria" pitchFamily="34" charset="-122"/>
-                <a:cs typeface="Cambria" pitchFamily="34" charset="-120"/>
+                <a:cs typeface="Amiri" pitchFamily="2" charset="-78"/>
               </a:rPr>
               <a:t>Al Madina Online School</a:t>
             </a:r>
@@ -3060,8 +3037,7 @@
                   <a:srgbClr val="D4AF37"/>
                 </a:solidFill>
                 <a:latin typeface="Calibri" pitchFamily="34" charset="0"/>
-                <a:ea typeface="Calibri" pitchFamily="34" charset="-122"/>
-                <a:cs typeface="Calibri" pitchFamily="34" charset="-120"/>
+                <a:cs typeface="Amiri" pitchFamily="2" charset="-78"/>
               </a:rPr>
               <a:t>ARABIC DEPARTMENT · MIFTAH ARABIC</a:t>
             </a:r>
@@ -3099,8 +3075,7 @@
                   <a:srgbClr val="D4AF37"/>
                 </a:solidFill>
                 <a:latin typeface="Calibri" pitchFamily="34" charset="0"/>
-                <a:ea typeface="Calibri" pitchFamily="34" charset="-122"/>
-                <a:cs typeface="Calibri" pitchFamily="34" charset="-120"/>
+                <a:cs typeface="Amiri" pitchFamily="2" charset="-78"/>
               </a:rPr>
               <a:t>CAMBRIDGE IGCSE ARABIC 0544  ·  YEAR 7  ·  FOUNDATION F4  ·  F4-L12</a:t>
             </a:r>
@@ -3138,8 +3113,7 @@
                   <a:srgbClr val="9FB3D1"/>
                 </a:solidFill>
                 <a:latin typeface="Cambria" pitchFamily="34" charset="0"/>
-                <a:ea typeface="Cambria" pitchFamily="34" charset="-122"/>
-                <a:cs typeface="Cambria" pitchFamily="34" charset="-120"/>
+                <a:cs typeface="Amiri" pitchFamily="2" charset="-78"/>
               </a:rPr>
               <a:t>F4-L12</a:t>
             </a:r>
@@ -3177,8 +3151,7 @@
                   <a:srgbClr val="FFFFFF"/>
                 </a:solidFill>
                 <a:latin typeface="Cambria" pitchFamily="34" charset="0"/>
-                <a:ea typeface="Cambria" pitchFamily="34" charset="-122"/>
-                <a:cs typeface="Cambria" pitchFamily="34" charset="-120"/>
+                <a:cs typeface="Amiri" pitchFamily="2" charset="-78"/>
               </a:rPr>
               <a:t>Review and Unit Assessment: School Life</a:t>
             </a:r>
@@ -3215,9 +3188,8 @@
                 <a:solidFill>
                   <a:srgbClr val="D4AF37"/>
                 </a:solidFill>
-                <a:latin typeface="Amiri" pitchFamily="34" charset="0"/>
-                <a:ea typeface="Amiri" pitchFamily="34" charset="-122"/>
-                <a:cs typeface="Amiri" pitchFamily="34" charset="-120"/>
+                <a:latin typeface="Amiri" pitchFamily="2" charset="-78"/>
+                <a:cs typeface="Amiri" pitchFamily="2" charset="-78"/>
               </a:rPr>
               <a:t>المُرَاجَعَةُ وَتَقْيِيمُ الوَحْدَةِ — الحَيَاةُ المَدْرَسِيَّةُ</a:t>
             </a:r>
@@ -3255,8 +3227,7 @@
                   <a:srgbClr val="C6D2E6"/>
                 </a:solidFill>
                 <a:latin typeface="Calibri" pitchFamily="34" charset="0"/>
-                <a:ea typeface="Calibri" pitchFamily="34" charset="-122"/>
-                <a:cs typeface="Calibri" pitchFamily="34" charset="-120"/>
+                <a:cs typeface="Amiri" pitchFamily="2" charset="-78"/>
               </a:rPr>
               <a:t>Show what you can understand and produce about school life across listening, reading, writing and speaking — then turn the result into one precise next step for F5.</a:t>
             </a:r>
@@ -3321,8 +3292,7 @@
                   <a:srgbClr val="D4AF37"/>
                 </a:solidFill>
                 <a:latin typeface="Calibri" pitchFamily="34" charset="0"/>
-                <a:ea typeface="Calibri" pitchFamily="34" charset="-122"/>
-                <a:cs typeface="Calibri" pitchFamily="34" charset="-120"/>
+                <a:cs typeface="Amiri" pitchFamily="2" charset="-78"/>
               </a:rPr>
               <a:t>LESSON</a:t>
             </a:r>
@@ -3338,8 +3308,7 @@
                   <a:srgbClr val="FFFFFF"/>
                 </a:solidFill>
                 <a:latin typeface="Calibri" pitchFamily="34" charset="0"/>
-                <a:ea typeface="Calibri" pitchFamily="34" charset="-122"/>
-                <a:cs typeface="Calibri" pitchFamily="34" charset="-120"/>
+                <a:cs typeface="Amiri" pitchFamily="2" charset="-78"/>
               </a:rPr>
               <a:t>F4-L12 · Foundation F4 · My School</a:t>
             </a:r>
@@ -3404,8 +3373,7 @@
                   <a:srgbClr val="D4AF37"/>
                 </a:solidFill>
                 <a:latin typeface="Calibri" pitchFamily="34" charset="0"/>
-                <a:ea typeface="Calibri" pitchFamily="34" charset="-122"/>
-                <a:cs typeface="Calibri" pitchFamily="34" charset="-120"/>
+                <a:cs typeface="Amiri" pitchFamily="2" charset="-78"/>
               </a:rPr>
               <a:t>DURATION</a:t>
             </a:r>
@@ -3421,8 +3389,7 @@
                   <a:srgbClr val="FFFFFF"/>
                 </a:solidFill>
                 <a:latin typeface="Calibri" pitchFamily="34" charset="0"/>
-                <a:ea typeface="Calibri" pitchFamily="34" charset="-122"/>
-                <a:cs typeface="Calibri" pitchFamily="34" charset="-120"/>
+                <a:cs typeface="Amiri" pitchFamily="2" charset="-78"/>
               </a:rPr>
               <a:t>60 minutes · Teams</a:t>
             </a:r>
@@ -3487,8 +3454,7 @@
                   <a:srgbClr val="D4AF37"/>
                 </a:solidFill>
                 <a:latin typeface="Calibri" pitchFamily="34" charset="0"/>
-                <a:ea typeface="Calibri" pitchFamily="34" charset="-122"/>
-                <a:cs typeface="Calibri" pitchFamily="34" charset="-120"/>
+                <a:cs typeface="Amiri" pitchFamily="2" charset="-78"/>
               </a:rPr>
               <a:t>LEVEL</a:t>
             </a:r>
@@ -3504,8 +3470,7 @@
                   <a:srgbClr val="FFFFFF"/>
                 </a:solidFill>
                 <a:latin typeface="Calibri" pitchFamily="34" charset="0"/>
-                <a:ea typeface="Calibri" pitchFamily="34" charset="-122"/>
-                <a:cs typeface="Calibri" pitchFamily="34" charset="-120"/>
+                <a:cs typeface="Amiri" pitchFamily="2" charset="-78"/>
               </a:rPr>
               <a:t>Foundation · end of unit F4</a:t>
             </a:r>
@@ -3570,8 +3535,7 @@
                   <a:srgbClr val="D4AF37"/>
                 </a:solidFill>
                 <a:latin typeface="Calibri" pitchFamily="34" charset="0"/>
-                <a:ea typeface="Calibri" pitchFamily="34" charset="-122"/>
-                <a:cs typeface="Calibri" pitchFamily="34" charset="-120"/>
+                <a:cs typeface="Amiri" pitchFamily="2" charset="-78"/>
               </a:rPr>
               <a:t>ON THE WEBSITE</a:t>
             </a:r>
@@ -3587,8 +3551,7 @@
                   <a:srgbClr val="FFFFFF"/>
                 </a:solidFill>
                 <a:latin typeface="Calibri" pitchFamily="34" charset="0"/>
-                <a:ea typeface="Calibri" pitchFamily="34" charset="-122"/>
-                <a:cs typeface="Calibri" pitchFamily="34" charset="-120"/>
+                <a:cs typeface="Amiri" pitchFamily="2" charset="-78"/>
               </a:rPr>
               <a:t>Pathways › Foundation › F4 › F4-L12</a:t>
             </a:r>
@@ -3682,9 +3645,8 @@
                 <a:solidFill>
                   <a:srgbClr val="D4AF37"/>
                 </a:solidFill>
-                <a:latin typeface="Amiri" pitchFamily="34" charset="0"/>
-                <a:ea typeface="Amiri" pitchFamily="34" charset="-122"/>
-                <a:cs typeface="Amiri" pitchFamily="34" charset="-120"/>
+                <a:latin typeface="Amiri" pitchFamily="2" charset="-78"/>
+                <a:cs typeface="Amiri" pitchFamily="2" charset="-78"/>
               </a:rPr>
               <a:t>م</a:t>
             </a:r>
@@ -3722,8 +3684,7 @@
                   <a:srgbClr val="1B3B6F"/>
                 </a:solidFill>
                 <a:latin typeface="Cambria" pitchFamily="34" charset="0"/>
-                <a:ea typeface="Cambria" pitchFamily="34" charset="-122"/>
-                <a:cs typeface="Cambria" pitchFamily="34" charset="-120"/>
+                <a:cs typeface="Amiri" pitchFamily="2" charset="-78"/>
               </a:rPr>
               <a:t>Al Madina Online School</a:t>
             </a:r>
@@ -3761,8 +3722,7 @@
                   <a:srgbClr val="8A6D1E"/>
                 </a:solidFill>
                 <a:latin typeface="Calibri" pitchFamily="34" charset="0"/>
-                <a:ea typeface="Calibri" pitchFamily="34" charset="-122"/>
-                <a:cs typeface="Calibri" pitchFamily="34" charset="-120"/>
+                <a:cs typeface="Amiri" pitchFamily="2" charset="-78"/>
               </a:rPr>
               <a:t>ARABIC DEPARTMENT · MIFTAH ARABIC · IGCSE 0544</a:t>
             </a:r>
@@ -3827,8 +3787,7 @@
                   <a:srgbClr val="FFFFFF"/>
                 </a:solidFill>
                 <a:latin typeface="Calibri" pitchFamily="34" charset="0"/>
-                <a:ea typeface="Calibri" pitchFamily="34" charset="-122"/>
-                <a:cs typeface="Calibri" pitchFamily="34" charset="-120"/>
+                <a:cs typeface="Amiri" pitchFamily="2" charset="-78"/>
               </a:rPr>
               <a:t>F4-L12 · F4 Assessment</a:t>
             </a:r>
@@ -3893,8 +3852,7 @@
                   <a:srgbClr val="FFFFFF"/>
                 </a:solidFill>
                 <a:latin typeface="Calibri" pitchFamily="34" charset="0"/>
-                <a:ea typeface="Calibri" pitchFamily="34" charset="-122"/>
-                <a:cs typeface="Calibri" pitchFamily="34" charset="-120"/>
+                <a:cs typeface="Amiri" pitchFamily="2" charset="-78"/>
               </a:rPr>
               <a:t>I DO · 5 MIN</a:t>
             </a:r>
@@ -3932,8 +3890,7 @@
                   <a:srgbClr val="6B4C9A"/>
                 </a:solidFill>
                 <a:latin typeface="Calibri" pitchFamily="34" charset="0"/>
-                <a:ea typeface="Calibri" pitchFamily="34" charset="-122"/>
-                <a:cs typeface="Calibri" pitchFamily="34" charset="-120"/>
+                <a:cs typeface="Amiri" pitchFamily="2" charset="-78"/>
               </a:rPr>
               <a:t>LISTENING · TEXT 2 · MARIAM AND YUSUF · MATCHES 1–6 (WEBSITE)</a:t>
             </a:r>
@@ -3971,8 +3928,7 @@
                   <a:srgbClr val="1B3B6F"/>
                 </a:solidFill>
                 <a:latin typeface="Cambria" pitchFamily="34" charset="0"/>
-                <a:ea typeface="Cambria" pitchFamily="34" charset="-122"/>
-                <a:cs typeface="Cambria" pitchFamily="34" charset="-120"/>
+                <a:cs typeface="Amiri" pitchFamily="2" charset="-78"/>
               </a:rPr>
               <a:t>Mariam, Yusuf, both or neither?</a:t>
             </a:r>
@@ -4009,9 +3965,8 @@
                 <a:solidFill>
                   <a:srgbClr val="8A6D1E"/>
                 </a:solidFill>
-                <a:latin typeface="Amiri" pitchFamily="34" charset="0"/>
-                <a:ea typeface="Amiri" pitchFamily="34" charset="-122"/>
-                <a:cs typeface="Amiri" pitchFamily="34" charset="-120"/>
+                <a:latin typeface="Amiri" pitchFamily="2" charset="-78"/>
+                <a:cs typeface="Amiri" pitchFamily="2" charset="-78"/>
               </a:rPr>
               <a:t>النَّصُّ الثَّانِي</a:t>
             </a:r>
@@ -4049,8 +4004,7 @@
                   <a:srgbClr val="8A93A0"/>
                 </a:solidFill>
                 <a:latin typeface="Calibri" pitchFamily="34" charset="0"/>
-                <a:ea typeface="Calibri" pitchFamily="34" charset="-122"/>
-                <a:cs typeface="Calibri" pitchFamily="34" charset="-120"/>
+                <a:cs typeface="Amiri" pitchFamily="2" charset="-78"/>
               </a:rPr>
               <a:t>Miftah Arabic · Foundation F4 · My School · F4-L12</a:t>
             </a:r>
@@ -4113,8 +4067,7 @@
                   <a:srgbClr val="FFFFFF"/>
                 </a:solidFill>
                 <a:latin typeface="Calibri" pitchFamily="34" charset="0"/>
-                <a:ea typeface="Calibri" pitchFamily="34" charset="-122"/>
-                <a:cs typeface="Calibri" pitchFamily="34" charset="-120"/>
+                <a:cs typeface="Amiri" pitchFamily="2" charset="-78"/>
               </a:rPr>
               <a:t>M · Y · Both · Neither</a:t>
             </a:r>
@@ -4152,8 +4105,7 @@
                   <a:srgbClr val="FFFFFF"/>
                 </a:solidFill>
                 <a:latin typeface="Calibri" pitchFamily="34" charset="0"/>
-                <a:ea typeface="Calibri" pitchFamily="34" charset="-122"/>
-                <a:cs typeface="Calibri" pitchFamily="34" charset="-120"/>
+                <a:cs typeface="Amiri" pitchFamily="2" charset="-78"/>
               </a:rPr>
               <a:t>Statement</a:t>
             </a:r>
@@ -4191,8 +4143,7 @@
                   <a:srgbClr val="FFFFFF"/>
                 </a:solidFill>
                 <a:latin typeface="Calibri" pitchFamily="34" charset="0"/>
-                <a:ea typeface="Calibri" pitchFamily="34" charset="-122"/>
-                <a:cs typeface="Calibri" pitchFamily="34" charset="-120"/>
+                <a:cs typeface="Amiri" pitchFamily="2" charset="-78"/>
               </a:rPr>
               <a:t>No.</a:t>
             </a:r>
@@ -4257,8 +4208,7 @@
                   <a:srgbClr val="5A6472"/>
                 </a:solidFill>
                 <a:latin typeface="Calibri" pitchFamily="34" charset="0"/>
-                <a:ea typeface="Calibri" pitchFamily="34" charset="-122"/>
-                <a:cs typeface="Calibri" pitchFamily="34" charset="-120"/>
+                <a:cs typeface="Amiri" pitchFamily="2" charset="-78"/>
               </a:rPr>
               <a:t>________</a:t>
             </a:r>
@@ -4296,8 +4246,7 @@
                   <a:srgbClr val="5A6472"/>
                 </a:solidFill>
                 <a:latin typeface="Calibri" pitchFamily="34" charset="0"/>
-                <a:ea typeface="Calibri" pitchFamily="34" charset="-122"/>
-                <a:cs typeface="Calibri" pitchFamily="34" charset="-120"/>
+                <a:cs typeface="Amiri" pitchFamily="2" charset="-78"/>
               </a:rPr>
               <a:t>Studies Arabic on Monday</a:t>
             </a:r>
@@ -4335,8 +4284,7 @@
                   <a:srgbClr val="5A6472"/>
                 </a:solidFill>
                 <a:latin typeface="Calibri" pitchFamily="34" charset="0"/>
-                <a:ea typeface="Calibri" pitchFamily="34" charset="-122"/>
-                <a:cs typeface="Calibri" pitchFamily="34" charset="-120"/>
+                <a:cs typeface="Amiri" pitchFamily="2" charset="-78"/>
               </a:rPr>
               <a:t>1</a:t>
             </a:r>
@@ -4401,8 +4349,7 @@
                   <a:srgbClr val="FFFFFF"/>
                 </a:solidFill>
                 <a:latin typeface="Calibri" pitchFamily="34" charset="0"/>
-                <a:ea typeface="Calibri" pitchFamily="34" charset="-122"/>
-                <a:cs typeface="Calibri" pitchFamily="34" charset="-120"/>
+                <a:cs typeface="Amiri" pitchFamily="2" charset="-78"/>
               </a:rPr>
               <a:t>CORE</a:t>
             </a:r>
@@ -4467,8 +4414,7 @@
                   <a:srgbClr val="5A6472"/>
                 </a:solidFill>
                 <a:latin typeface="Calibri" pitchFamily="34" charset="0"/>
-                <a:ea typeface="Calibri" pitchFamily="34" charset="-122"/>
-                <a:cs typeface="Calibri" pitchFamily="34" charset="-120"/>
+                <a:cs typeface="Amiri" pitchFamily="2" charset="-78"/>
               </a:rPr>
               <a:t>________</a:t>
             </a:r>
@@ -4506,8 +4452,7 @@
                   <a:srgbClr val="5A6472"/>
                 </a:solidFill>
                 <a:latin typeface="Calibri" pitchFamily="34" charset="0"/>
-                <a:ea typeface="Calibri" pitchFamily="34" charset="-122"/>
-                <a:cs typeface="Calibri" pitchFamily="34" charset="-120"/>
+                <a:cs typeface="Amiri" pitchFamily="2" charset="-78"/>
               </a:rPr>
               <a:t>Studies mathematics on Monday</a:t>
             </a:r>
@@ -4545,8 +4490,7 @@
                   <a:srgbClr val="5A6472"/>
                 </a:solidFill>
                 <a:latin typeface="Calibri" pitchFamily="34" charset="0"/>
-                <a:ea typeface="Calibri" pitchFamily="34" charset="-122"/>
-                <a:cs typeface="Calibri" pitchFamily="34" charset="-120"/>
+                <a:cs typeface="Amiri" pitchFamily="2" charset="-78"/>
               </a:rPr>
               <a:t>2</a:t>
             </a:r>
@@ -4611,8 +4555,7 @@
                   <a:srgbClr val="FFFFFF"/>
                 </a:solidFill>
                 <a:latin typeface="Calibri" pitchFamily="34" charset="0"/>
-                <a:ea typeface="Calibri" pitchFamily="34" charset="-122"/>
-                <a:cs typeface="Calibri" pitchFamily="34" charset="-120"/>
+                <a:cs typeface="Amiri" pitchFamily="2" charset="-78"/>
               </a:rPr>
               <a:t>CORE</a:t>
             </a:r>
@@ -4677,8 +4620,7 @@
                   <a:srgbClr val="5A6472"/>
                 </a:solidFill>
                 <a:latin typeface="Calibri" pitchFamily="34" charset="0"/>
-                <a:ea typeface="Calibri" pitchFamily="34" charset="-122"/>
-                <a:cs typeface="Calibri" pitchFamily="34" charset="-120"/>
+                <a:cs typeface="Amiri" pitchFamily="2" charset="-78"/>
               </a:rPr>
               <a:t>________</a:t>
             </a:r>
@@ -4716,8 +4658,7 @@
                   <a:srgbClr val="5A6472"/>
                 </a:solidFill>
                 <a:latin typeface="Calibri" pitchFamily="34" charset="0"/>
-                <a:ea typeface="Calibri" pitchFamily="34" charset="-122"/>
-                <a:cs typeface="Calibri" pitchFamily="34" charset="-120"/>
+                <a:cs typeface="Amiri" pitchFamily="2" charset="-78"/>
               </a:rPr>
               <a:t>Studies Arabic on Thursday</a:t>
             </a:r>
@@ -4755,8 +4696,7 @@
                   <a:srgbClr val="5A6472"/>
                 </a:solidFill>
                 <a:latin typeface="Calibri" pitchFamily="34" charset="0"/>
-                <a:ea typeface="Calibri" pitchFamily="34" charset="-122"/>
-                <a:cs typeface="Calibri" pitchFamily="34" charset="-120"/>
+                <a:cs typeface="Amiri" pitchFamily="2" charset="-78"/>
               </a:rPr>
               <a:t>3</a:t>
             </a:r>
@@ -4821,8 +4761,7 @@
                   <a:srgbClr val="FFFFFF"/>
                 </a:solidFill>
                 <a:latin typeface="Calibri" pitchFamily="34" charset="0"/>
-                <a:ea typeface="Calibri" pitchFamily="34" charset="-122"/>
-                <a:cs typeface="Calibri" pitchFamily="34" charset="-120"/>
+                <a:cs typeface="Amiri" pitchFamily="2" charset="-78"/>
               </a:rPr>
               <a:t>CORE</a:t>
             </a:r>
@@ -4887,8 +4826,7 @@
                   <a:srgbClr val="5A6472"/>
                 </a:solidFill>
                 <a:latin typeface="Calibri" pitchFamily="34" charset="0"/>
-                <a:ea typeface="Calibri" pitchFamily="34" charset="-122"/>
-                <a:cs typeface="Calibri" pitchFamily="34" charset="-120"/>
+                <a:cs typeface="Amiri" pitchFamily="2" charset="-78"/>
               </a:rPr>
               <a:t>________</a:t>
             </a:r>
@@ -4926,8 +4864,7 @@
                   <a:srgbClr val="5A6472"/>
                 </a:solidFill>
                 <a:latin typeface="Calibri" pitchFamily="34" charset="0"/>
-                <a:ea typeface="Calibri" pitchFamily="34" charset="-122"/>
-                <a:cs typeface="Calibri" pitchFamily="34" charset="-120"/>
+                <a:cs typeface="Amiri" pitchFamily="2" charset="-78"/>
               </a:rPr>
               <a:t>Has art on Wednesday</a:t>
             </a:r>
@@ -4965,8 +4902,7 @@
                   <a:srgbClr val="5A6472"/>
                 </a:solidFill>
                 <a:latin typeface="Calibri" pitchFamily="34" charset="0"/>
-                <a:ea typeface="Calibri" pitchFamily="34" charset="-122"/>
-                <a:cs typeface="Calibri" pitchFamily="34" charset="-120"/>
+                <a:cs typeface="Amiri" pitchFamily="2" charset="-78"/>
               </a:rPr>
               <a:t>4</a:t>
             </a:r>
@@ -5031,8 +4967,7 @@
                   <a:srgbClr val="5A6472"/>
                 </a:solidFill>
                 <a:latin typeface="Calibri" pitchFamily="34" charset="0"/>
-                <a:ea typeface="Calibri" pitchFamily="34" charset="-122"/>
-                <a:cs typeface="Calibri" pitchFamily="34" charset="-120"/>
+                <a:cs typeface="Amiri" pitchFamily="2" charset="-78"/>
               </a:rPr>
               <a:t>________</a:t>
             </a:r>
@@ -5070,8 +5005,7 @@
                   <a:srgbClr val="5A6472"/>
                 </a:solidFill>
                 <a:latin typeface="Calibri" pitchFamily="34" charset="0"/>
-                <a:ea typeface="Calibri" pitchFamily="34" charset="-122"/>
-                <a:cs typeface="Calibri" pitchFamily="34" charset="-120"/>
+                <a:cs typeface="Amiri" pitchFamily="2" charset="-78"/>
               </a:rPr>
               <a:t>Has science on Wednesday</a:t>
             </a:r>
@@ -5109,8 +5043,7 @@
                   <a:srgbClr val="5A6472"/>
                 </a:solidFill>
                 <a:latin typeface="Calibri" pitchFamily="34" charset="0"/>
-                <a:ea typeface="Calibri" pitchFamily="34" charset="-122"/>
-                <a:cs typeface="Calibri" pitchFamily="34" charset="-120"/>
+                <a:cs typeface="Amiri" pitchFamily="2" charset="-78"/>
               </a:rPr>
               <a:t>5</a:t>
             </a:r>
@@ -5175,8 +5108,7 @@
                   <a:srgbClr val="5A6472"/>
                 </a:solidFill>
                 <a:latin typeface="Calibri" pitchFamily="34" charset="0"/>
-                <a:ea typeface="Calibri" pitchFamily="34" charset="-122"/>
-                <a:cs typeface="Calibri" pitchFamily="34" charset="-120"/>
+                <a:cs typeface="Amiri" pitchFamily="2" charset="-78"/>
               </a:rPr>
               <a:t>________</a:t>
             </a:r>
@@ -5214,8 +5146,7 @@
                   <a:srgbClr val="5A6472"/>
                 </a:solidFill>
                 <a:latin typeface="Calibri" pitchFamily="34" charset="0"/>
-                <a:ea typeface="Calibri" pitchFamily="34" charset="-122"/>
-                <a:cs typeface="Calibri" pitchFamily="34" charset="-120"/>
+                <a:cs typeface="Amiri" pitchFamily="2" charset="-78"/>
               </a:rPr>
               <a:t>Has science on Thursday</a:t>
             </a:r>
@@ -5253,8 +5184,7 @@
                   <a:srgbClr val="5A6472"/>
                 </a:solidFill>
                 <a:latin typeface="Calibri" pitchFamily="34" charset="0"/>
-                <a:ea typeface="Calibri" pitchFamily="34" charset="-122"/>
-                <a:cs typeface="Calibri" pitchFamily="34" charset="-120"/>
+                <a:cs typeface="Amiri" pitchFamily="2" charset="-78"/>
               </a:rPr>
               <a:t>6</a:t>
             </a:r>
@@ -5292,8 +5222,7 @@
                   <a:srgbClr val="1B3B6F"/>
                 </a:solidFill>
                 <a:latin typeface="Calibri" pitchFamily="34" charset="0"/>
-                <a:ea typeface="Calibri" pitchFamily="34" charset="-122"/>
-                <a:cs typeface="Calibri" pitchFamily="34" charset="-120"/>
+                <a:cs typeface="Amiri" pitchFamily="2" charset="-78"/>
               </a:rPr>
               <a:t>Write M, Y, Both or Neither for each statement. One mark each.</a:t>
             </a:r>
@@ -5331,8 +5260,7 @@
                   <a:srgbClr val="8A93A0"/>
                 </a:solidFill>
                 <a:latin typeface="Calibri" pitchFamily="34" charset="0"/>
-                <a:ea typeface="Calibri" pitchFamily="34" charset="-122"/>
-                <a:cs typeface="Calibri" pitchFamily="34" charset="-120"/>
+                <a:cs typeface="Amiri" pitchFamily="2" charset="-78"/>
               </a:rPr>
               <a:t>10 / 23</a:t>
             </a:r>
@@ -5426,9 +5354,8 @@
                 <a:solidFill>
                   <a:srgbClr val="D4AF37"/>
                 </a:solidFill>
-                <a:latin typeface="Amiri" pitchFamily="34" charset="0"/>
-                <a:ea typeface="Amiri" pitchFamily="34" charset="-122"/>
-                <a:cs typeface="Amiri" pitchFamily="34" charset="-120"/>
+                <a:latin typeface="Amiri" pitchFamily="2" charset="-78"/>
+                <a:cs typeface="Amiri" pitchFamily="2" charset="-78"/>
               </a:rPr>
               <a:t>م</a:t>
             </a:r>
@@ -5466,8 +5393,7 @@
                   <a:srgbClr val="1B3B6F"/>
                 </a:solidFill>
                 <a:latin typeface="Cambria" pitchFamily="34" charset="0"/>
-                <a:ea typeface="Cambria" pitchFamily="34" charset="-122"/>
-                <a:cs typeface="Cambria" pitchFamily="34" charset="-120"/>
+                <a:cs typeface="Amiri" pitchFamily="2" charset="-78"/>
               </a:rPr>
               <a:t>Al Madina Online School</a:t>
             </a:r>
@@ -5505,8 +5431,7 @@
                   <a:srgbClr val="8A6D1E"/>
                 </a:solidFill>
                 <a:latin typeface="Calibri" pitchFamily="34" charset="0"/>
-                <a:ea typeface="Calibri" pitchFamily="34" charset="-122"/>
-                <a:cs typeface="Calibri" pitchFamily="34" charset="-120"/>
+                <a:cs typeface="Amiri" pitchFamily="2" charset="-78"/>
               </a:rPr>
               <a:t>ARABIC DEPARTMENT · MIFTAH ARABIC · IGCSE 0544</a:t>
             </a:r>
@@ -5571,8 +5496,7 @@
                   <a:srgbClr val="FFFFFF"/>
                 </a:solidFill>
                 <a:latin typeface="Calibri" pitchFamily="34" charset="0"/>
-                <a:ea typeface="Calibri" pitchFamily="34" charset="-122"/>
-                <a:cs typeface="Calibri" pitchFamily="34" charset="-120"/>
+                <a:cs typeface="Amiri" pitchFamily="2" charset="-78"/>
               </a:rPr>
               <a:t>F4-L12 · F4 Assessment</a:t>
             </a:r>
@@ -5637,8 +5561,7 @@
                   <a:srgbClr val="FFFFFF"/>
                 </a:solidFill>
                 <a:latin typeface="Calibri" pitchFamily="34" charset="0"/>
-                <a:ea typeface="Calibri" pitchFamily="34" charset="-122"/>
-                <a:cs typeface="Calibri" pitchFamily="34" charset="-120"/>
+                <a:cs typeface="Amiri" pitchFamily="2" charset="-78"/>
               </a:rPr>
               <a:t>I DO · 3 MIN</a:t>
             </a:r>
@@ -5676,8 +5599,7 @@
                   <a:srgbClr val="6B4C9A"/>
                 </a:solidFill>
                 <a:latin typeface="Calibri" pitchFamily="34" charset="0"/>
-                <a:ea typeface="Calibri" pitchFamily="34" charset="-122"/>
-                <a:cs typeface="Calibri" pitchFamily="34" charset="-120"/>
+                <a:cs typeface="Amiri" pitchFamily="2" charset="-78"/>
               </a:rPr>
               <a:t>LISTENING · TEXT 2 · MATCHES 7–8 AND TRUE / FALSE (WEBSITE)</a:t>
             </a:r>
@@ -5715,8 +5637,7 @@
                   <a:srgbClr val="1B3B6F"/>
                 </a:solidFill>
                 <a:latin typeface="Cambria" pitchFamily="34" charset="0"/>
-                <a:ea typeface="Cambria" pitchFamily="34" charset="-122"/>
-                <a:cs typeface="Cambria" pitchFamily="34" charset="-120"/>
+                <a:cs typeface="Amiri" pitchFamily="2" charset="-78"/>
               </a:rPr>
               <a:t>Finish Text 2</a:t>
             </a:r>
@@ -5753,9 +5674,8 @@
                 <a:solidFill>
                   <a:srgbClr val="8A6D1E"/>
                 </a:solidFill>
-                <a:latin typeface="Amiri" pitchFamily="34" charset="0"/>
-                <a:ea typeface="Amiri" pitchFamily="34" charset="-122"/>
-                <a:cs typeface="Amiri" pitchFamily="34" charset="-120"/>
+                <a:latin typeface="Amiri" pitchFamily="2" charset="-78"/>
+                <a:cs typeface="Amiri" pitchFamily="2" charset="-78"/>
               </a:rPr>
               <a:t>النَّصُّ الثَّانِي</a:t>
             </a:r>
@@ -5793,8 +5713,7 @@
                   <a:srgbClr val="8A93A0"/>
                 </a:solidFill>
                 <a:latin typeface="Calibri" pitchFamily="34" charset="0"/>
-                <a:ea typeface="Calibri" pitchFamily="34" charset="-122"/>
-                <a:cs typeface="Calibri" pitchFamily="34" charset="-120"/>
+                <a:cs typeface="Amiri" pitchFamily="2" charset="-78"/>
               </a:rPr>
               <a:t>Miftah Arabic · Foundation F4 · My School · F4-L12</a:t>
             </a:r>
@@ -5857,8 +5776,7 @@
                   <a:srgbClr val="FFFFFF"/>
                 </a:solidFill>
                 <a:latin typeface="Calibri" pitchFamily="34" charset="0"/>
-                <a:ea typeface="Calibri" pitchFamily="34" charset="-122"/>
-                <a:cs typeface="Calibri" pitchFamily="34" charset="-120"/>
+                <a:cs typeface="Amiri" pitchFamily="2" charset="-78"/>
               </a:rPr>
               <a:t>Your answer</a:t>
             </a:r>
@@ -5896,8 +5814,7 @@
                   <a:srgbClr val="FFFFFF"/>
                 </a:solidFill>
                 <a:latin typeface="Calibri" pitchFamily="34" charset="0"/>
-                <a:ea typeface="Calibri" pitchFamily="34" charset="-122"/>
-                <a:cs typeface="Calibri" pitchFamily="34" charset="-120"/>
+                <a:cs typeface="Amiri" pitchFamily="2" charset="-78"/>
               </a:rPr>
               <a:t>Statement</a:t>
             </a:r>
@@ -5935,8 +5852,7 @@
                   <a:srgbClr val="FFFFFF"/>
                 </a:solidFill>
                 <a:latin typeface="Calibri" pitchFamily="34" charset="0"/>
-                <a:ea typeface="Calibri" pitchFamily="34" charset="-122"/>
-                <a:cs typeface="Calibri" pitchFamily="34" charset="-120"/>
+                <a:cs typeface="Amiri" pitchFamily="2" charset="-78"/>
               </a:rPr>
               <a:t>No.</a:t>
             </a:r>
@@ -6001,8 +5917,7 @@
                   <a:srgbClr val="5A6472"/>
                 </a:solidFill>
                 <a:latin typeface="Calibri" pitchFamily="34" charset="0"/>
-                <a:ea typeface="Calibri" pitchFamily="34" charset="-122"/>
-                <a:cs typeface="Calibri" pitchFamily="34" charset="-120"/>
+                <a:cs typeface="Amiri" pitchFamily="2" charset="-78"/>
               </a:rPr>
               <a:t>________</a:t>
             </a:r>
@@ -6040,8 +5955,7 @@
                   <a:srgbClr val="5A6472"/>
                 </a:solidFill>
                 <a:latin typeface="Calibri" pitchFamily="34" charset="0"/>
-                <a:ea typeface="Calibri" pitchFamily="34" charset="-122"/>
-                <a:cs typeface="Calibri" pitchFamily="34" charset="-120"/>
+                <a:cs typeface="Amiri" pitchFamily="2" charset="-78"/>
               </a:rPr>
               <a:t>Finishes school at 3:00 (M · Y · Both · Neither)</a:t>
             </a:r>
@@ -6079,8 +5993,7 @@
                   <a:srgbClr val="5A6472"/>
                 </a:solidFill>
                 <a:latin typeface="Calibri" pitchFamily="34" charset="0"/>
-                <a:ea typeface="Calibri" pitchFamily="34" charset="-122"/>
-                <a:cs typeface="Calibri" pitchFamily="34" charset="-120"/>
+                <a:cs typeface="Amiri" pitchFamily="2" charset="-78"/>
               </a:rPr>
               <a:t>7</a:t>
             </a:r>
@@ -6145,8 +6058,7 @@
                   <a:srgbClr val="FFFFFF"/>
                 </a:solidFill>
                 <a:latin typeface="Calibri" pitchFamily="34" charset="0"/>
-                <a:ea typeface="Calibri" pitchFamily="34" charset="-122"/>
-                <a:cs typeface="Calibri" pitchFamily="34" charset="-120"/>
+                <a:cs typeface="Amiri" pitchFamily="2" charset="-78"/>
               </a:rPr>
               <a:t>CORE</a:t>
             </a:r>
@@ -6211,8 +6123,7 @@
                   <a:srgbClr val="5A6472"/>
                 </a:solidFill>
                 <a:latin typeface="Calibri" pitchFamily="34" charset="0"/>
-                <a:ea typeface="Calibri" pitchFamily="34" charset="-122"/>
-                <a:cs typeface="Calibri" pitchFamily="34" charset="-120"/>
+                <a:cs typeface="Amiri" pitchFamily="2" charset="-78"/>
               </a:rPr>
               <a:t>________</a:t>
             </a:r>
@@ -6250,8 +6161,7 @@
                   <a:srgbClr val="5A6472"/>
                 </a:solidFill>
                 <a:latin typeface="Calibri" pitchFamily="34" charset="0"/>
-                <a:ea typeface="Calibri" pitchFamily="34" charset="-122"/>
-                <a:cs typeface="Calibri" pitchFamily="34" charset="-120"/>
+                <a:cs typeface="Amiri" pitchFamily="2" charset="-78"/>
               </a:rPr>
               <a:t>Finishes school at 3:30 (M · Y · Both · Neither)</a:t>
             </a:r>
@@ -6289,8 +6199,7 @@
                   <a:srgbClr val="5A6472"/>
                 </a:solidFill>
                 <a:latin typeface="Calibri" pitchFamily="34" charset="0"/>
-                <a:ea typeface="Calibri" pitchFamily="34" charset="-122"/>
-                <a:cs typeface="Calibri" pitchFamily="34" charset="-120"/>
+                <a:cs typeface="Amiri" pitchFamily="2" charset="-78"/>
               </a:rPr>
               <a:t>8</a:t>
             </a:r>
@@ -6355,8 +6264,7 @@
                   <a:srgbClr val="FFFFFF"/>
                 </a:solidFill>
                 <a:latin typeface="Calibri" pitchFamily="34" charset="0"/>
-                <a:ea typeface="Calibri" pitchFamily="34" charset="-122"/>
-                <a:cs typeface="Calibri" pitchFamily="34" charset="-120"/>
+                <a:cs typeface="Amiri" pitchFamily="2" charset="-78"/>
               </a:rPr>
               <a:t>CORE</a:t>
             </a:r>
@@ -6421,8 +6329,7 @@
                   <a:srgbClr val="5A6472"/>
                 </a:solidFill>
                 <a:latin typeface="Calibri" pitchFamily="34" charset="0"/>
-                <a:ea typeface="Calibri" pitchFamily="34" charset="-122"/>
-                <a:cs typeface="Calibri" pitchFamily="34" charset="-120"/>
+                <a:cs typeface="Amiri" pitchFamily="2" charset="-78"/>
               </a:rPr>
               <a:t>True · False</a:t>
             </a:r>
@@ -6460,8 +6367,7 @@
                   <a:srgbClr val="5A6472"/>
                 </a:solidFill>
                 <a:latin typeface="Calibri" pitchFamily="34" charset="0"/>
-                <a:ea typeface="Calibri" pitchFamily="34" charset="-122"/>
-                <a:cs typeface="Calibri" pitchFamily="34" charset="-120"/>
+                <a:cs typeface="Amiri" pitchFamily="2" charset="-78"/>
               </a:rPr>
               <a:t>Both students study Arabic on Thursday.</a:t>
             </a:r>
@@ -6499,8 +6405,7 @@
                   <a:srgbClr val="5A6472"/>
                 </a:solidFill>
                 <a:latin typeface="Calibri" pitchFamily="34" charset="0"/>
-                <a:ea typeface="Calibri" pitchFamily="34" charset="-122"/>
-                <a:cs typeface="Calibri" pitchFamily="34" charset="-120"/>
+                <a:cs typeface="Amiri" pitchFamily="2" charset="-78"/>
               </a:rPr>
               <a:t>9</a:t>
             </a:r>
@@ -6565,8 +6470,7 @@
                   <a:srgbClr val="FFFFFF"/>
                 </a:solidFill>
                 <a:latin typeface="Calibri" pitchFamily="34" charset="0"/>
-                <a:ea typeface="Calibri" pitchFamily="34" charset="-122"/>
-                <a:cs typeface="Calibri" pitchFamily="34" charset="-120"/>
+                <a:cs typeface="Amiri" pitchFamily="2" charset="-78"/>
               </a:rPr>
               <a:t>CORE</a:t>
             </a:r>
@@ -6631,8 +6535,7 @@
                   <a:srgbClr val="5A6472"/>
                 </a:solidFill>
                 <a:latin typeface="Calibri" pitchFamily="34" charset="0"/>
-                <a:ea typeface="Calibri" pitchFamily="34" charset="-122"/>
-                <a:cs typeface="Calibri" pitchFamily="34" charset="-120"/>
+                <a:cs typeface="Amiri" pitchFamily="2" charset="-78"/>
               </a:rPr>
               <a:t>True · False</a:t>
             </a:r>
@@ -6670,8 +6573,7 @@
                   <a:srgbClr val="5A6472"/>
                 </a:solidFill>
                 <a:latin typeface="Calibri" pitchFamily="34" charset="0"/>
-                <a:ea typeface="Calibri" pitchFamily="34" charset="-122"/>
-                <a:cs typeface="Calibri" pitchFamily="34" charset="-120"/>
+                <a:cs typeface="Amiri" pitchFamily="2" charset="-78"/>
               </a:rPr>
               <a:t>Mariam studies mathematics on Monday.</a:t>
             </a:r>
@@ -6709,8 +6611,7 @@
                   <a:srgbClr val="5A6472"/>
                 </a:solidFill>
                 <a:latin typeface="Calibri" pitchFamily="34" charset="0"/>
-                <a:ea typeface="Calibri" pitchFamily="34" charset="-122"/>
-                <a:cs typeface="Calibri" pitchFamily="34" charset="-120"/>
+                <a:cs typeface="Amiri" pitchFamily="2" charset="-78"/>
               </a:rPr>
               <a:t>10</a:t>
             </a:r>
@@ -6775,8 +6676,7 @@
                   <a:srgbClr val="5A6472"/>
                 </a:solidFill>
                 <a:latin typeface="Calibri" pitchFamily="34" charset="0"/>
-                <a:ea typeface="Calibri" pitchFamily="34" charset="-122"/>
-                <a:cs typeface="Calibri" pitchFamily="34" charset="-120"/>
+                <a:cs typeface="Amiri" pitchFamily="2" charset="-78"/>
               </a:rPr>
               <a:t>True · False</a:t>
             </a:r>
@@ -6814,8 +6714,7 @@
                   <a:srgbClr val="5A6472"/>
                 </a:solidFill>
                 <a:latin typeface="Calibri" pitchFamily="34" charset="0"/>
-                <a:ea typeface="Calibri" pitchFamily="34" charset="-122"/>
-                <a:cs typeface="Calibri" pitchFamily="34" charset="-120"/>
+                <a:cs typeface="Amiri" pitchFamily="2" charset="-78"/>
               </a:rPr>
               <a:t>Yusuf has art and science on Wednesday.</a:t>
             </a:r>
@@ -6853,8 +6752,7 @@
                   <a:srgbClr val="5A6472"/>
                 </a:solidFill>
                 <a:latin typeface="Calibri" pitchFamily="34" charset="0"/>
-                <a:ea typeface="Calibri" pitchFamily="34" charset="-122"/>
-                <a:cs typeface="Calibri" pitchFamily="34" charset="-120"/>
+                <a:cs typeface="Amiri" pitchFamily="2" charset="-78"/>
               </a:rPr>
               <a:t>11</a:t>
             </a:r>
@@ -6919,8 +6817,7 @@
                   <a:srgbClr val="5A6472"/>
                 </a:solidFill>
                 <a:latin typeface="Calibri" pitchFamily="34" charset="0"/>
-                <a:ea typeface="Calibri" pitchFamily="34" charset="-122"/>
-                <a:cs typeface="Calibri" pitchFamily="34" charset="-120"/>
+                <a:cs typeface="Amiri" pitchFamily="2" charset="-78"/>
               </a:rPr>
               <a:t>True · False</a:t>
             </a:r>
@@ -6958,8 +6855,7 @@
                   <a:srgbClr val="5A6472"/>
                 </a:solidFill>
                 <a:latin typeface="Calibri" pitchFamily="34" charset="0"/>
-                <a:ea typeface="Calibri" pitchFamily="34" charset="-122"/>
-                <a:cs typeface="Calibri" pitchFamily="34" charset="-120"/>
+                <a:cs typeface="Amiri" pitchFamily="2" charset="-78"/>
               </a:rPr>
               <a:t>Both students finish school at the same time.</a:t>
             </a:r>
@@ -6997,8 +6893,7 @@
                   <a:srgbClr val="5A6472"/>
                 </a:solidFill>
                 <a:latin typeface="Calibri" pitchFamily="34" charset="0"/>
-                <a:ea typeface="Calibri" pitchFamily="34" charset="-122"/>
-                <a:cs typeface="Calibri" pitchFamily="34" charset="-120"/>
+                <a:cs typeface="Amiri" pitchFamily="2" charset="-78"/>
               </a:rPr>
               <a:t>12</a:t>
             </a:r>
@@ -7036,8 +6931,7 @@
                   <a:srgbClr val="1B3B6F"/>
                 </a:solidFill>
                 <a:latin typeface="Calibri" pitchFamily="34" charset="0"/>
-                <a:ea typeface="Calibri" pitchFamily="34" charset="-122"/>
-                <a:cs typeface="Calibri" pitchFamily="34" charset="-120"/>
+                <a:cs typeface="Amiri" pitchFamily="2" charset="-78"/>
               </a:rPr>
               <a:t>Listening total: Text 1 (8) + Text 2 (12) = 20.</a:t>
             </a:r>
@@ -7075,8 +6969,7 @@
                   <a:srgbClr val="8A93A0"/>
                 </a:solidFill>
                 <a:latin typeface="Calibri" pitchFamily="34" charset="0"/>
-                <a:ea typeface="Calibri" pitchFamily="34" charset="-122"/>
-                <a:cs typeface="Calibri" pitchFamily="34" charset="-120"/>
+                <a:cs typeface="Amiri" pitchFamily="2" charset="-78"/>
               </a:rPr>
               <a:t>11 / 23</a:t>
             </a:r>
@@ -7170,9 +7063,8 @@
                 <a:solidFill>
                   <a:srgbClr val="D4AF37"/>
                 </a:solidFill>
-                <a:latin typeface="Amiri" pitchFamily="34" charset="0"/>
-                <a:ea typeface="Amiri" pitchFamily="34" charset="-122"/>
-                <a:cs typeface="Amiri" pitchFamily="34" charset="-120"/>
+                <a:latin typeface="Amiri" pitchFamily="2" charset="-78"/>
+                <a:cs typeface="Amiri" pitchFamily="2" charset="-78"/>
               </a:rPr>
               <a:t>م</a:t>
             </a:r>
@@ -7210,8 +7102,7 @@
                   <a:srgbClr val="1B3B6F"/>
                 </a:solidFill>
                 <a:latin typeface="Cambria" pitchFamily="34" charset="0"/>
-                <a:ea typeface="Cambria" pitchFamily="34" charset="-122"/>
-                <a:cs typeface="Cambria" pitchFamily="34" charset="-120"/>
+                <a:cs typeface="Amiri" pitchFamily="2" charset="-78"/>
               </a:rPr>
               <a:t>Al Madina Online School</a:t>
             </a:r>
@@ -7249,8 +7140,7 @@
                   <a:srgbClr val="8A6D1E"/>
                 </a:solidFill>
                 <a:latin typeface="Calibri" pitchFamily="34" charset="0"/>
-                <a:ea typeface="Calibri" pitchFamily="34" charset="-122"/>
-                <a:cs typeface="Calibri" pitchFamily="34" charset="-120"/>
+                <a:cs typeface="Amiri" pitchFamily="2" charset="-78"/>
               </a:rPr>
               <a:t>ARABIC DEPARTMENT · MIFTAH ARABIC · IGCSE 0544</a:t>
             </a:r>
@@ -7315,8 +7205,7 @@
                   <a:srgbClr val="FFFFFF"/>
                 </a:solidFill>
                 <a:latin typeface="Calibri" pitchFamily="34" charset="0"/>
-                <a:ea typeface="Calibri" pitchFamily="34" charset="-122"/>
-                <a:cs typeface="Calibri" pitchFamily="34" charset="-120"/>
+                <a:cs typeface="Amiri" pitchFamily="2" charset="-78"/>
               </a:rPr>
               <a:t>F4-L12 · F4 Assessment</a:t>
             </a:r>
@@ -7381,8 +7270,7 @@
                   <a:srgbClr val="FFFFFF"/>
                 </a:solidFill>
                 <a:latin typeface="Calibri" pitchFamily="34" charset="0"/>
-                <a:ea typeface="Calibri" pitchFamily="34" charset="-122"/>
-                <a:cs typeface="Calibri" pitchFamily="34" charset="-120"/>
+                <a:cs typeface="Amiri" pitchFamily="2" charset="-78"/>
               </a:rPr>
               <a:t>WE DO · 2 MIN</a:t>
             </a:r>
@@ -7420,8 +7308,7 @@
                   <a:srgbClr val="2F6FB0"/>
                 </a:solidFill>
                 <a:latin typeface="Calibri" pitchFamily="34" charset="0"/>
-                <a:ea typeface="Calibri" pitchFamily="34" charset="-122"/>
-                <a:cs typeface="Calibri" pitchFamily="34" charset="-120"/>
+                <a:cs typeface="Amiri" pitchFamily="2" charset="-78"/>
               </a:rPr>
               <a:t>READING · PART B · A SCHOOL ARTICLE (WEBSITE)</a:t>
             </a:r>
@@ -7459,8 +7346,7 @@
                   <a:srgbClr val="1B3B6F"/>
                 </a:solidFill>
                 <a:latin typeface="Cambria" pitchFamily="34" charset="0"/>
-                <a:ea typeface="Cambria" pitchFamily="34" charset="-122"/>
-                <a:cs typeface="Cambria" pitchFamily="34" charset="-120"/>
+                <a:cs typeface="Amiri" pitchFamily="2" charset="-78"/>
               </a:rPr>
               <a:t>Reading · My school life</a:t>
             </a:r>
@@ -7497,9 +7383,8 @@
                 <a:solidFill>
                   <a:srgbClr val="8A6D1E"/>
                 </a:solidFill>
-                <a:latin typeface="Amiri" pitchFamily="34" charset="0"/>
-                <a:ea typeface="Amiri" pitchFamily="34" charset="-122"/>
-                <a:cs typeface="Amiri" pitchFamily="34" charset="-120"/>
+                <a:latin typeface="Amiri" pitchFamily="2" charset="-78"/>
+                <a:cs typeface="Amiri" pitchFamily="2" charset="-78"/>
               </a:rPr>
               <a:t>حَيَاتِي المَدْرَسِيَّةُ</a:t>
             </a:r>
@@ -7537,8 +7422,7 @@
                   <a:srgbClr val="8A93A0"/>
                 </a:solidFill>
                 <a:latin typeface="Calibri" pitchFamily="34" charset="0"/>
-                <a:ea typeface="Calibri" pitchFamily="34" charset="-122"/>
-                <a:cs typeface="Calibri" pitchFamily="34" charset="-120"/>
+                <a:cs typeface="Amiri" pitchFamily="2" charset="-78"/>
               </a:rPr>
               <a:t>Miftah Arabic · Foundation F4 · My School · F4-L12</a:t>
             </a:r>
@@ -7612,9 +7496,8 @@
                 <a:solidFill>
                   <a:srgbClr val="1F2A37"/>
                 </a:solidFill>
-                <a:latin typeface="Amiri" pitchFamily="34" charset="0"/>
-                <a:ea typeface="Amiri" pitchFamily="34" charset="-122"/>
-                <a:cs typeface="Amiri" pitchFamily="34" charset="-120"/>
+                <a:latin typeface="Amiri" pitchFamily="2" charset="-78"/>
+                <a:cs typeface="Amiri" pitchFamily="2" charset="-78"/>
               </a:rPr>
               <a:t>أَنَا عُمَرُ، وَأَدْرُسُ فِي مَدْرَسَةٍ كَبِيرَةٍ قَرِيبَةٍ مِنْ بَيْتِي. تَبْدَأُ الدِّرَاسَةُ فِي السَّاعَةِ الثَّامِنَةِ، وَتَنْتَهِي فِي السَّاعَةِ الثَّالِثَةِ. أَدْرُسُ سِتَّ مَوَادَّ، وَأُفَضِّلُ الحَاسُوبَ لِأَنَّهُ مُفِيدٌ وَمُمْتِعٌ. مُعَلِّمُ الحَاسُوبِ صَبُورٌ وَيَشْرَحُ الدَّرْسَ بِوُضُوحٍ. لَا أُحِبُّ الرِّيَاضِيَّاتِ كَثِيرًا لِأَنَّهَا صَعْبَةٌ، وَلَكِنِّي أُحَاوِلُ كُلَّ يَوْمٍ. فِي مَدْرَسَتِنَا مَكْتَبَةٌ جَيِّدَةٌ وَمَلْعَبٌ وَاسِعٌ. يَجِبُ أَنْ نَحْتَرِمَ المُعَلِّمِينَ، وَلَا يَجُوزُ الأَكْلُ فِي المَكْتَبَةِ.</a:t>
             </a:r>
@@ -7652,8 +7535,7 @@
                   <a:srgbClr val="8A93A0"/>
                 </a:solidFill>
                 <a:latin typeface="Calibri" pitchFamily="34" charset="0"/>
-                <a:ea typeface="Calibri" pitchFamily="34" charset="-122"/>
-                <a:cs typeface="Calibri" pitchFamily="34" charset="-120"/>
+                <a:cs typeface="Amiri" pitchFamily="2" charset="-78"/>
               </a:rPr>
               <a:t>12 / 23</a:t>
             </a:r>
@@ -7747,9 +7629,8 @@
                 <a:solidFill>
                   <a:srgbClr val="D4AF37"/>
                 </a:solidFill>
-                <a:latin typeface="Amiri" pitchFamily="34" charset="0"/>
-                <a:ea typeface="Amiri" pitchFamily="34" charset="-122"/>
-                <a:cs typeface="Amiri" pitchFamily="34" charset="-120"/>
+                <a:latin typeface="Amiri" pitchFamily="2" charset="-78"/>
+                <a:cs typeface="Amiri" pitchFamily="2" charset="-78"/>
               </a:rPr>
               <a:t>م</a:t>
             </a:r>
@@ -7787,8 +7668,7 @@
                   <a:srgbClr val="1B3B6F"/>
                 </a:solidFill>
                 <a:latin typeface="Cambria" pitchFamily="34" charset="0"/>
-                <a:ea typeface="Cambria" pitchFamily="34" charset="-122"/>
-                <a:cs typeface="Cambria" pitchFamily="34" charset="-120"/>
+                <a:cs typeface="Amiri" pitchFamily="2" charset="-78"/>
               </a:rPr>
               <a:t>Al Madina Online School</a:t>
             </a:r>
@@ -7826,8 +7706,7 @@
                   <a:srgbClr val="8A6D1E"/>
                 </a:solidFill>
                 <a:latin typeface="Calibri" pitchFamily="34" charset="0"/>
-                <a:ea typeface="Calibri" pitchFamily="34" charset="-122"/>
-                <a:cs typeface="Calibri" pitchFamily="34" charset="-120"/>
+                <a:cs typeface="Amiri" pitchFamily="2" charset="-78"/>
               </a:rPr>
               <a:t>ARABIC DEPARTMENT · MIFTAH ARABIC · IGCSE 0544</a:t>
             </a:r>
@@ -7892,8 +7771,7 @@
                   <a:srgbClr val="FFFFFF"/>
                 </a:solidFill>
                 <a:latin typeface="Calibri" pitchFamily="34" charset="0"/>
-                <a:ea typeface="Calibri" pitchFamily="34" charset="-122"/>
-                <a:cs typeface="Calibri" pitchFamily="34" charset="-120"/>
+                <a:cs typeface="Amiri" pitchFamily="2" charset="-78"/>
               </a:rPr>
               <a:t>F4-L12 · F4 Assessment</a:t>
             </a:r>
@@ -7958,8 +7836,7 @@
                   <a:srgbClr val="FFFFFF"/>
                 </a:solidFill>
                 <a:latin typeface="Calibri" pitchFamily="34" charset="0"/>
-                <a:ea typeface="Calibri" pitchFamily="34" charset="-122"/>
-                <a:cs typeface="Calibri" pitchFamily="34" charset="-120"/>
+                <a:cs typeface="Amiri" pitchFamily="2" charset="-78"/>
               </a:rPr>
               <a:t>WE DO · 7 MIN</a:t>
             </a:r>
@@ -7997,8 +7874,7 @@
                   <a:srgbClr val="2F6FB0"/>
                 </a:solidFill>
                 <a:latin typeface="Calibri" pitchFamily="34" charset="0"/>
-                <a:ea typeface="Calibri" pitchFamily="34" charset="-122"/>
-                <a:cs typeface="Calibri" pitchFamily="34" charset="-120"/>
+                <a:cs typeface="Amiri" pitchFamily="2" charset="-78"/>
               </a:rPr>
               <a:t>READING · 10 MARKS · SIX QUESTIONS (WEBSITE)</a:t>
             </a:r>
@@ -8036,8 +7912,7 @@
                   <a:srgbClr val="1B3B6F"/>
                 </a:solidFill>
                 <a:latin typeface="Cambria" pitchFamily="34" charset="0"/>
-                <a:ea typeface="Cambria" pitchFamily="34" charset="-122"/>
-                <a:cs typeface="Cambria" pitchFamily="34" charset="-120"/>
+                <a:cs typeface="Amiri" pitchFamily="2" charset="-78"/>
               </a:rPr>
               <a:t>Questions about Omar</a:t>
             </a:r>
@@ -8074,9 +7949,8 @@
                 <a:solidFill>
                   <a:srgbClr val="8A6D1E"/>
                 </a:solidFill>
-                <a:latin typeface="Amiri" pitchFamily="34" charset="0"/>
-                <a:ea typeface="Amiri" pitchFamily="34" charset="-122"/>
-                <a:cs typeface="Amiri" pitchFamily="34" charset="-120"/>
+                <a:latin typeface="Amiri" pitchFamily="2" charset="-78"/>
+                <a:cs typeface="Amiri" pitchFamily="2" charset="-78"/>
               </a:rPr>
               <a:t>أَسْئِلَةُ القِرَاءَةِ</a:t>
             </a:r>
@@ -8114,8 +7988,7 @@
                   <a:srgbClr val="8A93A0"/>
                 </a:solidFill>
                 <a:latin typeface="Calibri" pitchFamily="34" charset="0"/>
-                <a:ea typeface="Calibri" pitchFamily="34" charset="-122"/>
-                <a:cs typeface="Calibri" pitchFamily="34" charset="-120"/>
+                <a:cs typeface="Amiri" pitchFamily="2" charset="-78"/>
               </a:rPr>
               <a:t>Miftah Arabic · Foundation F4 · My School · F4-L12</a:t>
             </a:r>
@@ -8212,8 +8085,7 @@
                   <a:srgbClr val="FFFFFF"/>
                 </a:solidFill>
                 <a:latin typeface="Calibri" pitchFamily="34" charset="0"/>
-                <a:ea typeface="Calibri" pitchFamily="34" charset="-122"/>
-                <a:cs typeface="Calibri" pitchFamily="34" charset="-120"/>
+                <a:cs typeface="Amiri" pitchFamily="2" charset="-78"/>
               </a:rPr>
               <a:t>1</a:t>
             </a:r>
@@ -8251,8 +8123,7 @@
                   <a:srgbClr val="1B3B6F"/>
                 </a:solidFill>
                 <a:latin typeface="Calibri" pitchFamily="34" charset="0"/>
-                <a:ea typeface="Calibri" pitchFamily="34" charset="-122"/>
-                <a:cs typeface="Calibri" pitchFamily="34" charset="-120"/>
+                <a:cs typeface="Amiri" pitchFamily="2" charset="-78"/>
               </a:rPr>
               <a:t>Where is Omar’s school?</a:t>
             </a:r>
@@ -8315,8 +8186,7 @@
                   <a:srgbClr val="1B3B6F"/>
                 </a:solidFill>
                 <a:latin typeface="Calibri" pitchFamily="34" charset="0"/>
-                <a:ea typeface="Calibri" pitchFamily="34" charset="-122"/>
-                <a:cs typeface="Calibri" pitchFamily="34" charset="-120"/>
+                <a:cs typeface="Amiri" pitchFamily="2" charset="-78"/>
               </a:rPr>
               <a:t>A</a:t>
             </a:r>
@@ -8354,8 +8224,7 @@
                   <a:srgbClr val="1F2A37"/>
                 </a:solidFill>
                 <a:latin typeface="Calibri" pitchFamily="34" charset="0"/>
-                <a:ea typeface="Calibri" pitchFamily="34" charset="-122"/>
-                <a:cs typeface="Calibri" pitchFamily="34" charset="-120"/>
+                <a:cs typeface="Amiri" pitchFamily="2" charset="-78"/>
               </a:rPr>
               <a:t>near the station</a:t>
             </a:r>
@@ -8418,8 +8287,7 @@
                   <a:srgbClr val="1B3B6F"/>
                 </a:solidFill>
                 <a:latin typeface="Calibri" pitchFamily="34" charset="0"/>
-                <a:ea typeface="Calibri" pitchFamily="34" charset="-122"/>
-                <a:cs typeface="Calibri" pitchFamily="34" charset="-120"/>
+                <a:cs typeface="Amiri" pitchFamily="2" charset="-78"/>
               </a:rPr>
               <a:t>B</a:t>
             </a:r>
@@ -8457,8 +8325,7 @@
                   <a:srgbClr val="1F2A37"/>
                 </a:solidFill>
                 <a:latin typeface="Calibri" pitchFamily="34" charset="0"/>
-                <a:ea typeface="Calibri" pitchFamily="34" charset="-122"/>
-                <a:cs typeface="Calibri" pitchFamily="34" charset="-120"/>
+                <a:cs typeface="Amiri" pitchFamily="2" charset="-78"/>
               </a:rPr>
               <a:t>far from his home</a:t>
             </a:r>
@@ -8521,8 +8388,7 @@
                   <a:srgbClr val="1B3B6F"/>
                 </a:solidFill>
                 <a:latin typeface="Calibri" pitchFamily="34" charset="0"/>
-                <a:ea typeface="Calibri" pitchFamily="34" charset="-122"/>
-                <a:cs typeface="Calibri" pitchFamily="34" charset="-120"/>
+                <a:cs typeface="Amiri" pitchFamily="2" charset="-78"/>
               </a:rPr>
               <a:t>C</a:t>
             </a:r>
@@ -8560,8 +8426,7 @@
                   <a:srgbClr val="1F2A37"/>
                 </a:solidFill>
                 <a:latin typeface="Calibri" pitchFamily="34" charset="0"/>
-                <a:ea typeface="Calibri" pitchFamily="34" charset="-122"/>
-                <a:cs typeface="Calibri" pitchFamily="34" charset="-120"/>
+                <a:cs typeface="Amiri" pitchFamily="2" charset="-78"/>
               </a:rPr>
               <a:t>near his home</a:t>
             </a:r>
@@ -8658,8 +8523,7 @@
                   <a:srgbClr val="FFFFFF"/>
                 </a:solidFill>
                 <a:latin typeface="Calibri" pitchFamily="34" charset="0"/>
-                <a:ea typeface="Calibri" pitchFamily="34" charset="-122"/>
-                <a:cs typeface="Calibri" pitchFamily="34" charset="-120"/>
+                <a:cs typeface="Amiri" pitchFamily="2" charset="-78"/>
               </a:rPr>
               <a:t>2</a:t>
             </a:r>
@@ -8697,8 +8561,7 @@
                   <a:srgbClr val="1B3B6F"/>
                 </a:solidFill>
                 <a:latin typeface="Calibri" pitchFamily="34" charset="0"/>
-                <a:ea typeface="Calibri" pitchFamily="34" charset="-122"/>
-                <a:cs typeface="Calibri" pitchFamily="34" charset="-120"/>
+                <a:cs typeface="Amiri" pitchFamily="2" charset="-78"/>
               </a:rPr>
               <a:t>When does school begin and end?</a:t>
             </a:r>
@@ -8761,8 +8624,7 @@
                   <a:srgbClr val="1B3B6F"/>
                 </a:solidFill>
                 <a:latin typeface="Calibri" pitchFamily="34" charset="0"/>
-                <a:ea typeface="Calibri" pitchFamily="34" charset="-122"/>
-                <a:cs typeface="Calibri" pitchFamily="34" charset="-120"/>
+                <a:cs typeface="Amiri" pitchFamily="2" charset="-78"/>
               </a:rPr>
               <a:t>A</a:t>
             </a:r>
@@ -8800,8 +8662,7 @@
                   <a:srgbClr val="1F2A37"/>
                 </a:solidFill>
                 <a:latin typeface="Calibri" pitchFamily="34" charset="0"/>
-                <a:ea typeface="Calibri" pitchFamily="34" charset="-122"/>
-                <a:cs typeface="Calibri" pitchFamily="34" charset="-120"/>
+                <a:cs typeface="Amiri" pitchFamily="2" charset="-78"/>
               </a:rPr>
               <a:t>8:00–3:30</a:t>
             </a:r>
@@ -8864,8 +8725,7 @@
                   <a:srgbClr val="1B3B6F"/>
                 </a:solidFill>
                 <a:latin typeface="Calibri" pitchFamily="34" charset="0"/>
-                <a:ea typeface="Calibri" pitchFamily="34" charset="-122"/>
-                <a:cs typeface="Calibri" pitchFamily="34" charset="-120"/>
+                <a:cs typeface="Amiri" pitchFamily="2" charset="-78"/>
               </a:rPr>
               <a:t>B</a:t>
             </a:r>
@@ -8903,8 +8763,7 @@
                   <a:srgbClr val="1F2A37"/>
                 </a:solidFill>
                 <a:latin typeface="Calibri" pitchFamily="34" charset="0"/>
-                <a:ea typeface="Calibri" pitchFamily="34" charset="-122"/>
-                <a:cs typeface="Calibri" pitchFamily="34" charset="-120"/>
+                <a:cs typeface="Amiri" pitchFamily="2" charset="-78"/>
               </a:rPr>
               <a:t>8:00–3:00</a:t>
             </a:r>
@@ -8967,8 +8826,7 @@
                   <a:srgbClr val="1B3B6F"/>
                 </a:solidFill>
                 <a:latin typeface="Calibri" pitchFamily="34" charset="0"/>
-                <a:ea typeface="Calibri" pitchFamily="34" charset="-122"/>
-                <a:cs typeface="Calibri" pitchFamily="34" charset="-120"/>
+                <a:cs typeface="Amiri" pitchFamily="2" charset="-78"/>
               </a:rPr>
               <a:t>C</a:t>
             </a:r>
@@ -9006,8 +8864,7 @@
                   <a:srgbClr val="1F2A37"/>
                 </a:solidFill>
                 <a:latin typeface="Calibri" pitchFamily="34" charset="0"/>
-                <a:ea typeface="Calibri" pitchFamily="34" charset="-122"/>
-                <a:cs typeface="Calibri" pitchFamily="34" charset="-120"/>
+                <a:cs typeface="Amiri" pitchFamily="2" charset="-78"/>
               </a:rPr>
               <a:t>9:00–3:00</a:t>
             </a:r>
@@ -9104,8 +8961,7 @@
                   <a:srgbClr val="FFFFFF"/>
                 </a:solidFill>
                 <a:latin typeface="Calibri" pitchFamily="34" charset="0"/>
-                <a:ea typeface="Calibri" pitchFamily="34" charset="-122"/>
-                <a:cs typeface="Calibri" pitchFamily="34" charset="-120"/>
+                <a:cs typeface="Amiri" pitchFamily="2" charset="-78"/>
               </a:rPr>
               <a:t>3</a:t>
             </a:r>
@@ -9143,8 +8999,7 @@
                   <a:srgbClr val="1B3B6F"/>
                 </a:solidFill>
                 <a:latin typeface="Calibri" pitchFamily="34" charset="0"/>
-                <a:ea typeface="Calibri" pitchFamily="34" charset="-122"/>
-                <a:cs typeface="Calibri" pitchFamily="34" charset="-120"/>
+                <a:cs typeface="Amiri" pitchFamily="2" charset="-78"/>
               </a:rPr>
               <a:t>Which subject does he prefer, and why?</a:t>
             </a:r>
@@ -9207,8 +9062,7 @@
                   <a:srgbClr val="1B3B6F"/>
                 </a:solidFill>
                 <a:latin typeface="Calibri" pitchFamily="34" charset="0"/>
-                <a:ea typeface="Calibri" pitchFamily="34" charset="-122"/>
-                <a:cs typeface="Calibri" pitchFamily="34" charset="-120"/>
+                <a:cs typeface="Amiri" pitchFamily="2" charset="-78"/>
               </a:rPr>
               <a:t>A</a:t>
             </a:r>
@@ -9246,8 +9100,7 @@
                   <a:srgbClr val="1F2A37"/>
                 </a:solidFill>
                 <a:latin typeface="Calibri" pitchFamily="34" charset="0"/>
-                <a:ea typeface="Calibri" pitchFamily="34" charset="-122"/>
-                <a:cs typeface="Calibri" pitchFamily="34" charset="-120"/>
+                <a:cs typeface="Amiri" pitchFamily="2" charset="-78"/>
               </a:rPr>
               <a:t>maths — it is easy</a:t>
             </a:r>
@@ -9310,8 +9163,7 @@
                   <a:srgbClr val="1B3B6F"/>
                 </a:solidFill>
                 <a:latin typeface="Calibri" pitchFamily="34" charset="0"/>
-                <a:ea typeface="Calibri" pitchFamily="34" charset="-122"/>
-                <a:cs typeface="Calibri" pitchFamily="34" charset="-120"/>
+                <a:cs typeface="Amiri" pitchFamily="2" charset="-78"/>
               </a:rPr>
               <a:t>B</a:t>
             </a:r>
@@ -9349,8 +9201,7 @@
                   <a:srgbClr val="1F2A37"/>
                 </a:solidFill>
                 <a:latin typeface="Calibri" pitchFamily="34" charset="0"/>
-                <a:ea typeface="Calibri" pitchFamily="34" charset="-122"/>
-                <a:cs typeface="Calibri" pitchFamily="34" charset="-120"/>
+                <a:cs typeface="Amiri" pitchFamily="2" charset="-78"/>
               </a:rPr>
               <a:t>computing — useful and enjoyable</a:t>
             </a:r>
@@ -9413,8 +9264,7 @@
                   <a:srgbClr val="1B3B6F"/>
                 </a:solidFill>
                 <a:latin typeface="Calibri" pitchFamily="34" charset="0"/>
-                <a:ea typeface="Calibri" pitchFamily="34" charset="-122"/>
-                <a:cs typeface="Calibri" pitchFamily="34" charset="-120"/>
+                <a:cs typeface="Amiri" pitchFamily="2" charset="-78"/>
               </a:rPr>
               <a:t>C</a:t>
             </a:r>
@@ -9452,8 +9302,7 @@
                   <a:srgbClr val="1F2A37"/>
                 </a:solidFill>
                 <a:latin typeface="Calibri" pitchFamily="34" charset="0"/>
-                <a:ea typeface="Calibri" pitchFamily="34" charset="-122"/>
-                <a:cs typeface="Calibri" pitchFamily="34" charset="-120"/>
+                <a:cs typeface="Amiri" pitchFamily="2" charset="-78"/>
               </a:rPr>
               <a:t>Arabic — it is important</a:t>
             </a:r>
@@ -9550,8 +9399,7 @@
                   <a:srgbClr val="FFFFFF"/>
                 </a:solidFill>
                 <a:latin typeface="Calibri" pitchFamily="34" charset="0"/>
-                <a:ea typeface="Calibri" pitchFamily="34" charset="-122"/>
-                <a:cs typeface="Calibri" pitchFamily="34" charset="-120"/>
+                <a:cs typeface="Amiri" pitchFamily="2" charset="-78"/>
               </a:rPr>
               <a:t>4</a:t>
             </a:r>
@@ -9589,8 +9437,7 @@
                   <a:srgbClr val="1B3B6F"/>
                 </a:solidFill>
                 <a:latin typeface="Calibri" pitchFamily="34" charset="0"/>
-                <a:ea typeface="Calibri" pitchFamily="34" charset="-122"/>
-                <a:cs typeface="Calibri" pitchFamily="34" charset="-120"/>
+                <a:cs typeface="Amiri" pitchFamily="2" charset="-78"/>
               </a:rPr>
               <a:t>What shows the computing teacher supports learning?</a:t>
             </a:r>
@@ -9653,8 +9500,7 @@
                   <a:srgbClr val="1B3B6F"/>
                 </a:solidFill>
                 <a:latin typeface="Calibri" pitchFamily="34" charset="0"/>
-                <a:ea typeface="Calibri" pitchFamily="34" charset="-122"/>
-                <a:cs typeface="Calibri" pitchFamily="34" charset="-120"/>
+                <a:cs typeface="Amiri" pitchFamily="2" charset="-78"/>
               </a:rPr>
               <a:t>A</a:t>
             </a:r>
@@ -9692,8 +9538,7 @@
                   <a:srgbClr val="1F2A37"/>
                 </a:solidFill>
                 <a:latin typeface="Calibri" pitchFamily="34" charset="0"/>
-                <a:ea typeface="Calibri" pitchFamily="34" charset="-122"/>
-                <a:cs typeface="Calibri" pitchFamily="34" charset="-120"/>
+                <a:cs typeface="Amiri" pitchFamily="2" charset="-78"/>
               </a:rPr>
               <a:t>He is strict and gives homework.</a:t>
             </a:r>
@@ -9756,8 +9601,7 @@
                   <a:srgbClr val="1B3B6F"/>
                 </a:solidFill>
                 <a:latin typeface="Calibri" pitchFamily="34" charset="0"/>
-                <a:ea typeface="Calibri" pitchFamily="34" charset="-122"/>
-                <a:cs typeface="Calibri" pitchFamily="34" charset="-120"/>
+                <a:cs typeface="Amiri" pitchFamily="2" charset="-78"/>
               </a:rPr>
               <a:t>B</a:t>
             </a:r>
@@ -9795,8 +9639,7 @@
                   <a:srgbClr val="1F2A37"/>
                 </a:solidFill>
                 <a:latin typeface="Calibri" pitchFamily="34" charset="0"/>
-                <a:ea typeface="Calibri" pitchFamily="34" charset="-122"/>
-                <a:cs typeface="Calibri" pitchFamily="34" charset="-120"/>
+                <a:cs typeface="Amiri" pitchFamily="2" charset="-78"/>
               </a:rPr>
               <a:t>He is young and funny.</a:t>
             </a:r>
@@ -9859,8 +9702,7 @@
                   <a:srgbClr val="1B3B6F"/>
                 </a:solidFill>
                 <a:latin typeface="Calibri" pitchFamily="34" charset="0"/>
-                <a:ea typeface="Calibri" pitchFamily="34" charset="-122"/>
-                <a:cs typeface="Calibri" pitchFamily="34" charset="-120"/>
+                <a:cs typeface="Amiri" pitchFamily="2" charset="-78"/>
               </a:rPr>
               <a:t>C</a:t>
             </a:r>
@@ -9898,8 +9740,7 @@
                   <a:srgbClr val="1F2A37"/>
                 </a:solidFill>
                 <a:latin typeface="Calibri" pitchFamily="34" charset="0"/>
-                <a:ea typeface="Calibri" pitchFamily="34" charset="-122"/>
-                <a:cs typeface="Calibri" pitchFamily="34" charset="-120"/>
+                <a:cs typeface="Amiri" pitchFamily="2" charset="-78"/>
               </a:rPr>
               <a:t>He is patient and explains clearly.</a:t>
             </a:r>
@@ -9996,8 +9837,7 @@
                   <a:srgbClr val="FFFFFF"/>
                 </a:solidFill>
                 <a:latin typeface="Calibri" pitchFamily="34" charset="0"/>
-                <a:ea typeface="Calibri" pitchFamily="34" charset="-122"/>
-                <a:cs typeface="Calibri" pitchFamily="34" charset="-120"/>
+                <a:cs typeface="Amiri" pitchFamily="2" charset="-78"/>
               </a:rPr>
               <a:t>5</a:t>
             </a:r>
@@ -10035,8 +9875,7 @@
                   <a:srgbClr val="1B3B6F"/>
                 </a:solidFill>
                 <a:latin typeface="Calibri" pitchFamily="34" charset="0"/>
-                <a:ea typeface="Calibri" pitchFamily="34" charset="-122"/>
-                <a:cs typeface="Calibri" pitchFamily="34" charset="-120"/>
+                <a:cs typeface="Amiri" pitchFamily="2" charset="-78"/>
               </a:rPr>
               <a:t>Which two facilities are mentioned?</a:t>
             </a:r>
@@ -10099,8 +9938,7 @@
                   <a:srgbClr val="1B3B6F"/>
                 </a:solidFill>
                 <a:latin typeface="Calibri" pitchFamily="34" charset="0"/>
-                <a:ea typeface="Calibri" pitchFamily="34" charset="-122"/>
-                <a:cs typeface="Calibri" pitchFamily="34" charset="-120"/>
+                <a:cs typeface="Amiri" pitchFamily="2" charset="-78"/>
               </a:rPr>
               <a:t>A</a:t>
             </a:r>
@@ -10138,8 +9976,7 @@
                   <a:srgbClr val="1F2A37"/>
                 </a:solidFill>
                 <a:latin typeface="Calibri" pitchFamily="34" charset="0"/>
-                <a:ea typeface="Calibri" pitchFamily="34" charset="-122"/>
-                <a:cs typeface="Calibri" pitchFamily="34" charset="-120"/>
+                <a:cs typeface="Amiri" pitchFamily="2" charset="-78"/>
               </a:rPr>
               <a:t>a library and a playground</a:t>
             </a:r>
@@ -10202,8 +10039,7 @@
                   <a:srgbClr val="1B3B6F"/>
                 </a:solidFill>
                 <a:latin typeface="Calibri" pitchFamily="34" charset="0"/>
-                <a:ea typeface="Calibri" pitchFamily="34" charset="-122"/>
-                <a:cs typeface="Calibri" pitchFamily="34" charset="-120"/>
+                <a:cs typeface="Amiri" pitchFamily="2" charset="-78"/>
               </a:rPr>
               <a:t>B</a:t>
             </a:r>
@@ -10241,8 +10077,7 @@
                   <a:srgbClr val="1F2A37"/>
                 </a:solidFill>
                 <a:latin typeface="Calibri" pitchFamily="34" charset="0"/>
-                <a:ea typeface="Calibri" pitchFamily="34" charset="-122"/>
-                <a:cs typeface="Calibri" pitchFamily="34" charset="-120"/>
+                <a:cs typeface="Amiri" pitchFamily="2" charset="-78"/>
               </a:rPr>
               <a:t>a hall and a canteen</a:t>
             </a:r>
@@ -10305,8 +10140,7 @@
                   <a:srgbClr val="1B3B6F"/>
                 </a:solidFill>
                 <a:latin typeface="Calibri" pitchFamily="34" charset="0"/>
-                <a:ea typeface="Calibri" pitchFamily="34" charset="-122"/>
-                <a:cs typeface="Calibri" pitchFamily="34" charset="-120"/>
+                <a:cs typeface="Amiri" pitchFamily="2" charset="-78"/>
               </a:rPr>
               <a:t>C</a:t>
             </a:r>
@@ -10344,8 +10178,7 @@
                   <a:srgbClr val="1F2A37"/>
                 </a:solidFill>
                 <a:latin typeface="Calibri" pitchFamily="34" charset="0"/>
-                <a:ea typeface="Calibri" pitchFamily="34" charset="-122"/>
-                <a:cs typeface="Calibri" pitchFamily="34" charset="-120"/>
+                <a:cs typeface="Amiri" pitchFamily="2" charset="-78"/>
               </a:rPr>
               <a:t>an office and a laboratory</a:t>
             </a:r>
@@ -10442,8 +10275,7 @@
                   <a:srgbClr val="FFFFFF"/>
                 </a:solidFill>
                 <a:latin typeface="Calibri" pitchFamily="34" charset="0"/>
-                <a:ea typeface="Calibri" pitchFamily="34" charset="-122"/>
-                <a:cs typeface="Calibri" pitchFamily="34" charset="-120"/>
+                <a:cs typeface="Amiri" pitchFamily="2" charset="-78"/>
               </a:rPr>
               <a:t>6</a:t>
             </a:r>
@@ -10481,8 +10313,7 @@
                   <a:srgbClr val="1B3B6F"/>
                 </a:solidFill>
                 <a:latin typeface="Calibri" pitchFamily="34" charset="0"/>
-                <a:ea typeface="Calibri" pitchFamily="34" charset="-122"/>
-                <a:cs typeface="Calibri" pitchFamily="34" charset="-120"/>
+                <a:cs typeface="Amiri" pitchFamily="2" charset="-78"/>
               </a:rPr>
               <a:t>Which school-rule summary is accurate?</a:t>
             </a:r>
@@ -10545,8 +10376,7 @@
                   <a:srgbClr val="1B3B6F"/>
                 </a:solidFill>
                 <a:latin typeface="Calibri" pitchFamily="34" charset="0"/>
-                <a:ea typeface="Calibri" pitchFamily="34" charset="-122"/>
-                <a:cs typeface="Calibri" pitchFamily="34" charset="-120"/>
+                <a:cs typeface="Amiri" pitchFamily="2" charset="-78"/>
               </a:rPr>
               <a:t>A</a:t>
             </a:r>
@@ -10584,8 +10414,7 @@
                   <a:srgbClr val="1F2A37"/>
                 </a:solidFill>
                 <a:latin typeface="Calibri" pitchFamily="34" charset="0"/>
-                <a:ea typeface="Calibri" pitchFamily="34" charset="-122"/>
-                <a:cs typeface="Calibri" pitchFamily="34" charset="-120"/>
+                <a:cs typeface="Amiri" pitchFamily="2" charset="-78"/>
               </a:rPr>
               <a:t>Do not use phones; wear a uniform.</a:t>
             </a:r>
@@ -10648,8 +10477,7 @@
                   <a:srgbClr val="1B3B6F"/>
                 </a:solidFill>
                 <a:latin typeface="Calibri" pitchFamily="34" charset="0"/>
-                <a:ea typeface="Calibri" pitchFamily="34" charset="-122"/>
-                <a:cs typeface="Calibri" pitchFamily="34" charset="-120"/>
+                <a:cs typeface="Amiri" pitchFamily="2" charset="-78"/>
               </a:rPr>
               <a:t>B</a:t>
             </a:r>
@@ -10687,8 +10515,7 @@
                   <a:srgbClr val="1F2A37"/>
                 </a:solidFill>
                 <a:latin typeface="Calibri" pitchFamily="34" charset="0"/>
-                <a:ea typeface="Calibri" pitchFamily="34" charset="-122"/>
-                <a:cs typeface="Calibri" pitchFamily="34" charset="-120"/>
+                <a:cs typeface="Amiri" pitchFamily="2" charset="-78"/>
               </a:rPr>
               <a:t>Respect teachers; do not eat in the library.</a:t>
             </a:r>
@@ -10751,8 +10578,7 @@
                   <a:srgbClr val="1B3B6F"/>
                 </a:solidFill>
                 <a:latin typeface="Calibri" pitchFamily="34" charset="0"/>
-                <a:ea typeface="Calibri" pitchFamily="34" charset="-122"/>
-                <a:cs typeface="Calibri" pitchFamily="34" charset="-120"/>
+                <a:cs typeface="Amiri" pitchFamily="2" charset="-78"/>
               </a:rPr>
               <a:t>C</a:t>
             </a:r>
@@ -10790,8 +10616,7 @@
                   <a:srgbClr val="1F2A37"/>
                 </a:solidFill>
                 <a:latin typeface="Calibri" pitchFamily="34" charset="0"/>
-                <a:ea typeface="Calibri" pitchFamily="34" charset="-122"/>
-                <a:cs typeface="Calibri" pitchFamily="34" charset="-120"/>
+                <a:cs typeface="Amiri" pitchFamily="2" charset="-78"/>
               </a:rPr>
               <a:t>Complete homework; remain silent.</a:t>
             </a:r>
@@ -10829,8 +10654,7 @@
                   <a:srgbClr val="8A93A0"/>
                 </a:solidFill>
                 <a:latin typeface="Calibri" pitchFamily="34" charset="0"/>
-                <a:ea typeface="Calibri" pitchFamily="34" charset="-122"/>
-                <a:cs typeface="Calibri" pitchFamily="34" charset="-120"/>
+                <a:cs typeface="Amiri" pitchFamily="2" charset="-78"/>
               </a:rPr>
               <a:t>13 / 23</a:t>
             </a:r>
@@ -10924,9 +10748,8 @@
                 <a:solidFill>
                   <a:srgbClr val="D4AF37"/>
                 </a:solidFill>
-                <a:latin typeface="Amiri" pitchFamily="34" charset="0"/>
-                <a:ea typeface="Amiri" pitchFamily="34" charset="-122"/>
-                <a:cs typeface="Amiri" pitchFamily="34" charset="-120"/>
+                <a:latin typeface="Amiri" pitchFamily="2" charset="-78"/>
+                <a:cs typeface="Amiri" pitchFamily="2" charset="-78"/>
               </a:rPr>
               <a:t>م</a:t>
             </a:r>
@@ -10964,8 +10787,7 @@
                   <a:srgbClr val="1B3B6F"/>
                 </a:solidFill>
                 <a:latin typeface="Cambria" pitchFamily="34" charset="0"/>
-                <a:ea typeface="Cambria" pitchFamily="34" charset="-122"/>
-                <a:cs typeface="Cambria" pitchFamily="34" charset="-120"/>
+                <a:cs typeface="Amiri" pitchFamily="2" charset="-78"/>
               </a:rPr>
               <a:t>Al Madina Online School</a:t>
             </a:r>
@@ -11003,8 +10825,7 @@
                   <a:srgbClr val="8A6D1E"/>
                 </a:solidFill>
                 <a:latin typeface="Calibri" pitchFamily="34" charset="0"/>
-                <a:ea typeface="Calibri" pitchFamily="34" charset="-122"/>
-                <a:cs typeface="Calibri" pitchFamily="34" charset="-120"/>
+                <a:cs typeface="Amiri" pitchFamily="2" charset="-78"/>
               </a:rPr>
               <a:t>ARABIC DEPARTMENT · MIFTAH ARABIC · IGCSE 0544</a:t>
             </a:r>
@@ -11069,8 +10890,7 @@
                   <a:srgbClr val="FFFFFF"/>
                 </a:solidFill>
                 <a:latin typeface="Calibri" pitchFamily="34" charset="0"/>
-                <a:ea typeface="Calibri" pitchFamily="34" charset="-122"/>
-                <a:cs typeface="Calibri" pitchFamily="34" charset="-120"/>
+                <a:cs typeface="Amiri" pitchFamily="2" charset="-78"/>
               </a:rPr>
               <a:t>F4-L12 · F4 Assessment</a:t>
             </a:r>
@@ -11135,8 +10955,7 @@
                   <a:srgbClr val="FFFFFF"/>
                 </a:solidFill>
                 <a:latin typeface="Calibri" pitchFamily="34" charset="0"/>
-                <a:ea typeface="Calibri" pitchFamily="34" charset="-122"/>
-                <a:cs typeface="Calibri" pitchFamily="34" charset="-120"/>
+                <a:cs typeface="Amiri" pitchFamily="2" charset="-78"/>
               </a:rPr>
               <a:t>WE DO</a:t>
             </a:r>
@@ -11174,8 +10993,7 @@
                   <a:srgbClr val="2F6FB0"/>
                 </a:solidFill>
                 <a:latin typeface="Calibri" pitchFamily="34" charset="0"/>
-                <a:ea typeface="Calibri" pitchFamily="34" charset="-122"/>
-                <a:cs typeface="Calibri" pitchFamily="34" charset="-120"/>
+                <a:cs typeface="Amiri" pitchFamily="2" charset="-78"/>
               </a:rPr>
               <a:t>READING · ANSWERS · SHOW AFTER THE SECTION</a:t>
             </a:r>
@@ -11213,8 +11031,7 @@
                   <a:srgbClr val="1B3B6F"/>
                 </a:solidFill>
                 <a:latin typeface="Cambria" pitchFamily="34" charset="0"/>
-                <a:ea typeface="Cambria" pitchFamily="34" charset="-122"/>
-                <a:cs typeface="Cambria" pitchFamily="34" charset="-120"/>
+                <a:cs typeface="Amiri" pitchFamily="2" charset="-78"/>
               </a:rPr>
               <a:t>Reading · Answers</a:t>
             </a:r>
@@ -11251,9 +11068,8 @@
                 <a:solidFill>
                   <a:srgbClr val="8A6D1E"/>
                 </a:solidFill>
-                <a:latin typeface="Amiri" pitchFamily="34" charset="0"/>
-                <a:ea typeface="Amiri" pitchFamily="34" charset="-122"/>
-                <a:cs typeface="Amiri" pitchFamily="34" charset="-120"/>
+                <a:latin typeface="Amiri" pitchFamily="2" charset="-78"/>
+                <a:cs typeface="Amiri" pitchFamily="2" charset="-78"/>
               </a:rPr>
               <a:t>الإِجَابَاتُ</a:t>
             </a:r>
@@ -11291,8 +11107,7 @@
                   <a:srgbClr val="8A93A0"/>
                 </a:solidFill>
                 <a:latin typeface="Calibri" pitchFamily="34" charset="0"/>
-                <a:ea typeface="Calibri" pitchFamily="34" charset="-122"/>
-                <a:cs typeface="Calibri" pitchFamily="34" charset="-120"/>
+                <a:cs typeface="Amiri" pitchFamily="2" charset="-78"/>
               </a:rPr>
               <a:t>Miftah Arabic · Foundation F4 · My School · F4-L12</a:t>
             </a:r>
@@ -11389,8 +11204,7 @@
                   <a:srgbClr val="FFFFFF"/>
                 </a:solidFill>
                 <a:latin typeface="Calibri" pitchFamily="34" charset="0"/>
-                <a:ea typeface="Calibri" pitchFamily="34" charset="-122"/>
-                <a:cs typeface="Calibri" pitchFamily="34" charset="-120"/>
+                <a:cs typeface="Amiri" pitchFamily="2" charset="-78"/>
               </a:rPr>
               <a:t>1</a:t>
             </a:r>
@@ -11428,8 +11242,7 @@
                   <a:srgbClr val="1B3B6F"/>
                 </a:solidFill>
                 <a:latin typeface="Calibri" pitchFamily="34" charset="0"/>
-                <a:ea typeface="Calibri" pitchFamily="34" charset="-122"/>
-                <a:cs typeface="Calibri" pitchFamily="34" charset="-120"/>
+                <a:cs typeface="Amiri" pitchFamily="2" charset="-78"/>
               </a:rPr>
               <a:t>Where is Omar’s school?</a:t>
             </a:r>
@@ -11492,8 +11305,7 @@
                   <a:srgbClr val="1B3B6F"/>
                 </a:solidFill>
                 <a:latin typeface="Calibri" pitchFamily="34" charset="0"/>
-                <a:ea typeface="Calibri" pitchFamily="34" charset="-122"/>
-                <a:cs typeface="Calibri" pitchFamily="34" charset="-120"/>
+                <a:cs typeface="Amiri" pitchFamily="2" charset="-78"/>
               </a:rPr>
               <a:t>A</a:t>
             </a:r>
@@ -11531,8 +11343,7 @@
                   <a:srgbClr val="9AA1AB"/>
                 </a:solidFill>
                 <a:latin typeface="Calibri" pitchFamily="34" charset="0"/>
-                <a:ea typeface="Calibri" pitchFamily="34" charset="-122"/>
-                <a:cs typeface="Calibri" pitchFamily="34" charset="-120"/>
+                <a:cs typeface="Amiri" pitchFamily="2" charset="-78"/>
               </a:rPr>
               <a:t>near the station</a:t>
             </a:r>
@@ -11595,8 +11406,7 @@
                   <a:srgbClr val="1B3B6F"/>
                 </a:solidFill>
                 <a:latin typeface="Calibri" pitchFamily="34" charset="0"/>
-                <a:ea typeface="Calibri" pitchFamily="34" charset="-122"/>
-                <a:cs typeface="Calibri" pitchFamily="34" charset="-120"/>
+                <a:cs typeface="Amiri" pitchFamily="2" charset="-78"/>
               </a:rPr>
               <a:t>B</a:t>
             </a:r>
@@ -11634,8 +11444,7 @@
                   <a:srgbClr val="9AA1AB"/>
                 </a:solidFill>
                 <a:latin typeface="Calibri" pitchFamily="34" charset="0"/>
-                <a:ea typeface="Calibri" pitchFamily="34" charset="-122"/>
-                <a:cs typeface="Calibri" pitchFamily="34" charset="-120"/>
+                <a:cs typeface="Amiri" pitchFamily="2" charset="-78"/>
               </a:rPr>
               <a:t>far from his home</a:t>
             </a:r>
@@ -11725,8 +11534,7 @@
                   <a:srgbClr val="FFFFFF"/>
                 </a:solidFill>
                 <a:latin typeface="Calibri" pitchFamily="34" charset="0"/>
-                <a:ea typeface="Calibri" pitchFamily="34" charset="-122"/>
-                <a:cs typeface="Calibri" pitchFamily="34" charset="-120"/>
+                <a:cs typeface="Amiri" pitchFamily="2" charset="-78"/>
               </a:rPr>
               <a:t>C</a:t>
             </a:r>
@@ -11764,8 +11572,7 @@
                   <a:srgbClr val="1F2A37"/>
                 </a:solidFill>
                 <a:latin typeface="Calibri" pitchFamily="34" charset="0"/>
-                <a:ea typeface="Calibri" pitchFamily="34" charset="-122"/>
-                <a:cs typeface="Calibri" pitchFamily="34" charset="-120"/>
+                <a:cs typeface="Amiri" pitchFamily="2" charset="-78"/>
               </a:rPr>
               <a:t>near his home</a:t>
             </a:r>
@@ -11802,9 +11609,8 @@
                 <a:solidFill>
                   <a:srgbClr val="8A6D1E"/>
                 </a:solidFill>
-                <a:latin typeface="Amiri" pitchFamily="34" charset="0"/>
-                <a:ea typeface="Amiri" pitchFamily="34" charset="-122"/>
-                <a:cs typeface="Amiri" pitchFamily="34" charset="-120"/>
+                <a:latin typeface="Amiri" pitchFamily="2" charset="-78"/>
+                <a:cs typeface="Amiri" pitchFamily="2" charset="-78"/>
               </a:rPr>
               <a:t>قَرِيبَةٍ مِنْ بَيْتِي</a:t>
             </a:r>
@@ -11901,8 +11707,7 @@
                   <a:srgbClr val="FFFFFF"/>
                 </a:solidFill>
                 <a:latin typeface="Calibri" pitchFamily="34" charset="0"/>
-                <a:ea typeface="Calibri" pitchFamily="34" charset="-122"/>
-                <a:cs typeface="Calibri" pitchFamily="34" charset="-120"/>
+                <a:cs typeface="Amiri" pitchFamily="2" charset="-78"/>
               </a:rPr>
               <a:t>2</a:t>
             </a:r>
@@ -11940,8 +11745,7 @@
                   <a:srgbClr val="1B3B6F"/>
                 </a:solidFill>
                 <a:latin typeface="Calibri" pitchFamily="34" charset="0"/>
-                <a:ea typeface="Calibri" pitchFamily="34" charset="-122"/>
-                <a:cs typeface="Calibri" pitchFamily="34" charset="-120"/>
+                <a:cs typeface="Amiri" pitchFamily="2" charset="-78"/>
               </a:rPr>
               <a:t>When does school begin and end?</a:t>
             </a:r>
@@ -12004,8 +11808,7 @@
                   <a:srgbClr val="1B3B6F"/>
                 </a:solidFill>
                 <a:latin typeface="Calibri" pitchFamily="34" charset="0"/>
-                <a:ea typeface="Calibri" pitchFamily="34" charset="-122"/>
-                <a:cs typeface="Calibri" pitchFamily="34" charset="-120"/>
+                <a:cs typeface="Amiri" pitchFamily="2" charset="-78"/>
               </a:rPr>
               <a:t>A</a:t>
             </a:r>
@@ -12043,8 +11846,7 @@
                   <a:srgbClr val="9AA1AB"/>
                 </a:solidFill>
                 <a:latin typeface="Calibri" pitchFamily="34" charset="0"/>
-                <a:ea typeface="Calibri" pitchFamily="34" charset="-122"/>
-                <a:cs typeface="Calibri" pitchFamily="34" charset="-120"/>
+                <a:cs typeface="Amiri" pitchFamily="2" charset="-78"/>
               </a:rPr>
               <a:t>8:00–3:30</a:t>
             </a:r>
@@ -12134,8 +11936,7 @@
                   <a:srgbClr val="FFFFFF"/>
                 </a:solidFill>
                 <a:latin typeface="Calibri" pitchFamily="34" charset="0"/>
-                <a:ea typeface="Calibri" pitchFamily="34" charset="-122"/>
-                <a:cs typeface="Calibri" pitchFamily="34" charset="-120"/>
+                <a:cs typeface="Amiri" pitchFamily="2" charset="-78"/>
               </a:rPr>
               <a:t>B</a:t>
             </a:r>
@@ -12173,8 +11974,7 @@
                   <a:srgbClr val="1F2A37"/>
                 </a:solidFill>
                 <a:latin typeface="Calibri" pitchFamily="34" charset="0"/>
-                <a:ea typeface="Calibri" pitchFamily="34" charset="-122"/>
-                <a:cs typeface="Calibri" pitchFamily="34" charset="-120"/>
+                <a:cs typeface="Amiri" pitchFamily="2" charset="-78"/>
               </a:rPr>
               <a:t>8:00–3:00</a:t>
             </a:r>
@@ -12237,8 +12037,7 @@
                   <a:srgbClr val="1B3B6F"/>
                 </a:solidFill>
                 <a:latin typeface="Calibri" pitchFamily="34" charset="0"/>
-                <a:ea typeface="Calibri" pitchFamily="34" charset="-122"/>
-                <a:cs typeface="Calibri" pitchFamily="34" charset="-120"/>
+                <a:cs typeface="Amiri" pitchFamily="2" charset="-78"/>
               </a:rPr>
               <a:t>C</a:t>
             </a:r>
@@ -12276,8 +12075,7 @@
                   <a:srgbClr val="9AA1AB"/>
                 </a:solidFill>
                 <a:latin typeface="Calibri" pitchFamily="34" charset="0"/>
-                <a:ea typeface="Calibri" pitchFamily="34" charset="-122"/>
-                <a:cs typeface="Calibri" pitchFamily="34" charset="-120"/>
+                <a:cs typeface="Amiri" pitchFamily="2" charset="-78"/>
               </a:rPr>
               <a:t>9:00–3:00</a:t>
             </a:r>
@@ -12314,9 +12112,8 @@
                 <a:solidFill>
                   <a:srgbClr val="8A6D1E"/>
                 </a:solidFill>
-                <a:latin typeface="Amiri" pitchFamily="34" charset="0"/>
-                <a:ea typeface="Amiri" pitchFamily="34" charset="-122"/>
-                <a:cs typeface="Amiri" pitchFamily="34" charset="-120"/>
+                <a:latin typeface="Amiri" pitchFamily="2" charset="-78"/>
+                <a:cs typeface="Amiri" pitchFamily="2" charset="-78"/>
               </a:rPr>
               <a:t>فِي السَّاعَةِ الثَّامِنَةِ … فِي السَّاعَةِ الثَّالِثَةِ</a:t>
             </a:r>
@@ -12413,8 +12210,7 @@
                   <a:srgbClr val="FFFFFF"/>
                 </a:solidFill>
                 <a:latin typeface="Calibri" pitchFamily="34" charset="0"/>
-                <a:ea typeface="Calibri" pitchFamily="34" charset="-122"/>
-                <a:cs typeface="Calibri" pitchFamily="34" charset="-120"/>
+                <a:cs typeface="Amiri" pitchFamily="2" charset="-78"/>
               </a:rPr>
               <a:t>3</a:t>
             </a:r>
@@ -12452,8 +12248,7 @@
                   <a:srgbClr val="1B3B6F"/>
                 </a:solidFill>
                 <a:latin typeface="Calibri" pitchFamily="34" charset="0"/>
-                <a:ea typeface="Calibri" pitchFamily="34" charset="-122"/>
-                <a:cs typeface="Calibri" pitchFamily="34" charset="-120"/>
+                <a:cs typeface="Amiri" pitchFamily="2" charset="-78"/>
               </a:rPr>
               <a:t>Which subject does he prefer, and why?</a:t>
             </a:r>
@@ -12516,8 +12311,7 @@
                   <a:srgbClr val="1B3B6F"/>
                 </a:solidFill>
                 <a:latin typeface="Calibri" pitchFamily="34" charset="0"/>
-                <a:ea typeface="Calibri" pitchFamily="34" charset="-122"/>
-                <a:cs typeface="Calibri" pitchFamily="34" charset="-120"/>
+                <a:cs typeface="Amiri" pitchFamily="2" charset="-78"/>
               </a:rPr>
               <a:t>A</a:t>
             </a:r>
@@ -12555,8 +12349,7 @@
                   <a:srgbClr val="9AA1AB"/>
                 </a:solidFill>
                 <a:latin typeface="Calibri" pitchFamily="34" charset="0"/>
-                <a:ea typeface="Calibri" pitchFamily="34" charset="-122"/>
-                <a:cs typeface="Calibri" pitchFamily="34" charset="-120"/>
+                <a:cs typeface="Amiri" pitchFamily="2" charset="-78"/>
               </a:rPr>
               <a:t>maths — it is easy</a:t>
             </a:r>
@@ -12646,8 +12439,7 @@
                   <a:srgbClr val="FFFFFF"/>
                 </a:solidFill>
                 <a:latin typeface="Calibri" pitchFamily="34" charset="0"/>
-                <a:ea typeface="Calibri" pitchFamily="34" charset="-122"/>
-                <a:cs typeface="Calibri" pitchFamily="34" charset="-120"/>
+                <a:cs typeface="Amiri" pitchFamily="2" charset="-78"/>
               </a:rPr>
               <a:t>B</a:t>
             </a:r>
@@ -12685,8 +12477,7 @@
                   <a:srgbClr val="1F2A37"/>
                 </a:solidFill>
                 <a:latin typeface="Calibri" pitchFamily="34" charset="0"/>
-                <a:ea typeface="Calibri" pitchFamily="34" charset="-122"/>
-                <a:cs typeface="Calibri" pitchFamily="34" charset="-120"/>
+                <a:cs typeface="Amiri" pitchFamily="2" charset="-78"/>
               </a:rPr>
               <a:t>computing — useful and enjoyable</a:t>
             </a:r>
@@ -12749,8 +12540,7 @@
                   <a:srgbClr val="1B3B6F"/>
                 </a:solidFill>
                 <a:latin typeface="Calibri" pitchFamily="34" charset="0"/>
-                <a:ea typeface="Calibri" pitchFamily="34" charset="-122"/>
-                <a:cs typeface="Calibri" pitchFamily="34" charset="-120"/>
+                <a:cs typeface="Amiri" pitchFamily="2" charset="-78"/>
               </a:rPr>
               <a:t>C</a:t>
             </a:r>
@@ -12788,8 +12578,7 @@
                   <a:srgbClr val="9AA1AB"/>
                 </a:solidFill>
                 <a:latin typeface="Calibri" pitchFamily="34" charset="0"/>
-                <a:ea typeface="Calibri" pitchFamily="34" charset="-122"/>
-                <a:cs typeface="Calibri" pitchFamily="34" charset="-120"/>
+                <a:cs typeface="Amiri" pitchFamily="2" charset="-78"/>
               </a:rPr>
               <a:t>Arabic — it is important</a:t>
             </a:r>
@@ -12826,9 +12615,8 @@
                 <a:solidFill>
                   <a:srgbClr val="8A6D1E"/>
                 </a:solidFill>
-                <a:latin typeface="Amiri" pitchFamily="34" charset="0"/>
-                <a:ea typeface="Amiri" pitchFamily="34" charset="-122"/>
-                <a:cs typeface="Amiri" pitchFamily="34" charset="-120"/>
+                <a:latin typeface="Amiri" pitchFamily="2" charset="-78"/>
+                <a:cs typeface="Amiri" pitchFamily="2" charset="-78"/>
               </a:rPr>
               <a:t>أُفَضِّلُ الحَاسُوبَ لِأَنَّهُ مُفِيدٌ وَمُمْتِعٌ</a:t>
             </a:r>
@@ -12925,8 +12713,7 @@
                   <a:srgbClr val="FFFFFF"/>
                 </a:solidFill>
                 <a:latin typeface="Calibri" pitchFamily="34" charset="0"/>
-                <a:ea typeface="Calibri" pitchFamily="34" charset="-122"/>
-                <a:cs typeface="Calibri" pitchFamily="34" charset="-120"/>
+                <a:cs typeface="Amiri" pitchFamily="2" charset="-78"/>
               </a:rPr>
               <a:t>4</a:t>
             </a:r>
@@ -12964,8 +12751,7 @@
                   <a:srgbClr val="1B3B6F"/>
                 </a:solidFill>
                 <a:latin typeface="Calibri" pitchFamily="34" charset="0"/>
-                <a:ea typeface="Calibri" pitchFamily="34" charset="-122"/>
-                <a:cs typeface="Calibri" pitchFamily="34" charset="-120"/>
+                <a:cs typeface="Amiri" pitchFamily="2" charset="-78"/>
               </a:rPr>
               <a:t>What shows the computing teacher supports learning?</a:t>
             </a:r>
@@ -13028,8 +12814,7 @@
                   <a:srgbClr val="1B3B6F"/>
                 </a:solidFill>
                 <a:latin typeface="Calibri" pitchFamily="34" charset="0"/>
-                <a:ea typeface="Calibri" pitchFamily="34" charset="-122"/>
-                <a:cs typeface="Calibri" pitchFamily="34" charset="-120"/>
+                <a:cs typeface="Amiri" pitchFamily="2" charset="-78"/>
               </a:rPr>
               <a:t>A</a:t>
             </a:r>
@@ -13067,8 +12852,7 @@
                   <a:srgbClr val="9AA1AB"/>
                 </a:solidFill>
                 <a:latin typeface="Calibri" pitchFamily="34" charset="0"/>
-                <a:ea typeface="Calibri" pitchFamily="34" charset="-122"/>
-                <a:cs typeface="Calibri" pitchFamily="34" charset="-120"/>
+                <a:cs typeface="Amiri" pitchFamily="2" charset="-78"/>
               </a:rPr>
               <a:t>He is strict and gives homework.</a:t>
             </a:r>
@@ -13131,8 +12915,7 @@
                   <a:srgbClr val="1B3B6F"/>
                 </a:solidFill>
                 <a:latin typeface="Calibri" pitchFamily="34" charset="0"/>
-                <a:ea typeface="Calibri" pitchFamily="34" charset="-122"/>
-                <a:cs typeface="Calibri" pitchFamily="34" charset="-120"/>
+                <a:cs typeface="Amiri" pitchFamily="2" charset="-78"/>
               </a:rPr>
               <a:t>B</a:t>
             </a:r>
@@ -13170,8 +12953,7 @@
                   <a:srgbClr val="9AA1AB"/>
                 </a:solidFill>
                 <a:latin typeface="Calibri" pitchFamily="34" charset="0"/>
-                <a:ea typeface="Calibri" pitchFamily="34" charset="-122"/>
-                <a:cs typeface="Calibri" pitchFamily="34" charset="-120"/>
+                <a:cs typeface="Amiri" pitchFamily="2" charset="-78"/>
               </a:rPr>
               <a:t>He is young and funny.</a:t>
             </a:r>
@@ -13261,8 +13043,7 @@
                   <a:srgbClr val="FFFFFF"/>
                 </a:solidFill>
                 <a:latin typeface="Calibri" pitchFamily="34" charset="0"/>
-                <a:ea typeface="Calibri" pitchFamily="34" charset="-122"/>
-                <a:cs typeface="Calibri" pitchFamily="34" charset="-120"/>
+                <a:cs typeface="Amiri" pitchFamily="2" charset="-78"/>
               </a:rPr>
               <a:t>C</a:t>
             </a:r>
@@ -13300,8 +13081,7 @@
                   <a:srgbClr val="1F2A37"/>
                 </a:solidFill>
                 <a:latin typeface="Calibri" pitchFamily="34" charset="0"/>
-                <a:ea typeface="Calibri" pitchFamily="34" charset="-122"/>
-                <a:cs typeface="Calibri" pitchFamily="34" charset="-120"/>
+                <a:cs typeface="Amiri" pitchFamily="2" charset="-78"/>
               </a:rPr>
               <a:t>He is patient and explains clearly.</a:t>
             </a:r>
@@ -13338,9 +13118,8 @@
                 <a:solidFill>
                   <a:srgbClr val="8A6D1E"/>
                 </a:solidFill>
-                <a:latin typeface="Amiri" pitchFamily="34" charset="0"/>
-                <a:ea typeface="Amiri" pitchFamily="34" charset="-122"/>
-                <a:cs typeface="Amiri" pitchFamily="34" charset="-120"/>
+                <a:latin typeface="Amiri" pitchFamily="2" charset="-78"/>
+                <a:cs typeface="Amiri" pitchFamily="2" charset="-78"/>
               </a:rPr>
               <a:t>صَبُورٌ وَيَشْرَحُ الدَّرْسَ بِوُضُوحٍ</a:t>
             </a:r>
@@ -13437,8 +13216,7 @@
                   <a:srgbClr val="FFFFFF"/>
                 </a:solidFill>
                 <a:latin typeface="Calibri" pitchFamily="34" charset="0"/>
-                <a:ea typeface="Calibri" pitchFamily="34" charset="-122"/>
-                <a:cs typeface="Calibri" pitchFamily="34" charset="-120"/>
+                <a:cs typeface="Amiri" pitchFamily="2" charset="-78"/>
               </a:rPr>
               <a:t>5</a:t>
             </a:r>
@@ -13476,8 +13254,7 @@
                   <a:srgbClr val="1B3B6F"/>
                 </a:solidFill>
                 <a:latin typeface="Calibri" pitchFamily="34" charset="0"/>
-                <a:ea typeface="Calibri" pitchFamily="34" charset="-122"/>
-                <a:cs typeface="Calibri" pitchFamily="34" charset="-120"/>
+                <a:cs typeface="Amiri" pitchFamily="2" charset="-78"/>
               </a:rPr>
               <a:t>Which two facilities are mentioned?</a:t>
             </a:r>
@@ -13567,8 +13344,7 @@
                   <a:srgbClr val="FFFFFF"/>
                 </a:solidFill>
                 <a:latin typeface="Calibri" pitchFamily="34" charset="0"/>
-                <a:ea typeface="Calibri" pitchFamily="34" charset="-122"/>
-                <a:cs typeface="Calibri" pitchFamily="34" charset="-120"/>
+                <a:cs typeface="Amiri" pitchFamily="2" charset="-78"/>
               </a:rPr>
               <a:t>A</a:t>
             </a:r>
@@ -13606,8 +13382,7 @@
                   <a:srgbClr val="1F2A37"/>
                 </a:solidFill>
                 <a:latin typeface="Calibri" pitchFamily="34" charset="0"/>
-                <a:ea typeface="Calibri" pitchFamily="34" charset="-122"/>
-                <a:cs typeface="Calibri" pitchFamily="34" charset="-120"/>
+                <a:cs typeface="Amiri" pitchFamily="2" charset="-78"/>
               </a:rPr>
               <a:t>a library and a playground</a:t>
             </a:r>
@@ -13670,8 +13445,7 @@
                   <a:srgbClr val="1B3B6F"/>
                 </a:solidFill>
                 <a:latin typeface="Calibri" pitchFamily="34" charset="0"/>
-                <a:ea typeface="Calibri" pitchFamily="34" charset="-122"/>
-                <a:cs typeface="Calibri" pitchFamily="34" charset="-120"/>
+                <a:cs typeface="Amiri" pitchFamily="2" charset="-78"/>
               </a:rPr>
               <a:t>B</a:t>
             </a:r>
@@ -13709,8 +13483,7 @@
                   <a:srgbClr val="9AA1AB"/>
                 </a:solidFill>
                 <a:latin typeface="Calibri" pitchFamily="34" charset="0"/>
-                <a:ea typeface="Calibri" pitchFamily="34" charset="-122"/>
-                <a:cs typeface="Calibri" pitchFamily="34" charset="-120"/>
+                <a:cs typeface="Amiri" pitchFamily="2" charset="-78"/>
               </a:rPr>
               <a:t>a hall and a canteen</a:t>
             </a:r>
@@ -13773,8 +13546,7 @@
                   <a:srgbClr val="1B3B6F"/>
                 </a:solidFill>
                 <a:latin typeface="Calibri" pitchFamily="34" charset="0"/>
-                <a:ea typeface="Calibri" pitchFamily="34" charset="-122"/>
-                <a:cs typeface="Calibri" pitchFamily="34" charset="-120"/>
+                <a:cs typeface="Amiri" pitchFamily="2" charset="-78"/>
               </a:rPr>
               <a:t>C</a:t>
             </a:r>
@@ -13812,8 +13584,7 @@
                   <a:srgbClr val="9AA1AB"/>
                 </a:solidFill>
                 <a:latin typeface="Calibri" pitchFamily="34" charset="0"/>
-                <a:ea typeface="Calibri" pitchFamily="34" charset="-122"/>
-                <a:cs typeface="Calibri" pitchFamily="34" charset="-120"/>
+                <a:cs typeface="Amiri" pitchFamily="2" charset="-78"/>
               </a:rPr>
               <a:t>an office and a laboratory</a:t>
             </a:r>
@@ -13850,9 +13621,8 @@
                 <a:solidFill>
                   <a:srgbClr val="8A6D1E"/>
                 </a:solidFill>
-                <a:latin typeface="Amiri" pitchFamily="34" charset="0"/>
-                <a:ea typeface="Amiri" pitchFamily="34" charset="-122"/>
-                <a:cs typeface="Amiri" pitchFamily="34" charset="-120"/>
+                <a:latin typeface="Amiri" pitchFamily="2" charset="-78"/>
+                <a:cs typeface="Amiri" pitchFamily="2" charset="-78"/>
               </a:rPr>
               <a:t>مَكْتَبَةٌ جَيِّدَةٌ وَمَلْعَبٌ وَاسِعٌ</a:t>
             </a:r>
@@ -13949,8 +13719,7 @@
                   <a:srgbClr val="FFFFFF"/>
                 </a:solidFill>
                 <a:latin typeface="Calibri" pitchFamily="34" charset="0"/>
-                <a:ea typeface="Calibri" pitchFamily="34" charset="-122"/>
-                <a:cs typeface="Calibri" pitchFamily="34" charset="-120"/>
+                <a:cs typeface="Amiri" pitchFamily="2" charset="-78"/>
               </a:rPr>
               <a:t>6</a:t>
             </a:r>
@@ -13988,8 +13757,7 @@
                   <a:srgbClr val="1B3B6F"/>
                 </a:solidFill>
                 <a:latin typeface="Calibri" pitchFamily="34" charset="0"/>
-                <a:ea typeface="Calibri" pitchFamily="34" charset="-122"/>
-                <a:cs typeface="Calibri" pitchFamily="34" charset="-120"/>
+                <a:cs typeface="Amiri" pitchFamily="2" charset="-78"/>
               </a:rPr>
               <a:t>Which school-rule summary is accurate?</a:t>
             </a:r>
@@ -14052,8 +13820,7 @@
                   <a:srgbClr val="1B3B6F"/>
                 </a:solidFill>
                 <a:latin typeface="Calibri" pitchFamily="34" charset="0"/>
-                <a:ea typeface="Calibri" pitchFamily="34" charset="-122"/>
-                <a:cs typeface="Calibri" pitchFamily="34" charset="-120"/>
+                <a:cs typeface="Amiri" pitchFamily="2" charset="-78"/>
               </a:rPr>
               <a:t>A</a:t>
             </a:r>
@@ -14091,8 +13858,7 @@
                   <a:srgbClr val="9AA1AB"/>
                 </a:solidFill>
                 <a:latin typeface="Calibri" pitchFamily="34" charset="0"/>
-                <a:ea typeface="Calibri" pitchFamily="34" charset="-122"/>
-                <a:cs typeface="Calibri" pitchFamily="34" charset="-120"/>
+                <a:cs typeface="Amiri" pitchFamily="2" charset="-78"/>
               </a:rPr>
               <a:t>Do not use phones; wear a uniform.</a:t>
             </a:r>
@@ -14182,8 +13948,7 @@
                   <a:srgbClr val="FFFFFF"/>
                 </a:solidFill>
                 <a:latin typeface="Calibri" pitchFamily="34" charset="0"/>
-                <a:ea typeface="Calibri" pitchFamily="34" charset="-122"/>
-                <a:cs typeface="Calibri" pitchFamily="34" charset="-120"/>
+                <a:cs typeface="Amiri" pitchFamily="2" charset="-78"/>
               </a:rPr>
               <a:t>B</a:t>
             </a:r>
@@ -14221,8 +13986,7 @@
                   <a:srgbClr val="1F2A37"/>
                 </a:solidFill>
                 <a:latin typeface="Calibri" pitchFamily="34" charset="0"/>
-                <a:ea typeface="Calibri" pitchFamily="34" charset="-122"/>
-                <a:cs typeface="Calibri" pitchFamily="34" charset="-120"/>
+                <a:cs typeface="Amiri" pitchFamily="2" charset="-78"/>
               </a:rPr>
               <a:t>Respect teachers; do not eat in the library.</a:t>
             </a:r>
@@ -14285,8 +14049,7 @@
                   <a:srgbClr val="1B3B6F"/>
                 </a:solidFill>
                 <a:latin typeface="Calibri" pitchFamily="34" charset="0"/>
-                <a:ea typeface="Calibri" pitchFamily="34" charset="-122"/>
-                <a:cs typeface="Calibri" pitchFamily="34" charset="-120"/>
+                <a:cs typeface="Amiri" pitchFamily="2" charset="-78"/>
               </a:rPr>
               <a:t>C</a:t>
             </a:r>
@@ -14324,8 +14087,7 @@
                   <a:srgbClr val="9AA1AB"/>
                 </a:solidFill>
                 <a:latin typeface="Calibri" pitchFamily="34" charset="0"/>
-                <a:ea typeface="Calibri" pitchFamily="34" charset="-122"/>
-                <a:cs typeface="Calibri" pitchFamily="34" charset="-120"/>
+                <a:cs typeface="Amiri" pitchFamily="2" charset="-78"/>
               </a:rPr>
               <a:t>Complete homework; remain silent.</a:t>
             </a:r>
@@ -14362,9 +14124,8 @@
                 <a:solidFill>
                   <a:srgbClr val="8A6D1E"/>
                 </a:solidFill>
-                <a:latin typeface="Amiri" pitchFamily="34" charset="0"/>
-                <a:ea typeface="Amiri" pitchFamily="34" charset="-122"/>
-                <a:cs typeface="Amiri" pitchFamily="34" charset="-120"/>
+                <a:latin typeface="Amiri" pitchFamily="2" charset="-78"/>
+                <a:cs typeface="Amiri" pitchFamily="2" charset="-78"/>
               </a:rPr>
               <a:t>نَحْتَرِمَ المُعَلِّمِينَ … لَا يَجُوزُ الأَكْلُ فِي المَكْتَبَةِ</a:t>
             </a:r>
@@ -14402,8 +14163,7 @@
                   <a:srgbClr val="8A93A0"/>
                 </a:solidFill>
                 <a:latin typeface="Calibri" pitchFamily="34" charset="0"/>
-                <a:ea typeface="Calibri" pitchFamily="34" charset="-122"/>
-                <a:cs typeface="Calibri" pitchFamily="34" charset="-120"/>
+                <a:cs typeface="Amiri" pitchFamily="2" charset="-78"/>
               </a:rPr>
               <a:t>14 / 23</a:t>
             </a:r>
@@ -14497,9 +14257,8 @@
                 <a:solidFill>
                   <a:srgbClr val="D4AF37"/>
                 </a:solidFill>
-                <a:latin typeface="Amiri" pitchFamily="34" charset="0"/>
-                <a:ea typeface="Amiri" pitchFamily="34" charset="-122"/>
-                <a:cs typeface="Amiri" pitchFamily="34" charset="-120"/>
+                <a:latin typeface="Amiri" pitchFamily="2" charset="-78"/>
+                <a:cs typeface="Amiri" pitchFamily="2" charset="-78"/>
               </a:rPr>
               <a:t>م</a:t>
             </a:r>
@@ -14537,8 +14296,7 @@
                   <a:srgbClr val="1B3B6F"/>
                 </a:solidFill>
                 <a:latin typeface="Cambria" pitchFamily="34" charset="0"/>
-                <a:ea typeface="Cambria" pitchFamily="34" charset="-122"/>
-                <a:cs typeface="Cambria" pitchFamily="34" charset="-120"/>
+                <a:cs typeface="Amiri" pitchFamily="2" charset="-78"/>
               </a:rPr>
               <a:t>Al Madina Online School</a:t>
             </a:r>
@@ -14576,8 +14334,7 @@
                   <a:srgbClr val="8A6D1E"/>
                 </a:solidFill>
                 <a:latin typeface="Calibri" pitchFamily="34" charset="0"/>
-                <a:ea typeface="Calibri" pitchFamily="34" charset="-122"/>
-                <a:cs typeface="Calibri" pitchFamily="34" charset="-120"/>
+                <a:cs typeface="Amiri" pitchFamily="2" charset="-78"/>
               </a:rPr>
               <a:t>ARABIC DEPARTMENT · MIFTAH ARABIC · IGCSE 0544</a:t>
             </a:r>
@@ -14642,8 +14399,7 @@
                   <a:srgbClr val="FFFFFF"/>
                 </a:solidFill>
                 <a:latin typeface="Calibri" pitchFamily="34" charset="0"/>
-                <a:ea typeface="Calibri" pitchFamily="34" charset="-122"/>
-                <a:cs typeface="Calibri" pitchFamily="34" charset="-120"/>
+                <a:cs typeface="Amiri" pitchFamily="2" charset="-78"/>
               </a:rPr>
               <a:t>F4-L12 · F4 Assessment</a:t>
             </a:r>
@@ -14708,8 +14464,7 @@
                   <a:srgbClr val="FFFFFF"/>
                 </a:solidFill>
                 <a:latin typeface="Calibri" pitchFamily="34" charset="0"/>
-                <a:ea typeface="Calibri" pitchFamily="34" charset="-122"/>
-                <a:cs typeface="Calibri" pitchFamily="34" charset="-120"/>
+                <a:cs typeface="Amiri" pitchFamily="2" charset="-78"/>
               </a:rPr>
               <a:t>YOU DO · 4 MIN</a:t>
             </a:r>
@@ -14747,8 +14502,7 @@
                   <a:srgbClr val="1E6B52"/>
                 </a:solidFill>
                 <a:latin typeface="Calibri" pitchFamily="34" charset="0"/>
-                <a:ea typeface="Calibri" pitchFamily="34" charset="-122"/>
-                <a:cs typeface="Calibri" pitchFamily="34" charset="-120"/>
+                <a:cs typeface="Amiri" pitchFamily="2" charset="-78"/>
               </a:rPr>
               <a:t>WRITING · QUESTION 1 · 5 MARKS (WEBSITE)</a:t>
             </a:r>
@@ -14786,8 +14540,7 @@
                   <a:srgbClr val="1B3B6F"/>
                 </a:solidFill>
                 <a:latin typeface="Cambria" pitchFamily="34" charset="0"/>
-                <a:ea typeface="Cambria" pitchFamily="34" charset="-122"/>
-                <a:cs typeface="Cambria" pitchFamily="34" charset="-120"/>
+                <a:cs typeface="Amiri" pitchFamily="2" charset="-78"/>
               </a:rPr>
               <a:t>School registration form</a:t>
             </a:r>
@@ -14824,9 +14577,8 @@
                 <a:solidFill>
                   <a:srgbClr val="8A6D1E"/>
                 </a:solidFill>
-                <a:latin typeface="Amiri" pitchFamily="34" charset="0"/>
-                <a:ea typeface="Amiri" pitchFamily="34" charset="-122"/>
-                <a:cs typeface="Amiri" pitchFamily="34" charset="-120"/>
+                <a:latin typeface="Amiri" pitchFamily="2" charset="-78"/>
+                <a:cs typeface="Amiri" pitchFamily="2" charset="-78"/>
               </a:rPr>
               <a:t>اِسْتِمَارَةُ التَّسْجِيلِ</a:t>
             </a:r>
@@ -14864,8 +14616,7 @@
                   <a:srgbClr val="8A93A0"/>
                 </a:solidFill>
                 <a:latin typeface="Calibri" pitchFamily="34" charset="0"/>
-                <a:ea typeface="Calibri" pitchFamily="34" charset="-122"/>
-                <a:cs typeface="Calibri" pitchFamily="34" charset="-120"/>
+                <a:cs typeface="Amiri" pitchFamily="2" charset="-78"/>
               </a:rPr>
               <a:t>Miftah Arabic · Foundation F4 · My School · F4-L12</a:t>
             </a:r>
@@ -14928,8 +14679,7 @@
                   <a:srgbClr val="FFFFFF"/>
                 </a:solidFill>
                 <a:latin typeface="Calibri" pitchFamily="34" charset="0"/>
-                <a:ea typeface="Calibri" pitchFamily="34" charset="-122"/>
-                <a:cs typeface="Calibri" pitchFamily="34" charset="-120"/>
+                <a:cs typeface="Amiri" pitchFamily="2" charset="-78"/>
               </a:rPr>
               <a:t>Your answer in Arabic</a:t>
             </a:r>
@@ -14967,8 +14717,7 @@
                   <a:srgbClr val="FFFFFF"/>
                 </a:solidFill>
                 <a:latin typeface="Calibri" pitchFamily="34" charset="0"/>
-                <a:ea typeface="Calibri" pitchFamily="34" charset="-122"/>
-                <a:cs typeface="Calibri" pitchFamily="34" charset="-120"/>
+                <a:cs typeface="Amiri" pitchFamily="2" charset="-78"/>
               </a:rPr>
               <a:t>Arabic label</a:t>
             </a:r>
@@ -15006,8 +14755,7 @@
                   <a:srgbClr val="FFFFFF"/>
                 </a:solidFill>
                 <a:latin typeface="Calibri" pitchFamily="34" charset="0"/>
-                <a:ea typeface="Calibri" pitchFamily="34" charset="-122"/>
-                <a:cs typeface="Calibri" pitchFamily="34" charset="-120"/>
+                <a:cs typeface="Amiri" pitchFamily="2" charset="-78"/>
               </a:rPr>
               <a:t>Line</a:t>
             </a:r>
@@ -15072,8 +14820,7 @@
                   <a:srgbClr val="5A6472"/>
                 </a:solidFill>
                 <a:latin typeface="Calibri" pitchFamily="34" charset="0"/>
-                <a:ea typeface="Calibri" pitchFamily="34" charset="-122"/>
-                <a:cs typeface="Calibri" pitchFamily="34" charset="-120"/>
+                <a:cs typeface="Amiri" pitchFamily="2" charset="-78"/>
               </a:rPr>
               <a:t>______________</a:t>
             </a:r>
@@ -15110,9 +14857,8 @@
                 <a:solidFill>
                   <a:srgbClr val="1B3B6F"/>
                 </a:solidFill>
-                <a:latin typeface="Amiri" pitchFamily="34" charset="0"/>
-                <a:ea typeface="Amiri" pitchFamily="34" charset="-122"/>
-                <a:cs typeface="Amiri" pitchFamily="34" charset="-120"/>
+                <a:latin typeface="Amiri" pitchFamily="2" charset="-78"/>
+                <a:cs typeface="Amiri" pitchFamily="2" charset="-78"/>
               </a:rPr>
               <a:t>الاِسْمُ</a:t>
             </a:r>
@@ -15150,8 +14896,7 @@
                   <a:srgbClr val="5A6472"/>
                 </a:solidFill>
                 <a:latin typeface="Calibri" pitchFamily="34" charset="0"/>
-                <a:ea typeface="Calibri" pitchFamily="34" charset="-122"/>
-                <a:cs typeface="Calibri" pitchFamily="34" charset="-120"/>
+                <a:cs typeface="Amiri" pitchFamily="2" charset="-78"/>
               </a:rPr>
               <a:t>1 · Name</a:t>
             </a:r>
@@ -15216,8 +14961,7 @@
                   <a:srgbClr val="FFFFFF"/>
                 </a:solidFill>
                 <a:latin typeface="Calibri" pitchFamily="34" charset="0"/>
-                <a:ea typeface="Calibri" pitchFamily="34" charset="-122"/>
-                <a:cs typeface="Calibri" pitchFamily="34" charset="-120"/>
+                <a:cs typeface="Amiri" pitchFamily="2" charset="-78"/>
               </a:rPr>
               <a:t>CORE</a:t>
             </a:r>
@@ -15282,8 +15026,7 @@
                   <a:srgbClr val="5A6472"/>
                 </a:solidFill>
                 <a:latin typeface="Calibri" pitchFamily="34" charset="0"/>
-                <a:ea typeface="Calibri" pitchFamily="34" charset="-122"/>
-                <a:cs typeface="Calibri" pitchFamily="34" charset="-120"/>
+                <a:cs typeface="Amiri" pitchFamily="2" charset="-78"/>
               </a:rPr>
               <a:t>______________</a:t>
             </a:r>
@@ -15320,9 +15063,8 @@
                 <a:solidFill>
                   <a:srgbClr val="1B3B6F"/>
                 </a:solidFill>
-                <a:latin typeface="Amiri" pitchFamily="34" charset="0"/>
-                <a:ea typeface="Amiri" pitchFamily="34" charset="-122"/>
-                <a:cs typeface="Amiri" pitchFamily="34" charset="-120"/>
+                <a:latin typeface="Amiri" pitchFamily="2" charset="-78"/>
+                <a:cs typeface="Amiri" pitchFamily="2" charset="-78"/>
               </a:rPr>
               <a:t>العُمْرُ</a:t>
             </a:r>
@@ -15360,8 +15102,7 @@
                   <a:srgbClr val="5A6472"/>
                 </a:solidFill>
                 <a:latin typeface="Calibri" pitchFamily="34" charset="0"/>
-                <a:ea typeface="Calibri" pitchFamily="34" charset="-122"/>
-                <a:cs typeface="Calibri" pitchFamily="34" charset="-120"/>
+                <a:cs typeface="Amiri" pitchFamily="2" charset="-78"/>
               </a:rPr>
               <a:t>2 · Age</a:t>
             </a:r>
@@ -15426,8 +15167,7 @@
                   <a:srgbClr val="FFFFFF"/>
                 </a:solidFill>
                 <a:latin typeface="Calibri" pitchFamily="34" charset="0"/>
-                <a:ea typeface="Calibri" pitchFamily="34" charset="-122"/>
-                <a:cs typeface="Calibri" pitchFamily="34" charset="-120"/>
+                <a:cs typeface="Amiri" pitchFamily="2" charset="-78"/>
               </a:rPr>
               <a:t>CORE</a:t>
             </a:r>
@@ -15492,8 +15232,7 @@
                   <a:srgbClr val="5A6472"/>
                 </a:solidFill>
                 <a:latin typeface="Calibri" pitchFamily="34" charset="0"/>
-                <a:ea typeface="Calibri" pitchFamily="34" charset="-122"/>
-                <a:cs typeface="Calibri" pitchFamily="34" charset="-120"/>
+                <a:cs typeface="Amiri" pitchFamily="2" charset="-78"/>
               </a:rPr>
               <a:t>______________</a:t>
             </a:r>
@@ -15530,9 +15269,8 @@
                 <a:solidFill>
                   <a:srgbClr val="1B3B6F"/>
                 </a:solidFill>
-                <a:latin typeface="Amiri" pitchFamily="34" charset="0"/>
-                <a:ea typeface="Amiri" pitchFamily="34" charset="-122"/>
-                <a:cs typeface="Amiri" pitchFamily="34" charset="-120"/>
+                <a:latin typeface="Amiri" pitchFamily="2" charset="-78"/>
+                <a:cs typeface="Amiri" pitchFamily="2" charset="-78"/>
               </a:rPr>
               <a:t>الجِنْسِيَّةُ</a:t>
             </a:r>
@@ -15570,8 +15308,7 @@
                   <a:srgbClr val="5A6472"/>
                 </a:solidFill>
                 <a:latin typeface="Calibri" pitchFamily="34" charset="0"/>
-                <a:ea typeface="Calibri" pitchFamily="34" charset="-122"/>
-                <a:cs typeface="Calibri" pitchFamily="34" charset="-120"/>
+                <a:cs typeface="Amiri" pitchFamily="2" charset="-78"/>
               </a:rPr>
               <a:t>3 · Nationality</a:t>
             </a:r>
@@ -15636,8 +15373,7 @@
                   <a:srgbClr val="FFFFFF"/>
                 </a:solidFill>
                 <a:latin typeface="Calibri" pitchFamily="34" charset="0"/>
-                <a:ea typeface="Calibri" pitchFamily="34" charset="-122"/>
-                <a:cs typeface="Calibri" pitchFamily="34" charset="-120"/>
+                <a:cs typeface="Amiri" pitchFamily="2" charset="-78"/>
               </a:rPr>
               <a:t>CORE</a:t>
             </a:r>
@@ -15702,8 +15438,7 @@
                   <a:srgbClr val="5A6472"/>
                 </a:solidFill>
                 <a:latin typeface="Calibri" pitchFamily="34" charset="0"/>
-                <a:ea typeface="Calibri" pitchFamily="34" charset="-122"/>
-                <a:cs typeface="Calibri" pitchFamily="34" charset="-120"/>
+                <a:cs typeface="Amiri" pitchFamily="2" charset="-78"/>
               </a:rPr>
               <a:t>______________</a:t>
             </a:r>
@@ -15740,9 +15475,8 @@
                 <a:solidFill>
                   <a:srgbClr val="1B3B6F"/>
                 </a:solidFill>
-                <a:latin typeface="Amiri" pitchFamily="34" charset="0"/>
-                <a:ea typeface="Amiri" pitchFamily="34" charset="-122"/>
-                <a:cs typeface="Amiri" pitchFamily="34" charset="-120"/>
+                <a:latin typeface="Amiri" pitchFamily="2" charset="-78"/>
+                <a:cs typeface="Amiri" pitchFamily="2" charset="-78"/>
               </a:rPr>
               <a:t>المَوَادُّ</a:t>
             </a:r>
@@ -15780,8 +15514,7 @@
                   <a:srgbClr val="5A6472"/>
                 </a:solidFill>
                 <a:latin typeface="Calibri" pitchFamily="34" charset="0"/>
-                <a:ea typeface="Calibri" pitchFamily="34" charset="-122"/>
-                <a:cs typeface="Calibri" pitchFamily="34" charset="-120"/>
+                <a:cs typeface="Amiri" pitchFamily="2" charset="-78"/>
               </a:rPr>
               <a:t>4 · Subjects studied</a:t>
             </a:r>
@@ -15846,8 +15579,7 @@
                   <a:srgbClr val="FFFFFF"/>
                 </a:solidFill>
                 <a:latin typeface="Calibri" pitchFamily="34" charset="0"/>
-                <a:ea typeface="Calibri" pitchFamily="34" charset="-122"/>
-                <a:cs typeface="Calibri" pitchFamily="34" charset="-120"/>
+                <a:cs typeface="Amiri" pitchFamily="2" charset="-78"/>
               </a:rPr>
               <a:t>CORE</a:t>
             </a:r>
@@ -15912,8 +15644,7 @@
                   <a:srgbClr val="5A6472"/>
                 </a:solidFill>
                 <a:latin typeface="Calibri" pitchFamily="34" charset="0"/>
-                <a:ea typeface="Calibri" pitchFamily="34" charset="-122"/>
-                <a:cs typeface="Calibri" pitchFamily="34" charset="-120"/>
+                <a:cs typeface="Amiri" pitchFamily="2" charset="-78"/>
               </a:rPr>
               <a:t>______________</a:t>
             </a:r>
@@ -15950,9 +15681,8 @@
                 <a:solidFill>
                   <a:srgbClr val="1B3B6F"/>
                 </a:solidFill>
-                <a:latin typeface="Amiri" pitchFamily="34" charset="0"/>
-                <a:ea typeface="Amiri" pitchFamily="34" charset="-122"/>
-                <a:cs typeface="Amiri" pitchFamily="34" charset="-120"/>
+                <a:latin typeface="Amiri" pitchFamily="2" charset="-78"/>
+                <a:cs typeface="Amiri" pitchFamily="2" charset="-78"/>
               </a:rPr>
               <a:t>المَادَّةُ المُفَضَّلَةُ</a:t>
             </a:r>
@@ -15990,8 +15720,7 @@
                   <a:srgbClr val="5A6472"/>
                 </a:solidFill>
                 <a:latin typeface="Calibri" pitchFamily="34" charset="0"/>
-                <a:ea typeface="Calibri" pitchFamily="34" charset="-122"/>
-                <a:cs typeface="Calibri" pitchFamily="34" charset="-120"/>
+                <a:cs typeface="Amiri" pitchFamily="2" charset="-78"/>
               </a:rPr>
               <a:t>5 · Favourite subject</a:t>
             </a:r>
@@ -16056,8 +15785,7 @@
                   <a:srgbClr val="FFFFFF"/>
                 </a:solidFill>
                 <a:latin typeface="Calibri" pitchFamily="34" charset="0"/>
-                <a:ea typeface="Calibri" pitchFamily="34" charset="-122"/>
-                <a:cs typeface="Calibri" pitchFamily="34" charset="-120"/>
+                <a:cs typeface="Amiri" pitchFamily="2" charset="-78"/>
               </a:rPr>
               <a:t>CORE</a:t>
             </a:r>
@@ -16095,8 +15823,7 @@
                   <a:srgbClr val="1B3B6F"/>
                 </a:solidFill>
                 <a:latin typeface="Calibri" pitchFamily="34" charset="0"/>
-                <a:ea typeface="Calibri" pitchFamily="34" charset="-122"/>
-                <a:cs typeface="Calibri" pitchFamily="34" charset="-120"/>
+                <a:cs typeface="Amiri" pitchFamily="2" charset="-78"/>
               </a:rPr>
               <a:t>One mark for each relevant, readable line in Arabic. Own or fictional details are fine.</a:t>
             </a:r>
@@ -16134,8 +15861,7 @@
                   <a:srgbClr val="8A93A0"/>
                 </a:solidFill>
                 <a:latin typeface="Calibri" pitchFamily="34" charset="0"/>
-                <a:ea typeface="Calibri" pitchFamily="34" charset="-122"/>
-                <a:cs typeface="Calibri" pitchFamily="34" charset="-120"/>
+                <a:cs typeface="Amiri" pitchFamily="2" charset="-78"/>
               </a:rPr>
               <a:t>15 / 23</a:t>
             </a:r>
@@ -16229,9 +15955,8 @@
                 <a:solidFill>
                   <a:srgbClr val="D4AF37"/>
                 </a:solidFill>
-                <a:latin typeface="Amiri" pitchFamily="34" charset="0"/>
-                <a:ea typeface="Amiri" pitchFamily="34" charset="-122"/>
-                <a:cs typeface="Amiri" pitchFamily="34" charset="-120"/>
+                <a:latin typeface="Amiri" pitchFamily="2" charset="-78"/>
+                <a:cs typeface="Amiri" pitchFamily="2" charset="-78"/>
               </a:rPr>
               <a:t>م</a:t>
             </a:r>
@@ -16269,8 +15994,7 @@
                   <a:srgbClr val="1B3B6F"/>
                 </a:solidFill>
                 <a:latin typeface="Cambria" pitchFamily="34" charset="0"/>
-                <a:ea typeface="Cambria" pitchFamily="34" charset="-122"/>
-                <a:cs typeface="Cambria" pitchFamily="34" charset="-120"/>
+                <a:cs typeface="Amiri" pitchFamily="2" charset="-78"/>
               </a:rPr>
               <a:t>Al Madina Online School</a:t>
             </a:r>
@@ -16308,8 +16032,7 @@
                   <a:srgbClr val="8A6D1E"/>
                 </a:solidFill>
                 <a:latin typeface="Calibri" pitchFamily="34" charset="0"/>
-                <a:ea typeface="Calibri" pitchFamily="34" charset="-122"/>
-                <a:cs typeface="Calibri" pitchFamily="34" charset="-120"/>
+                <a:cs typeface="Amiri" pitchFamily="2" charset="-78"/>
               </a:rPr>
               <a:t>ARABIC DEPARTMENT · MIFTAH ARABIC · IGCSE 0544</a:t>
             </a:r>
@@ -16374,8 +16097,7 @@
                   <a:srgbClr val="FFFFFF"/>
                 </a:solidFill>
                 <a:latin typeface="Calibri" pitchFamily="34" charset="0"/>
-                <a:ea typeface="Calibri" pitchFamily="34" charset="-122"/>
-                <a:cs typeface="Calibri" pitchFamily="34" charset="-120"/>
+                <a:cs typeface="Amiri" pitchFamily="2" charset="-78"/>
               </a:rPr>
               <a:t>F4-L12 · F4 Assessment</a:t>
             </a:r>
@@ -16440,8 +16162,7 @@
                   <a:srgbClr val="FFFFFF"/>
                 </a:solidFill>
                 <a:latin typeface="Calibri" pitchFamily="34" charset="0"/>
-                <a:ea typeface="Calibri" pitchFamily="34" charset="-122"/>
-                <a:cs typeface="Calibri" pitchFamily="34" charset="-120"/>
+                <a:cs typeface="Amiri" pitchFamily="2" charset="-78"/>
               </a:rPr>
               <a:t>YOU DO · 12 MIN</a:t>
             </a:r>
@@ -16479,8 +16200,7 @@
                   <a:srgbClr val="1E6B52"/>
                 </a:solidFill>
                 <a:latin typeface="Calibri" pitchFamily="34" charset="0"/>
-                <a:ea typeface="Calibri" pitchFamily="34" charset="-122"/>
-                <a:cs typeface="Calibri" pitchFamily="34" charset="-120"/>
+                <a:cs typeface="Amiri" pitchFamily="2" charset="-78"/>
               </a:rPr>
               <a:t>WRITING · QUESTION 2 · 15 MARKS (WEBSITE)</a:t>
             </a:r>
@@ -16518,8 +16238,7 @@
                   <a:srgbClr val="1B3B6F"/>
                 </a:solidFill>
                 <a:latin typeface="Cambria" pitchFamily="34" charset="0"/>
-                <a:ea typeface="Cambria" pitchFamily="34" charset="-122"/>
-                <a:cs typeface="Cambria" pitchFamily="34" charset="-120"/>
+                <a:cs typeface="Amiri" pitchFamily="2" charset="-78"/>
               </a:rPr>
               <a:t>Email a new student (70–90 words)</a:t>
             </a:r>
@@ -16556,9 +16275,8 @@
                 <a:solidFill>
                   <a:srgbClr val="8A6D1E"/>
                 </a:solidFill>
-                <a:latin typeface="Amiri" pitchFamily="34" charset="0"/>
-                <a:ea typeface="Amiri" pitchFamily="34" charset="-122"/>
-                <a:cs typeface="Amiri" pitchFamily="34" charset="-120"/>
+                <a:latin typeface="Amiri" pitchFamily="2" charset="-78"/>
+                <a:cs typeface="Amiri" pitchFamily="2" charset="-78"/>
               </a:rPr>
               <a:t>رِسَالَةٌ إِلَى طَالِبٍ جَدِيدٍ</a:t>
             </a:r>
@@ -16596,8 +16314,7 @@
                   <a:srgbClr val="8A93A0"/>
                 </a:solidFill>
                 <a:latin typeface="Calibri" pitchFamily="34" charset="0"/>
-                <a:ea typeface="Calibri" pitchFamily="34" charset="-122"/>
-                <a:cs typeface="Calibri" pitchFamily="34" charset="-120"/>
+                <a:cs typeface="Amiri" pitchFamily="2" charset="-78"/>
               </a:rPr>
               <a:t>Miftah Arabic · Foundation F4 · My School · F4-L12</a:t>
             </a:r>
@@ -16660,8 +16377,7 @@
                   <a:srgbClr val="FFFFFF"/>
                 </a:solidFill>
                 <a:latin typeface="Calibri" pitchFamily="34" charset="0"/>
-                <a:ea typeface="Calibri" pitchFamily="34" charset="-122"/>
-                <a:cs typeface="Calibri" pitchFamily="34" charset="-120"/>
+                <a:cs typeface="Amiri" pitchFamily="2" charset="-78"/>
               </a:rPr>
               <a:t>Mark scheme (15)</a:t>
             </a:r>
@@ -16699,8 +16415,7 @@
                   <a:srgbClr val="FFFFFF"/>
                 </a:solidFill>
                 <a:latin typeface="Calibri" pitchFamily="34" charset="0"/>
-                <a:ea typeface="Calibri" pitchFamily="34" charset="-122"/>
-                <a:cs typeface="Calibri" pitchFamily="34" charset="-120"/>
+                <a:cs typeface="Amiri" pitchFamily="2" charset="-78"/>
               </a:rPr>
               <a:t>Include all five points</a:t>
             </a:r>
@@ -16765,8 +16480,7 @@
                   <a:srgbClr val="5A6472"/>
                 </a:solidFill>
                 <a:latin typeface="Calibri" pitchFamily="34" charset="0"/>
-                <a:ea typeface="Calibri" pitchFamily="34" charset="-122"/>
-                <a:cs typeface="Calibri" pitchFamily="34" charset="-120"/>
+                <a:cs typeface="Amiri" pitchFamily="2" charset="-78"/>
               </a:rPr>
               <a:t>Task completion /5</a:t>
             </a:r>
@@ -16804,8 +16518,7 @@
                   <a:srgbClr val="5A6472"/>
                 </a:solidFill>
                 <a:latin typeface="Calibri" pitchFamily="34" charset="0"/>
-                <a:ea typeface="Calibri" pitchFamily="34" charset="-122"/>
-                <a:cs typeface="Calibri" pitchFamily="34" charset="-120"/>
+                <a:cs typeface="Amiri" pitchFamily="2" charset="-78"/>
               </a:rPr>
               <a:t>1 · A greeting and a short description of the school.</a:t>
             </a:r>
@@ -16870,8 +16583,7 @@
                   <a:srgbClr val="FFFFFF"/>
                 </a:solidFill>
                 <a:latin typeface="Calibri" pitchFamily="34" charset="0"/>
-                <a:ea typeface="Calibri" pitchFamily="34" charset="-122"/>
-                <a:cs typeface="Calibri" pitchFamily="34" charset="-120"/>
+                <a:cs typeface="Amiri" pitchFamily="2" charset="-78"/>
               </a:rPr>
               <a:t>CORE</a:t>
             </a:r>
@@ -16936,8 +16648,7 @@
                   <a:srgbClr val="5A6472"/>
                 </a:solidFill>
                 <a:latin typeface="Calibri" pitchFamily="34" charset="0"/>
-                <a:ea typeface="Calibri" pitchFamily="34" charset="-122"/>
-                <a:cs typeface="Calibri" pitchFamily="34" charset="-120"/>
+                <a:cs typeface="Amiri" pitchFamily="2" charset="-78"/>
               </a:rPr>
               <a:t>all points, 70–90 words</a:t>
             </a:r>
@@ -16975,8 +16686,7 @@
                   <a:srgbClr val="5A6472"/>
                 </a:solidFill>
                 <a:latin typeface="Calibri" pitchFamily="34" charset="0"/>
-                <a:ea typeface="Calibri" pitchFamily="34" charset="-122"/>
-                <a:cs typeface="Calibri" pitchFamily="34" charset="-120"/>
+                <a:cs typeface="Amiri" pitchFamily="2" charset="-78"/>
               </a:rPr>
               <a:t>2 · Subjects and at least one timetable detail.</a:t>
             </a:r>
@@ -17041,8 +16751,7 @@
                   <a:srgbClr val="FFFFFF"/>
                 </a:solidFill>
                 <a:latin typeface="Calibri" pitchFamily="34" charset="0"/>
-                <a:ea typeface="Calibri" pitchFamily="34" charset="-122"/>
-                <a:cs typeface="Calibri" pitchFamily="34" charset="-120"/>
+                <a:cs typeface="Amiri" pitchFamily="2" charset="-78"/>
               </a:rPr>
               <a:t>CORE</a:t>
             </a:r>
@@ -17107,8 +16816,7 @@
                   <a:srgbClr val="5A6472"/>
                 </a:solidFill>
                 <a:latin typeface="Calibri" pitchFamily="34" charset="0"/>
-                <a:ea typeface="Calibri" pitchFamily="34" charset="-122"/>
-                <a:cs typeface="Calibri" pitchFamily="34" charset="-120"/>
+                <a:cs typeface="Amiri" pitchFamily="2" charset="-78"/>
               </a:rPr>
               <a:t>Range /5 — connectives, reasons,</a:t>
             </a:r>
@@ -17146,8 +16854,7 @@
                   <a:srgbClr val="5A6472"/>
                 </a:solidFill>
                 <a:latin typeface="Calibri" pitchFamily="34" charset="0"/>
-                <a:ea typeface="Calibri" pitchFamily="34" charset="-122"/>
-                <a:cs typeface="Calibri" pitchFamily="34" charset="-120"/>
+                <a:cs typeface="Amiri" pitchFamily="2" charset="-78"/>
               </a:rPr>
               <a:t>3 · One rule with yajibu an or lā yajūzu an.</a:t>
             </a:r>
@@ -17212,8 +16919,7 @@
                   <a:srgbClr val="FFFFFF"/>
                 </a:solidFill>
                 <a:latin typeface="Calibri" pitchFamily="34" charset="0"/>
-                <a:ea typeface="Calibri" pitchFamily="34" charset="-122"/>
-                <a:cs typeface="Calibri" pitchFamily="34" charset="-120"/>
+                <a:cs typeface="Amiri" pitchFamily="2" charset="-78"/>
               </a:rPr>
               <a:t>CORE</a:t>
             </a:r>
@@ -17278,8 +16984,7 @@
                   <a:srgbClr val="5A6472"/>
                 </a:solidFill>
                 <a:latin typeface="Calibri" pitchFamily="34" charset="0"/>
-                <a:ea typeface="Calibri" pitchFamily="34" charset="-122"/>
-                <a:cs typeface="Calibri" pitchFamily="34" charset="-120"/>
+                <a:cs typeface="Amiri" pitchFamily="2" charset="-78"/>
               </a:rPr>
               <a:t>times, rules, varied openings</a:t>
             </a:r>
@@ -17317,8 +17022,7 @@
                   <a:srgbClr val="5A6472"/>
                 </a:solidFill>
                 <a:latin typeface="Calibri" pitchFamily="34" charset="0"/>
-                <a:ea typeface="Calibri" pitchFamily="34" charset="-122"/>
-                <a:cs typeface="Calibri" pitchFamily="34" charset="-120"/>
+                <a:cs typeface="Amiri" pitchFamily="2" charset="-78"/>
               </a:rPr>
               <a:t>4 · Your opinion with a reason.</a:t>
             </a:r>
@@ -17383,8 +17087,7 @@
                   <a:srgbClr val="FFFFFF"/>
                 </a:solidFill>
                 <a:latin typeface="Calibri" pitchFamily="34" charset="0"/>
-                <a:ea typeface="Calibri" pitchFamily="34" charset="-122"/>
-                <a:cs typeface="Calibri" pitchFamily="34" charset="-120"/>
+                <a:cs typeface="Amiri" pitchFamily="2" charset="-78"/>
               </a:rPr>
               <a:t>CORE</a:t>
             </a:r>
@@ -17449,8 +17152,7 @@
                   <a:srgbClr val="5A6472"/>
                 </a:solidFill>
                 <a:latin typeface="Calibri" pitchFamily="34" charset="0"/>
-                <a:ea typeface="Calibri" pitchFamily="34" charset="-122"/>
-                <a:cs typeface="Calibri" pitchFamily="34" charset="-120"/>
+                <a:cs typeface="Amiri" pitchFamily="2" charset="-78"/>
               </a:rPr>
               <a:t>Accuracy /5 — verbs, agreement, li-annahu / li-annahā</a:t>
             </a:r>
@@ -17488,8 +17190,7 @@
                   <a:srgbClr val="5A6472"/>
                 </a:solidFill>
                 <a:latin typeface="Calibri" pitchFamily="34" charset="0"/>
-                <a:ea typeface="Calibri" pitchFamily="34" charset="-122"/>
-                <a:cs typeface="Calibri" pitchFamily="34" charset="-120"/>
+                <a:cs typeface="Amiri" pitchFamily="2" charset="-78"/>
               </a:rPr>
               <a:t>5 · A suitable closing.</a:t>
             </a:r>
@@ -17554,8 +17255,7 @@
                   <a:srgbClr val="FFFFFF"/>
                 </a:solidFill>
                 <a:latin typeface="Calibri" pitchFamily="34" charset="0"/>
-                <a:ea typeface="Calibri" pitchFamily="34" charset="-122"/>
-                <a:cs typeface="Calibri" pitchFamily="34" charset="-120"/>
+                <a:cs typeface="Amiri" pitchFamily="2" charset="-78"/>
               </a:rPr>
               <a:t>CORE</a:t>
             </a:r>
@@ -17593,8 +17293,7 @@
                   <a:srgbClr val="1B3B6F"/>
                 </a:solidFill>
                 <a:latin typeface="Calibri" pitchFamily="34" charset="0"/>
-                <a:ea typeface="Calibri" pitchFamily="34" charset="-122"/>
-                <a:cs typeface="Calibri" pitchFamily="34" charset="-120"/>
+                <a:cs typeface="Amiri" pitchFamily="2" charset="-78"/>
               </a:rPr>
               <a:t>Website self-check: all content points · three connectives · verbs and agreement checked · a correct reason · 70–90 words.</a:t>
             </a:r>
@@ -17632,8 +17331,7 @@
                   <a:srgbClr val="8A93A0"/>
                 </a:solidFill>
                 <a:latin typeface="Calibri" pitchFamily="34" charset="0"/>
-                <a:ea typeface="Calibri" pitchFamily="34" charset="-122"/>
-                <a:cs typeface="Calibri" pitchFamily="34" charset="-120"/>
+                <a:cs typeface="Amiri" pitchFamily="2" charset="-78"/>
               </a:rPr>
               <a:t>16 / 23</a:t>
             </a:r>
@@ -17727,9 +17425,8 @@
                 <a:solidFill>
                   <a:srgbClr val="D4AF37"/>
                 </a:solidFill>
-                <a:latin typeface="Amiri" pitchFamily="34" charset="0"/>
-                <a:ea typeface="Amiri" pitchFamily="34" charset="-122"/>
-                <a:cs typeface="Amiri" pitchFamily="34" charset="-120"/>
+                <a:latin typeface="Amiri" pitchFamily="2" charset="-78"/>
+                <a:cs typeface="Amiri" pitchFamily="2" charset="-78"/>
               </a:rPr>
               <a:t>م</a:t>
             </a:r>
@@ -17767,8 +17464,7 @@
                   <a:srgbClr val="1B3B6F"/>
                 </a:solidFill>
                 <a:latin typeface="Cambria" pitchFamily="34" charset="0"/>
-                <a:ea typeface="Cambria" pitchFamily="34" charset="-122"/>
-                <a:cs typeface="Cambria" pitchFamily="34" charset="-120"/>
+                <a:cs typeface="Amiri" pitchFamily="2" charset="-78"/>
               </a:rPr>
               <a:t>Al Madina Online School</a:t>
             </a:r>
@@ -17806,8 +17502,7 @@
                   <a:srgbClr val="8A6D1E"/>
                 </a:solidFill>
                 <a:latin typeface="Calibri" pitchFamily="34" charset="0"/>
-                <a:ea typeface="Calibri" pitchFamily="34" charset="-122"/>
-                <a:cs typeface="Calibri" pitchFamily="34" charset="-120"/>
+                <a:cs typeface="Amiri" pitchFamily="2" charset="-78"/>
               </a:rPr>
               <a:t>ARABIC DEPARTMENT · MIFTAH ARABIC · IGCSE 0544</a:t>
             </a:r>
@@ -17872,8 +17567,7 @@
                   <a:srgbClr val="FFFFFF"/>
                 </a:solidFill>
                 <a:latin typeface="Calibri" pitchFamily="34" charset="0"/>
-                <a:ea typeface="Calibri" pitchFamily="34" charset="-122"/>
-                <a:cs typeface="Calibri" pitchFamily="34" charset="-120"/>
+                <a:cs typeface="Amiri" pitchFamily="2" charset="-78"/>
               </a:rPr>
               <a:t>F4-L12 · F4 Assessment</a:t>
             </a:r>
@@ -17938,8 +17632,7 @@
                   <a:srgbClr val="FFFFFF"/>
                 </a:solidFill>
                 <a:latin typeface="Calibri" pitchFamily="34" charset="0"/>
-                <a:ea typeface="Calibri" pitchFamily="34" charset="-122"/>
-                <a:cs typeface="Calibri" pitchFamily="34" charset="-120"/>
+                <a:cs typeface="Amiri" pitchFamily="2" charset="-78"/>
               </a:rPr>
               <a:t>FEEDBACK · 1 MIN</a:t>
             </a:r>
@@ -17977,8 +17670,7 @@
                   <a:srgbClr val="8A6D1E"/>
                 </a:solidFill>
                 <a:latin typeface="Calibri" pitchFamily="34" charset="0"/>
-                <a:ea typeface="Calibri" pitchFamily="34" charset="-122"/>
-                <a:cs typeface="Calibri" pitchFamily="34" charset="-120"/>
+                <a:cs typeface="Amiri" pitchFamily="2" charset="-78"/>
               </a:rPr>
               <a:t>WRITING · A FULL-MARK MODEL (TEACHER-WRITTEN) · SHOW AFTER WRITING</a:t>
             </a:r>
@@ -18016,8 +17708,7 @@
                   <a:srgbClr val="1B3B6F"/>
                 </a:solidFill>
                 <a:latin typeface="Cambria" pitchFamily="34" charset="0"/>
-                <a:ea typeface="Cambria" pitchFamily="34" charset="-122"/>
-                <a:cs typeface="Cambria" pitchFamily="34" charset="-120"/>
+                <a:cs typeface="Amiri" pitchFamily="2" charset="-78"/>
               </a:rPr>
               <a:t>A full-mark email</a:t>
             </a:r>
@@ -18054,9 +17745,8 @@
                 <a:solidFill>
                   <a:srgbClr val="8A6D1E"/>
                 </a:solidFill>
-                <a:latin typeface="Amiri" pitchFamily="34" charset="0"/>
-                <a:ea typeface="Amiri" pitchFamily="34" charset="-122"/>
-                <a:cs typeface="Amiri" pitchFamily="34" charset="-120"/>
+                <a:latin typeface="Amiri" pitchFamily="2" charset="-78"/>
+                <a:cs typeface="Amiri" pitchFamily="2" charset="-78"/>
               </a:rPr>
               <a:t>نَمُوذَجُ الدَّرَجَةِ الكَامِلَةِ</a:t>
             </a:r>
@@ -18094,8 +17784,7 @@
                   <a:srgbClr val="8A93A0"/>
                 </a:solidFill>
                 <a:latin typeface="Calibri" pitchFamily="34" charset="0"/>
-                <a:ea typeface="Calibri" pitchFamily="34" charset="-122"/>
-                <a:cs typeface="Calibri" pitchFamily="34" charset="-120"/>
+                <a:cs typeface="Amiri" pitchFamily="2" charset="-78"/>
               </a:rPr>
               <a:t>Miftah Arabic · Foundation F4 · My School · F4-L12</a:t>
             </a:r>
@@ -18159,9 +17848,8 @@
                 <a:solidFill>
                   <a:srgbClr val="1B3B6F"/>
                 </a:solidFill>
-                <a:latin typeface="Amiri" pitchFamily="34" charset="0"/>
-                <a:ea typeface="Amiri" pitchFamily="34" charset="-122"/>
-                <a:cs typeface="Amiri" pitchFamily="34" charset="-120"/>
+                <a:latin typeface="Amiri" pitchFamily="2" charset="-78"/>
+                <a:cs typeface="Amiri" pitchFamily="2" charset="-78"/>
               </a:rPr>
               <a:t>عَزِيزِي آدَمُ، أَهْلًا وَسَهْلًا فِي مَدْرَسَتِنَا! مَدْرَسَتُنَا كَبِيرَةٌ، وَفِيهَا مَكْتَبَةٌ وَمُخْتَبَرٌ.</a:t>
             </a:r>
@@ -18199,8 +17887,7 @@
                   <a:srgbClr val="1F2A37"/>
                 </a:solidFill>
                 <a:latin typeface="Calibri" pitchFamily="34" charset="0"/>
-                <a:ea typeface="Calibri" pitchFamily="34" charset="-122"/>
-                <a:cs typeface="Calibri" pitchFamily="34" charset="-120"/>
+                <a:cs typeface="Amiri" pitchFamily="2" charset="-78"/>
               </a:rPr>
               <a:t>greeting + school</a:t>
             </a:r>
@@ -18267,9 +17954,8 @@
                 <a:solidFill>
                   <a:srgbClr val="1B3B6F"/>
                 </a:solidFill>
-                <a:latin typeface="Amiri" pitchFamily="34" charset="0"/>
-                <a:ea typeface="Amiri" pitchFamily="34" charset="-122"/>
-                <a:cs typeface="Amiri" pitchFamily="34" charset="-120"/>
+                <a:latin typeface="Amiri" pitchFamily="2" charset="-78"/>
+                <a:cs typeface="Amiri" pitchFamily="2" charset="-78"/>
               </a:rPr>
               <a:t>نَدْرُسُ ثَمَانِيَ مَوَادَّ. فِي يَوْمِ الاِثْنَيْنِ عِنْدَنَا العَرَبِيَّةُ عِنْدَ السَّاعَةِ التَّاسِعَةِ، ثُمَّ العُلُومُ.</a:t>
             </a:r>
@@ -18307,8 +17993,7 @@
                   <a:srgbClr val="1F2A37"/>
                 </a:solidFill>
                 <a:latin typeface="Calibri" pitchFamily="34" charset="0"/>
-                <a:ea typeface="Calibri" pitchFamily="34" charset="-122"/>
-                <a:cs typeface="Calibri" pitchFamily="34" charset="-120"/>
+                <a:cs typeface="Amiri" pitchFamily="2" charset="-78"/>
               </a:rPr>
               <a:t>subjects + timetable</a:t>
             </a:r>
@@ -18372,9 +18057,8 @@
                 <a:solidFill>
                   <a:srgbClr val="1B3B6F"/>
                 </a:solidFill>
-                <a:latin typeface="Amiri" pitchFamily="34" charset="0"/>
-                <a:ea typeface="Amiri" pitchFamily="34" charset="-122"/>
-                <a:cs typeface="Amiri" pitchFamily="34" charset="-120"/>
+                <a:latin typeface="Amiri" pitchFamily="2" charset="-78"/>
+                <a:cs typeface="Amiri" pitchFamily="2" charset="-78"/>
               </a:rPr>
               <a:t>يَجِبُ أَنْ نَصِلَ فِي الوَقْتِ، وَلَا يَجُوزُ أَنْ نَسْتَعْمِلَ الهَاتِفَ فِي الدَّرْسِ.</a:t>
             </a:r>
@@ -18412,8 +18096,7 @@
                   <a:srgbClr val="1F2A37"/>
                 </a:solidFill>
                 <a:latin typeface="Calibri" pitchFamily="34" charset="0"/>
-                <a:ea typeface="Calibri" pitchFamily="34" charset="-122"/>
-                <a:cs typeface="Calibri" pitchFamily="34" charset="-120"/>
+                <a:cs typeface="Amiri" pitchFamily="2" charset="-78"/>
               </a:rPr>
               <a:t>two rules</a:t>
             </a:r>
@@ -18477,9 +18160,8 @@
                 <a:solidFill>
                   <a:srgbClr val="1B3B6F"/>
                 </a:solidFill>
-                <a:latin typeface="Amiri" pitchFamily="34" charset="0"/>
-                <a:ea typeface="Amiri" pitchFamily="34" charset="-122"/>
-                <a:cs typeface="Amiri" pitchFamily="34" charset="-120"/>
+                <a:latin typeface="Amiri" pitchFamily="2" charset="-78"/>
+                <a:cs typeface="Amiri" pitchFamily="2" charset="-78"/>
               </a:rPr>
               <a:t>أُفَضِّلُ التَّارِيخَ لِأَنَّهُ مُمْتِعٌ، وَلَكِنَّ الرِّيَاضِيَّاتِ صَعْبَةٌ قَلِيلًا. المُعَلِّمُونَ صَبُورُونَ.</a:t>
             </a:r>
@@ -18517,8 +18199,7 @@
                   <a:srgbClr val="1F2A37"/>
                 </a:solidFill>
                 <a:latin typeface="Calibri" pitchFamily="34" charset="0"/>
-                <a:ea typeface="Calibri" pitchFamily="34" charset="-122"/>
-                <a:cs typeface="Calibri" pitchFamily="34" charset="-120"/>
+                <a:cs typeface="Amiri" pitchFamily="2" charset="-78"/>
               </a:rPr>
               <a:t>opinion + reason + contrast</a:t>
             </a:r>
@@ -18582,9 +18263,8 @@
                 <a:solidFill>
                   <a:srgbClr val="1B3B6F"/>
                 </a:solidFill>
-                <a:latin typeface="Amiri" pitchFamily="34" charset="0"/>
-                <a:ea typeface="Amiri" pitchFamily="34" charset="-122"/>
-                <a:cs typeface="Amiri" pitchFamily="34" charset="-120"/>
+                <a:latin typeface="Amiri" pitchFamily="2" charset="-78"/>
+                <a:cs typeface="Amiri" pitchFamily="2" charset="-78"/>
               </a:rPr>
               <a:t>أَتَمَنَّى أَنْ تُحِبَّ المَدْرَسَةَ. إِلَى اللِّقَاءِ! صَدِيقُكَ، يُوسُفُ</a:t>
             </a:r>
@@ -18622,8 +18302,7 @@
                   <a:srgbClr val="1F2A37"/>
                 </a:solidFill>
                 <a:latin typeface="Calibri" pitchFamily="34" charset="0"/>
-                <a:ea typeface="Calibri" pitchFamily="34" charset="-122"/>
-                <a:cs typeface="Calibri" pitchFamily="34" charset="-120"/>
+                <a:cs typeface="Amiri" pitchFamily="2" charset="-78"/>
               </a:rPr>
               <a:t>closing</a:t>
             </a:r>
@@ -18661,8 +18340,7 @@
                   <a:srgbClr val="8A93A0"/>
                 </a:solidFill>
                 <a:latin typeface="Calibri" pitchFamily="34" charset="0"/>
-                <a:ea typeface="Calibri" pitchFamily="34" charset="-122"/>
-                <a:cs typeface="Calibri" pitchFamily="34" charset="-120"/>
+                <a:cs typeface="Amiri" pitchFamily="2" charset="-78"/>
               </a:rPr>
               <a:t>17 / 23</a:t>
             </a:r>
@@ -18756,9 +18434,8 @@
                 <a:solidFill>
                   <a:srgbClr val="D4AF37"/>
                 </a:solidFill>
-                <a:latin typeface="Amiri" pitchFamily="34" charset="0"/>
-                <a:ea typeface="Amiri" pitchFamily="34" charset="-122"/>
-                <a:cs typeface="Amiri" pitchFamily="34" charset="-120"/>
+                <a:latin typeface="Amiri" pitchFamily="2" charset="-78"/>
+                <a:cs typeface="Amiri" pitchFamily="2" charset="-78"/>
               </a:rPr>
               <a:t>م</a:t>
             </a:r>
@@ -18796,8 +18473,7 @@
                   <a:srgbClr val="1B3B6F"/>
                 </a:solidFill>
                 <a:latin typeface="Cambria" pitchFamily="34" charset="0"/>
-                <a:ea typeface="Cambria" pitchFamily="34" charset="-122"/>
-                <a:cs typeface="Cambria" pitchFamily="34" charset="-120"/>
+                <a:cs typeface="Amiri" pitchFamily="2" charset="-78"/>
               </a:rPr>
               <a:t>Al Madina Online School</a:t>
             </a:r>
@@ -18835,8 +18511,7 @@
                   <a:srgbClr val="8A6D1E"/>
                 </a:solidFill>
                 <a:latin typeface="Calibri" pitchFamily="34" charset="0"/>
-                <a:ea typeface="Calibri" pitchFamily="34" charset="-122"/>
-                <a:cs typeface="Calibri" pitchFamily="34" charset="-120"/>
+                <a:cs typeface="Amiri" pitchFamily="2" charset="-78"/>
               </a:rPr>
               <a:t>ARABIC DEPARTMENT · MIFTAH ARABIC · IGCSE 0544</a:t>
             </a:r>
@@ -18901,8 +18576,7 @@
                   <a:srgbClr val="FFFFFF"/>
                 </a:solidFill>
                 <a:latin typeface="Calibri" pitchFamily="34" charset="0"/>
-                <a:ea typeface="Calibri" pitchFamily="34" charset="-122"/>
-                <a:cs typeface="Calibri" pitchFamily="34" charset="-120"/>
+                <a:cs typeface="Amiri" pitchFamily="2" charset="-78"/>
               </a:rPr>
               <a:t>F4-L12 · F4 Assessment</a:t>
             </a:r>
@@ -18967,8 +18641,7 @@
                   <a:srgbClr val="FFFFFF"/>
                 </a:solidFill>
                 <a:latin typeface="Calibri" pitchFamily="34" charset="0"/>
-                <a:ea typeface="Calibri" pitchFamily="34" charset="-122"/>
-                <a:cs typeface="Calibri" pitchFamily="34" charset="-120"/>
+                <a:cs typeface="Amiri" pitchFamily="2" charset="-78"/>
               </a:rPr>
               <a:t>YOU DO · 5 MIN</a:t>
             </a:r>
@@ -19006,8 +18679,7 @@
                   <a:srgbClr val="1E6B52"/>
                 </a:solidFill>
                 <a:latin typeface="Calibri" pitchFamily="34" charset="0"/>
-                <a:ea typeface="Calibri" pitchFamily="34" charset="-122"/>
-                <a:cs typeface="Calibri" pitchFamily="34" charset="-120"/>
+                <a:cs typeface="Amiri" pitchFamily="2" charset="-78"/>
               </a:rPr>
               <a:t>SPEAKING · ROLE PLAY · 6 MARKS (WEBSITE)</a:t>
             </a:r>
@@ -19045,8 +18717,7 @@
                   <a:srgbClr val="1B3B6F"/>
                 </a:solidFill>
                 <a:latin typeface="Cambria" pitchFamily="34" charset="0"/>
-                <a:ea typeface="Cambria" pitchFamily="34" charset="-122"/>
-                <a:cs typeface="Cambria" pitchFamily="34" charset="-120"/>
+                <a:cs typeface="Amiri" pitchFamily="2" charset="-78"/>
               </a:rPr>
               <a:t>You are a new student</a:t>
             </a:r>
@@ -19083,9 +18754,8 @@
                 <a:solidFill>
                   <a:srgbClr val="8A6D1E"/>
                 </a:solidFill>
-                <a:latin typeface="Amiri" pitchFamily="34" charset="0"/>
-                <a:ea typeface="Amiri" pitchFamily="34" charset="-122"/>
-                <a:cs typeface="Amiri" pitchFamily="34" charset="-120"/>
+                <a:latin typeface="Amiri" pitchFamily="2" charset="-78"/>
+                <a:cs typeface="Amiri" pitchFamily="2" charset="-78"/>
               </a:rPr>
               <a:t>تَمْثِيلُ الدَّوْرِ</a:t>
             </a:r>
@@ -19123,8 +18793,7 @@
                   <a:srgbClr val="8A93A0"/>
                 </a:solidFill>
                 <a:latin typeface="Calibri" pitchFamily="34" charset="0"/>
-                <a:ea typeface="Calibri" pitchFamily="34" charset="-122"/>
-                <a:cs typeface="Calibri" pitchFamily="34" charset="-120"/>
+                <a:cs typeface="Amiri" pitchFamily="2" charset="-78"/>
               </a:rPr>
               <a:t>Miftah Arabic · Foundation F4 · My School · F4-L12</a:t>
             </a:r>
@@ -19187,8 +18856,7 @@
                   <a:srgbClr val="FFFFFF"/>
                 </a:solidFill>
                 <a:latin typeface="Calibri" pitchFamily="34" charset="0"/>
-                <a:ea typeface="Calibri" pitchFamily="34" charset="-122"/>
-                <a:cs typeface="Calibri" pitchFamily="34" charset="-120"/>
+                <a:cs typeface="Amiri" pitchFamily="2" charset="-78"/>
               </a:rPr>
               <a:t>Support</a:t>
             </a:r>
@@ -19226,8 +18894,7 @@
                   <a:srgbClr val="FFFFFF"/>
                 </a:solidFill>
                 <a:latin typeface="Calibri" pitchFamily="34" charset="0"/>
-                <a:ea typeface="Calibri" pitchFamily="34" charset="-122"/>
-                <a:cs typeface="Calibri" pitchFamily="34" charset="-120"/>
+                <a:cs typeface="Amiri" pitchFamily="2" charset="-78"/>
               </a:rPr>
               <a:t>Prompt</a:t>
             </a:r>
@@ -19291,9 +18958,8 @@
                 <a:solidFill>
                   <a:srgbClr val="1B3B6F"/>
                 </a:solidFill>
-                <a:latin typeface="Amiri" pitchFamily="34" charset="0"/>
-                <a:ea typeface="Amiri" pitchFamily="34" charset="-122"/>
-                <a:cs typeface="Amiri" pitchFamily="34" charset="-120"/>
+                <a:latin typeface="Amiri" pitchFamily="2" charset="-78"/>
+                <a:cs typeface="Amiri" pitchFamily="2" charset="-78"/>
               </a:rPr>
               <a:t>السَّلَامُ عَلَيْكُمْ. اِسْمِي …</a:t>
             </a:r>
@@ -19331,8 +18997,7 @@
                   <a:srgbClr val="5A6472"/>
                 </a:solidFill>
                 <a:latin typeface="Calibri" pitchFamily="34" charset="0"/>
-                <a:ea typeface="Calibri" pitchFamily="34" charset="-122"/>
-                <a:cs typeface="Calibri" pitchFamily="34" charset="-120"/>
+                <a:cs typeface="Amiri" pitchFamily="2" charset="-78"/>
               </a:rPr>
               <a:t>1 · Greet the teacher and say your name.</a:t>
             </a:r>
@@ -19397,8 +19062,7 @@
                   <a:srgbClr val="FFFFFF"/>
                 </a:solidFill>
                 <a:latin typeface="Calibri" pitchFamily="34" charset="0"/>
-                <a:ea typeface="Calibri" pitchFamily="34" charset="-122"/>
-                <a:cs typeface="Calibri" pitchFamily="34" charset="-120"/>
+                <a:cs typeface="Amiri" pitchFamily="2" charset="-78"/>
               </a:rPr>
               <a:t>CORE</a:t>
             </a:r>
@@ -19462,9 +19126,8 @@
                 <a:solidFill>
                   <a:srgbClr val="1B3B6F"/>
                 </a:solidFill>
-                <a:latin typeface="Amiri" pitchFamily="34" charset="0"/>
-                <a:ea typeface="Amiri" pitchFamily="34" charset="-122"/>
-                <a:cs typeface="Amiri" pitchFamily="34" charset="-120"/>
+                <a:latin typeface="Amiri" pitchFamily="2" charset="-78"/>
+                <a:cs typeface="Amiri" pitchFamily="2" charset="-78"/>
               </a:rPr>
               <a:t>أَدْرُسُ … وَ …</a:t>
             </a:r>
@@ -19502,8 +19165,7 @@
                   <a:srgbClr val="5A6472"/>
                 </a:solidFill>
                 <a:latin typeface="Calibri" pitchFamily="34" charset="0"/>
-                <a:ea typeface="Calibri" pitchFamily="34" charset="-122"/>
-                <a:cs typeface="Calibri" pitchFamily="34" charset="-120"/>
+                <a:cs typeface="Amiri" pitchFamily="2" charset="-78"/>
               </a:rPr>
               <a:t>2 · Say two subjects you study.</a:t>
             </a:r>
@@ -19568,8 +19230,7 @@
                   <a:srgbClr val="FFFFFF"/>
                 </a:solidFill>
                 <a:latin typeface="Calibri" pitchFamily="34" charset="0"/>
-                <a:ea typeface="Calibri" pitchFamily="34" charset="-122"/>
-                <a:cs typeface="Calibri" pitchFamily="34" charset="-120"/>
+                <a:cs typeface="Amiri" pitchFamily="2" charset="-78"/>
               </a:rPr>
               <a:t>CORE</a:t>
             </a:r>
@@ -19633,9 +19294,8 @@
                 <a:solidFill>
                   <a:srgbClr val="1B3B6F"/>
                 </a:solidFill>
-                <a:latin typeface="Amiri" pitchFamily="34" charset="0"/>
-                <a:ea typeface="Amiri" pitchFamily="34" charset="-122"/>
-                <a:cs typeface="Amiri" pitchFamily="34" charset="-120"/>
+                <a:latin typeface="Amiri" pitchFamily="2" charset="-78"/>
+                <a:cs typeface="Amiri" pitchFamily="2" charset="-78"/>
               </a:rPr>
               <a:t>عِنْدِي … يَوْمَ …</a:t>
             </a:r>
@@ -19673,8 +19333,7 @@
                   <a:srgbClr val="5A6472"/>
                 </a:solidFill>
                 <a:latin typeface="Calibri" pitchFamily="34" charset="0"/>
-                <a:ea typeface="Calibri" pitchFamily="34" charset="-122"/>
-                <a:cs typeface="Calibri" pitchFamily="34" charset="-120"/>
+                <a:cs typeface="Amiri" pitchFamily="2" charset="-78"/>
               </a:rPr>
               <a:t>3 · Say when you study one subject.</a:t>
             </a:r>
@@ -19739,8 +19398,7 @@
                   <a:srgbClr val="FFFFFF"/>
                 </a:solidFill>
                 <a:latin typeface="Calibri" pitchFamily="34" charset="0"/>
-                <a:ea typeface="Calibri" pitchFamily="34" charset="-122"/>
-                <a:cs typeface="Calibri" pitchFamily="34" charset="-120"/>
+                <a:cs typeface="Amiri" pitchFamily="2" charset="-78"/>
               </a:rPr>
               <a:t>CORE</a:t>
             </a:r>
@@ -19804,9 +19462,8 @@
                 <a:solidFill>
                   <a:srgbClr val="1B3B6F"/>
                 </a:solidFill>
-                <a:latin typeface="Amiri" pitchFamily="34" charset="0"/>
-                <a:ea typeface="Amiri" pitchFamily="34" charset="-122"/>
-                <a:cs typeface="Amiri" pitchFamily="34" charset="-120"/>
+                <a:latin typeface="Amiri" pitchFamily="2" charset="-78"/>
+                <a:cs typeface="Amiri" pitchFamily="2" charset="-78"/>
               </a:rPr>
               <a:t>مَادَّتِي المُفَضَّلَةُ … لِأَنَّهَا …</a:t>
             </a:r>
@@ -19844,8 +19501,7 @@
                   <a:srgbClr val="5A6472"/>
                 </a:solidFill>
                 <a:latin typeface="Calibri" pitchFamily="34" charset="0"/>
-                <a:ea typeface="Calibri" pitchFamily="34" charset="-122"/>
-                <a:cs typeface="Calibri" pitchFamily="34" charset="-120"/>
+                <a:cs typeface="Amiri" pitchFamily="2" charset="-78"/>
               </a:rPr>
               <a:t>4 · Your favourite subject and a reason.</a:t>
             </a:r>
@@ -19910,8 +19566,7 @@
                   <a:srgbClr val="FFFFFF"/>
                 </a:solidFill>
                 <a:latin typeface="Calibri" pitchFamily="34" charset="0"/>
-                <a:ea typeface="Calibri" pitchFamily="34" charset="-122"/>
-                <a:cs typeface="Calibri" pitchFamily="34" charset="-120"/>
+                <a:cs typeface="Amiri" pitchFamily="2" charset="-78"/>
               </a:rPr>
               <a:t>CORE</a:t>
             </a:r>
@@ -19975,9 +19630,8 @@
                 <a:solidFill>
                   <a:srgbClr val="1B3B6F"/>
                 </a:solidFill>
-                <a:latin typeface="Amiri" pitchFamily="34" charset="0"/>
-                <a:ea typeface="Amiri" pitchFamily="34" charset="-122"/>
-                <a:cs typeface="Amiri" pitchFamily="34" charset="-120"/>
+                <a:latin typeface="Amiri" pitchFamily="2" charset="-78"/>
+                <a:cs typeface="Amiri" pitchFamily="2" charset="-78"/>
               </a:rPr>
               <a:t>يَجِبُ أَنْ …</a:t>
             </a:r>
@@ -20015,8 +19669,7 @@
                   <a:srgbClr val="5A6472"/>
                 </a:solidFill>
                 <a:latin typeface="Calibri" pitchFamily="34" charset="0"/>
-                <a:ea typeface="Calibri" pitchFamily="34" charset="-122"/>
-                <a:cs typeface="Calibri" pitchFamily="34" charset="-120"/>
+                <a:cs typeface="Amiri" pitchFamily="2" charset="-78"/>
               </a:rPr>
               <a:t>5 · State one school rule.</a:t>
             </a:r>
@@ -20081,8 +19734,7 @@
                   <a:srgbClr val="FFFFFF"/>
                 </a:solidFill>
                 <a:latin typeface="Calibri" pitchFamily="34" charset="0"/>
-                <a:ea typeface="Calibri" pitchFamily="34" charset="-122"/>
-                <a:cs typeface="Calibri" pitchFamily="34" charset="-120"/>
+                <a:cs typeface="Amiri" pitchFamily="2" charset="-78"/>
               </a:rPr>
               <a:t>CORE</a:t>
             </a:r>
@@ -20120,8 +19772,7 @@
                   <a:srgbClr val="1B3B6F"/>
                 </a:solidFill>
                 <a:latin typeface="Calibri" pitchFamily="34" charset="0"/>
-                <a:ea typeface="Calibri" pitchFamily="34" charset="-122"/>
-                <a:cs typeface="Calibri" pitchFamily="34" charset="-120"/>
+                <a:cs typeface="Amiri" pitchFamily="2" charset="-78"/>
               </a:rPr>
               <a:t>The teacher asks about your timetable, favourite subjects and one rule. Short accurate answers earn credit.</a:t>
             </a:r>
@@ -20159,8 +19810,7 @@
                   <a:srgbClr val="8A93A0"/>
                 </a:solidFill>
                 <a:latin typeface="Calibri" pitchFamily="34" charset="0"/>
-                <a:ea typeface="Calibri" pitchFamily="34" charset="-122"/>
-                <a:cs typeface="Calibri" pitchFamily="34" charset="-120"/>
+                <a:cs typeface="Amiri" pitchFamily="2" charset="-78"/>
               </a:rPr>
               <a:t>18 / 23</a:t>
             </a:r>
@@ -20254,9 +19904,8 @@
                 <a:solidFill>
                   <a:srgbClr val="D4AF37"/>
                 </a:solidFill>
-                <a:latin typeface="Amiri" pitchFamily="34" charset="0"/>
-                <a:ea typeface="Amiri" pitchFamily="34" charset="-122"/>
-                <a:cs typeface="Amiri" pitchFamily="34" charset="-120"/>
+                <a:latin typeface="Amiri" pitchFamily="2" charset="-78"/>
+                <a:cs typeface="Amiri" pitchFamily="2" charset="-78"/>
               </a:rPr>
               <a:t>م</a:t>
             </a:r>
@@ -20294,8 +19943,7 @@
                   <a:srgbClr val="1B3B6F"/>
                 </a:solidFill>
                 <a:latin typeface="Cambria" pitchFamily="34" charset="0"/>
-                <a:ea typeface="Cambria" pitchFamily="34" charset="-122"/>
-                <a:cs typeface="Cambria" pitchFamily="34" charset="-120"/>
+                <a:cs typeface="Amiri" pitchFamily="2" charset="-78"/>
               </a:rPr>
               <a:t>Al Madina Online School</a:t>
             </a:r>
@@ -20333,8 +19981,7 @@
                   <a:srgbClr val="8A6D1E"/>
                 </a:solidFill>
                 <a:latin typeface="Calibri" pitchFamily="34" charset="0"/>
-                <a:ea typeface="Calibri" pitchFamily="34" charset="-122"/>
-                <a:cs typeface="Calibri" pitchFamily="34" charset="-120"/>
+                <a:cs typeface="Amiri" pitchFamily="2" charset="-78"/>
               </a:rPr>
               <a:t>ARABIC DEPARTMENT · MIFTAH ARABIC · IGCSE 0544</a:t>
             </a:r>
@@ -20399,8 +20046,7 @@
                   <a:srgbClr val="FFFFFF"/>
                 </a:solidFill>
                 <a:latin typeface="Calibri" pitchFamily="34" charset="0"/>
-                <a:ea typeface="Calibri" pitchFamily="34" charset="-122"/>
-                <a:cs typeface="Calibri" pitchFamily="34" charset="-120"/>
+                <a:cs typeface="Amiri" pitchFamily="2" charset="-78"/>
               </a:rPr>
               <a:t>F4-L12 · F4 Assessment</a:t>
             </a:r>
@@ -20465,8 +20111,7 @@
                   <a:srgbClr val="FFFFFF"/>
                 </a:solidFill>
                 <a:latin typeface="Calibri" pitchFamily="34" charset="0"/>
-                <a:ea typeface="Calibri" pitchFamily="34" charset="-122"/>
-                <a:cs typeface="Calibri" pitchFamily="34" charset="-120"/>
+                <a:cs typeface="Amiri" pitchFamily="2" charset="-78"/>
               </a:rPr>
               <a:t>YOU DO · 3 MIN</a:t>
             </a:r>
@@ -20504,8 +20149,7 @@
                   <a:srgbClr val="1E6B52"/>
                 </a:solidFill>
                 <a:latin typeface="Calibri" pitchFamily="34" charset="0"/>
-                <a:ea typeface="Calibri" pitchFamily="34" charset="-122"/>
-                <a:cs typeface="Calibri" pitchFamily="34" charset="-120"/>
+                <a:cs typeface="Amiri" pitchFamily="2" charset="-78"/>
               </a:rPr>
               <a:t>SPEAKING · TOPIC RESPONSE · 4 MARKS (WEBSITE)</a:t>
             </a:r>
@@ -20543,8 +20187,7 @@
                   <a:srgbClr val="1B3B6F"/>
                 </a:solidFill>
                 <a:latin typeface="Cambria" pitchFamily="34" charset="0"/>
-                <a:ea typeface="Cambria" pitchFamily="34" charset="-122"/>
-                <a:cs typeface="Cambria" pitchFamily="34" charset="-120"/>
+                <a:cs typeface="Amiri" pitchFamily="2" charset="-78"/>
               </a:rPr>
               <a:t>What do you think of your school?</a:t>
             </a:r>
@@ -20581,9 +20224,8 @@
                 <a:solidFill>
                   <a:srgbClr val="8A6D1E"/>
                 </a:solidFill>
-                <a:latin typeface="Amiri" pitchFamily="34" charset="0"/>
-                <a:ea typeface="Amiri" pitchFamily="34" charset="-122"/>
-                <a:cs typeface="Amiri" pitchFamily="34" charset="-120"/>
+                <a:latin typeface="Amiri" pitchFamily="2" charset="-78"/>
+                <a:cs typeface="Amiri" pitchFamily="2" charset="-78"/>
               </a:rPr>
               <a:t>مَا رَأْيُكَ فِي مَدْرَسَتِكَ؟</a:t>
             </a:r>
@@ -20621,8 +20263,7 @@
                   <a:srgbClr val="8A93A0"/>
                 </a:solidFill>
                 <a:latin typeface="Calibri" pitchFamily="34" charset="0"/>
-                <a:ea typeface="Calibri" pitchFamily="34" charset="-122"/>
-                <a:cs typeface="Calibri" pitchFamily="34" charset="-120"/>
+                <a:cs typeface="Amiri" pitchFamily="2" charset="-78"/>
               </a:rPr>
               <a:t>Miftah Arabic · Foundation F4 · My School · F4-L12</a:t>
             </a:r>
@@ -20686,9 +20327,8 @@
                 <a:solidFill>
                   <a:srgbClr val="1B3B6F"/>
                 </a:solidFill>
-                <a:latin typeface="Amiri" pitchFamily="34" charset="0"/>
-                <a:ea typeface="Amiri" pitchFamily="34" charset="-122"/>
-                <a:cs typeface="Amiri" pitchFamily="34" charset="-120"/>
+                <a:latin typeface="Amiri" pitchFamily="2" charset="-78"/>
+                <a:cs typeface="Amiri" pitchFamily="2" charset="-78"/>
               </a:rPr>
               <a:t>مَا رَأْيُكَ فِي مَدْرَسَتِكَ؟ هَلْ تُحِبُّ المَدْرَسَةَ؟ لِمَاذَا؟</a:t>
             </a:r>
@@ -20726,8 +20366,7 @@
                   <a:srgbClr val="1F2A37"/>
                 </a:solidFill>
                 <a:latin typeface="Calibri" pitchFamily="34" charset="0"/>
-                <a:ea typeface="Calibri" pitchFamily="34" charset="-122"/>
-                <a:cs typeface="Calibri" pitchFamily="34" charset="-120"/>
+                <a:cs typeface="Amiri" pitchFamily="2" charset="-78"/>
               </a:rPr>
               <a:t>The question (to a girl: raʼyuki, madrasatiki, tuḥibbīna)</a:t>
             </a:r>
@@ -20791,9 +20430,8 @@
                 <a:solidFill>
                   <a:srgbClr val="1B3B6F"/>
                 </a:solidFill>
-                <a:latin typeface="Amiri" pitchFamily="34" charset="0"/>
-                <a:ea typeface="Amiri" pitchFamily="34" charset="-122"/>
-                <a:cs typeface="Amiri" pitchFamily="34" charset="-120"/>
+                <a:latin typeface="Amiri" pitchFamily="2" charset="-78"/>
+                <a:cs typeface="Amiri" pitchFamily="2" charset="-78"/>
               </a:rPr>
               <a:t>أُحِبُّ مَدْرَسَتِي لِأَنَّ المُعَلِّمِينَ صَبُورُونَ.</a:t>
             </a:r>
@@ -20831,8 +20469,7 @@
                   <a:srgbClr val="1F2A37"/>
                 </a:solidFill>
                 <a:latin typeface="Calibri" pitchFamily="34" charset="0"/>
-                <a:ea typeface="Calibri" pitchFamily="34" charset="-122"/>
-                <a:cs typeface="Calibri" pitchFamily="34" charset="-120"/>
+                <a:cs typeface="Amiri" pitchFamily="2" charset="-78"/>
               </a:rPr>
               <a:t>CORE · two accurate sentences and one reason</a:t>
             </a:r>
@@ -20896,9 +20533,8 @@
                 <a:solidFill>
                   <a:srgbClr val="1B3B6F"/>
                 </a:solidFill>
-                <a:latin typeface="Amiri" pitchFamily="34" charset="0"/>
-                <a:ea typeface="Amiri" pitchFamily="34" charset="-122"/>
-                <a:cs typeface="Amiri" pitchFamily="34" charset="-120"/>
+                <a:latin typeface="Amiri" pitchFamily="2" charset="-78"/>
+                <a:cs typeface="Amiri" pitchFamily="2" charset="-78"/>
               </a:rPr>
               <a:t>مَدْرَسَتِي كَبِيرَةٌ، وَفِيهَا مَلْعَبٌ. أُحِبُّ العُلُومَ، وَلَكِنَّ اليَوْمَ طَوِيلٌ.</a:t>
             </a:r>
@@ -20936,8 +20572,7 @@
                   <a:srgbClr val="1F2A37"/>
                 </a:solidFill>
                 <a:latin typeface="Calibri" pitchFamily="34" charset="0"/>
-                <a:ea typeface="Calibri" pitchFamily="34" charset="-122"/>
-                <a:cs typeface="Calibri" pitchFamily="34" charset="-120"/>
+                <a:cs typeface="Amiri" pitchFamily="2" charset="-78"/>
               </a:rPr>
               <a:t>DEVELOP · four connected sentences with a contrast</a:t>
             </a:r>
@@ -21004,9 +20639,8 @@
                 <a:solidFill>
                   <a:srgbClr val="1B3B6F"/>
                 </a:solidFill>
-                <a:latin typeface="Amiri" pitchFamily="34" charset="0"/>
-                <a:ea typeface="Amiri" pitchFamily="34" charset="-122"/>
-                <a:cs typeface="Amiri" pitchFamily="34" charset="-120"/>
+                <a:latin typeface="Amiri" pitchFamily="2" charset="-78"/>
+                <a:cs typeface="Amiri" pitchFamily="2" charset="-78"/>
               </a:rPr>
               <a:t>فِي رَأْيِي، مَدْرَسَتِي جَيِّدَةٌ لِأَنَّنِي أَتَعَلَّمُ كَثِيرًا، وَلَكِنَّ الوَاجِبَاتِ كَثِيرَةٌ أَحْيَانًا.</a:t>
             </a:r>
@@ -21044,8 +20678,7 @@
                   <a:srgbClr val="1F2A37"/>
                 </a:solidFill>
                 <a:latin typeface="Calibri" pitchFamily="34" charset="0"/>
-                <a:ea typeface="Calibri" pitchFamily="34" charset="-122"/>
-                <a:cs typeface="Calibri" pitchFamily="34" charset="-120"/>
+                <a:cs typeface="Amiri" pitchFamily="2" charset="-78"/>
               </a:rPr>
               <a:t>STRETCH · a balanced opinion with evidence</a:t>
             </a:r>
@@ -21083,8 +20716,7 @@
                   <a:srgbClr val="8A93A0"/>
                 </a:solidFill>
                 <a:latin typeface="Calibri" pitchFamily="34" charset="0"/>
-                <a:ea typeface="Calibri" pitchFamily="34" charset="-122"/>
-                <a:cs typeface="Calibri" pitchFamily="34" charset="-120"/>
+                <a:cs typeface="Amiri" pitchFamily="2" charset="-78"/>
               </a:rPr>
               <a:t>19 / 23</a:t>
             </a:r>
@@ -21178,9 +20810,8 @@
                 <a:solidFill>
                   <a:srgbClr val="D4AF37"/>
                 </a:solidFill>
-                <a:latin typeface="Amiri" pitchFamily="34" charset="0"/>
-                <a:ea typeface="Amiri" pitchFamily="34" charset="-122"/>
-                <a:cs typeface="Amiri" pitchFamily="34" charset="-120"/>
+                <a:latin typeface="Amiri" pitchFamily="2" charset="-78"/>
+                <a:cs typeface="Amiri" pitchFamily="2" charset="-78"/>
               </a:rPr>
               <a:t>م</a:t>
             </a:r>
@@ -21218,8 +20849,7 @@
                   <a:srgbClr val="1B3B6F"/>
                 </a:solidFill>
                 <a:latin typeface="Cambria" pitchFamily="34" charset="0"/>
-                <a:ea typeface="Cambria" pitchFamily="34" charset="-122"/>
-                <a:cs typeface="Cambria" pitchFamily="34" charset="-120"/>
+                <a:cs typeface="Amiri" pitchFamily="2" charset="-78"/>
               </a:rPr>
               <a:t>Al Madina Online School</a:t>
             </a:r>
@@ -21257,8 +20887,7 @@
                   <a:srgbClr val="8A6D1E"/>
                 </a:solidFill>
                 <a:latin typeface="Calibri" pitchFamily="34" charset="0"/>
-                <a:ea typeface="Calibri" pitchFamily="34" charset="-122"/>
-                <a:cs typeface="Calibri" pitchFamily="34" charset="-120"/>
+                <a:cs typeface="Amiri" pitchFamily="2" charset="-78"/>
               </a:rPr>
               <a:t>ARABIC DEPARTMENT · MIFTAH ARABIC · IGCSE 0544</a:t>
             </a:r>
@@ -21323,8 +20952,7 @@
                   <a:srgbClr val="FFFFFF"/>
                 </a:solidFill>
                 <a:latin typeface="Calibri" pitchFamily="34" charset="0"/>
-                <a:ea typeface="Calibri" pitchFamily="34" charset="-122"/>
-                <a:cs typeface="Calibri" pitchFamily="34" charset="-120"/>
+                <a:cs typeface="Amiri" pitchFamily="2" charset="-78"/>
               </a:rPr>
               <a:t>F4-L12 · F4 Assessment</a:t>
             </a:r>
@@ -21389,8 +21017,7 @@
                   <a:srgbClr val="FFFFFF"/>
                 </a:solidFill>
                 <a:latin typeface="Calibri" pitchFamily="34" charset="0"/>
-                <a:ea typeface="Calibri" pitchFamily="34" charset="-122"/>
-                <a:cs typeface="Calibri" pitchFamily="34" charset="-120"/>
+                <a:cs typeface="Amiri" pitchFamily="2" charset="-78"/>
               </a:rPr>
               <a:t>WELCOME · 1 MIN</a:t>
             </a:r>
@@ -21428,8 +21055,7 @@
                   <a:srgbClr val="5A6472"/>
                 </a:solidFill>
                 <a:latin typeface="Calibri" pitchFamily="34" charset="0"/>
-                <a:ea typeface="Calibri" pitchFamily="34" charset="-122"/>
-                <a:cs typeface="Calibri" pitchFamily="34" charset="-120"/>
+                <a:cs typeface="Amiri" pitchFamily="2" charset="-78"/>
               </a:rPr>
               <a:t>BEFORE WE BEGIN</a:t>
             </a:r>
@@ -21467,8 +21093,7 @@
                   <a:srgbClr val="1B3B6F"/>
                 </a:solidFill>
                 <a:latin typeface="Cambria" pitchFamily="34" charset="0"/>
-                <a:ea typeface="Cambria" pitchFamily="34" charset="-122"/>
-                <a:cs typeface="Cambria" pitchFamily="34" charset="-120"/>
+                <a:cs typeface="Amiri" pitchFamily="2" charset="-78"/>
               </a:rPr>
               <a:t>Our online classroom</a:t>
             </a:r>
@@ -21505,9 +21130,8 @@
                 <a:solidFill>
                   <a:srgbClr val="8A6D1E"/>
                 </a:solidFill>
-                <a:latin typeface="Amiri" pitchFamily="34" charset="0"/>
-                <a:ea typeface="Amiri" pitchFamily="34" charset="-122"/>
-                <a:cs typeface="Amiri" pitchFamily="34" charset="-120"/>
+                <a:latin typeface="Amiri" pitchFamily="2" charset="-78"/>
+                <a:cs typeface="Amiri" pitchFamily="2" charset="-78"/>
               </a:rPr>
               <a:t>آدَابُ الصَّفِّ</a:t>
             </a:r>
@@ -21545,8 +21169,7 @@
                   <a:srgbClr val="8A93A0"/>
                 </a:solidFill>
                 <a:latin typeface="Calibri" pitchFamily="34" charset="0"/>
-                <a:ea typeface="Calibri" pitchFamily="34" charset="-122"/>
-                <a:cs typeface="Calibri" pitchFamily="34" charset="-120"/>
+                <a:cs typeface="Amiri" pitchFamily="2" charset="-78"/>
               </a:rPr>
               <a:t>Miftah Arabic · Foundation F4 · My School · F4-L12</a:t>
             </a:r>
@@ -21667,8 +21290,7 @@
                   <a:srgbClr val="1B3B6F"/>
                 </a:solidFill>
                 <a:latin typeface="Calibri" pitchFamily="34" charset="0"/>
-                <a:ea typeface="Calibri" pitchFamily="34" charset="-122"/>
-                <a:cs typeface="Calibri" pitchFamily="34" charset="-120"/>
+                <a:cs typeface="Amiri" pitchFamily="2" charset="-78"/>
               </a:rPr>
               <a:t>Camera on</a:t>
             </a:r>
@@ -21684,8 +21306,7 @@
                   <a:srgbClr val="5A6472"/>
                 </a:solidFill>
                 <a:latin typeface="Calibri" pitchFamily="34" charset="0"/>
-                <a:ea typeface="Calibri" pitchFamily="34" charset="-122"/>
-                <a:cs typeface="Calibri" pitchFamily="34" charset="-120"/>
+                <a:cs typeface="Amiri" pitchFamily="2" charset="-78"/>
               </a:rPr>
               <a:t>So I can see you learning and help you quickly.</a:t>
             </a:r>
@@ -21806,8 +21427,7 @@
                   <a:srgbClr val="1B3B6F"/>
                 </a:solidFill>
                 <a:latin typeface="Calibri" pitchFamily="34" charset="0"/>
-                <a:ea typeface="Calibri" pitchFamily="34" charset="-122"/>
-                <a:cs typeface="Calibri" pitchFamily="34" charset="-120"/>
+                <a:cs typeface="Amiri" pitchFamily="2" charset="-78"/>
               </a:rPr>
               <a:t>Mic muted</a:t>
             </a:r>
@@ -21823,8 +21443,7 @@
                   <a:srgbClr val="5A6472"/>
                 </a:solidFill>
                 <a:latin typeface="Calibri" pitchFamily="34" charset="0"/>
-                <a:ea typeface="Calibri" pitchFamily="34" charset="-122"/>
-                <a:cs typeface="Calibri" pitchFamily="34" charset="-120"/>
+                <a:cs typeface="Amiri" pitchFamily="2" charset="-78"/>
               </a:rPr>
               <a:t>Unmute only when invited to speak.</a:t>
             </a:r>
@@ -21945,8 +21564,7 @@
                   <a:srgbClr val="1B3B6F"/>
                 </a:solidFill>
                 <a:latin typeface="Calibri" pitchFamily="34" charset="0"/>
-                <a:ea typeface="Calibri" pitchFamily="34" charset="-122"/>
-                <a:cs typeface="Calibri" pitchFamily="34" charset="-120"/>
+                <a:cs typeface="Amiri" pitchFamily="2" charset="-78"/>
               </a:rPr>
               <a:t>Chat for learning</a:t>
             </a:r>
@@ -21962,8 +21580,7 @@
                   <a:srgbClr val="5A6472"/>
                 </a:solidFill>
                 <a:latin typeface="Calibri" pitchFamily="34" charset="0"/>
-                <a:ea typeface="Calibri" pitchFamily="34" charset="-122"/>
-                <a:cs typeface="Calibri" pitchFamily="34" charset="-120"/>
+                <a:cs typeface="Amiri" pitchFamily="2" charset="-78"/>
               </a:rPr>
               <a:t>Answers, questions and Arabic only.</a:t>
             </a:r>
@@ -22084,8 +21701,7 @@
                   <a:srgbClr val="1B3B6F"/>
                 </a:solidFill>
                 <a:latin typeface="Calibri" pitchFamily="34" charset="0"/>
-                <a:ea typeface="Calibri" pitchFamily="34" charset="-122"/>
-                <a:cs typeface="Calibri" pitchFamily="34" charset="-120"/>
+                <a:cs typeface="Amiri" pitchFamily="2" charset="-78"/>
               </a:rPr>
               <a:t>Raise your hand</a:t>
             </a:r>
@@ -22101,8 +21717,7 @@
                   <a:srgbClr val="5A6472"/>
                 </a:solidFill>
                 <a:latin typeface="Calibri" pitchFamily="34" charset="0"/>
-                <a:ea typeface="Calibri" pitchFamily="34" charset="-122"/>
-                <a:cs typeface="Calibri" pitchFamily="34" charset="-120"/>
+                <a:cs typeface="Amiri" pitchFamily="2" charset="-78"/>
               </a:rPr>
               <a:t>Use the hand button to ask for help.</a:t>
             </a:r>
@@ -22174,8 +21789,7 @@
                   <a:srgbClr val="1B3B6F"/>
                 </a:solidFill>
                 <a:latin typeface="Calibri" pitchFamily="34" charset="0"/>
-                <a:ea typeface="Calibri" pitchFamily="34" charset="-122"/>
-                <a:cs typeface="Calibri" pitchFamily="34" charset="-120"/>
+                <a:cs typeface="Amiri" pitchFamily="2" charset="-78"/>
               </a:rPr>
               <a:t>HOW WE TALK — THE ORACY CODE</a:t>
             </a:r>
@@ -22238,8 +21852,7 @@
                   <a:srgbClr val="D4AF37"/>
                 </a:solidFill>
                 <a:latin typeface="Arial" pitchFamily="34" charset="0"/>
-                <a:ea typeface="Arial" pitchFamily="34" charset="-122"/>
-                <a:cs typeface="Arial" pitchFamily="34" charset="-120"/>
+                <a:cs typeface="Amiri" pitchFamily="2" charset="-78"/>
               </a:rPr>
               <a:t>●</a:t>
             </a:r>
@@ -22277,8 +21890,7 @@
                   <a:srgbClr val="1B3B6F"/>
                 </a:solidFill>
                 <a:latin typeface="Calibri" pitchFamily="34" charset="0"/>
-                <a:ea typeface="Calibri" pitchFamily="34" charset="-122"/>
-                <a:cs typeface="Calibri" pitchFamily="34" charset="-120"/>
+                <a:cs typeface="Amiri" pitchFamily="2" charset="-78"/>
               </a:rPr>
               <a:t>Think</a:t>
             </a:r>
@@ -22294,8 +21906,7 @@
                   <a:srgbClr val="5A6472"/>
                 </a:solidFill>
                 <a:latin typeface="Calibri" pitchFamily="34" charset="0"/>
-                <a:ea typeface="Calibri" pitchFamily="34" charset="-122"/>
-                <a:cs typeface="Calibri" pitchFamily="34" charset="-120"/>
+                <a:cs typeface="Amiri" pitchFamily="2" charset="-78"/>
               </a:rPr>
               <a:t>silent preparation</a:t>
             </a:r>
@@ -22358,8 +21969,7 @@
                   <a:srgbClr val="D4AF37"/>
                 </a:solidFill>
                 <a:latin typeface="Arial" pitchFamily="34" charset="0"/>
-                <a:ea typeface="Arial" pitchFamily="34" charset="-122"/>
-                <a:cs typeface="Arial" pitchFamily="34" charset="-120"/>
+                <a:cs typeface="Amiri" pitchFamily="2" charset="-78"/>
               </a:rPr>
               <a:t>↔</a:t>
             </a:r>
@@ -22397,8 +22007,7 @@
                   <a:srgbClr val="1B3B6F"/>
                 </a:solidFill>
                 <a:latin typeface="Calibri" pitchFamily="34" charset="0"/>
-                <a:ea typeface="Calibri" pitchFamily="34" charset="-122"/>
-                <a:cs typeface="Calibri" pitchFamily="34" charset="-120"/>
+                <a:cs typeface="Amiri" pitchFamily="2" charset="-78"/>
               </a:rPr>
               <a:t>Rehearse</a:t>
             </a:r>
@@ -22414,8 +22023,7 @@
                   <a:srgbClr val="5A6472"/>
                 </a:solidFill>
                 <a:latin typeface="Calibri" pitchFamily="34" charset="0"/>
-                <a:ea typeface="Calibri" pitchFamily="34" charset="-122"/>
-                <a:cs typeface="Calibri" pitchFamily="34" charset="-120"/>
+                <a:cs typeface="Amiri" pitchFamily="2" charset="-78"/>
               </a:rPr>
               <a:t>both partners speak</a:t>
             </a:r>
@@ -22478,8 +22086,7 @@
                   <a:srgbClr val="D4AF37"/>
                 </a:solidFill>
                 <a:latin typeface="Arial" pitchFamily="34" charset="0"/>
-                <a:ea typeface="Arial" pitchFamily="34" charset="-122"/>
-                <a:cs typeface="Arial" pitchFamily="34" charset="-120"/>
+                <a:cs typeface="Amiri" pitchFamily="2" charset="-78"/>
               </a:rPr>
               <a:t>+</a:t>
             </a:r>
@@ -22517,8 +22124,7 @@
                   <a:srgbClr val="1B3B6F"/>
                 </a:solidFill>
                 <a:latin typeface="Calibri" pitchFamily="34" charset="0"/>
-                <a:ea typeface="Calibri" pitchFamily="34" charset="-122"/>
-                <a:cs typeface="Calibri" pitchFamily="34" charset="-120"/>
+                <a:cs typeface="Amiri" pitchFamily="2" charset="-78"/>
               </a:rPr>
               <a:t>Build</a:t>
             </a:r>
@@ -22534,8 +22140,7 @@
                   <a:srgbClr val="5A6472"/>
                 </a:solidFill>
                 <a:latin typeface="Calibri" pitchFamily="34" charset="0"/>
-                <a:ea typeface="Calibri" pitchFamily="34" charset="-122"/>
-                <a:cs typeface="Calibri" pitchFamily="34" charset="-120"/>
+                <a:cs typeface="Amiri" pitchFamily="2" charset="-78"/>
               </a:rPr>
               <a:t>add a reason or detail</a:t>
             </a:r>
@@ -22598,8 +22203,7 @@
                   <a:srgbClr val="D4AF37"/>
                 </a:solidFill>
                 <a:latin typeface="Arial" pitchFamily="34" charset="0"/>
-                <a:ea typeface="Arial" pitchFamily="34" charset="-122"/>
-                <a:cs typeface="Arial" pitchFamily="34" charset="-120"/>
+                <a:cs typeface="Amiri" pitchFamily="2" charset="-78"/>
               </a:rPr>
               <a:t>?</a:t>
             </a:r>
@@ -22637,8 +22241,7 @@
                   <a:srgbClr val="1B3B6F"/>
                 </a:solidFill>
                 <a:latin typeface="Calibri" pitchFamily="34" charset="0"/>
-                <a:ea typeface="Calibri" pitchFamily="34" charset="-122"/>
-                <a:cs typeface="Calibri" pitchFamily="34" charset="-120"/>
+                <a:cs typeface="Amiri" pitchFamily="2" charset="-78"/>
               </a:rPr>
               <a:t>Challenge</a:t>
             </a:r>
@@ -22654,8 +22257,7 @@
                   <a:srgbClr val="5A6472"/>
                 </a:solidFill>
                 <a:latin typeface="Calibri" pitchFamily="34" charset="0"/>
-                <a:ea typeface="Calibri" pitchFamily="34" charset="-122"/>
-                <a:cs typeface="Calibri" pitchFamily="34" charset="-120"/>
+                <a:cs typeface="Amiri" pitchFamily="2" charset="-78"/>
               </a:rPr>
               <a:t>question respectfully</a:t>
             </a:r>
@@ -22718,8 +22320,7 @@
                   <a:srgbClr val="D4AF37"/>
                 </a:solidFill>
                 <a:latin typeface="Arial" pitchFamily="34" charset="0"/>
-                <a:ea typeface="Arial" pitchFamily="34" charset="-122"/>
-                <a:cs typeface="Arial" pitchFamily="34" charset="-120"/>
+                <a:cs typeface="Amiri" pitchFamily="2" charset="-78"/>
               </a:rPr>
               <a:t>◎</a:t>
             </a:r>
@@ -22757,8 +22358,7 @@
                   <a:srgbClr val="1B3B6F"/>
                 </a:solidFill>
                 <a:latin typeface="Calibri" pitchFamily="34" charset="0"/>
-                <a:ea typeface="Calibri" pitchFamily="34" charset="-122"/>
-                <a:cs typeface="Calibri" pitchFamily="34" charset="-120"/>
+                <a:cs typeface="Amiri" pitchFamily="2" charset="-78"/>
               </a:rPr>
               <a:t>Share</a:t>
             </a:r>
@@ -22774,8 +22374,7 @@
                   <a:srgbClr val="5A6472"/>
                 </a:solidFill>
                 <a:latin typeface="Calibri" pitchFamily="34" charset="0"/>
-                <a:ea typeface="Calibri" pitchFamily="34" charset="-122"/>
-                <a:cs typeface="Calibri" pitchFamily="34" charset="-120"/>
+                <a:cs typeface="Amiri" pitchFamily="2" charset="-78"/>
               </a:rPr>
               <a:t>anyone may be invited</a:t>
             </a:r>
@@ -22838,8 +22437,7 @@
                   <a:srgbClr val="D4AF37"/>
                 </a:solidFill>
                 <a:latin typeface="Arial" pitchFamily="34" charset="0"/>
-                <a:ea typeface="Arial" pitchFamily="34" charset="-122"/>
-                <a:cs typeface="Arial" pitchFamily="34" charset="-120"/>
+                <a:cs typeface="Amiri" pitchFamily="2" charset="-78"/>
               </a:rPr>
               <a:t>↺</a:t>
             </a:r>
@@ -22877,8 +22475,7 @@
                   <a:srgbClr val="1B3B6F"/>
                 </a:solidFill>
                 <a:latin typeface="Calibri" pitchFamily="34" charset="0"/>
-                <a:ea typeface="Calibri" pitchFamily="34" charset="-122"/>
-                <a:cs typeface="Calibri" pitchFamily="34" charset="-120"/>
+                <a:cs typeface="Amiri" pitchFamily="2" charset="-78"/>
               </a:rPr>
               <a:t>Summarise</a:t>
             </a:r>
@@ -22894,8 +22491,7 @@
                   <a:srgbClr val="5A6472"/>
                 </a:solidFill>
                 <a:latin typeface="Calibri" pitchFamily="34" charset="0"/>
-                <a:ea typeface="Calibri" pitchFamily="34" charset="-122"/>
-                <a:cs typeface="Calibri" pitchFamily="34" charset="-120"/>
+                <a:cs typeface="Amiri" pitchFamily="2" charset="-78"/>
               </a:rPr>
               <a:t>say it more precisely</a:t>
             </a:r>
@@ -22933,8 +22529,7 @@
                   <a:srgbClr val="8A6D1E"/>
                 </a:solidFill>
                 <a:latin typeface="Calibri" pitchFamily="34" charset="0"/>
-                <a:ea typeface="Calibri" pitchFamily="34" charset="-122"/>
-                <a:cs typeface="Calibri" pitchFamily="34" charset="-120"/>
+                <a:cs typeface="Amiri" pitchFamily="2" charset="-78"/>
               </a:rPr>
               <a:t>I will always give you thinking and practice time before I ask anyone. Reading aloud is by invitation — you can always say “pass, please come back to me”.</a:t>
             </a:r>
@@ -22972,8 +22567,7 @@
                   <a:srgbClr val="8A93A0"/>
                 </a:solidFill>
                 <a:latin typeface="Calibri" pitchFamily="34" charset="0"/>
-                <a:ea typeface="Calibri" pitchFamily="34" charset="-122"/>
-                <a:cs typeface="Calibri" pitchFamily="34" charset="-120"/>
+                <a:cs typeface="Amiri" pitchFamily="2" charset="-78"/>
               </a:rPr>
               <a:t>2 / 23</a:t>
             </a:r>
@@ -23067,9 +22661,8 @@
                 <a:solidFill>
                   <a:srgbClr val="D4AF37"/>
                 </a:solidFill>
-                <a:latin typeface="Amiri" pitchFamily="34" charset="0"/>
-                <a:ea typeface="Amiri" pitchFamily="34" charset="-122"/>
-                <a:cs typeface="Amiri" pitchFamily="34" charset="-120"/>
+                <a:latin typeface="Amiri" pitchFamily="2" charset="-78"/>
+                <a:cs typeface="Amiri" pitchFamily="2" charset="-78"/>
               </a:rPr>
               <a:t>م</a:t>
             </a:r>
@@ -23107,8 +22700,7 @@
                   <a:srgbClr val="1B3B6F"/>
                 </a:solidFill>
                 <a:latin typeface="Cambria" pitchFamily="34" charset="0"/>
-                <a:ea typeface="Cambria" pitchFamily="34" charset="-122"/>
-                <a:cs typeface="Cambria" pitchFamily="34" charset="-120"/>
+                <a:cs typeface="Amiri" pitchFamily="2" charset="-78"/>
               </a:rPr>
               <a:t>Al Madina Online School</a:t>
             </a:r>
@@ -23146,8 +22738,7 @@
                   <a:srgbClr val="8A6D1E"/>
                 </a:solidFill>
                 <a:latin typeface="Calibri" pitchFamily="34" charset="0"/>
-                <a:ea typeface="Calibri" pitchFamily="34" charset="-122"/>
-                <a:cs typeface="Calibri" pitchFamily="34" charset="-120"/>
+                <a:cs typeface="Amiri" pitchFamily="2" charset="-78"/>
               </a:rPr>
               <a:t>ARABIC DEPARTMENT · MIFTAH ARABIC · IGCSE 0544</a:t>
             </a:r>
@@ -23212,8 +22803,7 @@
                   <a:srgbClr val="FFFFFF"/>
                 </a:solidFill>
                 <a:latin typeface="Calibri" pitchFamily="34" charset="0"/>
-                <a:ea typeface="Calibri" pitchFamily="34" charset="-122"/>
-                <a:cs typeface="Calibri" pitchFamily="34" charset="-120"/>
+                <a:cs typeface="Amiri" pitchFamily="2" charset="-78"/>
               </a:rPr>
               <a:t>F4-L12 · F4 Assessment</a:t>
             </a:r>
@@ -23278,8 +22868,7 @@
                   <a:srgbClr val="FFFFFF"/>
                 </a:solidFill>
                 <a:latin typeface="Calibri" pitchFamily="34" charset="0"/>
-                <a:ea typeface="Calibri" pitchFamily="34" charset="-122"/>
-                <a:cs typeface="Calibri" pitchFamily="34" charset="-120"/>
+                <a:cs typeface="Amiri" pitchFamily="2" charset="-78"/>
               </a:rPr>
               <a:t>FEEDBACK · 3 MIN</a:t>
             </a:r>
@@ -23317,8 +22906,7 @@
                   <a:srgbClr val="8A6D1E"/>
                 </a:solidFill>
                 <a:latin typeface="Calibri" pitchFamily="34" charset="0"/>
-                <a:ea typeface="Calibri" pitchFamily="34" charset="-122"/>
-                <a:cs typeface="Calibri" pitchFamily="34" charset="-120"/>
+                <a:cs typeface="Amiri" pitchFamily="2" charset="-78"/>
               </a:rPr>
               <a:t>RESULTS · YOUR F4 ASSESSMENT PROFILE (WEBSITE)</a:t>
             </a:r>
@@ -23356,8 +22944,7 @@
                   <a:srgbClr val="1B3B6F"/>
                 </a:solidFill>
                 <a:latin typeface="Cambria" pitchFamily="34" charset="0"/>
-                <a:ea typeface="Cambria" pitchFamily="34" charset="-122"/>
-                <a:cs typeface="Cambria" pitchFamily="34" charset="-120"/>
+                <a:cs typeface="Amiri" pitchFamily="2" charset="-78"/>
               </a:rPr>
               <a:t>My F4 score profile</a:t>
             </a:r>
@@ -23394,9 +22981,8 @@
                 <a:solidFill>
                   <a:srgbClr val="8A6D1E"/>
                 </a:solidFill>
-                <a:latin typeface="Amiri" pitchFamily="34" charset="0"/>
-                <a:ea typeface="Amiri" pitchFamily="34" charset="-122"/>
-                <a:cs typeface="Amiri" pitchFamily="34" charset="-120"/>
+                <a:latin typeface="Amiri" pitchFamily="2" charset="-78"/>
+                <a:cs typeface="Amiri" pitchFamily="2" charset="-78"/>
               </a:rPr>
               <a:t>مِلَفُّ التَّقْيِيمِ</a:t>
             </a:r>
@@ -23434,8 +23020,7 @@
                   <a:srgbClr val="8A93A0"/>
                 </a:solidFill>
                 <a:latin typeface="Calibri" pitchFamily="34" charset="0"/>
-                <a:ea typeface="Calibri" pitchFamily="34" charset="-122"/>
-                <a:cs typeface="Calibri" pitchFamily="34" charset="-120"/>
+                <a:cs typeface="Amiri" pitchFamily="2" charset="-78"/>
               </a:rPr>
               <a:t>Miftah Arabic · Foundation F4 · My School · F4-L12</a:t>
             </a:r>
@@ -23498,8 +23083,7 @@
                   <a:srgbClr val="FFFFFF"/>
                 </a:solidFill>
                 <a:latin typeface="Calibri" pitchFamily="34" charset="0"/>
-                <a:ea typeface="Calibri" pitchFamily="34" charset="-122"/>
-                <a:cs typeface="Calibri" pitchFamily="34" charset="-120"/>
+                <a:cs typeface="Amiri" pitchFamily="2" charset="-78"/>
               </a:rPr>
               <a:t>Section</a:t>
             </a:r>
@@ -23537,8 +23121,7 @@
                   <a:srgbClr val="FFFFFF"/>
                 </a:solidFill>
                 <a:latin typeface="Calibri" pitchFamily="34" charset="0"/>
-                <a:ea typeface="Calibri" pitchFamily="34" charset="-122"/>
-                <a:cs typeface="Calibri" pitchFamily="34" charset="-120"/>
+                <a:cs typeface="Amiri" pitchFamily="2" charset="-78"/>
               </a:rPr>
               <a:t>My score</a:t>
             </a:r>
@@ -23576,8 +23159,7 @@
                   <a:srgbClr val="FFFFFF"/>
                 </a:solidFill>
                 <a:latin typeface="Calibri" pitchFamily="34" charset="0"/>
-                <a:ea typeface="Calibri" pitchFamily="34" charset="-122"/>
-                <a:cs typeface="Calibri" pitchFamily="34" charset="-120"/>
+                <a:cs typeface="Amiri" pitchFamily="2" charset="-78"/>
               </a:rPr>
               <a:t>Website bands (total /60)</a:t>
             </a:r>
@@ -23642,8 +23224,7 @@
                   <a:srgbClr val="5A6472"/>
                 </a:solidFill>
                 <a:latin typeface="Calibri" pitchFamily="34" charset="0"/>
-                <a:ea typeface="Calibri" pitchFamily="34" charset="-122"/>
-                <a:cs typeface="Calibri" pitchFamily="34" charset="-120"/>
+                <a:cs typeface="Amiri" pitchFamily="2" charset="-78"/>
               </a:rPr>
               <a:t>A · Listening</a:t>
             </a:r>
@@ -23681,8 +23262,7 @@
                   <a:srgbClr val="5A6472"/>
                 </a:solidFill>
                 <a:latin typeface="Calibri" pitchFamily="34" charset="0"/>
-                <a:ea typeface="Calibri" pitchFamily="34" charset="-122"/>
-                <a:cs typeface="Calibri" pitchFamily="34" charset="-120"/>
+                <a:cs typeface="Amiri" pitchFamily="2" charset="-78"/>
               </a:rPr>
               <a:t>/20</a:t>
             </a:r>
@@ -23720,8 +23300,7 @@
                   <a:srgbClr val="5A6472"/>
                 </a:solidFill>
                 <a:latin typeface="Calibri" pitchFamily="34" charset="0"/>
-                <a:ea typeface="Calibri" pitchFamily="34" charset="-122"/>
-                <a:cs typeface="Calibri" pitchFamily="34" charset="-120"/>
+                <a:cs typeface="Amiri" pitchFamily="2" charset="-78"/>
               </a:rPr>
               <a:t>54–60 Excellent — confident, accurate school-life communication</a:t>
             </a:r>
@@ -23786,8 +23365,7 @@
                   <a:srgbClr val="FFFFFF"/>
                 </a:solidFill>
                 <a:latin typeface="Calibri" pitchFamily="34" charset="0"/>
-                <a:ea typeface="Calibri" pitchFamily="34" charset="-122"/>
-                <a:cs typeface="Calibri" pitchFamily="34" charset="-120"/>
+                <a:cs typeface="Amiri" pitchFamily="2" charset="-78"/>
               </a:rPr>
               <a:t>CORE</a:t>
             </a:r>
@@ -23852,8 +23430,7 @@
                   <a:srgbClr val="5A6472"/>
                 </a:solidFill>
                 <a:latin typeface="Calibri" pitchFamily="34" charset="0"/>
-                <a:ea typeface="Calibri" pitchFamily="34" charset="-122"/>
-                <a:cs typeface="Calibri" pitchFamily="34" charset="-120"/>
+                <a:cs typeface="Amiri" pitchFamily="2" charset="-78"/>
               </a:rPr>
               <a:t>B · Reading</a:t>
             </a:r>
@@ -23891,8 +23468,7 @@
                   <a:srgbClr val="5A6472"/>
                 </a:solidFill>
                 <a:latin typeface="Calibri" pitchFamily="34" charset="0"/>
-                <a:ea typeface="Calibri" pitchFamily="34" charset="-122"/>
-                <a:cs typeface="Calibri" pitchFamily="34" charset="-120"/>
+                <a:cs typeface="Amiri" pitchFamily="2" charset="-78"/>
               </a:rPr>
               <a:t>/10</a:t>
             </a:r>
@@ -23930,8 +23506,7 @@
                   <a:srgbClr val="5A6472"/>
                 </a:solidFill>
                 <a:latin typeface="Calibri" pitchFamily="34" charset="0"/>
-                <a:ea typeface="Calibri" pitchFamily="34" charset="-122"/>
-                <a:cs typeface="Calibri" pitchFamily="34" charset="-120"/>
+                <a:cs typeface="Amiri" pitchFamily="2" charset="-78"/>
               </a:rPr>
               <a:t>42–53 Good — secure progress with a few focused gaps</a:t>
             </a:r>
@@ -23996,8 +23571,7 @@
                   <a:srgbClr val="FFFFFF"/>
                 </a:solidFill>
                 <a:latin typeface="Calibri" pitchFamily="34" charset="0"/>
-                <a:ea typeface="Calibri" pitchFamily="34" charset="-122"/>
-                <a:cs typeface="Calibri" pitchFamily="34" charset="-120"/>
+                <a:cs typeface="Amiri" pitchFamily="2" charset="-78"/>
               </a:rPr>
               <a:t>CORE</a:t>
             </a:r>
@@ -24062,8 +23636,7 @@
                   <a:srgbClr val="5A6472"/>
                 </a:solidFill>
                 <a:latin typeface="Calibri" pitchFamily="34" charset="0"/>
-                <a:ea typeface="Calibri" pitchFamily="34" charset="-122"/>
-                <a:cs typeface="Calibri" pitchFamily="34" charset="-120"/>
+                <a:cs typeface="Amiri" pitchFamily="2" charset="-78"/>
               </a:rPr>
               <a:t>C · Writing</a:t>
             </a:r>
@@ -24101,8 +23674,7 @@
                   <a:srgbClr val="5A6472"/>
                 </a:solidFill>
                 <a:latin typeface="Calibri" pitchFamily="34" charset="0"/>
-                <a:ea typeface="Calibri" pitchFamily="34" charset="-122"/>
-                <a:cs typeface="Calibri" pitchFamily="34" charset="-120"/>
+                <a:cs typeface="Amiri" pitchFamily="2" charset="-78"/>
               </a:rPr>
               <a:t>/20</a:t>
             </a:r>
@@ -24140,8 +23712,7 @@
                   <a:srgbClr val="5A6472"/>
                 </a:solidFill>
                 <a:latin typeface="Calibri" pitchFamily="34" charset="0"/>
-                <a:ea typeface="Calibri" pitchFamily="34" charset="-122"/>
-                <a:cs typeface="Calibri" pitchFamily="34" charset="-120"/>
+                <a:cs typeface="Amiri" pitchFamily="2" charset="-78"/>
               </a:rPr>
               <a:t>30–41 Satisfactory — core communication in place</a:t>
             </a:r>
@@ -24206,8 +23777,7 @@
                   <a:srgbClr val="FFFFFF"/>
                 </a:solidFill>
                 <a:latin typeface="Calibri" pitchFamily="34" charset="0"/>
-                <a:ea typeface="Calibri" pitchFamily="34" charset="-122"/>
-                <a:cs typeface="Calibri" pitchFamily="34" charset="-120"/>
+                <a:cs typeface="Amiri" pitchFamily="2" charset="-78"/>
               </a:rPr>
               <a:t>CORE</a:t>
             </a:r>
@@ -24272,8 +23842,7 @@
                   <a:srgbClr val="5A6472"/>
                 </a:solidFill>
                 <a:latin typeface="Calibri" pitchFamily="34" charset="0"/>
-                <a:ea typeface="Calibri" pitchFamily="34" charset="-122"/>
-                <a:cs typeface="Calibri" pitchFamily="34" charset="-120"/>
+                <a:cs typeface="Amiri" pitchFamily="2" charset="-78"/>
               </a:rPr>
               <a:t>D · Speaking</a:t>
             </a:r>
@@ -24311,8 +23880,7 @@
                   <a:srgbClr val="5A6472"/>
                 </a:solidFill>
                 <a:latin typeface="Calibri" pitchFamily="34" charset="0"/>
-                <a:ea typeface="Calibri" pitchFamily="34" charset="-122"/>
-                <a:cs typeface="Calibri" pitchFamily="34" charset="-120"/>
+                <a:cs typeface="Amiri" pitchFamily="2" charset="-78"/>
               </a:rPr>
               <a:t>/10</a:t>
             </a:r>
@@ -24350,8 +23918,7 @@
                   <a:srgbClr val="5A6472"/>
                 </a:solidFill>
                 <a:latin typeface="Calibri" pitchFamily="34" charset="0"/>
-                <a:ea typeface="Calibri" pitchFamily="34" charset="-122"/>
-                <a:cs typeface="Calibri" pitchFamily="34" charset="-120"/>
+                <a:cs typeface="Amiri" pitchFamily="2" charset="-78"/>
               </a:rPr>
               <a:t>0–29 Needs support — return to selected F4 cycles</a:t>
             </a:r>
@@ -24416,8 +23983,7 @@
                   <a:srgbClr val="FFFFFF"/>
                 </a:solidFill>
                 <a:latin typeface="Calibri" pitchFamily="34" charset="0"/>
-                <a:ea typeface="Calibri" pitchFamily="34" charset="-122"/>
-                <a:cs typeface="Calibri" pitchFamily="34" charset="-120"/>
+                <a:cs typeface="Amiri" pitchFamily="2" charset="-78"/>
               </a:rPr>
               <a:t>CORE</a:t>
             </a:r>
@@ -24455,8 +24021,7 @@
                   <a:srgbClr val="1B3B6F"/>
                 </a:solidFill>
                 <a:latin typeface="Calibri" pitchFamily="34" charset="0"/>
-                <a:ea typeface="Calibri" pitchFamily="34" charset="-122"/>
-                <a:cs typeface="Calibri" pitchFamily="34" charset="-120"/>
+                <a:cs typeface="Amiri" pitchFamily="2" charset="-78"/>
               </a:rPr>
               <a:t>Website: one strength supported by evidence · one precise gap · my next action.</a:t>
             </a:r>
@@ -24494,8 +24059,7 @@
                   <a:srgbClr val="8A93A0"/>
                 </a:solidFill>
                 <a:latin typeface="Calibri" pitchFamily="34" charset="0"/>
-                <a:ea typeface="Calibri" pitchFamily="34" charset="-122"/>
-                <a:cs typeface="Calibri" pitchFamily="34" charset="-120"/>
+                <a:cs typeface="Amiri" pitchFamily="2" charset="-78"/>
               </a:rPr>
               <a:t>20 / 23</a:t>
             </a:r>
@@ -24589,9 +24153,8 @@
                 <a:solidFill>
                   <a:srgbClr val="D4AF37"/>
                 </a:solidFill>
-                <a:latin typeface="Amiri" pitchFamily="34" charset="0"/>
-                <a:ea typeface="Amiri" pitchFamily="34" charset="-122"/>
-                <a:cs typeface="Amiri" pitchFamily="34" charset="-120"/>
+                <a:latin typeface="Amiri" pitchFamily="2" charset="-78"/>
+                <a:cs typeface="Amiri" pitchFamily="2" charset="-78"/>
               </a:rPr>
               <a:t>م</a:t>
             </a:r>
@@ -24629,8 +24192,7 @@
                   <a:srgbClr val="1B3B6F"/>
                 </a:solidFill>
                 <a:latin typeface="Cambria" pitchFamily="34" charset="0"/>
-                <a:ea typeface="Cambria" pitchFamily="34" charset="-122"/>
-                <a:cs typeface="Cambria" pitchFamily="34" charset="-120"/>
+                <a:cs typeface="Amiri" pitchFamily="2" charset="-78"/>
               </a:rPr>
               <a:t>Al Madina Online School</a:t>
             </a:r>
@@ -24668,8 +24230,7 @@
                   <a:srgbClr val="8A6D1E"/>
                 </a:solidFill>
                 <a:latin typeface="Calibri" pitchFamily="34" charset="0"/>
-                <a:ea typeface="Calibri" pitchFamily="34" charset="-122"/>
-                <a:cs typeface="Calibri" pitchFamily="34" charset="-120"/>
+                <a:cs typeface="Amiri" pitchFamily="2" charset="-78"/>
               </a:rPr>
               <a:t>ARABIC DEPARTMENT · MIFTAH ARABIC · IGCSE 0544</a:t>
             </a:r>
@@ -24734,8 +24295,7 @@
                   <a:srgbClr val="FFFFFF"/>
                 </a:solidFill>
                 <a:latin typeface="Calibri" pitchFamily="34" charset="0"/>
-                <a:ea typeface="Calibri" pitchFamily="34" charset="-122"/>
-                <a:cs typeface="Calibri" pitchFamily="34" charset="-120"/>
+                <a:cs typeface="Amiri" pitchFamily="2" charset="-78"/>
               </a:rPr>
               <a:t>F4-L12 · F4 Assessment</a:t>
             </a:r>
@@ -24800,8 +24360,7 @@
                   <a:srgbClr val="FFFFFF"/>
                 </a:solidFill>
                 <a:latin typeface="Calibri" pitchFamily="34" charset="0"/>
-                <a:ea typeface="Calibri" pitchFamily="34" charset="-122"/>
-                <a:cs typeface="Calibri" pitchFamily="34" charset="-120"/>
+                <a:cs typeface="Amiri" pitchFamily="2" charset="-78"/>
               </a:rPr>
               <a:t>FEEDBACK · 1 MIN</a:t>
             </a:r>
@@ -24839,8 +24398,7 @@
                   <a:srgbClr val="8A6D1E"/>
                 </a:solidFill>
                 <a:latin typeface="Calibri" pitchFamily="34" charset="0"/>
-                <a:ea typeface="Calibri" pitchFamily="34" charset="-122"/>
-                <a:cs typeface="Calibri" pitchFamily="34" charset="-120"/>
+                <a:cs typeface="Amiri" pitchFamily="2" charset="-78"/>
               </a:rPr>
               <a:t>FEEDBACK · SUCCESS CRITERIA</a:t>
             </a:r>
@@ -24878,8 +24436,7 @@
                   <a:srgbClr val="1B3B6F"/>
                 </a:solidFill>
                 <a:latin typeface="Cambria" pitchFamily="34" charset="0"/>
-                <a:ea typeface="Cambria" pitchFamily="34" charset="-122"/>
-                <a:cs typeface="Cambria" pitchFamily="34" charset="-120"/>
+                <a:cs typeface="Amiri" pitchFamily="2" charset="-78"/>
               </a:rPr>
               <a:t>Check your work</a:t>
             </a:r>
@@ -24916,9 +24473,8 @@
                 <a:solidFill>
                   <a:srgbClr val="8A6D1E"/>
                 </a:solidFill>
-                <a:latin typeface="Amiri" pitchFamily="34" charset="0"/>
-                <a:ea typeface="Amiri" pitchFamily="34" charset="-122"/>
-                <a:cs typeface="Amiri" pitchFamily="34" charset="-120"/>
+                <a:latin typeface="Amiri" pitchFamily="2" charset="-78"/>
+                <a:cs typeface="Amiri" pitchFamily="2" charset="-78"/>
               </a:rPr>
               <a:t>قَيِّمْ عَمَلَكَ</a:t>
             </a:r>
@@ -24956,8 +24512,7 @@
                   <a:srgbClr val="8A93A0"/>
                 </a:solidFill>
                 <a:latin typeface="Calibri" pitchFamily="34" charset="0"/>
-                <a:ea typeface="Calibri" pitchFamily="34" charset="-122"/>
-                <a:cs typeface="Calibri" pitchFamily="34" charset="-120"/>
+                <a:cs typeface="Amiri" pitchFamily="2" charset="-78"/>
               </a:rPr>
               <a:t>Miftah Arabic · Foundation F4 · My School · F4-L12</a:t>
             </a:r>
@@ -25054,8 +24609,7 @@
                   <a:srgbClr val="1F2A37"/>
                 </a:solidFill>
                 <a:latin typeface="Calibri" pitchFamily="34" charset="0"/>
-                <a:ea typeface="Calibri" pitchFamily="34" charset="-122"/>
-                <a:cs typeface="Calibri" pitchFamily="34" charset="-120"/>
+                <a:cs typeface="Amiri" pitchFamily="2" charset="-78"/>
               </a:rPr>
               <a:t>I can name subjects, places and classroom objects.</a:t>
             </a:r>
@@ -25120,8 +24674,7 @@
                   <a:srgbClr val="FFFFFF"/>
                 </a:solidFill>
                 <a:latin typeface="Calibri" pitchFamily="34" charset="0"/>
-                <a:ea typeface="Calibri" pitchFamily="34" charset="-122"/>
-                <a:cs typeface="Calibri" pitchFamily="34" charset="-120"/>
+                <a:cs typeface="Amiri" pitchFamily="2" charset="-78"/>
               </a:rPr>
               <a:t>CORE</a:t>
             </a:r>
@@ -25218,8 +24771,7 @@
                   <a:srgbClr val="1F2A37"/>
                 </a:solidFill>
                 <a:latin typeface="Calibri" pitchFamily="34" charset="0"/>
-                <a:ea typeface="Calibri" pitchFamily="34" charset="-122"/>
-                <a:cs typeface="Calibri" pitchFamily="34" charset="-120"/>
+                <a:cs typeface="Amiri" pitchFamily="2" charset="-78"/>
               </a:rPr>
               <a:t>I can say what I study and when.</a:t>
             </a:r>
@@ -25284,8 +24836,7 @@
                   <a:srgbClr val="FFFFFF"/>
                 </a:solidFill>
                 <a:latin typeface="Calibri" pitchFamily="34" charset="0"/>
-                <a:ea typeface="Calibri" pitchFamily="34" charset="-122"/>
-                <a:cs typeface="Calibri" pitchFamily="34" charset="-120"/>
+                <a:cs typeface="Amiri" pitchFamily="2" charset="-78"/>
               </a:rPr>
               <a:t>CORE</a:t>
             </a:r>
@@ -25382,8 +24933,7 @@
                   <a:srgbClr val="1F2A37"/>
                 </a:solidFill>
                 <a:latin typeface="Calibri" pitchFamily="34" charset="0"/>
-                <a:ea typeface="Calibri" pitchFamily="34" charset="-122"/>
-                <a:cs typeface="Calibri" pitchFamily="34" charset="-120"/>
+                <a:cs typeface="Amiri" pitchFamily="2" charset="-78"/>
               </a:rPr>
               <a:t>I can give opinions with an accurate reason.</a:t>
             </a:r>
@@ -25448,8 +24998,7 @@
                   <a:srgbClr val="FFFFFF"/>
                 </a:solidFill>
                 <a:latin typeface="Calibri" pitchFamily="34" charset="0"/>
-                <a:ea typeface="Calibri" pitchFamily="34" charset="-122"/>
-                <a:cs typeface="Calibri" pitchFamily="34" charset="-120"/>
+                <a:cs typeface="Amiri" pitchFamily="2" charset="-78"/>
               </a:rPr>
               <a:t>DEVELOP</a:t>
             </a:r>
@@ -25546,8 +25095,7 @@
                   <a:srgbClr val="1F2A37"/>
                 </a:solidFill>
                 <a:latin typeface="Calibri" pitchFamily="34" charset="0"/>
-                <a:ea typeface="Calibri" pitchFamily="34" charset="-122"/>
-                <a:cs typeface="Calibri" pitchFamily="34" charset="-120"/>
+                <a:cs typeface="Amiri" pitchFamily="2" charset="-78"/>
               </a:rPr>
               <a:t>I can state school rules with yajibu an / lā yajūzu.</a:t>
             </a:r>
@@ -25612,8 +25160,7 @@
                   <a:srgbClr val="FFFFFF"/>
                 </a:solidFill>
                 <a:latin typeface="Calibri" pitchFamily="34" charset="0"/>
-                <a:ea typeface="Calibri" pitchFamily="34" charset="-122"/>
-                <a:cs typeface="Calibri" pitchFamily="34" charset="-120"/>
+                <a:cs typeface="Amiri" pitchFamily="2" charset="-78"/>
               </a:rPr>
               <a:t>DEVELOP</a:t>
             </a:r>
@@ -25710,8 +25257,7 @@
                   <a:srgbClr val="1F2A37"/>
                 </a:solidFill>
                 <a:latin typeface="Calibri" pitchFamily="34" charset="0"/>
-                <a:ea typeface="Calibri" pitchFamily="34" charset="-122"/>
-                <a:cs typeface="Calibri" pitchFamily="34" charset="-120"/>
+                <a:cs typeface="Amiri" pitchFamily="2" charset="-78"/>
               </a:rPr>
               <a:t>I can write 70–90 connected words to a new student.</a:t>
             </a:r>
@@ -25776,8 +25322,7 @@
                   <a:srgbClr val="FFFFFF"/>
                 </a:solidFill>
                 <a:latin typeface="Calibri" pitchFamily="34" charset="0"/>
-                <a:ea typeface="Calibri" pitchFamily="34" charset="-122"/>
-                <a:cs typeface="Calibri" pitchFamily="34" charset="-120"/>
+                <a:cs typeface="Amiri" pitchFamily="2" charset="-78"/>
               </a:rPr>
               <a:t>STRETCH</a:t>
             </a:r>
@@ -25849,8 +25394,7 @@
                   <a:srgbClr val="2E8B57"/>
                 </a:solidFill>
                 <a:latin typeface="Calibri" pitchFamily="34" charset="0"/>
-                <a:ea typeface="Calibri" pitchFamily="34" charset="-122"/>
-                <a:cs typeface="Calibri" pitchFamily="34" charset="-120"/>
+                <a:cs typeface="Amiri" pitchFamily="2" charset="-78"/>
               </a:rPr>
               <a:t>WWW</a:t>
             </a:r>
@@ -25866,8 +25410,7 @@
                   <a:srgbClr val="1F2A37"/>
                 </a:solidFill>
                 <a:latin typeface="Calibri" pitchFamily="34" charset="0"/>
-                <a:ea typeface="Calibri" pitchFamily="34" charset="-122"/>
-                <a:cs typeface="Calibri" pitchFamily="34" charset="-120"/>
+                <a:cs typeface="Amiri" pitchFamily="2" charset="-78"/>
               </a:rPr>
               <a:t>What went well? One thing you did accurately.</a:t>
             </a:r>
@@ -25939,8 +25482,7 @@
                   <a:srgbClr val="C9780A"/>
                 </a:solidFill>
                 <a:latin typeface="Calibri" pitchFamily="34" charset="0"/>
-                <a:ea typeface="Calibri" pitchFamily="34" charset="-122"/>
-                <a:cs typeface="Calibri" pitchFamily="34" charset="-120"/>
+                <a:cs typeface="Amiri" pitchFamily="2" charset="-78"/>
               </a:rPr>
               <a:t>EBI</a:t>
             </a:r>
@@ -25956,8 +25498,7 @@
                   <a:srgbClr val="1F2A37"/>
                 </a:solidFill>
                 <a:latin typeface="Calibri" pitchFamily="34" charset="0"/>
-                <a:ea typeface="Calibri" pitchFamily="34" charset="-122"/>
-                <a:cs typeface="Calibri" pitchFamily="34" charset="-120"/>
+                <a:cs typeface="Amiri" pitchFamily="2" charset="-78"/>
               </a:rPr>
               <a:t>Even better if… One thing you will fix or add.</a:t>
             </a:r>
@@ -25995,8 +25536,7 @@
                   <a:srgbClr val="8A93A0"/>
                 </a:solidFill>
                 <a:latin typeface="Calibri" pitchFamily="34" charset="0"/>
-                <a:ea typeface="Calibri" pitchFamily="34" charset="-122"/>
-                <a:cs typeface="Calibri" pitchFamily="34" charset="-120"/>
+                <a:cs typeface="Amiri" pitchFamily="2" charset="-78"/>
               </a:rPr>
               <a:t>21 / 23</a:t>
             </a:r>
@@ -26090,9 +25630,8 @@
                 <a:solidFill>
                   <a:srgbClr val="D4AF37"/>
                 </a:solidFill>
-                <a:latin typeface="Amiri" pitchFamily="34" charset="0"/>
-                <a:ea typeface="Amiri" pitchFamily="34" charset="-122"/>
-                <a:cs typeface="Amiri" pitchFamily="34" charset="-120"/>
+                <a:latin typeface="Amiri" pitchFamily="2" charset="-78"/>
+                <a:cs typeface="Amiri" pitchFamily="2" charset="-78"/>
               </a:rPr>
               <a:t>م</a:t>
             </a:r>
@@ -26130,8 +25669,7 @@
                   <a:srgbClr val="1B3B6F"/>
                 </a:solidFill>
                 <a:latin typeface="Cambria" pitchFamily="34" charset="0"/>
-                <a:ea typeface="Cambria" pitchFamily="34" charset="-122"/>
-                <a:cs typeface="Cambria" pitchFamily="34" charset="-120"/>
+                <a:cs typeface="Amiri" pitchFamily="2" charset="-78"/>
               </a:rPr>
               <a:t>Al Madina Online School</a:t>
             </a:r>
@@ -26169,8 +25707,7 @@
                   <a:srgbClr val="8A6D1E"/>
                 </a:solidFill>
                 <a:latin typeface="Calibri" pitchFamily="34" charset="0"/>
-                <a:ea typeface="Calibri" pitchFamily="34" charset="-122"/>
-                <a:cs typeface="Calibri" pitchFamily="34" charset="-120"/>
+                <a:cs typeface="Amiri" pitchFamily="2" charset="-78"/>
               </a:rPr>
               <a:t>ARABIC DEPARTMENT · MIFTAH ARABIC · IGCSE 0544</a:t>
             </a:r>
@@ -26235,8 +25772,7 @@
                   <a:srgbClr val="FFFFFF"/>
                 </a:solidFill>
                 <a:latin typeface="Calibri" pitchFamily="34" charset="0"/>
-                <a:ea typeface="Calibri" pitchFamily="34" charset="-122"/>
-                <a:cs typeface="Calibri" pitchFamily="34" charset="-120"/>
+                <a:cs typeface="Amiri" pitchFamily="2" charset="-78"/>
               </a:rPr>
               <a:t>F4-L12 · F4 Assessment</a:t>
             </a:r>
@@ -26301,8 +25837,7 @@
                   <a:srgbClr val="FFFFFF"/>
                 </a:solidFill>
                 <a:latin typeface="Calibri" pitchFamily="34" charset="0"/>
-                <a:ea typeface="Calibri" pitchFamily="34" charset="-122"/>
-                <a:cs typeface="Calibri" pitchFamily="34" charset="-120"/>
+                <a:cs typeface="Amiri" pitchFamily="2" charset="-78"/>
               </a:rPr>
               <a:t>PREPARATION · 2 MIN</a:t>
             </a:r>
@@ -26340,8 +25875,7 @@
                   <a:srgbClr val="C45A3C"/>
                 </a:solidFill>
                 <a:latin typeface="Calibri" pitchFamily="34" charset="0"/>
-                <a:ea typeface="Calibri" pitchFamily="34" charset="-122"/>
-                <a:cs typeface="Calibri" pitchFamily="34" charset="-120"/>
+                <a:cs typeface="Amiri" pitchFamily="2" charset="-78"/>
               </a:rPr>
               <a:t>PREPARATION FOR NEXT LESSON · ABOUT 10 MINUTES</a:t>
             </a:r>
@@ -26379,8 +25913,7 @@
                   <a:srgbClr val="1B3B6F"/>
                 </a:solidFill>
                 <a:latin typeface="Cambria" pitchFamily="34" charset="0"/>
-                <a:ea typeface="Cambria" pitchFamily="34" charset="-122"/>
-                <a:cs typeface="Cambria" pitchFamily="34" charset="-120"/>
+                <a:cs typeface="Amiri" pitchFamily="2" charset="-78"/>
               </a:rPr>
               <a:t>Before F5-L01: get ready at home</a:t>
             </a:r>
@@ -26417,9 +25950,8 @@
                 <a:solidFill>
                   <a:srgbClr val="8A6D1E"/>
                 </a:solidFill>
-                <a:latin typeface="Amiri" pitchFamily="34" charset="0"/>
-                <a:ea typeface="Amiri" pitchFamily="34" charset="-122"/>
-                <a:cs typeface="Amiri" pitchFamily="34" charset="-120"/>
+                <a:latin typeface="Amiri" pitchFamily="2" charset="-78"/>
+                <a:cs typeface="Amiri" pitchFamily="2" charset="-78"/>
               </a:rPr>
               <a:t>التَّحْضِيرُ لِلدَّرْسِ القَادِمِ</a:t>
             </a:r>
@@ -26457,8 +25989,7 @@
                   <a:srgbClr val="8A93A0"/>
                 </a:solidFill>
                 <a:latin typeface="Calibri" pitchFamily="34" charset="0"/>
-                <a:ea typeface="Calibri" pitchFamily="34" charset="-122"/>
-                <a:cs typeface="Calibri" pitchFamily="34" charset="-120"/>
+                <a:cs typeface="Amiri" pitchFamily="2" charset="-78"/>
               </a:rPr>
               <a:t>Miftah Arabic · Foundation F4 · My School · F4-L12</a:t>
             </a:r>
@@ -26579,8 +26110,7 @@
                   <a:srgbClr val="C45A3C"/>
                 </a:solidFill>
                 <a:latin typeface="Calibri" pitchFamily="34" charset="0"/>
-                <a:ea typeface="Calibri" pitchFamily="34" charset="-122"/>
-                <a:cs typeface="Calibri" pitchFamily="34" charset="-120"/>
+                <a:cs typeface="Amiri" pitchFamily="2" charset="-78"/>
               </a:rPr>
               <a:t>LEARN THESE 5 WORDS</a:t>
             </a:r>
@@ -26596,8 +26126,7 @@
                   <a:srgbClr val="5A6472"/>
                 </a:solidFill>
                 <a:latin typeface="Calibri" pitchFamily="34" charset="0"/>
-                <a:ea typeface="Calibri" pitchFamily="34" charset="-122"/>
-                <a:cs typeface="Calibri" pitchFamily="34" charset="-120"/>
+                <a:cs typeface="Amiri" pitchFamily="2" charset="-78"/>
               </a:rPr>
               <a:t>for F5-L01 · Food and Drinks</a:t>
             </a:r>
@@ -26634,9 +26163,8 @@
                 <a:solidFill>
                   <a:srgbClr val="1B3B6F"/>
                 </a:solidFill>
-                <a:latin typeface="Amiri" pitchFamily="34" charset="0"/>
-                <a:ea typeface="Amiri" pitchFamily="34" charset="-122"/>
-                <a:cs typeface="Amiri" pitchFamily="34" charset="-120"/>
+                <a:latin typeface="Amiri" pitchFamily="2" charset="-78"/>
+                <a:cs typeface="Amiri" pitchFamily="2" charset="-78"/>
               </a:rPr>
               <a:t>خُبْزٌ</a:t>
             </a:r>
@@ -26674,8 +26202,7 @@
                   <a:srgbClr val="1F2A37"/>
                 </a:solidFill>
                 <a:latin typeface="Calibri" pitchFamily="34" charset="0"/>
-                <a:ea typeface="Calibri" pitchFamily="34" charset="-122"/>
-                <a:cs typeface="Calibri" pitchFamily="34" charset="-120"/>
+                <a:cs typeface="Amiri" pitchFamily="2" charset="-78"/>
               </a:rPr>
               <a:t>bread</a:t>
             </a:r>
@@ -26688,8 +26215,7 @@
                   <a:srgbClr val="5A6472"/>
                 </a:solidFill>
                 <a:latin typeface="Calibri" pitchFamily="34" charset="0"/>
-                <a:ea typeface="Calibri" pitchFamily="34" charset="-122"/>
-                <a:cs typeface="Calibri" pitchFamily="34" charset="-120"/>
+                <a:cs typeface="Amiri" pitchFamily="2" charset="-78"/>
               </a:rPr>
               <a:t>  m.</a:t>
             </a:r>
@@ -26726,9 +26252,8 @@
                 <a:solidFill>
                   <a:srgbClr val="1B3B6F"/>
                 </a:solidFill>
-                <a:latin typeface="Amiri" pitchFamily="34" charset="0"/>
-                <a:ea typeface="Amiri" pitchFamily="34" charset="-122"/>
-                <a:cs typeface="Amiri" pitchFamily="34" charset="-120"/>
+                <a:latin typeface="Amiri" pitchFamily="2" charset="-78"/>
+                <a:cs typeface="Amiri" pitchFamily="2" charset="-78"/>
               </a:rPr>
               <a:t>أَرُزٌّ</a:t>
             </a:r>
@@ -26766,8 +26291,7 @@
                   <a:srgbClr val="1F2A37"/>
                 </a:solidFill>
                 <a:latin typeface="Calibri" pitchFamily="34" charset="0"/>
-                <a:ea typeface="Calibri" pitchFamily="34" charset="-122"/>
-                <a:cs typeface="Calibri" pitchFamily="34" charset="-120"/>
+                <a:cs typeface="Amiri" pitchFamily="2" charset="-78"/>
               </a:rPr>
               <a:t>rice</a:t>
             </a:r>
@@ -26780,8 +26304,7 @@
                   <a:srgbClr val="5A6472"/>
                 </a:solidFill>
                 <a:latin typeface="Calibri" pitchFamily="34" charset="0"/>
-                <a:ea typeface="Calibri" pitchFamily="34" charset="-122"/>
-                <a:cs typeface="Calibri" pitchFamily="34" charset="-120"/>
+                <a:cs typeface="Amiri" pitchFamily="2" charset="-78"/>
               </a:rPr>
               <a:t>  m.</a:t>
             </a:r>
@@ -26818,9 +26341,8 @@
                 <a:solidFill>
                   <a:srgbClr val="1B3B6F"/>
                 </a:solidFill>
-                <a:latin typeface="Amiri" pitchFamily="34" charset="0"/>
-                <a:ea typeface="Amiri" pitchFamily="34" charset="-122"/>
-                <a:cs typeface="Amiri" pitchFamily="34" charset="-120"/>
+                <a:latin typeface="Amiri" pitchFamily="2" charset="-78"/>
+                <a:cs typeface="Amiri" pitchFamily="2" charset="-78"/>
               </a:rPr>
               <a:t>دَجَاجٌ</a:t>
             </a:r>
@@ -26858,8 +26380,7 @@
                   <a:srgbClr val="1F2A37"/>
                 </a:solidFill>
                 <a:latin typeface="Calibri" pitchFamily="34" charset="0"/>
-                <a:ea typeface="Calibri" pitchFamily="34" charset="-122"/>
-                <a:cs typeface="Calibri" pitchFamily="34" charset="-120"/>
+                <a:cs typeface="Amiri" pitchFamily="2" charset="-78"/>
               </a:rPr>
               <a:t>chicken</a:t>
             </a:r>
@@ -26872,8 +26393,7 @@
                   <a:srgbClr val="5A6472"/>
                 </a:solidFill>
                 <a:latin typeface="Calibri" pitchFamily="34" charset="0"/>
-                <a:ea typeface="Calibri" pitchFamily="34" charset="-122"/>
-                <a:cs typeface="Calibri" pitchFamily="34" charset="-120"/>
+                <a:cs typeface="Amiri" pitchFamily="2" charset="-78"/>
               </a:rPr>
               <a:t>  m.</a:t>
             </a:r>
@@ -26910,9 +26430,8 @@
                 <a:solidFill>
                   <a:srgbClr val="1B3B6F"/>
                 </a:solidFill>
-                <a:latin typeface="Amiri" pitchFamily="34" charset="0"/>
-                <a:ea typeface="Amiri" pitchFamily="34" charset="-122"/>
-                <a:cs typeface="Amiri" pitchFamily="34" charset="-120"/>
+                <a:latin typeface="Amiri" pitchFamily="2" charset="-78"/>
+                <a:cs typeface="Amiri" pitchFamily="2" charset="-78"/>
               </a:rPr>
               <a:t>تُفَّاحٌ</a:t>
             </a:r>
@@ -26950,8 +26469,7 @@
                   <a:srgbClr val="1F2A37"/>
                 </a:solidFill>
                 <a:latin typeface="Calibri" pitchFamily="34" charset="0"/>
-                <a:ea typeface="Calibri" pitchFamily="34" charset="-122"/>
-                <a:cs typeface="Calibri" pitchFamily="34" charset="-120"/>
+                <a:cs typeface="Amiri" pitchFamily="2" charset="-78"/>
               </a:rPr>
               <a:t>apples</a:t>
             </a:r>
@@ -26964,8 +26482,7 @@
                   <a:srgbClr val="5A6472"/>
                 </a:solidFill>
                 <a:latin typeface="Calibri" pitchFamily="34" charset="0"/>
-                <a:ea typeface="Calibri" pitchFamily="34" charset="-122"/>
-                <a:cs typeface="Calibri" pitchFamily="34" charset="-120"/>
+                <a:cs typeface="Amiri" pitchFamily="2" charset="-78"/>
               </a:rPr>
               <a:t>  coll.</a:t>
             </a:r>
@@ -27002,9 +26519,8 @@
                 <a:solidFill>
                   <a:srgbClr val="1B3B6F"/>
                 </a:solidFill>
-                <a:latin typeface="Amiri" pitchFamily="34" charset="0"/>
-                <a:ea typeface="Amiri" pitchFamily="34" charset="-122"/>
-                <a:cs typeface="Amiri" pitchFamily="34" charset="-120"/>
+                <a:latin typeface="Amiri" pitchFamily="2" charset="-78"/>
+                <a:cs typeface="Amiri" pitchFamily="2" charset="-78"/>
               </a:rPr>
               <a:t>مَاءٌ</a:t>
             </a:r>
@@ -27042,8 +26558,7 @@
                   <a:srgbClr val="1F2A37"/>
                 </a:solidFill>
                 <a:latin typeface="Calibri" pitchFamily="34" charset="0"/>
-                <a:ea typeface="Calibri" pitchFamily="34" charset="-122"/>
-                <a:cs typeface="Calibri" pitchFamily="34" charset="-120"/>
+                <a:cs typeface="Amiri" pitchFamily="2" charset="-78"/>
               </a:rPr>
               <a:t>water</a:t>
             </a:r>
@@ -27056,8 +26571,7 @@
                   <a:srgbClr val="5A6472"/>
                 </a:solidFill>
                 <a:latin typeface="Calibri" pitchFamily="34" charset="0"/>
-                <a:ea typeface="Calibri" pitchFamily="34" charset="-122"/>
-                <a:cs typeface="Calibri" pitchFamily="34" charset="-120"/>
+                <a:cs typeface="Amiri" pitchFamily="2" charset="-78"/>
               </a:rPr>
               <a:t>  m.</a:t>
             </a:r>
@@ -27095,8 +26609,7 @@
                   <a:srgbClr val="C45A3C"/>
                 </a:solidFill>
                 <a:latin typeface="Calibri" pitchFamily="34" charset="0"/>
-                <a:ea typeface="Calibri" pitchFamily="34" charset="-122"/>
-                <a:cs typeface="Calibri" pitchFamily="34" charset="-120"/>
+                <a:cs typeface="Amiri" pitchFamily="2" charset="-78"/>
               </a:rPr>
               <a:t>AND ANSWER ONE QUESTION</a:t>
             </a:r>
@@ -27134,8 +26647,7 @@
                   <a:srgbClr val="1F2A37"/>
                 </a:solidFill>
                 <a:latin typeface="Calibri" pitchFamily="34" charset="0"/>
-                <a:ea typeface="Calibri" pitchFamily="34" charset="-122"/>
-                <a:cs typeface="Calibri" pitchFamily="34" charset="-120"/>
+                <a:cs typeface="Amiri" pitchFamily="2" charset="-78"/>
               </a:rPr>
               <a:t>Choose your first F5 habit and write one accurate school sentence.</a:t>
             </a:r>
@@ -27172,9 +26684,8 @@
                 <a:solidFill>
                   <a:srgbClr val="1B3B6F"/>
                 </a:solidFill>
-                <a:latin typeface="Amiri" pitchFamily="34" charset="0"/>
-                <a:ea typeface="Amiri" pitchFamily="34" charset="-122"/>
-                <a:cs typeface="Amiri" pitchFamily="34" charset="-120"/>
+                <a:latin typeface="Amiri" pitchFamily="2" charset="-78"/>
+                <a:cs typeface="Amiri" pitchFamily="2" charset="-78"/>
               </a:rPr>
               <a:t>عَادَتِي الأُولَى</a:t>
             </a:r>
@@ -27212,8 +26723,7 @@
                   <a:srgbClr val="1B3B6F"/>
                 </a:solidFill>
                 <a:latin typeface="Calibri" pitchFamily="34" charset="0"/>
-                <a:ea typeface="Calibri" pitchFamily="34" charset="-122"/>
-                <a:cs typeface="Calibri" pitchFamily="34" charset="-120"/>
+                <a:cs typeface="Amiri" pitchFamily="2" charset="-78"/>
               </a:rPr>
               <a:t>HOMEWORK — CHOOSE YOUR ROUTE</a:t>
             </a:r>
@@ -27312,8 +26822,7 @@
                   <a:srgbClr val="FFFFFF"/>
                 </a:solidFill>
                 <a:latin typeface="Calibri" pitchFamily="34" charset="0"/>
-                <a:ea typeface="Calibri" pitchFamily="34" charset="-122"/>
-                <a:cs typeface="Calibri" pitchFamily="34" charset="-120"/>
+                <a:cs typeface="Amiri" pitchFamily="2" charset="-78"/>
               </a:rPr>
               <a:t>CORE</a:t>
             </a:r>
@@ -27351,8 +26860,7 @@
                   <a:srgbClr val="1F2A37"/>
                 </a:solidFill>
                 <a:latin typeface="Calibri" pitchFamily="34" charset="0"/>
-                <a:ea typeface="Calibri" pitchFamily="34" charset="-122"/>
-                <a:cs typeface="Calibri" pitchFamily="34" charset="-120"/>
+                <a:cs typeface="Amiri" pitchFamily="2" charset="-78"/>
               </a:rPr>
               <a:t>Redo the website F4-L12 section with your lowest score; learn the five food words.</a:t>
             </a:r>
@@ -27451,8 +26959,7 @@
                   <a:srgbClr val="FFFFFF"/>
                 </a:solidFill>
                 <a:latin typeface="Calibri" pitchFamily="34" charset="0"/>
-                <a:ea typeface="Calibri" pitchFamily="34" charset="-122"/>
-                <a:cs typeface="Calibri" pitchFamily="34" charset="-120"/>
+                <a:cs typeface="Amiri" pitchFamily="2" charset="-78"/>
               </a:rPr>
               <a:t>DEVELOP</a:t>
             </a:r>
@@ -27490,8 +26997,7 @@
                   <a:srgbClr val="1F2A37"/>
                 </a:solidFill>
                 <a:latin typeface="Calibri" pitchFamily="34" charset="0"/>
-                <a:ea typeface="Calibri" pitchFamily="34" charset="-122"/>
-                <a:cs typeface="Calibri" pitchFamily="34" charset="-120"/>
+                <a:cs typeface="Amiri" pitchFamily="2" charset="-78"/>
               </a:rPr>
               <a:t>Improve one sentence of your assessed email, then learn the five food words.</a:t>
             </a:r>
@@ -27590,8 +27096,7 @@
                   <a:srgbClr val="FFFFFF"/>
                 </a:solidFill>
                 <a:latin typeface="Calibri" pitchFamily="34" charset="0"/>
-                <a:ea typeface="Calibri" pitchFamily="34" charset="-122"/>
-                <a:cs typeface="Calibri" pitchFamily="34" charset="-120"/>
+                <a:cs typeface="Amiri" pitchFamily="2" charset="-78"/>
               </a:rPr>
               <a:t>STRETCH</a:t>
             </a:r>
@@ -27629,8 +27134,7 @@
                   <a:srgbClr val="1F2A37"/>
                 </a:solidFill>
                 <a:latin typeface="Calibri" pitchFamily="34" charset="0"/>
-                <a:ea typeface="Calibri" pitchFamily="34" charset="-122"/>
-                <a:cs typeface="Calibri" pitchFamily="34" charset="-120"/>
+                <a:cs typeface="Amiri" pitchFamily="2" charset="-78"/>
               </a:rPr>
               <a:t>Write three sentences: I like … · I do not like … · because … (using the food words).</a:t>
             </a:r>
@@ -27668,8 +27172,7 @@
                   <a:srgbClr val="8A93A0"/>
                 </a:solidFill>
                 <a:latin typeface="Calibri" pitchFamily="34" charset="0"/>
-                <a:ea typeface="Calibri" pitchFamily="34" charset="-122"/>
-                <a:cs typeface="Calibri" pitchFamily="34" charset="-120"/>
+                <a:cs typeface="Amiri" pitchFamily="2" charset="-78"/>
               </a:rPr>
               <a:t>22 / 23</a:t>
             </a:r>
@@ -27813,8 +27316,7 @@
                   <a:srgbClr val="D4AF37"/>
                 </a:solidFill>
                 <a:latin typeface="Calibri" pitchFamily="34" charset="0"/>
-                <a:ea typeface="Calibri" pitchFamily="34" charset="-122"/>
-                <a:cs typeface="Calibri" pitchFamily="34" charset="-120"/>
+                <a:cs typeface="Amiri" pitchFamily="2" charset="-78"/>
               </a:rPr>
               <a:t>F4-L12 COMPLETE</a:t>
             </a:r>
@@ -27851,9 +27353,8 @@
                 <a:solidFill>
                   <a:srgbClr val="FFFFFF"/>
                 </a:solidFill>
-                <a:latin typeface="Amiri" pitchFamily="34" charset="0"/>
-                <a:ea typeface="Amiri" pitchFamily="34" charset="-122"/>
-                <a:cs typeface="Amiri" pitchFamily="34" charset="-120"/>
+                <a:latin typeface="Amiri" pitchFamily="2" charset="-78"/>
+                <a:cs typeface="Amiri" pitchFamily="2" charset="-78"/>
               </a:rPr>
               <a:t>أَحْسَنْتُمْ! إِلَى اللِّقَاءِ</a:t>
             </a:r>
@@ -27891,8 +27392,7 @@
                   <a:srgbClr val="C6D2E6"/>
                 </a:solidFill>
                 <a:latin typeface="Calibri" pitchFamily="34" charset="0"/>
-                <a:ea typeface="Calibri" pitchFamily="34" charset="-122"/>
-                <a:cs typeface="Calibri" pitchFamily="34" charset="-120"/>
+                <a:cs typeface="Amiri" pitchFamily="2" charset="-78"/>
               </a:rPr>
               <a:t>Well done — see you next lesson.</a:t>
             </a:r>
@@ -27930,8 +27430,7 @@
                   <a:srgbClr val="D4AF37"/>
                 </a:solidFill>
                 <a:latin typeface="Calibri" pitchFamily="34" charset="0"/>
-                <a:ea typeface="Calibri" pitchFamily="34" charset="-122"/>
-                <a:cs typeface="Calibri" pitchFamily="34" charset="-120"/>
+                <a:cs typeface="Amiri" pitchFamily="2" charset="-78"/>
               </a:rPr>
               <a:t>NEXT LESSON</a:t>
             </a:r>
@@ -27969,8 +27468,7 @@
                   <a:srgbClr val="FFFFFF"/>
                 </a:solidFill>
                 <a:latin typeface="Cambria" pitchFamily="34" charset="0"/>
-                <a:ea typeface="Cambria" pitchFamily="34" charset="-122"/>
-                <a:cs typeface="Cambria" pitchFamily="34" charset="-120"/>
+                <a:cs typeface="Amiri" pitchFamily="2" charset="-78"/>
               </a:rPr>
               <a:t>F5-L01 · Food and Drinks</a:t>
             </a:r>
@@ -28007,9 +27505,8 @@
                 <a:solidFill>
                   <a:srgbClr val="D4AF37"/>
                 </a:solidFill>
-                <a:latin typeface="Amiri" pitchFamily="34" charset="0"/>
-                <a:ea typeface="Amiri" pitchFamily="34" charset="-122"/>
-                <a:cs typeface="Amiri" pitchFamily="34" charset="-120"/>
+                <a:latin typeface="Amiri" pitchFamily="2" charset="-78"/>
+                <a:cs typeface="Amiri" pitchFamily="2" charset="-78"/>
               </a:rPr>
               <a:t>الطَّعَامُ وَالشَّرَابُ</a:t>
             </a:r>
@@ -28047,8 +27544,7 @@
                   <a:srgbClr val="FFFFFF"/>
                 </a:solidFill>
                 <a:latin typeface="Calibri" pitchFamily="34" charset="0"/>
-                <a:ea typeface="Calibri" pitchFamily="34" charset="-122"/>
-                <a:cs typeface="Calibri" pitchFamily="34" charset="-120"/>
+                <a:cs typeface="Amiri" pitchFamily="2" charset="-78"/>
               </a:rPr>
               <a:t>F4 complete — well done! Carry one reason in every opinion into F5.</a:t>
             </a:r>
@@ -28142,9 +27638,8 @@
                 <a:solidFill>
                   <a:srgbClr val="D4AF37"/>
                 </a:solidFill>
-                <a:latin typeface="Amiri" pitchFamily="34" charset="0"/>
-                <a:ea typeface="Amiri" pitchFamily="34" charset="-122"/>
-                <a:cs typeface="Amiri" pitchFamily="34" charset="-120"/>
+                <a:latin typeface="Amiri" pitchFamily="2" charset="-78"/>
+                <a:cs typeface="Amiri" pitchFamily="2" charset="-78"/>
               </a:rPr>
               <a:t>م</a:t>
             </a:r>
@@ -28182,8 +27677,7 @@
                   <a:srgbClr val="1B3B6F"/>
                 </a:solidFill>
                 <a:latin typeface="Cambria" pitchFamily="34" charset="0"/>
-                <a:ea typeface="Cambria" pitchFamily="34" charset="-122"/>
-                <a:cs typeface="Cambria" pitchFamily="34" charset="-120"/>
+                <a:cs typeface="Amiri" pitchFamily="2" charset="-78"/>
               </a:rPr>
               <a:t>Al Madina Online School</a:t>
             </a:r>
@@ -28221,8 +27715,7 @@
                   <a:srgbClr val="8A6D1E"/>
                 </a:solidFill>
                 <a:latin typeface="Calibri" pitchFamily="34" charset="0"/>
-                <a:ea typeface="Calibri" pitchFamily="34" charset="-122"/>
-                <a:cs typeface="Calibri" pitchFamily="34" charset="-120"/>
+                <a:cs typeface="Amiri" pitchFamily="2" charset="-78"/>
               </a:rPr>
               <a:t>ARABIC DEPARTMENT · MIFTAH ARABIC · IGCSE 0544</a:t>
             </a:r>
@@ -28287,8 +27780,7 @@
                   <a:srgbClr val="FFFFFF"/>
                 </a:solidFill>
                 <a:latin typeface="Calibri" pitchFamily="34" charset="0"/>
-                <a:ea typeface="Calibri" pitchFamily="34" charset="-122"/>
-                <a:cs typeface="Calibri" pitchFamily="34" charset="-120"/>
+                <a:cs typeface="Amiri" pitchFamily="2" charset="-78"/>
               </a:rPr>
               <a:t>F4-L12 · F4 Assessment</a:t>
             </a:r>
@@ -28353,8 +27845,7 @@
                   <a:srgbClr val="FFFFFF"/>
                 </a:solidFill>
                 <a:latin typeface="Calibri" pitchFamily="34" charset="0"/>
-                <a:ea typeface="Calibri" pitchFamily="34" charset="-122"/>
-                <a:cs typeface="Calibri" pitchFamily="34" charset="-120"/>
+                <a:cs typeface="Amiri" pitchFamily="2" charset="-78"/>
               </a:rPr>
               <a:t>WELCOME</a:t>
             </a:r>
@@ -28392,8 +27883,7 @@
                   <a:srgbClr val="5A6472"/>
                 </a:solidFill>
                 <a:latin typeface="Calibri" pitchFamily="34" charset="0"/>
-                <a:ea typeface="Calibri" pitchFamily="34" charset="-122"/>
-                <a:cs typeface="Calibri" pitchFamily="34" charset="-120"/>
+                <a:cs typeface="Amiri" pitchFamily="2" charset="-78"/>
               </a:rPr>
               <a:t>TODAY’S LESSON MAP</a:t>
             </a:r>
@@ -28431,8 +27921,7 @@
                   <a:srgbClr val="1B3B6F"/>
                 </a:solidFill>
                 <a:latin typeface="Cambria" pitchFamily="34" charset="0"/>
-                <a:ea typeface="Cambria" pitchFamily="34" charset="-122"/>
-                <a:cs typeface="Cambria" pitchFamily="34" charset="-120"/>
+                <a:cs typeface="Amiri" pitchFamily="2" charset="-78"/>
               </a:rPr>
               <a:t>Our assessment, step by step</a:t>
             </a:r>
@@ -28469,9 +27958,8 @@
                 <a:solidFill>
                   <a:srgbClr val="8A6D1E"/>
                 </a:solidFill>
-                <a:latin typeface="Amiri" pitchFamily="34" charset="0"/>
-                <a:ea typeface="Amiri" pitchFamily="34" charset="-122"/>
-                <a:cs typeface="Amiri" pitchFamily="34" charset="-120"/>
+                <a:latin typeface="Amiri" pitchFamily="2" charset="-78"/>
+                <a:cs typeface="Amiri" pitchFamily="2" charset="-78"/>
               </a:rPr>
               <a:t>خَرِيطَةُ الدَّرْسِ</a:t>
             </a:r>
@@ -28509,8 +27997,7 @@
                   <a:srgbClr val="8A93A0"/>
                 </a:solidFill>
                 <a:latin typeface="Calibri" pitchFamily="34" charset="0"/>
-                <a:ea typeface="Calibri" pitchFamily="34" charset="-122"/>
-                <a:cs typeface="Calibri" pitchFamily="34" charset="-120"/>
+                <a:cs typeface="Amiri" pitchFamily="2" charset="-78"/>
               </a:rPr>
               <a:t>Miftah Arabic · Foundation F4 · My School · F4-L12</a:t>
             </a:r>
@@ -28609,8 +28096,7 @@
                   <a:srgbClr val="FFFFFF"/>
                 </a:solidFill>
                 <a:latin typeface="Calibri" pitchFamily="34" charset="0"/>
-                <a:ea typeface="Calibri" pitchFamily="34" charset="-122"/>
-                <a:cs typeface="Calibri" pitchFamily="34" charset="-120"/>
+                <a:cs typeface="Amiri" pitchFamily="2" charset="-78"/>
               </a:rPr>
               <a:t>DO NOW</a:t>
             </a:r>
@@ -28648,8 +28134,7 @@
                   <a:srgbClr val="E8EDF5"/>
                 </a:solidFill>
                 <a:latin typeface="Calibri" pitchFamily="34" charset="0"/>
-                <a:ea typeface="Calibri" pitchFamily="34" charset="-122"/>
-                <a:cs typeface="Calibri" pitchFamily="34" charset="-120"/>
+                <a:cs typeface="Amiri" pitchFamily="2" charset="-78"/>
               </a:rPr>
               <a:t>4 min</a:t>
             </a:r>
@@ -28712,8 +28197,7 @@
                   <a:srgbClr val="1B3B6F"/>
                 </a:solidFill>
                 <a:latin typeface="Calibri" pitchFamily="34" charset="0"/>
-                <a:ea typeface="Calibri" pitchFamily="34" charset="-122"/>
-                <a:cs typeface="Calibri" pitchFamily="34" charset="-120"/>
+                <a:cs typeface="Amiri" pitchFamily="2" charset="-78"/>
               </a:rPr>
               <a:t>1</a:t>
             </a:r>
@@ -28751,8 +28235,7 @@
                   <a:srgbClr val="1F2A37"/>
                 </a:solidFill>
                 <a:latin typeface="Calibri" pitchFamily="34" charset="0"/>
-                <a:ea typeface="Calibri" pitchFamily="34" charset="-122"/>
-                <a:cs typeface="Calibri" pitchFamily="34" charset="-120"/>
+                <a:cs typeface="Amiri" pitchFamily="2" charset="-78"/>
               </a:rPr>
               <a:t>Revision arcade (not marked).</a:t>
             </a:r>
@@ -28789,9 +28272,8 @@
                 <a:solidFill>
                   <a:srgbClr val="0E7C86"/>
                 </a:solidFill>
-                <a:latin typeface="Amiri" pitchFamily="34" charset="0"/>
-                <a:ea typeface="Amiri" pitchFamily="34" charset="-122"/>
-                <a:cs typeface="Amiri" pitchFamily="34" charset="-120"/>
+                <a:latin typeface="Amiri" pitchFamily="2" charset="-78"/>
+                <a:cs typeface="Amiri" pitchFamily="2" charset="-78"/>
               </a:rPr>
               <a:t>تَهْيِئَةٌ</a:t>
             </a:r>
@@ -28890,8 +28372,7 @@
                   <a:srgbClr val="FFFFFF"/>
                 </a:solidFill>
                 <a:latin typeface="Calibri" pitchFamily="34" charset="0"/>
-                <a:ea typeface="Calibri" pitchFamily="34" charset="-122"/>
-                <a:cs typeface="Calibri" pitchFamily="34" charset="-120"/>
+                <a:cs typeface="Amiri" pitchFamily="2" charset="-78"/>
               </a:rPr>
               <a:t>TEACHER INSTRUCTION</a:t>
             </a:r>
@@ -28929,8 +28410,7 @@
                   <a:srgbClr val="E8EDF5"/>
                 </a:solidFill>
                 <a:latin typeface="Calibri" pitchFamily="34" charset="0"/>
-                <a:ea typeface="Calibri" pitchFamily="34" charset="-122"/>
-                <a:cs typeface="Calibri" pitchFamily="34" charset="-120"/>
+                <a:cs typeface="Amiri" pitchFamily="2" charset="-78"/>
               </a:rPr>
               <a:t>1 min</a:t>
             </a:r>
@@ -28993,8 +28473,7 @@
                   <a:srgbClr val="1B3B6F"/>
                 </a:solidFill>
                 <a:latin typeface="Calibri" pitchFamily="34" charset="0"/>
-                <a:ea typeface="Calibri" pitchFamily="34" charset="-122"/>
-                <a:cs typeface="Calibri" pitchFamily="34" charset="-120"/>
+                <a:cs typeface="Amiri" pitchFamily="2" charset="-78"/>
               </a:rPr>
               <a:t>2</a:t>
             </a:r>
@@ -29032,8 +28511,7 @@
                   <a:srgbClr val="1F2A37"/>
                 </a:solidFill>
                 <a:latin typeface="Calibri" pitchFamily="34" charset="0"/>
-                <a:ea typeface="Calibri" pitchFamily="34" charset="-122"/>
-                <a:cs typeface="Calibri" pitchFamily="34" charset="-120"/>
+                <a:cs typeface="Amiri" pitchFamily="2" charset="-78"/>
               </a:rPr>
               <a:t>The 60-mark map.</a:t>
             </a:r>
@@ -29070,9 +28548,8 @@
                 <a:solidFill>
                   <a:srgbClr val="1B3B6F"/>
                 </a:solidFill>
-                <a:latin typeface="Amiri" pitchFamily="34" charset="0"/>
-                <a:ea typeface="Amiri" pitchFamily="34" charset="-122"/>
-                <a:cs typeface="Amiri" pitchFamily="34" charset="-120"/>
+                <a:latin typeface="Amiri" pitchFamily="2" charset="-78"/>
+                <a:cs typeface="Amiri" pitchFamily="2" charset="-78"/>
               </a:rPr>
               <a:t>خُطَّةُ التَّقْيِيمِ</a:t>
             </a:r>
@@ -29171,8 +28648,7 @@
                   <a:srgbClr val="FFFFFF"/>
                 </a:solidFill>
                 <a:latin typeface="Calibri" pitchFamily="34" charset="0"/>
-                <a:ea typeface="Calibri" pitchFamily="34" charset="-122"/>
-                <a:cs typeface="Calibri" pitchFamily="34" charset="-120"/>
+                <a:cs typeface="Amiri" pitchFamily="2" charset="-78"/>
               </a:rPr>
               <a:t>I DO</a:t>
             </a:r>
@@ -29210,8 +28686,7 @@
                   <a:srgbClr val="E8EDF5"/>
                 </a:solidFill>
                 <a:latin typeface="Calibri" pitchFamily="34" charset="0"/>
-                <a:ea typeface="Calibri" pitchFamily="34" charset="-122"/>
-                <a:cs typeface="Calibri" pitchFamily="34" charset="-120"/>
+                <a:cs typeface="Amiri" pitchFamily="2" charset="-78"/>
               </a:rPr>
               <a:t>15 min</a:t>
             </a:r>
@@ -29274,8 +28749,7 @@
                   <a:srgbClr val="1B3B6F"/>
                 </a:solidFill>
                 <a:latin typeface="Calibri" pitchFamily="34" charset="0"/>
-                <a:ea typeface="Calibri" pitchFamily="34" charset="-122"/>
-                <a:cs typeface="Calibri" pitchFamily="34" charset="-120"/>
+                <a:cs typeface="Amiri" pitchFamily="2" charset="-78"/>
               </a:rPr>
               <a:t>3</a:t>
             </a:r>
@@ -29313,8 +28787,7 @@
                   <a:srgbClr val="1F2A37"/>
                 </a:solidFill>
                 <a:latin typeface="Calibri" pitchFamily="34" charset="0"/>
-                <a:ea typeface="Calibri" pitchFamily="34" charset="-122"/>
-                <a:cs typeface="Calibri" pitchFamily="34" charset="-120"/>
+                <a:cs typeface="Amiri" pitchFamily="2" charset="-78"/>
               </a:rPr>
               <a:t>Listening: 20 marks.</a:t>
             </a:r>
@@ -29351,9 +28824,8 @@
                 <a:solidFill>
                   <a:srgbClr val="6B4C9A"/>
                 </a:solidFill>
-                <a:latin typeface="Amiri" pitchFamily="34" charset="0"/>
-                <a:ea typeface="Amiri" pitchFamily="34" charset="-122"/>
-                <a:cs typeface="Amiri" pitchFamily="34" charset="-120"/>
+                <a:latin typeface="Amiri" pitchFamily="2" charset="-78"/>
+                <a:cs typeface="Amiri" pitchFamily="2" charset="-78"/>
               </a:rPr>
               <a:t>الاِسْتِمَاعُ</a:t>
             </a:r>
@@ -29452,8 +28924,7 @@
                   <a:srgbClr val="FFFFFF"/>
                 </a:solidFill>
                 <a:latin typeface="Calibri" pitchFamily="34" charset="0"/>
-                <a:ea typeface="Calibri" pitchFamily="34" charset="-122"/>
-                <a:cs typeface="Calibri" pitchFamily="34" charset="-120"/>
+                <a:cs typeface="Amiri" pitchFamily="2" charset="-78"/>
               </a:rPr>
               <a:t>WE DO</a:t>
             </a:r>
@@ -29491,8 +28962,7 @@
                   <a:srgbClr val="E8EDF5"/>
                 </a:solidFill>
                 <a:latin typeface="Calibri" pitchFamily="34" charset="0"/>
-                <a:ea typeface="Calibri" pitchFamily="34" charset="-122"/>
-                <a:cs typeface="Calibri" pitchFamily="34" charset="-120"/>
+                <a:cs typeface="Amiri" pitchFamily="2" charset="-78"/>
               </a:rPr>
               <a:t>10 min</a:t>
             </a:r>
@@ -29555,8 +29025,7 @@
                   <a:srgbClr val="1B3B6F"/>
                 </a:solidFill>
                 <a:latin typeface="Calibri" pitchFamily="34" charset="0"/>
-                <a:ea typeface="Calibri" pitchFamily="34" charset="-122"/>
-                <a:cs typeface="Calibri" pitchFamily="34" charset="-120"/>
+                <a:cs typeface="Amiri" pitchFamily="2" charset="-78"/>
               </a:rPr>
               <a:t>4</a:t>
             </a:r>
@@ -29594,8 +29063,7 @@
                   <a:srgbClr val="1F2A37"/>
                 </a:solidFill>
                 <a:latin typeface="Calibri" pitchFamily="34" charset="0"/>
-                <a:ea typeface="Calibri" pitchFamily="34" charset="-122"/>
-                <a:cs typeface="Calibri" pitchFamily="34" charset="-120"/>
+                <a:cs typeface="Amiri" pitchFamily="2" charset="-78"/>
               </a:rPr>
               <a:t>Reading: 10 marks.</a:t>
             </a:r>
@@ -29632,9 +29100,8 @@
                 <a:solidFill>
                   <a:srgbClr val="2F6FB0"/>
                 </a:solidFill>
-                <a:latin typeface="Amiri" pitchFamily="34" charset="0"/>
-                <a:ea typeface="Amiri" pitchFamily="34" charset="-122"/>
-                <a:cs typeface="Amiri" pitchFamily="34" charset="-120"/>
+                <a:latin typeface="Amiri" pitchFamily="2" charset="-78"/>
+                <a:cs typeface="Amiri" pitchFamily="2" charset="-78"/>
               </a:rPr>
               <a:t>القِرَاءَةُ</a:t>
             </a:r>
@@ -29733,8 +29200,7 @@
                   <a:srgbClr val="FFFFFF"/>
                 </a:solidFill>
                 <a:latin typeface="Calibri" pitchFamily="34" charset="0"/>
-                <a:ea typeface="Calibri" pitchFamily="34" charset="-122"/>
-                <a:cs typeface="Calibri" pitchFamily="34" charset="-120"/>
+                <a:cs typeface="Amiri" pitchFamily="2" charset="-78"/>
               </a:rPr>
               <a:t>YOU DO</a:t>
             </a:r>
@@ -29772,8 +29238,7 @@
                   <a:srgbClr val="E8EDF5"/>
                 </a:solidFill>
                 <a:latin typeface="Calibri" pitchFamily="34" charset="0"/>
-                <a:ea typeface="Calibri" pitchFamily="34" charset="-122"/>
-                <a:cs typeface="Calibri" pitchFamily="34" charset="-120"/>
+                <a:cs typeface="Amiri" pitchFamily="2" charset="-78"/>
               </a:rPr>
               <a:t>24 min</a:t>
             </a:r>
@@ -29836,8 +29301,7 @@
                   <a:srgbClr val="1B3B6F"/>
                 </a:solidFill>
                 <a:latin typeface="Calibri" pitchFamily="34" charset="0"/>
-                <a:ea typeface="Calibri" pitchFamily="34" charset="-122"/>
-                <a:cs typeface="Calibri" pitchFamily="34" charset="-120"/>
+                <a:cs typeface="Amiri" pitchFamily="2" charset="-78"/>
               </a:rPr>
               <a:t>5</a:t>
             </a:r>
@@ -29875,8 +29339,7 @@
                   <a:srgbClr val="1F2A37"/>
                 </a:solidFill>
                 <a:latin typeface="Calibri" pitchFamily="34" charset="0"/>
-                <a:ea typeface="Calibri" pitchFamily="34" charset="-122"/>
-                <a:cs typeface="Calibri" pitchFamily="34" charset="-120"/>
+                <a:cs typeface="Amiri" pitchFamily="2" charset="-78"/>
               </a:rPr>
               <a:t>Writing 20 + speaking 10.</a:t>
             </a:r>
@@ -29913,9 +29376,8 @@
                 <a:solidFill>
                   <a:srgbClr val="1E6B52"/>
                 </a:solidFill>
-                <a:latin typeface="Amiri" pitchFamily="34" charset="0"/>
-                <a:ea typeface="Amiri" pitchFamily="34" charset="-122"/>
-                <a:cs typeface="Amiri" pitchFamily="34" charset="-120"/>
+                <a:latin typeface="Amiri" pitchFamily="2" charset="-78"/>
+                <a:cs typeface="Amiri" pitchFamily="2" charset="-78"/>
               </a:rPr>
               <a:t>الكِتَابَةُ وَالتَّحَدُّثُ</a:t>
             </a:r>
@@ -30014,8 +29476,7 @@
                   <a:srgbClr val="FFFFFF"/>
                 </a:solidFill>
                 <a:latin typeface="Calibri" pitchFamily="34" charset="0"/>
-                <a:ea typeface="Calibri" pitchFamily="34" charset="-122"/>
-                <a:cs typeface="Calibri" pitchFamily="34" charset="-120"/>
+                <a:cs typeface="Amiri" pitchFamily="2" charset="-78"/>
               </a:rPr>
               <a:t>FEEDBACK</a:t>
             </a:r>
@@ -30053,8 +29514,7 @@
                   <a:srgbClr val="E8EDF5"/>
                 </a:solidFill>
                 <a:latin typeface="Calibri" pitchFamily="34" charset="0"/>
-                <a:ea typeface="Calibri" pitchFamily="34" charset="-122"/>
-                <a:cs typeface="Calibri" pitchFamily="34" charset="-120"/>
+                <a:cs typeface="Amiri" pitchFamily="2" charset="-78"/>
               </a:rPr>
               <a:t>4 min</a:t>
             </a:r>
@@ -30117,8 +29577,7 @@
                   <a:srgbClr val="1B3B6F"/>
                 </a:solidFill>
                 <a:latin typeface="Calibri" pitchFamily="34" charset="0"/>
-                <a:ea typeface="Calibri" pitchFamily="34" charset="-122"/>
-                <a:cs typeface="Calibri" pitchFamily="34" charset="-120"/>
+                <a:cs typeface="Amiri" pitchFamily="2" charset="-78"/>
               </a:rPr>
               <a:t>6</a:t>
             </a:r>
@@ -30156,8 +29615,7 @@
                   <a:srgbClr val="1F2A37"/>
                 </a:solidFill>
                 <a:latin typeface="Calibri" pitchFamily="34" charset="0"/>
-                <a:ea typeface="Calibri" pitchFamily="34" charset="-122"/>
-                <a:cs typeface="Calibri" pitchFamily="34" charset="-120"/>
+                <a:cs typeface="Amiri" pitchFamily="2" charset="-78"/>
               </a:rPr>
               <a:t>My profile and one next step.</a:t>
             </a:r>
@@ -30194,9 +29652,8 @@
                 <a:solidFill>
                   <a:srgbClr val="8A6D1E"/>
                 </a:solidFill>
-                <a:latin typeface="Amiri" pitchFamily="34" charset="0"/>
-                <a:ea typeface="Amiri" pitchFamily="34" charset="-122"/>
-                <a:cs typeface="Amiri" pitchFamily="34" charset="-120"/>
+                <a:latin typeface="Amiri" pitchFamily="2" charset="-78"/>
+                <a:cs typeface="Amiri" pitchFamily="2" charset="-78"/>
               </a:rPr>
               <a:t>الهَدَفُ</a:t>
             </a:r>
@@ -30295,8 +29752,7 @@
                   <a:srgbClr val="FFFFFF"/>
                 </a:solidFill>
                 <a:latin typeface="Calibri" pitchFamily="34" charset="0"/>
-                <a:ea typeface="Calibri" pitchFamily="34" charset="-122"/>
-                <a:cs typeface="Calibri" pitchFamily="34" charset="-120"/>
+                <a:cs typeface="Amiri" pitchFamily="2" charset="-78"/>
               </a:rPr>
               <a:t>PREPARATION</a:t>
             </a:r>
@@ -30334,8 +29790,7 @@
                   <a:srgbClr val="E8EDF5"/>
                 </a:solidFill>
                 <a:latin typeface="Calibri" pitchFamily="34" charset="0"/>
-                <a:ea typeface="Calibri" pitchFamily="34" charset="-122"/>
-                <a:cs typeface="Calibri" pitchFamily="34" charset="-120"/>
+                <a:cs typeface="Amiri" pitchFamily="2" charset="-78"/>
               </a:rPr>
               <a:t>2 min</a:t>
             </a:r>
@@ -30398,8 +29853,7 @@
                   <a:srgbClr val="1B3B6F"/>
                 </a:solidFill>
                 <a:latin typeface="Calibri" pitchFamily="34" charset="0"/>
-                <a:ea typeface="Calibri" pitchFamily="34" charset="-122"/>
-                <a:cs typeface="Calibri" pitchFamily="34" charset="-120"/>
+                <a:cs typeface="Amiri" pitchFamily="2" charset="-78"/>
               </a:rPr>
               <a:t>7</a:t>
             </a:r>
@@ -30437,8 +29891,7 @@
                   <a:srgbClr val="1F2A37"/>
                 </a:solidFill>
                 <a:latin typeface="Calibri" pitchFamily="34" charset="0"/>
-                <a:ea typeface="Calibri" pitchFamily="34" charset="-122"/>
-                <a:cs typeface="Calibri" pitchFamily="34" charset="-120"/>
+                <a:cs typeface="Amiri" pitchFamily="2" charset="-78"/>
               </a:rPr>
               <a:t>Get ready for F5: food.</a:t>
             </a:r>
@@ -30475,9 +29928,8 @@
                 <a:solidFill>
                   <a:srgbClr val="C45A3C"/>
                 </a:solidFill>
-                <a:latin typeface="Amiri" pitchFamily="34" charset="0"/>
-                <a:ea typeface="Amiri" pitchFamily="34" charset="-122"/>
-                <a:cs typeface="Amiri" pitchFamily="34" charset="-120"/>
+                <a:latin typeface="Amiri" pitchFamily="2" charset="-78"/>
+                <a:cs typeface="Amiri" pitchFamily="2" charset="-78"/>
               </a:rPr>
               <a:t>اِسْتَعِدَّ</a:t>
             </a:r>
@@ -30549,8 +30001,7 @@
                   <a:srgbClr val="1E6B52"/>
                 </a:solidFill>
                 <a:latin typeface="Calibri" pitchFamily="34" charset="0"/>
-                <a:ea typeface="Calibri" pitchFamily="34" charset="-122"/>
-                <a:cs typeface="Calibri" pitchFamily="34" charset="-120"/>
+                <a:cs typeface="Amiri" pitchFamily="2" charset="-78"/>
               </a:rPr>
               <a:t>IF ARABIC FEELS HARD TODAY</a:t>
             </a:r>
@@ -30588,8 +30039,7 @@
                   <a:srgbClr val="1F2A37"/>
                 </a:solidFill>
                 <a:latin typeface="Calibri" pitchFamily="34" charset="0"/>
-                <a:ea typeface="Calibri" pitchFamily="34" charset="-122"/>
-                <a:cs typeface="Calibri" pitchFamily="34" charset="-120"/>
+                <a:cs typeface="Amiri" pitchFamily="2" charset="-78"/>
               </a:rPr>
               <a:t>Start each section with the questions you find easiest. Leave a blank and come back. The arcade does not count.</a:t>
             </a:r>
@@ -30627,8 +30077,7 @@
                   <a:srgbClr val="8A93A0"/>
                 </a:solidFill>
                 <a:latin typeface="Calibri" pitchFamily="34" charset="0"/>
-                <a:ea typeface="Calibri" pitchFamily="34" charset="-122"/>
-                <a:cs typeface="Calibri" pitchFamily="34" charset="-120"/>
+                <a:cs typeface="Amiri" pitchFamily="2" charset="-78"/>
               </a:rPr>
               <a:t>3 / 23</a:t>
             </a:r>
@@ -30722,9 +30171,8 @@
                 <a:solidFill>
                   <a:srgbClr val="D4AF37"/>
                 </a:solidFill>
-                <a:latin typeface="Amiri" pitchFamily="34" charset="0"/>
-                <a:ea typeface="Amiri" pitchFamily="34" charset="-122"/>
-                <a:cs typeface="Amiri" pitchFamily="34" charset="-120"/>
+                <a:latin typeface="Amiri" pitchFamily="2" charset="-78"/>
+                <a:cs typeface="Amiri" pitchFamily="2" charset="-78"/>
               </a:rPr>
               <a:t>م</a:t>
             </a:r>
@@ -30762,8 +30210,7 @@
                   <a:srgbClr val="1B3B6F"/>
                 </a:solidFill>
                 <a:latin typeface="Cambria" pitchFamily="34" charset="0"/>
-                <a:ea typeface="Cambria" pitchFamily="34" charset="-122"/>
-                <a:cs typeface="Cambria" pitchFamily="34" charset="-120"/>
+                <a:cs typeface="Amiri" pitchFamily="2" charset="-78"/>
               </a:rPr>
               <a:t>Al Madina Online School</a:t>
             </a:r>
@@ -30801,8 +30248,7 @@
                   <a:srgbClr val="8A6D1E"/>
                 </a:solidFill>
                 <a:latin typeface="Calibri" pitchFamily="34" charset="0"/>
-                <a:ea typeface="Calibri" pitchFamily="34" charset="-122"/>
-                <a:cs typeface="Calibri" pitchFamily="34" charset="-120"/>
+                <a:cs typeface="Amiri" pitchFamily="2" charset="-78"/>
               </a:rPr>
               <a:t>ARABIC DEPARTMENT · MIFTAH ARABIC · IGCSE 0544</a:t>
             </a:r>
@@ -30867,8 +30313,7 @@
                   <a:srgbClr val="FFFFFF"/>
                 </a:solidFill>
                 <a:latin typeface="Calibri" pitchFamily="34" charset="0"/>
-                <a:ea typeface="Calibri" pitchFamily="34" charset="-122"/>
-                <a:cs typeface="Calibri" pitchFamily="34" charset="-120"/>
+                <a:cs typeface="Amiri" pitchFamily="2" charset="-78"/>
               </a:rPr>
               <a:t>F4-L12 · F4 Assessment</a:t>
             </a:r>
@@ -30933,8 +30378,7 @@
                   <a:srgbClr val="FFFFFF"/>
                 </a:solidFill>
                 <a:latin typeface="Calibri" pitchFamily="34" charset="0"/>
-                <a:ea typeface="Calibri" pitchFamily="34" charset="-122"/>
-                <a:cs typeface="Calibri" pitchFamily="34" charset="-120"/>
+                <a:cs typeface="Amiri" pitchFamily="2" charset="-78"/>
               </a:rPr>
               <a:t>DO NOW · 5 MIN</a:t>
             </a:r>
@@ -30972,8 +30416,7 @@
                   <a:srgbClr val="0E7C86"/>
                 </a:solidFill>
                 <a:latin typeface="Calibri" pitchFamily="34" charset="0"/>
-                <a:ea typeface="Calibri" pitchFamily="34" charset="-122"/>
-                <a:cs typeface="Calibri" pitchFamily="34" charset="-120"/>
+                <a:cs typeface="Amiri" pitchFamily="2" charset="-78"/>
               </a:rPr>
               <a:t>DO NOW · ON YOUR OWN · 5 MINUTES</a:t>
             </a:r>
@@ -31011,8 +30454,7 @@
                   <a:srgbClr val="1B3B6F"/>
                 </a:solidFill>
                 <a:latin typeface="Cambria" pitchFamily="34" charset="0"/>
-                <a:ea typeface="Cambria" pitchFamily="34" charset="-122"/>
-                <a:cs typeface="Cambria" pitchFamily="34" charset="-120"/>
+                <a:cs typeface="Amiri" pitchFamily="2" charset="-78"/>
               </a:rPr>
               <a:t>Retrieval: what do you remember?</a:t>
             </a:r>
@@ -31049,9 +30491,8 @@
                 <a:solidFill>
                   <a:srgbClr val="8A6D1E"/>
                 </a:solidFill>
-                <a:latin typeface="Amiri" pitchFamily="34" charset="0"/>
-                <a:ea typeface="Amiri" pitchFamily="34" charset="-122"/>
-                <a:cs typeface="Amiri" pitchFamily="34" charset="-120"/>
+                <a:latin typeface="Amiri" pitchFamily="2" charset="-78"/>
+                <a:cs typeface="Amiri" pitchFamily="2" charset="-78"/>
               </a:rPr>
               <a:t>اِبْدَأِ الآنَ</a:t>
             </a:r>
@@ -31089,8 +30530,7 @@
                   <a:srgbClr val="8A93A0"/>
                 </a:solidFill>
                 <a:latin typeface="Calibri" pitchFamily="34" charset="0"/>
-                <a:ea typeface="Calibri" pitchFamily="34" charset="-122"/>
-                <a:cs typeface="Calibri" pitchFamily="34" charset="-120"/>
+                <a:cs typeface="Amiri" pitchFamily="2" charset="-78"/>
               </a:rPr>
               <a:t>Miftah Arabic · Foundation F4 · My School · F4-L12</a:t>
             </a:r>
@@ -31187,8 +30627,7 @@
                   <a:srgbClr val="FFFFFF"/>
                 </a:solidFill>
                 <a:latin typeface="Calibri" pitchFamily="34" charset="0"/>
-                <a:ea typeface="Calibri" pitchFamily="34" charset="-122"/>
-                <a:cs typeface="Calibri" pitchFamily="34" charset="-120"/>
+                <a:cs typeface="Amiri" pitchFamily="2" charset="-78"/>
               </a:rPr>
               <a:t>1</a:t>
             </a:r>
@@ -31226,8 +30665,7 @@
                   <a:srgbClr val="1B3B6F"/>
                 </a:solidFill>
                 <a:latin typeface="Calibri" pitchFamily="34" charset="0"/>
-                <a:ea typeface="Calibri" pitchFamily="34" charset="-122"/>
-                <a:cs typeface="Calibri" pitchFamily="34" charset="-120"/>
+                <a:cs typeface="Amiri" pitchFamily="2" charset="-78"/>
               </a:rPr>
               <a:t>What does </a:t>
             </a:r>
@@ -31239,9 +30677,8 @@
                 <a:solidFill>
                   <a:srgbClr val="1B3B6F"/>
                 </a:solidFill>
-                <a:latin typeface="Amiri" pitchFamily="34" charset="0"/>
-                <a:ea typeface="Amiri" pitchFamily="34" charset="-122"/>
-                <a:cs typeface="Amiri" pitchFamily="34" charset="-120"/>
+                <a:latin typeface="Amiri" pitchFamily="2" charset="-78"/>
+                <a:cs typeface="Amiri" pitchFamily="2" charset="-78"/>
               </a:rPr>
               <a:t>اِخْتِبَارٌ</a:t>
             </a:r>
@@ -31254,8 +30691,7 @@
                   <a:srgbClr val="1B3B6F"/>
                 </a:solidFill>
                 <a:latin typeface="Calibri" pitchFamily="34" charset="0"/>
-                <a:ea typeface="Calibri" pitchFamily="34" charset="-122"/>
-                <a:cs typeface="Calibri" pitchFamily="34" charset="-120"/>
+                <a:cs typeface="Amiri" pitchFamily="2" charset="-78"/>
               </a:rPr>
               <a:t> mean?</a:t>
             </a:r>
@@ -31318,8 +30754,7 @@
                   <a:srgbClr val="1B3B6F"/>
                 </a:solidFill>
                 <a:latin typeface="Calibri" pitchFamily="34" charset="0"/>
-                <a:ea typeface="Calibri" pitchFamily="34" charset="-122"/>
-                <a:cs typeface="Calibri" pitchFamily="34" charset="-120"/>
+                <a:cs typeface="Amiri" pitchFamily="2" charset="-78"/>
               </a:rPr>
               <a:t>A</a:t>
             </a:r>
@@ -31357,8 +30792,7 @@
                   <a:srgbClr val="1F2A37"/>
                 </a:solidFill>
                 <a:latin typeface="Calibri" pitchFamily="34" charset="0"/>
-                <a:ea typeface="Calibri" pitchFamily="34" charset="-122"/>
-                <a:cs typeface="Calibri" pitchFamily="34" charset="-120"/>
+                <a:cs typeface="Amiri" pitchFamily="2" charset="-78"/>
               </a:rPr>
               <a:t>a review</a:t>
             </a:r>
@@ -31421,8 +30855,7 @@
                   <a:srgbClr val="1B3B6F"/>
                 </a:solidFill>
                 <a:latin typeface="Calibri" pitchFamily="34" charset="0"/>
-                <a:ea typeface="Calibri" pitchFamily="34" charset="-122"/>
-                <a:cs typeface="Calibri" pitchFamily="34" charset="-120"/>
+                <a:cs typeface="Amiri" pitchFamily="2" charset="-78"/>
               </a:rPr>
               <a:t>B</a:t>
             </a:r>
@@ -31460,8 +30893,7 @@
                   <a:srgbClr val="1F2A37"/>
                 </a:solidFill>
                 <a:latin typeface="Calibri" pitchFamily="34" charset="0"/>
-                <a:ea typeface="Calibri" pitchFamily="34" charset="-122"/>
-                <a:cs typeface="Calibri" pitchFamily="34" charset="-120"/>
+                <a:cs typeface="Amiri" pitchFamily="2" charset="-78"/>
               </a:rPr>
               <a:t>a test</a:t>
             </a:r>
@@ -31524,8 +30956,7 @@
                   <a:srgbClr val="1B3B6F"/>
                 </a:solidFill>
                 <a:latin typeface="Calibri" pitchFamily="34" charset="0"/>
-                <a:ea typeface="Calibri" pitchFamily="34" charset="-122"/>
-                <a:cs typeface="Calibri" pitchFamily="34" charset="-120"/>
+                <a:cs typeface="Amiri" pitchFamily="2" charset="-78"/>
               </a:rPr>
               <a:t>C</a:t>
             </a:r>
@@ -31563,8 +30994,7 @@
                   <a:srgbClr val="1F2A37"/>
                 </a:solidFill>
                 <a:latin typeface="Calibri" pitchFamily="34" charset="0"/>
-                <a:ea typeface="Calibri" pitchFamily="34" charset="-122"/>
-                <a:cs typeface="Calibri" pitchFamily="34" charset="-120"/>
+                <a:cs typeface="Amiri" pitchFamily="2" charset="-78"/>
               </a:rPr>
               <a:t>an answer</a:t>
             </a:r>
@@ -31661,8 +31091,7 @@
                   <a:srgbClr val="FFFFFF"/>
                 </a:solidFill>
                 <a:latin typeface="Calibri" pitchFamily="34" charset="0"/>
-                <a:ea typeface="Calibri" pitchFamily="34" charset="-122"/>
-                <a:cs typeface="Calibri" pitchFamily="34" charset="-120"/>
+                <a:cs typeface="Amiri" pitchFamily="2" charset="-78"/>
               </a:rPr>
               <a:t>2</a:t>
             </a:r>
@@ -31700,8 +31129,7 @@
                   <a:srgbClr val="1B3B6F"/>
                 </a:solidFill>
                 <a:latin typeface="Calibri" pitchFamily="34" charset="0"/>
-                <a:ea typeface="Calibri" pitchFamily="34" charset="-122"/>
-                <a:cs typeface="Calibri" pitchFamily="34" charset="-120"/>
+                <a:cs typeface="Amiri" pitchFamily="2" charset="-78"/>
               </a:rPr>
               <a:t>What does </a:t>
             </a:r>
@@ -31713,9 +31141,8 @@
                 <a:solidFill>
                   <a:srgbClr val="1B3B6F"/>
                 </a:solidFill>
-                <a:latin typeface="Amiri" pitchFamily="34" charset="0"/>
-                <a:ea typeface="Amiri" pitchFamily="34" charset="-122"/>
-                <a:cs typeface="Amiri" pitchFamily="34" charset="-120"/>
+                <a:latin typeface="Amiri" pitchFamily="2" charset="-78"/>
+                <a:cs typeface="Amiri" pitchFamily="2" charset="-78"/>
               </a:rPr>
               <a:t>تَعْلِيمَاتٌ</a:t>
             </a:r>
@@ -31728,8 +31155,7 @@
                   <a:srgbClr val="1B3B6F"/>
                 </a:solidFill>
                 <a:latin typeface="Calibri" pitchFamily="34" charset="0"/>
-                <a:ea typeface="Calibri" pitchFamily="34" charset="-122"/>
-                <a:cs typeface="Calibri" pitchFamily="34" charset="-120"/>
+                <a:cs typeface="Amiri" pitchFamily="2" charset="-78"/>
               </a:rPr>
               <a:t> mean?</a:t>
             </a:r>
@@ -31792,8 +31218,7 @@
                   <a:srgbClr val="1B3B6F"/>
                 </a:solidFill>
                 <a:latin typeface="Calibri" pitchFamily="34" charset="0"/>
-                <a:ea typeface="Calibri" pitchFamily="34" charset="-122"/>
-                <a:cs typeface="Calibri" pitchFamily="34" charset="-120"/>
+                <a:cs typeface="Amiri" pitchFamily="2" charset="-78"/>
               </a:rPr>
               <a:t>A</a:t>
             </a:r>
@@ -31831,8 +31256,7 @@
                   <a:srgbClr val="1F2A37"/>
                 </a:solidFill>
                 <a:latin typeface="Calibri" pitchFamily="34" charset="0"/>
-                <a:ea typeface="Calibri" pitchFamily="34" charset="-122"/>
-                <a:cs typeface="Calibri" pitchFamily="34" charset="-120"/>
+                <a:cs typeface="Amiri" pitchFamily="2" charset="-78"/>
               </a:rPr>
               <a:t>instructions</a:t>
             </a:r>
@@ -31895,8 +31319,7 @@
                   <a:srgbClr val="1B3B6F"/>
                 </a:solidFill>
                 <a:latin typeface="Calibri" pitchFamily="34" charset="0"/>
-                <a:ea typeface="Calibri" pitchFamily="34" charset="-122"/>
-                <a:cs typeface="Calibri" pitchFamily="34" charset="-120"/>
+                <a:cs typeface="Amiri" pitchFamily="2" charset="-78"/>
               </a:rPr>
               <a:t>B</a:t>
             </a:r>
@@ -31934,8 +31357,7 @@
                   <a:srgbClr val="1F2A37"/>
                 </a:solidFill>
                 <a:latin typeface="Calibri" pitchFamily="34" charset="0"/>
-                <a:ea typeface="Calibri" pitchFamily="34" charset="-122"/>
-                <a:cs typeface="Calibri" pitchFamily="34" charset="-120"/>
+                <a:cs typeface="Amiri" pitchFamily="2" charset="-78"/>
               </a:rPr>
               <a:t>questions</a:t>
             </a:r>
@@ -31998,8 +31420,7 @@
                   <a:srgbClr val="1B3B6F"/>
                 </a:solidFill>
                 <a:latin typeface="Calibri" pitchFamily="34" charset="0"/>
-                <a:ea typeface="Calibri" pitchFamily="34" charset="-122"/>
-                <a:cs typeface="Calibri" pitchFamily="34" charset="-120"/>
+                <a:cs typeface="Amiri" pitchFamily="2" charset="-78"/>
               </a:rPr>
               <a:t>C</a:t>
             </a:r>
@@ -32037,8 +31458,7 @@
                   <a:srgbClr val="1F2A37"/>
                 </a:solidFill>
                 <a:latin typeface="Calibri" pitchFamily="34" charset="0"/>
-                <a:ea typeface="Calibri" pitchFamily="34" charset="-122"/>
-                <a:cs typeface="Calibri" pitchFamily="34" charset="-120"/>
+                <a:cs typeface="Amiri" pitchFamily="2" charset="-78"/>
               </a:rPr>
               <a:t>answers</a:t>
             </a:r>
@@ -32135,8 +31555,7 @@
                   <a:srgbClr val="FFFFFF"/>
                 </a:solidFill>
                 <a:latin typeface="Calibri" pitchFamily="34" charset="0"/>
-                <a:ea typeface="Calibri" pitchFamily="34" charset="-122"/>
-                <a:cs typeface="Calibri" pitchFamily="34" charset="-120"/>
+                <a:cs typeface="Amiri" pitchFamily="2" charset="-78"/>
               </a:rPr>
               <a:t>3</a:t>
             </a:r>
@@ -32174,8 +31593,7 @@
                   <a:srgbClr val="1B3B6F"/>
                 </a:solidFill>
                 <a:latin typeface="Calibri" pitchFamily="34" charset="0"/>
-                <a:ea typeface="Calibri" pitchFamily="34" charset="-122"/>
-                <a:cs typeface="Calibri" pitchFamily="34" charset="-120"/>
+                <a:cs typeface="Amiri" pitchFamily="2" charset="-78"/>
               </a:rPr>
               <a:t>Complete: </a:t>
             </a:r>
@@ -32187,9 +31605,8 @@
                 <a:solidFill>
                   <a:srgbClr val="1B3B6F"/>
                 </a:solidFill>
-                <a:latin typeface="Amiri" pitchFamily="34" charset="0"/>
-                <a:ea typeface="Amiri" pitchFamily="34" charset="-122"/>
-                <a:cs typeface="Amiri" pitchFamily="34" charset="-120"/>
+                <a:latin typeface="Amiri" pitchFamily="2" charset="-78"/>
+                <a:cs typeface="Amiri" pitchFamily="2" charset="-78"/>
               </a:rPr>
               <a:t>أُحِبُّ العُلُومَ</a:t>
             </a:r>
@@ -32202,8 +31619,7 @@
                   <a:srgbClr val="1B3B6F"/>
                 </a:solidFill>
                 <a:latin typeface="Calibri" pitchFamily="34" charset="0"/>
-                <a:ea typeface="Calibri" pitchFamily="34" charset="-122"/>
-                <a:cs typeface="Calibri" pitchFamily="34" charset="-120"/>
+                <a:cs typeface="Amiri" pitchFamily="2" charset="-78"/>
               </a:rPr>
               <a:t> ____ </a:t>
             </a:r>
@@ -32215,9 +31631,8 @@
                 <a:solidFill>
                   <a:srgbClr val="1B3B6F"/>
                 </a:solidFill>
-                <a:latin typeface="Amiri" pitchFamily="34" charset="0"/>
-                <a:ea typeface="Amiri" pitchFamily="34" charset="-122"/>
-                <a:cs typeface="Amiri" pitchFamily="34" charset="-120"/>
+                <a:latin typeface="Amiri" pitchFamily="2" charset="-78"/>
+                <a:cs typeface="Amiri" pitchFamily="2" charset="-78"/>
               </a:rPr>
               <a:t>مُفِيدَةٌ</a:t>
             </a:r>
@@ -32230,8 +31645,7 @@
                   <a:srgbClr val="1B3B6F"/>
                 </a:solidFill>
                 <a:latin typeface="Calibri" pitchFamily="34" charset="0"/>
-                <a:ea typeface="Calibri" pitchFamily="34" charset="-122"/>
-                <a:cs typeface="Calibri" pitchFamily="34" charset="-120"/>
+                <a:cs typeface="Amiri" pitchFamily="2" charset="-78"/>
               </a:rPr>
               <a:t>.</a:t>
             </a:r>
@@ -32294,8 +31708,7 @@
                   <a:srgbClr val="1B3B6F"/>
                 </a:solidFill>
                 <a:latin typeface="Calibri" pitchFamily="34" charset="0"/>
-                <a:ea typeface="Calibri" pitchFamily="34" charset="-122"/>
-                <a:cs typeface="Calibri" pitchFamily="34" charset="-120"/>
+                <a:cs typeface="Amiri" pitchFamily="2" charset="-78"/>
               </a:rPr>
               <a:t>A</a:t>
             </a:r>
@@ -32332,9 +31745,8 @@
                 <a:solidFill>
                   <a:srgbClr val="1F2A37"/>
                 </a:solidFill>
-                <a:latin typeface="Amiri" pitchFamily="34" charset="0"/>
-                <a:ea typeface="Amiri" pitchFamily="34" charset="-122"/>
-                <a:cs typeface="Amiri" pitchFamily="34" charset="-120"/>
+                <a:latin typeface="Amiri" pitchFamily="2" charset="-78"/>
+                <a:cs typeface="Amiri" pitchFamily="2" charset="-78"/>
               </a:rPr>
               <a:t>لِأَنَّهُ</a:t>
             </a:r>
@@ -32397,8 +31809,7 @@
                   <a:srgbClr val="1B3B6F"/>
                 </a:solidFill>
                 <a:latin typeface="Calibri" pitchFamily="34" charset="0"/>
-                <a:ea typeface="Calibri" pitchFamily="34" charset="-122"/>
-                <a:cs typeface="Calibri" pitchFamily="34" charset="-120"/>
+                <a:cs typeface="Amiri" pitchFamily="2" charset="-78"/>
               </a:rPr>
               <a:t>B</a:t>
             </a:r>
@@ -32435,9 +31846,8 @@
                 <a:solidFill>
                   <a:srgbClr val="1F2A37"/>
                 </a:solidFill>
-                <a:latin typeface="Amiri" pitchFamily="34" charset="0"/>
-                <a:ea typeface="Amiri" pitchFamily="34" charset="-122"/>
-                <a:cs typeface="Amiri" pitchFamily="34" charset="-120"/>
+                <a:latin typeface="Amiri" pitchFamily="2" charset="-78"/>
+                <a:cs typeface="Amiri" pitchFamily="2" charset="-78"/>
               </a:rPr>
               <a:t>لَكِنَّ</a:t>
             </a:r>
@@ -32500,8 +31910,7 @@
                   <a:srgbClr val="1B3B6F"/>
                 </a:solidFill>
                 <a:latin typeface="Calibri" pitchFamily="34" charset="0"/>
-                <a:ea typeface="Calibri" pitchFamily="34" charset="-122"/>
-                <a:cs typeface="Calibri" pitchFamily="34" charset="-120"/>
+                <a:cs typeface="Amiri" pitchFamily="2" charset="-78"/>
               </a:rPr>
               <a:t>C</a:t>
             </a:r>
@@ -32538,9 +31947,8 @@
                 <a:solidFill>
                   <a:srgbClr val="1F2A37"/>
                 </a:solidFill>
-                <a:latin typeface="Amiri" pitchFamily="34" charset="0"/>
-                <a:ea typeface="Amiri" pitchFamily="34" charset="-122"/>
-                <a:cs typeface="Amiri" pitchFamily="34" charset="-120"/>
+                <a:latin typeface="Amiri" pitchFamily="2" charset="-78"/>
+                <a:cs typeface="Amiri" pitchFamily="2" charset="-78"/>
               </a:rPr>
               <a:t>لِأَنَّهَا</a:t>
             </a:r>
@@ -32637,8 +32045,7 @@
                   <a:srgbClr val="FFFFFF"/>
                 </a:solidFill>
                 <a:latin typeface="Calibri" pitchFamily="34" charset="0"/>
-                <a:ea typeface="Calibri" pitchFamily="34" charset="-122"/>
-                <a:cs typeface="Calibri" pitchFamily="34" charset="-120"/>
+                <a:cs typeface="Amiri" pitchFamily="2" charset="-78"/>
               </a:rPr>
               <a:t>4</a:t>
             </a:r>
@@ -32675,9 +32082,8 @@
                 <a:solidFill>
                   <a:srgbClr val="1B3B6F"/>
                 </a:solidFill>
-                <a:latin typeface="Amiri" pitchFamily="34" charset="0"/>
-                <a:ea typeface="Amiri" pitchFamily="34" charset="-122"/>
-                <a:cs typeface="Amiri" pitchFamily="34" charset="-120"/>
+                <a:latin typeface="Amiri" pitchFamily="2" charset="-78"/>
+                <a:cs typeface="Amiri" pitchFamily="2" charset="-78"/>
               </a:rPr>
               <a:t>لَا يَجُوزُ اسْتِخْدَامُ الهَاتِفِ.</a:t>
             </a:r>
@@ -32740,8 +32146,7 @@
                   <a:srgbClr val="1B3B6F"/>
                 </a:solidFill>
                 <a:latin typeface="Calibri" pitchFamily="34" charset="0"/>
-                <a:ea typeface="Calibri" pitchFamily="34" charset="-122"/>
-                <a:cs typeface="Calibri" pitchFamily="34" charset="-120"/>
+                <a:cs typeface="Amiri" pitchFamily="2" charset="-78"/>
               </a:rPr>
               <a:t>A</a:t>
             </a:r>
@@ -32779,8 +32184,7 @@
                   <a:srgbClr val="1F2A37"/>
                 </a:solidFill>
                 <a:latin typeface="Calibri" pitchFamily="34" charset="0"/>
-                <a:ea typeface="Calibri" pitchFamily="34" charset="-122"/>
-                <a:cs typeface="Calibri" pitchFamily="34" charset="-120"/>
+                <a:cs typeface="Amiri" pitchFamily="2" charset="-78"/>
               </a:rPr>
               <a:t>Phone use is allowed.</a:t>
             </a:r>
@@ -32843,8 +32247,7 @@
                   <a:srgbClr val="1B3B6F"/>
                 </a:solidFill>
                 <a:latin typeface="Calibri" pitchFamily="34" charset="0"/>
-                <a:ea typeface="Calibri" pitchFamily="34" charset="-122"/>
-                <a:cs typeface="Calibri" pitchFamily="34" charset="-120"/>
+                <a:cs typeface="Amiri" pitchFamily="2" charset="-78"/>
               </a:rPr>
               <a:t>B</a:t>
             </a:r>
@@ -32882,8 +32285,7 @@
                   <a:srgbClr val="1F2A37"/>
                 </a:solidFill>
                 <a:latin typeface="Calibri" pitchFamily="34" charset="0"/>
-                <a:ea typeface="Calibri" pitchFamily="34" charset="-122"/>
-                <a:cs typeface="Calibri" pitchFamily="34" charset="-120"/>
+                <a:cs typeface="Amiri" pitchFamily="2" charset="-78"/>
               </a:rPr>
               <a:t>Phone use is preferred.</a:t>
             </a:r>
@@ -32946,8 +32348,7 @@
                   <a:srgbClr val="1B3B6F"/>
                 </a:solidFill>
                 <a:latin typeface="Calibri" pitchFamily="34" charset="0"/>
-                <a:ea typeface="Calibri" pitchFamily="34" charset="-122"/>
-                <a:cs typeface="Calibri" pitchFamily="34" charset="-120"/>
+                <a:cs typeface="Amiri" pitchFamily="2" charset="-78"/>
               </a:rPr>
               <a:t>C</a:t>
             </a:r>
@@ -32985,8 +32386,7 @@
                   <a:srgbClr val="1F2A37"/>
                 </a:solidFill>
                 <a:latin typeface="Calibri" pitchFamily="34" charset="0"/>
-                <a:ea typeface="Calibri" pitchFamily="34" charset="-122"/>
-                <a:cs typeface="Calibri" pitchFamily="34" charset="-120"/>
+                <a:cs typeface="Amiri" pitchFamily="2" charset="-78"/>
               </a:rPr>
               <a:t>Phone use is not allowed.</a:t>
             </a:r>
@@ -33083,8 +32483,7 @@
                   <a:srgbClr val="FFFFFF"/>
                 </a:solidFill>
                 <a:latin typeface="Calibri" pitchFamily="34" charset="0"/>
-                <a:ea typeface="Calibri" pitchFamily="34" charset="-122"/>
-                <a:cs typeface="Calibri" pitchFamily="34" charset="-120"/>
+                <a:cs typeface="Amiri" pitchFamily="2" charset="-78"/>
               </a:rPr>
               <a:t>5</a:t>
             </a:r>
@@ -33122,8 +32521,7 @@
                   <a:srgbClr val="1B3B6F"/>
                 </a:solidFill>
                 <a:latin typeface="Calibri" pitchFamily="34" charset="0"/>
-                <a:ea typeface="Calibri" pitchFamily="34" charset="-122"/>
-                <a:cs typeface="Calibri" pitchFamily="34" charset="-120"/>
+                <a:cs typeface="Amiri" pitchFamily="2" charset="-78"/>
               </a:rPr>
               <a:t>In a timetable question, what does </a:t>
             </a:r>
@@ -33135,9 +32533,8 @@
                 <a:solidFill>
                   <a:srgbClr val="1B3B6F"/>
                 </a:solidFill>
-                <a:latin typeface="Amiri" pitchFamily="34" charset="0"/>
-                <a:ea typeface="Amiri" pitchFamily="34" charset="-122"/>
-                <a:cs typeface="Amiri" pitchFamily="34" charset="-120"/>
+                <a:latin typeface="Amiri" pitchFamily="2" charset="-78"/>
+                <a:cs typeface="Amiri" pitchFamily="2" charset="-78"/>
               </a:rPr>
               <a:t>مَتَى</a:t>
             </a:r>
@@ -33150,8 +32547,7 @@
                   <a:srgbClr val="1B3B6F"/>
                 </a:solidFill>
                 <a:latin typeface="Calibri" pitchFamily="34" charset="0"/>
-                <a:ea typeface="Calibri" pitchFamily="34" charset="-122"/>
-                <a:cs typeface="Calibri" pitchFamily="34" charset="-120"/>
+                <a:cs typeface="Amiri" pitchFamily="2" charset="-78"/>
               </a:rPr>
               <a:t> ask for?</a:t>
             </a:r>
@@ -33214,8 +32610,7 @@
                   <a:srgbClr val="1B3B6F"/>
                 </a:solidFill>
                 <a:latin typeface="Calibri" pitchFamily="34" charset="0"/>
-                <a:ea typeface="Calibri" pitchFamily="34" charset="-122"/>
-                <a:cs typeface="Calibri" pitchFamily="34" charset="-120"/>
+                <a:cs typeface="Amiri" pitchFamily="2" charset="-78"/>
               </a:rPr>
               <a:t>A</a:t>
             </a:r>
@@ -33253,8 +32648,7 @@
                   <a:srgbClr val="1F2A37"/>
                 </a:solidFill>
                 <a:latin typeface="Calibri" pitchFamily="34" charset="0"/>
-                <a:ea typeface="Calibri" pitchFamily="34" charset="-122"/>
-                <a:cs typeface="Calibri" pitchFamily="34" charset="-120"/>
+                <a:cs typeface="Amiri" pitchFamily="2" charset="-78"/>
               </a:rPr>
               <a:t>a time or day</a:t>
             </a:r>
@@ -33317,8 +32711,7 @@
                   <a:srgbClr val="1B3B6F"/>
                 </a:solidFill>
                 <a:latin typeface="Calibri" pitchFamily="34" charset="0"/>
-                <a:ea typeface="Calibri" pitchFamily="34" charset="-122"/>
-                <a:cs typeface="Calibri" pitchFamily="34" charset="-120"/>
+                <a:cs typeface="Amiri" pitchFamily="2" charset="-78"/>
               </a:rPr>
               <a:t>B</a:t>
             </a:r>
@@ -33356,8 +32749,7 @@
                   <a:srgbClr val="1F2A37"/>
                 </a:solidFill>
                 <a:latin typeface="Calibri" pitchFamily="34" charset="0"/>
-                <a:ea typeface="Calibri" pitchFamily="34" charset="-122"/>
-                <a:cs typeface="Calibri" pitchFamily="34" charset="-120"/>
+                <a:cs typeface="Amiri" pitchFamily="2" charset="-78"/>
               </a:rPr>
               <a:t>a place</a:t>
             </a:r>
@@ -33420,8 +32812,7 @@
                   <a:srgbClr val="1B3B6F"/>
                 </a:solidFill>
                 <a:latin typeface="Calibri" pitchFamily="34" charset="0"/>
-                <a:ea typeface="Calibri" pitchFamily="34" charset="-122"/>
-                <a:cs typeface="Calibri" pitchFamily="34" charset="-120"/>
+                <a:cs typeface="Amiri" pitchFamily="2" charset="-78"/>
               </a:rPr>
               <a:t>C</a:t>
             </a:r>
@@ -33459,8 +32850,7 @@
                   <a:srgbClr val="1F2A37"/>
                 </a:solidFill>
                 <a:latin typeface="Calibri" pitchFamily="34" charset="0"/>
-                <a:ea typeface="Calibri" pitchFamily="34" charset="-122"/>
-                <a:cs typeface="Calibri" pitchFamily="34" charset="-120"/>
+                <a:cs typeface="Amiri" pitchFamily="2" charset="-78"/>
               </a:rPr>
               <a:t>a reason</a:t>
             </a:r>
@@ -33532,8 +32922,7 @@
                   <a:srgbClr val="0E7C86"/>
                 </a:solidFill>
                 <a:latin typeface="Calibri" pitchFamily="34" charset="0"/>
-                <a:ea typeface="Calibri" pitchFamily="34" charset="-122"/>
-                <a:cs typeface="Calibri" pitchFamily="34" charset="-120"/>
+                <a:cs typeface="Amiri" pitchFamily="2" charset="-78"/>
               </a:rPr>
               <a:t>HOW TO ANSWER</a:t>
             </a:r>
@@ -33571,8 +32960,7 @@
                   <a:srgbClr val="1F2A37"/>
                 </a:solidFill>
                 <a:latin typeface="Calibri" pitchFamily="34" charset="0"/>
-                <a:ea typeface="Calibri" pitchFamily="34" charset="-122"/>
-                <a:cs typeface="Calibri" pitchFamily="34" charset="-120"/>
+                <a:cs typeface="Amiri" pitchFamily="2" charset="-78"/>
               </a:rPr>
               <a:t>Work on your own in silence.</a:t>
             </a:r>
@@ -33588,8 +32976,7 @@
                   <a:srgbClr val="1F2A37"/>
                 </a:solidFill>
                 <a:latin typeface="Calibri" pitchFamily="34" charset="0"/>
-                <a:ea typeface="Calibri" pitchFamily="34" charset="-122"/>
-                <a:cs typeface="Calibri" pitchFamily="34" charset="-120"/>
+                <a:cs typeface="Amiri" pitchFamily="2" charset="-78"/>
               </a:rPr>
               <a:t>When the timer ends, type in the chat:</a:t>
             </a:r>
@@ -33627,8 +33014,7 @@
                   <a:srgbClr val="1B3B6F"/>
                 </a:solidFill>
                 <a:latin typeface="Consolas" pitchFamily="34" charset="0"/>
-                <a:ea typeface="Consolas" pitchFamily="34" charset="-122"/>
-                <a:cs typeface="Consolas" pitchFamily="34" charset="-120"/>
+                <a:cs typeface="Amiri" pitchFamily="2" charset="-78"/>
               </a:rPr>
               <a:t>1_  2_  3_  4_  5_</a:t>
             </a:r>
@@ -33666,8 +33052,7 @@
                   <a:srgbClr val="0E7C86"/>
                 </a:solidFill>
                 <a:latin typeface="Calibri" pitchFamily="34" charset="0"/>
-                <a:ea typeface="Calibri" pitchFamily="34" charset="-122"/>
-                <a:cs typeface="Calibri" pitchFamily="34" charset="-120"/>
+                <a:cs typeface="Amiri" pitchFamily="2" charset="-78"/>
               </a:rPr>
               <a:t>⏱  5 : 00</a:t>
             </a:r>
@@ -33705,8 +33090,7 @@
                   <a:srgbClr val="8A93A0"/>
                 </a:solidFill>
                 <a:latin typeface="Calibri" pitchFamily="34" charset="0"/>
-                <a:ea typeface="Calibri" pitchFamily="34" charset="-122"/>
-                <a:cs typeface="Calibri" pitchFamily="34" charset="-120"/>
+                <a:cs typeface="Amiri" pitchFamily="2" charset="-78"/>
               </a:rPr>
               <a:t>4 / 23</a:t>
             </a:r>
@@ -33800,9 +33184,8 @@
                 <a:solidFill>
                   <a:srgbClr val="D4AF37"/>
                 </a:solidFill>
-                <a:latin typeface="Amiri" pitchFamily="34" charset="0"/>
-                <a:ea typeface="Amiri" pitchFamily="34" charset="-122"/>
-                <a:cs typeface="Amiri" pitchFamily="34" charset="-120"/>
+                <a:latin typeface="Amiri" pitchFamily="2" charset="-78"/>
+                <a:cs typeface="Amiri" pitchFamily="2" charset="-78"/>
               </a:rPr>
               <a:t>م</a:t>
             </a:r>
@@ -33840,8 +33223,7 @@
                   <a:srgbClr val="1B3B6F"/>
                 </a:solidFill>
                 <a:latin typeface="Cambria" pitchFamily="34" charset="0"/>
-                <a:ea typeface="Cambria" pitchFamily="34" charset="-122"/>
-                <a:cs typeface="Cambria" pitchFamily="34" charset="-120"/>
+                <a:cs typeface="Amiri" pitchFamily="2" charset="-78"/>
               </a:rPr>
               <a:t>Al Madina Online School</a:t>
             </a:r>
@@ -33879,8 +33261,7 @@
                   <a:srgbClr val="8A6D1E"/>
                 </a:solidFill>
                 <a:latin typeface="Calibri" pitchFamily="34" charset="0"/>
-                <a:ea typeface="Calibri" pitchFamily="34" charset="-122"/>
-                <a:cs typeface="Calibri" pitchFamily="34" charset="-120"/>
+                <a:cs typeface="Amiri" pitchFamily="2" charset="-78"/>
               </a:rPr>
               <a:t>ARABIC DEPARTMENT · MIFTAH ARABIC · IGCSE 0544</a:t>
             </a:r>
@@ -33945,8 +33326,7 @@
                   <a:srgbClr val="FFFFFF"/>
                 </a:solidFill>
                 <a:latin typeface="Calibri" pitchFamily="34" charset="0"/>
-                <a:ea typeface="Calibri" pitchFamily="34" charset="-122"/>
-                <a:cs typeface="Calibri" pitchFamily="34" charset="-120"/>
+                <a:cs typeface="Amiri" pitchFamily="2" charset="-78"/>
               </a:rPr>
               <a:t>F4-L12 · F4 Assessment</a:t>
             </a:r>
@@ -34011,8 +33391,7 @@
                   <a:srgbClr val="FFFFFF"/>
                 </a:solidFill>
                 <a:latin typeface="Calibri" pitchFamily="34" charset="0"/>
-                <a:ea typeface="Calibri" pitchFamily="34" charset="-122"/>
-                <a:cs typeface="Calibri" pitchFamily="34" charset="-120"/>
+                <a:cs typeface="Amiri" pitchFamily="2" charset="-78"/>
               </a:rPr>
               <a:t>DO NOW · 2 MIN</a:t>
             </a:r>
@@ -34050,8 +33429,7 @@
                   <a:srgbClr val="0E7C86"/>
                 </a:solidFill>
                 <a:latin typeface="Calibri" pitchFamily="34" charset="0"/>
-                <a:ea typeface="Calibri" pitchFamily="34" charset="-122"/>
-                <a:cs typeface="Calibri" pitchFamily="34" charset="-120"/>
+                <a:cs typeface="Amiri" pitchFamily="2" charset="-78"/>
               </a:rPr>
               <a:t>DO NOW · ANSWERS AND REASONS</a:t>
             </a:r>
@@ -34089,8 +33467,7 @@
                   <a:srgbClr val="1B3B6F"/>
                 </a:solidFill>
                 <a:latin typeface="Cambria" pitchFamily="34" charset="0"/>
-                <a:ea typeface="Cambria" pitchFamily="34" charset="-122"/>
-                <a:cs typeface="Cambria" pitchFamily="34" charset="-120"/>
+                <a:cs typeface="Amiri" pitchFamily="2" charset="-78"/>
               </a:rPr>
               <a:t>Let’s check — and explain why</a:t>
             </a:r>
@@ -34127,9 +33504,8 @@
                 <a:solidFill>
                   <a:srgbClr val="8A6D1E"/>
                 </a:solidFill>
-                <a:latin typeface="Amiri" pitchFamily="34" charset="0"/>
-                <a:ea typeface="Amiri" pitchFamily="34" charset="-122"/>
-                <a:cs typeface="Amiri" pitchFamily="34" charset="-120"/>
+                <a:latin typeface="Amiri" pitchFamily="2" charset="-78"/>
+                <a:cs typeface="Amiri" pitchFamily="2" charset="-78"/>
               </a:rPr>
               <a:t>الإِجَابَاتُ وَالتَّعْلِيلُ</a:t>
             </a:r>
@@ -34167,8 +33543,7 @@
                   <a:srgbClr val="8A93A0"/>
                 </a:solidFill>
                 <a:latin typeface="Calibri" pitchFamily="34" charset="0"/>
-                <a:ea typeface="Calibri" pitchFamily="34" charset="-122"/>
-                <a:cs typeface="Calibri" pitchFamily="34" charset="-120"/>
+                <a:cs typeface="Amiri" pitchFamily="2" charset="-78"/>
               </a:rPr>
               <a:t>Miftah Arabic · Foundation F4 · My School · F4-L12</a:t>
             </a:r>
@@ -34265,8 +33640,7 @@
                   <a:srgbClr val="FFFFFF"/>
                 </a:solidFill>
                 <a:latin typeface="Calibri" pitchFamily="34" charset="0"/>
-                <a:ea typeface="Calibri" pitchFamily="34" charset="-122"/>
-                <a:cs typeface="Calibri" pitchFamily="34" charset="-120"/>
+                <a:cs typeface="Amiri" pitchFamily="2" charset="-78"/>
               </a:rPr>
               <a:t>1</a:t>
             </a:r>
@@ -34304,8 +33678,7 @@
                   <a:srgbClr val="1B3B6F"/>
                 </a:solidFill>
                 <a:latin typeface="Calibri" pitchFamily="34" charset="0"/>
-                <a:ea typeface="Calibri" pitchFamily="34" charset="-122"/>
-                <a:cs typeface="Calibri" pitchFamily="34" charset="-120"/>
+                <a:cs typeface="Amiri" pitchFamily="2" charset="-78"/>
               </a:rPr>
               <a:t>What does </a:t>
             </a:r>
@@ -34317,9 +33690,8 @@
                 <a:solidFill>
                   <a:srgbClr val="1B3B6F"/>
                 </a:solidFill>
-                <a:latin typeface="Amiri" pitchFamily="34" charset="0"/>
-                <a:ea typeface="Amiri" pitchFamily="34" charset="-122"/>
-                <a:cs typeface="Amiri" pitchFamily="34" charset="-120"/>
+                <a:latin typeface="Amiri" pitchFamily="2" charset="-78"/>
+                <a:cs typeface="Amiri" pitchFamily="2" charset="-78"/>
               </a:rPr>
               <a:t>اِخْتِبَارٌ</a:t>
             </a:r>
@@ -34332,8 +33704,7 @@
                   <a:srgbClr val="1B3B6F"/>
                 </a:solidFill>
                 <a:latin typeface="Calibri" pitchFamily="34" charset="0"/>
-                <a:ea typeface="Calibri" pitchFamily="34" charset="-122"/>
-                <a:cs typeface="Calibri" pitchFamily="34" charset="-120"/>
+                <a:cs typeface="Amiri" pitchFamily="2" charset="-78"/>
               </a:rPr>
               <a:t> mean?</a:t>
             </a:r>
@@ -34396,8 +33767,7 @@
                   <a:srgbClr val="1B3B6F"/>
                 </a:solidFill>
                 <a:latin typeface="Calibri" pitchFamily="34" charset="0"/>
-                <a:ea typeface="Calibri" pitchFamily="34" charset="-122"/>
-                <a:cs typeface="Calibri" pitchFamily="34" charset="-120"/>
+                <a:cs typeface="Amiri" pitchFamily="2" charset="-78"/>
               </a:rPr>
               <a:t>A</a:t>
             </a:r>
@@ -34435,8 +33805,7 @@
                   <a:srgbClr val="9AA1AB"/>
                 </a:solidFill>
                 <a:latin typeface="Calibri" pitchFamily="34" charset="0"/>
-                <a:ea typeface="Calibri" pitchFamily="34" charset="-122"/>
-                <a:cs typeface="Calibri" pitchFamily="34" charset="-120"/>
+                <a:cs typeface="Amiri" pitchFamily="2" charset="-78"/>
               </a:rPr>
               <a:t>a review</a:t>
             </a:r>
@@ -34526,8 +33895,7 @@
                   <a:srgbClr val="FFFFFF"/>
                 </a:solidFill>
                 <a:latin typeface="Calibri" pitchFamily="34" charset="0"/>
-                <a:ea typeface="Calibri" pitchFamily="34" charset="-122"/>
-                <a:cs typeface="Calibri" pitchFamily="34" charset="-120"/>
+                <a:cs typeface="Amiri" pitchFamily="2" charset="-78"/>
               </a:rPr>
               <a:t>B</a:t>
             </a:r>
@@ -34565,8 +33933,7 @@
                   <a:srgbClr val="1F2A37"/>
                 </a:solidFill>
                 <a:latin typeface="Calibri" pitchFamily="34" charset="0"/>
-                <a:ea typeface="Calibri" pitchFamily="34" charset="-122"/>
-                <a:cs typeface="Calibri" pitchFamily="34" charset="-120"/>
+                <a:cs typeface="Amiri" pitchFamily="2" charset="-78"/>
               </a:rPr>
               <a:t>a test</a:t>
             </a:r>
@@ -34629,8 +33996,7 @@
                   <a:srgbClr val="1B3B6F"/>
                 </a:solidFill>
                 <a:latin typeface="Calibri" pitchFamily="34" charset="0"/>
-                <a:ea typeface="Calibri" pitchFamily="34" charset="-122"/>
-                <a:cs typeface="Calibri" pitchFamily="34" charset="-120"/>
+                <a:cs typeface="Amiri" pitchFamily="2" charset="-78"/>
               </a:rPr>
               <a:t>C</a:t>
             </a:r>
@@ -34668,8 +34034,7 @@
                   <a:srgbClr val="9AA1AB"/>
                 </a:solidFill>
                 <a:latin typeface="Calibri" pitchFamily="34" charset="0"/>
-                <a:ea typeface="Calibri" pitchFamily="34" charset="-122"/>
-                <a:cs typeface="Calibri" pitchFamily="34" charset="-120"/>
+                <a:cs typeface="Amiri" pitchFamily="2" charset="-78"/>
               </a:rPr>
               <a:t>an answer</a:t>
             </a:r>
@@ -34707,8 +34072,7 @@
                   <a:srgbClr val="8A6D1E"/>
                 </a:solidFill>
                 <a:latin typeface="Calibri" pitchFamily="34" charset="0"/>
-                <a:ea typeface="Calibri" pitchFamily="34" charset="-122"/>
-                <a:cs typeface="Calibri" pitchFamily="34" charset="-120"/>
+                <a:cs typeface="Amiri" pitchFamily="2" charset="-78"/>
               </a:rPr>
               <a:t>Prepared at home (F4-L11).</a:t>
             </a:r>
@@ -34805,8 +34169,7 @@
                   <a:srgbClr val="FFFFFF"/>
                 </a:solidFill>
                 <a:latin typeface="Calibri" pitchFamily="34" charset="0"/>
-                <a:ea typeface="Calibri" pitchFamily="34" charset="-122"/>
-                <a:cs typeface="Calibri" pitchFamily="34" charset="-120"/>
+                <a:cs typeface="Amiri" pitchFamily="2" charset="-78"/>
               </a:rPr>
               <a:t>2</a:t>
             </a:r>
@@ -34844,8 +34207,7 @@
                   <a:srgbClr val="1B3B6F"/>
                 </a:solidFill>
                 <a:latin typeface="Calibri" pitchFamily="34" charset="0"/>
-                <a:ea typeface="Calibri" pitchFamily="34" charset="-122"/>
-                <a:cs typeface="Calibri" pitchFamily="34" charset="-120"/>
+                <a:cs typeface="Amiri" pitchFamily="2" charset="-78"/>
               </a:rPr>
               <a:t>What does </a:t>
             </a:r>
@@ -34857,9 +34219,8 @@
                 <a:solidFill>
                   <a:srgbClr val="1B3B6F"/>
                 </a:solidFill>
-                <a:latin typeface="Amiri" pitchFamily="34" charset="0"/>
-                <a:ea typeface="Amiri" pitchFamily="34" charset="-122"/>
-                <a:cs typeface="Amiri" pitchFamily="34" charset="-120"/>
+                <a:latin typeface="Amiri" pitchFamily="2" charset="-78"/>
+                <a:cs typeface="Amiri" pitchFamily="2" charset="-78"/>
               </a:rPr>
               <a:t>تَعْلِيمَاتٌ</a:t>
             </a:r>
@@ -34872,8 +34233,7 @@
                   <a:srgbClr val="1B3B6F"/>
                 </a:solidFill>
                 <a:latin typeface="Calibri" pitchFamily="34" charset="0"/>
-                <a:ea typeface="Calibri" pitchFamily="34" charset="-122"/>
-                <a:cs typeface="Calibri" pitchFamily="34" charset="-120"/>
+                <a:cs typeface="Amiri" pitchFamily="2" charset="-78"/>
               </a:rPr>
               <a:t> mean?</a:t>
             </a:r>
@@ -34963,8 +34323,7 @@
                   <a:srgbClr val="FFFFFF"/>
                 </a:solidFill>
                 <a:latin typeface="Calibri" pitchFamily="34" charset="0"/>
-                <a:ea typeface="Calibri" pitchFamily="34" charset="-122"/>
-                <a:cs typeface="Calibri" pitchFamily="34" charset="-120"/>
+                <a:cs typeface="Amiri" pitchFamily="2" charset="-78"/>
               </a:rPr>
               <a:t>A</a:t>
             </a:r>
@@ -35002,8 +34361,7 @@
                   <a:srgbClr val="1F2A37"/>
                 </a:solidFill>
                 <a:latin typeface="Calibri" pitchFamily="34" charset="0"/>
-                <a:ea typeface="Calibri" pitchFamily="34" charset="-122"/>
-                <a:cs typeface="Calibri" pitchFamily="34" charset="-120"/>
+                <a:cs typeface="Amiri" pitchFamily="2" charset="-78"/>
               </a:rPr>
               <a:t>instructions</a:t>
             </a:r>
@@ -35066,8 +34424,7 @@
                   <a:srgbClr val="1B3B6F"/>
                 </a:solidFill>
                 <a:latin typeface="Calibri" pitchFamily="34" charset="0"/>
-                <a:ea typeface="Calibri" pitchFamily="34" charset="-122"/>
-                <a:cs typeface="Calibri" pitchFamily="34" charset="-120"/>
+                <a:cs typeface="Amiri" pitchFamily="2" charset="-78"/>
               </a:rPr>
               <a:t>B</a:t>
             </a:r>
@@ -35105,8 +34462,7 @@
                   <a:srgbClr val="9AA1AB"/>
                 </a:solidFill>
                 <a:latin typeface="Calibri" pitchFamily="34" charset="0"/>
-                <a:ea typeface="Calibri" pitchFamily="34" charset="-122"/>
-                <a:cs typeface="Calibri" pitchFamily="34" charset="-120"/>
+                <a:cs typeface="Amiri" pitchFamily="2" charset="-78"/>
               </a:rPr>
               <a:t>questions</a:t>
             </a:r>
@@ -35169,8 +34525,7 @@
                   <a:srgbClr val="1B3B6F"/>
                 </a:solidFill>
                 <a:latin typeface="Calibri" pitchFamily="34" charset="0"/>
-                <a:ea typeface="Calibri" pitchFamily="34" charset="-122"/>
-                <a:cs typeface="Calibri" pitchFamily="34" charset="-120"/>
+                <a:cs typeface="Amiri" pitchFamily="2" charset="-78"/>
               </a:rPr>
               <a:t>C</a:t>
             </a:r>
@@ -35208,8 +34563,7 @@
                   <a:srgbClr val="9AA1AB"/>
                 </a:solidFill>
                 <a:latin typeface="Calibri" pitchFamily="34" charset="0"/>
-                <a:ea typeface="Calibri" pitchFamily="34" charset="-122"/>
-                <a:cs typeface="Calibri" pitchFamily="34" charset="-120"/>
+                <a:cs typeface="Amiri" pitchFamily="2" charset="-78"/>
               </a:rPr>
               <a:t>answers</a:t>
             </a:r>
@@ -35247,8 +34601,7 @@
                   <a:srgbClr val="8A6D1E"/>
                 </a:solidFill>
                 <a:latin typeface="Calibri" pitchFamily="34" charset="0"/>
-                <a:ea typeface="Calibri" pitchFamily="34" charset="-122"/>
-                <a:cs typeface="Calibri" pitchFamily="34" charset="-120"/>
+                <a:cs typeface="Amiri" pitchFamily="2" charset="-78"/>
               </a:rPr>
               <a:t>Prepared at home (F4-L11).</a:t>
             </a:r>
@@ -35345,8 +34698,7 @@
                   <a:srgbClr val="FFFFFF"/>
                 </a:solidFill>
                 <a:latin typeface="Calibri" pitchFamily="34" charset="0"/>
-                <a:ea typeface="Calibri" pitchFamily="34" charset="-122"/>
-                <a:cs typeface="Calibri" pitchFamily="34" charset="-120"/>
+                <a:cs typeface="Amiri" pitchFamily="2" charset="-78"/>
               </a:rPr>
               <a:t>3</a:t>
             </a:r>
@@ -35384,8 +34736,7 @@
                   <a:srgbClr val="1B3B6F"/>
                 </a:solidFill>
                 <a:latin typeface="Calibri" pitchFamily="34" charset="0"/>
-                <a:ea typeface="Calibri" pitchFamily="34" charset="-122"/>
-                <a:cs typeface="Calibri" pitchFamily="34" charset="-120"/>
+                <a:cs typeface="Amiri" pitchFamily="2" charset="-78"/>
               </a:rPr>
               <a:t>Complete: </a:t>
             </a:r>
@@ -35397,9 +34748,8 @@
                 <a:solidFill>
                   <a:srgbClr val="1B3B6F"/>
                 </a:solidFill>
-                <a:latin typeface="Amiri" pitchFamily="34" charset="0"/>
-                <a:ea typeface="Amiri" pitchFamily="34" charset="-122"/>
-                <a:cs typeface="Amiri" pitchFamily="34" charset="-120"/>
+                <a:latin typeface="Amiri" pitchFamily="2" charset="-78"/>
+                <a:cs typeface="Amiri" pitchFamily="2" charset="-78"/>
               </a:rPr>
               <a:t>أُحِبُّ العُلُومَ</a:t>
             </a:r>
@@ -35412,8 +34762,7 @@
                   <a:srgbClr val="1B3B6F"/>
                 </a:solidFill>
                 <a:latin typeface="Calibri" pitchFamily="34" charset="0"/>
-                <a:ea typeface="Calibri" pitchFamily="34" charset="-122"/>
-                <a:cs typeface="Calibri" pitchFamily="34" charset="-120"/>
+                <a:cs typeface="Amiri" pitchFamily="2" charset="-78"/>
               </a:rPr>
               <a:t> ____ </a:t>
             </a:r>
@@ -35425,9 +34774,8 @@
                 <a:solidFill>
                   <a:srgbClr val="1B3B6F"/>
                 </a:solidFill>
-                <a:latin typeface="Amiri" pitchFamily="34" charset="0"/>
-                <a:ea typeface="Amiri" pitchFamily="34" charset="-122"/>
-                <a:cs typeface="Amiri" pitchFamily="34" charset="-120"/>
+                <a:latin typeface="Amiri" pitchFamily="2" charset="-78"/>
+                <a:cs typeface="Amiri" pitchFamily="2" charset="-78"/>
               </a:rPr>
               <a:t>مُفِيدَةٌ</a:t>
             </a:r>
@@ -35440,8 +34788,7 @@
                   <a:srgbClr val="1B3B6F"/>
                 </a:solidFill>
                 <a:latin typeface="Calibri" pitchFamily="34" charset="0"/>
-                <a:ea typeface="Calibri" pitchFamily="34" charset="-122"/>
-                <a:cs typeface="Calibri" pitchFamily="34" charset="-120"/>
+                <a:cs typeface="Amiri" pitchFamily="2" charset="-78"/>
               </a:rPr>
               <a:t>.</a:t>
             </a:r>
@@ -35504,8 +34851,7 @@
                   <a:srgbClr val="1B3B6F"/>
                 </a:solidFill>
                 <a:latin typeface="Calibri" pitchFamily="34" charset="0"/>
-                <a:ea typeface="Calibri" pitchFamily="34" charset="-122"/>
-                <a:cs typeface="Calibri" pitchFamily="34" charset="-120"/>
+                <a:cs typeface="Amiri" pitchFamily="2" charset="-78"/>
               </a:rPr>
               <a:t>A</a:t>
             </a:r>
@@ -35542,9 +34888,8 @@
                 <a:solidFill>
                   <a:srgbClr val="9AA1AB"/>
                 </a:solidFill>
-                <a:latin typeface="Amiri" pitchFamily="34" charset="0"/>
-                <a:ea typeface="Amiri" pitchFamily="34" charset="-122"/>
-                <a:cs typeface="Amiri" pitchFamily="34" charset="-120"/>
+                <a:latin typeface="Amiri" pitchFamily="2" charset="-78"/>
+                <a:cs typeface="Amiri" pitchFamily="2" charset="-78"/>
               </a:rPr>
               <a:t>لِأَنَّهُ</a:t>
             </a:r>
@@ -35607,8 +34952,7 @@
                   <a:srgbClr val="1B3B6F"/>
                 </a:solidFill>
                 <a:latin typeface="Calibri" pitchFamily="34" charset="0"/>
-                <a:ea typeface="Calibri" pitchFamily="34" charset="-122"/>
-                <a:cs typeface="Calibri" pitchFamily="34" charset="-120"/>
+                <a:cs typeface="Amiri" pitchFamily="2" charset="-78"/>
               </a:rPr>
               <a:t>B</a:t>
             </a:r>
@@ -35645,9 +34989,8 @@
                 <a:solidFill>
                   <a:srgbClr val="9AA1AB"/>
                 </a:solidFill>
-                <a:latin typeface="Amiri" pitchFamily="34" charset="0"/>
-                <a:ea typeface="Amiri" pitchFamily="34" charset="-122"/>
-                <a:cs typeface="Amiri" pitchFamily="34" charset="-120"/>
+                <a:latin typeface="Amiri" pitchFamily="2" charset="-78"/>
+                <a:cs typeface="Amiri" pitchFamily="2" charset="-78"/>
               </a:rPr>
               <a:t>لَكِنَّ</a:t>
             </a:r>
@@ -35737,8 +35080,7 @@
                   <a:srgbClr val="FFFFFF"/>
                 </a:solidFill>
                 <a:latin typeface="Calibri" pitchFamily="34" charset="0"/>
-                <a:ea typeface="Calibri" pitchFamily="34" charset="-122"/>
-                <a:cs typeface="Calibri" pitchFamily="34" charset="-120"/>
+                <a:cs typeface="Amiri" pitchFamily="2" charset="-78"/>
               </a:rPr>
               <a:t>C</a:t>
             </a:r>
@@ -35775,9 +35117,8 @@
                 <a:solidFill>
                   <a:srgbClr val="1F2A37"/>
                 </a:solidFill>
-                <a:latin typeface="Amiri" pitchFamily="34" charset="0"/>
-                <a:ea typeface="Amiri" pitchFamily="34" charset="-122"/>
-                <a:cs typeface="Amiri" pitchFamily="34" charset="-120"/>
+                <a:latin typeface="Amiri" pitchFamily="2" charset="-78"/>
+                <a:cs typeface="Amiri" pitchFamily="2" charset="-78"/>
               </a:rPr>
               <a:t>لِأَنَّهَا</a:t>
             </a:r>
@@ -35814,9 +35155,8 @@
                 <a:solidFill>
                   <a:srgbClr val="8A6D1E"/>
                 </a:solidFill>
-                <a:latin typeface="Amiri" pitchFamily="34" charset="0"/>
-                <a:ea typeface="Amiri" pitchFamily="34" charset="-122"/>
-                <a:cs typeface="Amiri" pitchFamily="34" charset="-120"/>
+                <a:latin typeface="Amiri" pitchFamily="2" charset="-78"/>
+                <a:cs typeface="Amiri" pitchFamily="2" charset="-78"/>
               </a:rPr>
               <a:t>العُلُومُ</a:t>
             </a:r>
@@ -35829,8 +35169,7 @@
                   <a:srgbClr val="8A6D1E"/>
                 </a:solidFill>
                 <a:latin typeface="Calibri" pitchFamily="34" charset="0"/>
-                <a:ea typeface="Calibri" pitchFamily="34" charset="-122"/>
-                <a:cs typeface="Calibri" pitchFamily="34" charset="-120"/>
+                <a:cs typeface="Amiri" pitchFamily="2" charset="-78"/>
               </a:rPr>
               <a:t> is treated as feminine: li-annahā + mufīda (website revision arcade).</a:t>
             </a:r>
@@ -35927,8 +35266,7 @@
                   <a:srgbClr val="FFFFFF"/>
                 </a:solidFill>
                 <a:latin typeface="Calibri" pitchFamily="34" charset="0"/>
-                <a:ea typeface="Calibri" pitchFamily="34" charset="-122"/>
-                <a:cs typeface="Calibri" pitchFamily="34" charset="-120"/>
+                <a:cs typeface="Amiri" pitchFamily="2" charset="-78"/>
               </a:rPr>
               <a:t>4</a:t>
             </a:r>
@@ -35965,9 +35303,8 @@
                 <a:solidFill>
                   <a:srgbClr val="1B3B6F"/>
                 </a:solidFill>
-                <a:latin typeface="Amiri" pitchFamily="34" charset="0"/>
-                <a:ea typeface="Amiri" pitchFamily="34" charset="-122"/>
-                <a:cs typeface="Amiri" pitchFamily="34" charset="-120"/>
+                <a:latin typeface="Amiri" pitchFamily="2" charset="-78"/>
+                <a:cs typeface="Amiri" pitchFamily="2" charset="-78"/>
               </a:rPr>
               <a:t>لَا يَجُوزُ اسْتِخْدَامُ الهَاتِفِ.</a:t>
             </a:r>
@@ -36030,8 +35367,7 @@
                   <a:srgbClr val="1B3B6F"/>
                 </a:solidFill>
                 <a:latin typeface="Calibri" pitchFamily="34" charset="0"/>
-                <a:ea typeface="Calibri" pitchFamily="34" charset="-122"/>
-                <a:cs typeface="Calibri" pitchFamily="34" charset="-120"/>
+                <a:cs typeface="Amiri" pitchFamily="2" charset="-78"/>
               </a:rPr>
               <a:t>A</a:t>
             </a:r>
@@ -36069,8 +35405,7 @@
                   <a:srgbClr val="9AA1AB"/>
                 </a:solidFill>
                 <a:latin typeface="Calibri" pitchFamily="34" charset="0"/>
-                <a:ea typeface="Calibri" pitchFamily="34" charset="-122"/>
-                <a:cs typeface="Calibri" pitchFamily="34" charset="-120"/>
+                <a:cs typeface="Amiri" pitchFamily="2" charset="-78"/>
               </a:rPr>
               <a:t>Phone use is allowed.</a:t>
             </a:r>
@@ -36133,8 +35468,7 @@
                   <a:srgbClr val="1B3B6F"/>
                 </a:solidFill>
                 <a:latin typeface="Calibri" pitchFamily="34" charset="0"/>
-                <a:ea typeface="Calibri" pitchFamily="34" charset="-122"/>
-                <a:cs typeface="Calibri" pitchFamily="34" charset="-120"/>
+                <a:cs typeface="Amiri" pitchFamily="2" charset="-78"/>
               </a:rPr>
               <a:t>B</a:t>
             </a:r>
@@ -36172,8 +35506,7 @@
                   <a:srgbClr val="9AA1AB"/>
                 </a:solidFill>
                 <a:latin typeface="Calibri" pitchFamily="34" charset="0"/>
-                <a:ea typeface="Calibri" pitchFamily="34" charset="-122"/>
-                <a:cs typeface="Calibri" pitchFamily="34" charset="-120"/>
+                <a:cs typeface="Amiri" pitchFamily="2" charset="-78"/>
               </a:rPr>
               <a:t>Phone use is preferred.</a:t>
             </a:r>
@@ -36263,8 +35596,7 @@
                   <a:srgbClr val="FFFFFF"/>
                 </a:solidFill>
                 <a:latin typeface="Calibri" pitchFamily="34" charset="0"/>
-                <a:ea typeface="Calibri" pitchFamily="34" charset="-122"/>
-                <a:cs typeface="Calibri" pitchFamily="34" charset="-120"/>
+                <a:cs typeface="Amiri" pitchFamily="2" charset="-78"/>
               </a:rPr>
               <a:t>C</a:t>
             </a:r>
@@ -36302,8 +35634,7 @@
                   <a:srgbClr val="1F2A37"/>
                 </a:solidFill>
                 <a:latin typeface="Calibri" pitchFamily="34" charset="0"/>
-                <a:ea typeface="Calibri" pitchFamily="34" charset="-122"/>
-                <a:cs typeface="Calibri" pitchFamily="34" charset="-120"/>
+                <a:cs typeface="Amiri" pitchFamily="2" charset="-78"/>
               </a:rPr>
               <a:t>Phone use is not allowed.</a:t>
             </a:r>
@@ -36341,8 +35672,7 @@
                   <a:srgbClr val="8A6D1E"/>
                 </a:solidFill>
                 <a:latin typeface="Calibri" pitchFamily="34" charset="0"/>
-                <a:ea typeface="Calibri" pitchFamily="34" charset="-122"/>
-                <a:cs typeface="Calibri" pitchFamily="34" charset="-120"/>
+                <a:cs typeface="Amiri" pitchFamily="2" charset="-78"/>
               </a:rPr>
               <a:t>lā yajūzu introduces something prohibited (website revision arcade).</a:t>
             </a:r>
@@ -36439,8 +35769,7 @@
                   <a:srgbClr val="FFFFFF"/>
                 </a:solidFill>
                 <a:latin typeface="Calibri" pitchFamily="34" charset="0"/>
-                <a:ea typeface="Calibri" pitchFamily="34" charset="-122"/>
-                <a:cs typeface="Calibri" pitchFamily="34" charset="-120"/>
+                <a:cs typeface="Amiri" pitchFamily="2" charset="-78"/>
               </a:rPr>
               <a:t>5</a:t>
             </a:r>
@@ -36478,8 +35807,7 @@
                   <a:srgbClr val="1B3B6F"/>
                 </a:solidFill>
                 <a:latin typeface="Calibri" pitchFamily="34" charset="0"/>
-                <a:ea typeface="Calibri" pitchFamily="34" charset="-122"/>
-                <a:cs typeface="Calibri" pitchFamily="34" charset="-120"/>
+                <a:cs typeface="Amiri" pitchFamily="2" charset="-78"/>
               </a:rPr>
               <a:t>In a timetable question, what does </a:t>
             </a:r>
@@ -36491,9 +35819,8 @@
                 <a:solidFill>
                   <a:srgbClr val="1B3B6F"/>
                 </a:solidFill>
-                <a:latin typeface="Amiri" pitchFamily="34" charset="0"/>
-                <a:ea typeface="Amiri" pitchFamily="34" charset="-122"/>
-                <a:cs typeface="Amiri" pitchFamily="34" charset="-120"/>
+                <a:latin typeface="Amiri" pitchFamily="2" charset="-78"/>
+                <a:cs typeface="Amiri" pitchFamily="2" charset="-78"/>
               </a:rPr>
               <a:t>مَتَى</a:t>
             </a:r>
@@ -36506,8 +35833,7 @@
                   <a:srgbClr val="1B3B6F"/>
                 </a:solidFill>
                 <a:latin typeface="Calibri" pitchFamily="34" charset="0"/>
-                <a:ea typeface="Calibri" pitchFamily="34" charset="-122"/>
-                <a:cs typeface="Calibri" pitchFamily="34" charset="-120"/>
+                <a:cs typeface="Amiri" pitchFamily="2" charset="-78"/>
               </a:rPr>
               <a:t> ask for?</a:t>
             </a:r>
@@ -36597,8 +35923,7 @@
                   <a:srgbClr val="FFFFFF"/>
                 </a:solidFill>
                 <a:latin typeface="Calibri" pitchFamily="34" charset="0"/>
-                <a:ea typeface="Calibri" pitchFamily="34" charset="-122"/>
-                <a:cs typeface="Calibri" pitchFamily="34" charset="-120"/>
+                <a:cs typeface="Amiri" pitchFamily="2" charset="-78"/>
               </a:rPr>
               <a:t>A</a:t>
             </a:r>
@@ -36636,8 +35961,7 @@
                   <a:srgbClr val="1F2A37"/>
                 </a:solidFill>
                 <a:latin typeface="Calibri" pitchFamily="34" charset="0"/>
-                <a:ea typeface="Calibri" pitchFamily="34" charset="-122"/>
-                <a:cs typeface="Calibri" pitchFamily="34" charset="-120"/>
+                <a:cs typeface="Amiri" pitchFamily="2" charset="-78"/>
               </a:rPr>
               <a:t>a time or day</a:t>
             </a:r>
@@ -36700,8 +36024,7 @@
                   <a:srgbClr val="1B3B6F"/>
                 </a:solidFill>
                 <a:latin typeface="Calibri" pitchFamily="34" charset="0"/>
-                <a:ea typeface="Calibri" pitchFamily="34" charset="-122"/>
-                <a:cs typeface="Calibri" pitchFamily="34" charset="-120"/>
+                <a:cs typeface="Amiri" pitchFamily="2" charset="-78"/>
               </a:rPr>
               <a:t>B</a:t>
             </a:r>
@@ -36739,8 +36062,7 @@
                   <a:srgbClr val="9AA1AB"/>
                 </a:solidFill>
                 <a:latin typeface="Calibri" pitchFamily="34" charset="0"/>
-                <a:ea typeface="Calibri" pitchFamily="34" charset="-122"/>
-                <a:cs typeface="Calibri" pitchFamily="34" charset="-120"/>
+                <a:cs typeface="Amiri" pitchFamily="2" charset="-78"/>
               </a:rPr>
               <a:t>a place</a:t>
             </a:r>
@@ -36803,8 +36125,7 @@
                   <a:srgbClr val="1B3B6F"/>
                 </a:solidFill>
                 <a:latin typeface="Calibri" pitchFamily="34" charset="0"/>
-                <a:ea typeface="Calibri" pitchFamily="34" charset="-122"/>
-                <a:cs typeface="Calibri" pitchFamily="34" charset="-120"/>
+                <a:cs typeface="Amiri" pitchFamily="2" charset="-78"/>
               </a:rPr>
               <a:t>C</a:t>
             </a:r>
@@ -36842,8 +36163,7 @@
                   <a:srgbClr val="9AA1AB"/>
                 </a:solidFill>
                 <a:latin typeface="Calibri" pitchFamily="34" charset="0"/>
-                <a:ea typeface="Calibri" pitchFamily="34" charset="-122"/>
-                <a:cs typeface="Calibri" pitchFamily="34" charset="-120"/>
+                <a:cs typeface="Amiri" pitchFamily="2" charset="-78"/>
               </a:rPr>
               <a:t>a reason</a:t>
             </a:r>
@@ -36881,8 +36201,7 @@
                   <a:srgbClr val="8A6D1E"/>
                 </a:solidFill>
                 <a:latin typeface="Calibri" pitchFamily="34" charset="0"/>
-                <a:ea typeface="Calibri" pitchFamily="34" charset="-122"/>
-                <a:cs typeface="Calibri" pitchFamily="34" charset="-120"/>
+                <a:cs typeface="Amiri" pitchFamily="2" charset="-78"/>
               </a:rPr>
               <a:t>matā = when (website revision arcade).</a:t>
             </a:r>
@@ -36954,8 +36273,7 @@
                   <a:srgbClr val="8A6D1E"/>
                 </a:solidFill>
                 <a:latin typeface="Calibri" pitchFamily="34" charset="0"/>
-                <a:ea typeface="Calibri" pitchFamily="34" charset="-122"/>
-                <a:cs typeface="Calibri" pitchFamily="34" charset="-120"/>
+                <a:cs typeface="Amiri" pitchFamily="2" charset="-78"/>
               </a:rPr>
               <a:t>THE KEY IDEA FOR TODAY</a:t>
             </a:r>
@@ -36993,8 +36311,7 @@
                   <a:srgbClr val="1F2A37"/>
                 </a:solidFill>
                 <a:latin typeface="Calibri" pitchFamily="34" charset="0"/>
-                <a:ea typeface="Calibri" pitchFamily="34" charset="-122"/>
-                <a:cs typeface="Calibri" pitchFamily="34" charset="-120"/>
+                <a:cs typeface="Amiri" pitchFamily="2" charset="-78"/>
               </a:rPr>
               <a:t>This warm-up does NOT count. Read every question fully — then look for the evidence.</a:t>
             </a:r>
@@ -37031,9 +36348,8 @@
                 <a:solidFill>
                   <a:srgbClr val="1B3B6F"/>
                 </a:solidFill>
-                <a:latin typeface="Amiri" pitchFamily="34" charset="0"/>
-                <a:ea typeface="Amiri" pitchFamily="34" charset="-122"/>
-                <a:cs typeface="Amiri" pitchFamily="34" charset="-120"/>
+                <a:latin typeface="Amiri" pitchFamily="2" charset="-78"/>
+                <a:cs typeface="Amiri" pitchFamily="2" charset="-78"/>
               </a:rPr>
               <a:t>اِقْرَأْ · اِبْحَثْ عَنِ الدَّلِيلِ · أَجِبْ</a:t>
             </a:r>
@@ -37071,8 +36387,7 @@
                   <a:srgbClr val="8A93A0"/>
                 </a:solidFill>
                 <a:latin typeface="Calibri" pitchFamily="34" charset="0"/>
-                <a:ea typeface="Calibri" pitchFamily="34" charset="-122"/>
-                <a:cs typeface="Calibri" pitchFamily="34" charset="-120"/>
+                <a:cs typeface="Amiri" pitchFamily="2" charset="-78"/>
               </a:rPr>
               <a:t>5 / 23</a:t>
             </a:r>
@@ -37166,9 +36481,8 @@
                 <a:solidFill>
                   <a:srgbClr val="D4AF37"/>
                 </a:solidFill>
-                <a:latin typeface="Amiri" pitchFamily="34" charset="0"/>
-                <a:ea typeface="Amiri" pitchFamily="34" charset="-122"/>
-                <a:cs typeface="Amiri" pitchFamily="34" charset="-120"/>
+                <a:latin typeface="Amiri" pitchFamily="2" charset="-78"/>
+                <a:cs typeface="Amiri" pitchFamily="2" charset="-78"/>
               </a:rPr>
               <a:t>م</a:t>
             </a:r>
@@ -37206,8 +36520,7 @@
                   <a:srgbClr val="1B3B6F"/>
                 </a:solidFill>
                 <a:latin typeface="Cambria" pitchFamily="34" charset="0"/>
-                <a:ea typeface="Cambria" pitchFamily="34" charset="-122"/>
-                <a:cs typeface="Cambria" pitchFamily="34" charset="-120"/>
+                <a:cs typeface="Amiri" pitchFamily="2" charset="-78"/>
               </a:rPr>
               <a:t>Al Madina Online School</a:t>
             </a:r>
@@ -37245,8 +36558,7 @@
                   <a:srgbClr val="8A6D1E"/>
                 </a:solidFill>
                 <a:latin typeface="Calibri" pitchFamily="34" charset="0"/>
-                <a:ea typeface="Calibri" pitchFamily="34" charset="-122"/>
-                <a:cs typeface="Calibri" pitchFamily="34" charset="-120"/>
+                <a:cs typeface="Amiri" pitchFamily="2" charset="-78"/>
               </a:rPr>
               <a:t>ARABIC DEPARTMENT · MIFTAH ARABIC · IGCSE 0544</a:t>
             </a:r>
@@ -37311,8 +36623,7 @@
                   <a:srgbClr val="FFFFFF"/>
                 </a:solidFill>
                 <a:latin typeface="Calibri" pitchFamily="34" charset="0"/>
-                <a:ea typeface="Calibri" pitchFamily="34" charset="-122"/>
-                <a:cs typeface="Calibri" pitchFamily="34" charset="-120"/>
+                <a:cs typeface="Amiri" pitchFamily="2" charset="-78"/>
               </a:rPr>
               <a:t>F4-L12 · F4 Assessment</a:t>
             </a:r>
@@ -37377,8 +36688,7 @@
                   <a:srgbClr val="FFFFFF"/>
                 </a:solidFill>
                 <a:latin typeface="Calibri" pitchFamily="34" charset="0"/>
-                <a:ea typeface="Calibri" pitchFamily="34" charset="-122"/>
-                <a:cs typeface="Calibri" pitchFamily="34" charset="-120"/>
+                <a:cs typeface="Amiri" pitchFamily="2" charset="-78"/>
               </a:rPr>
               <a:t>TEACHER INSTRUCTION · 2 MIN</a:t>
             </a:r>
@@ -37416,8 +36726,7 @@
                   <a:srgbClr val="1B3B6F"/>
                 </a:solidFill>
                 <a:latin typeface="Calibri" pitchFamily="34" charset="0"/>
-                <a:ea typeface="Calibri" pitchFamily="34" charset="-122"/>
-                <a:cs typeface="Calibri" pitchFamily="34" charset="-120"/>
+                <a:cs typeface="Amiri" pitchFamily="2" charset="-78"/>
               </a:rPr>
               <a:t>REVIEW · THE F4 GRAMMAR SYSTEM (WEBSITE)</a:t>
             </a:r>
@@ -37455,8 +36764,7 @@
                   <a:srgbClr val="1B3B6F"/>
                 </a:solidFill>
                 <a:latin typeface="Cambria" pitchFamily="34" charset="0"/>
-                <a:ea typeface="Cambria" pitchFamily="34" charset="-122"/>
-                <a:cs typeface="Cambria" pitchFamily="34" charset="-120"/>
+                <a:cs typeface="Amiri" pitchFamily="2" charset="-78"/>
               </a:rPr>
               <a:t>Four patterns to check</a:t>
             </a:r>
@@ -37493,9 +36801,8 @@
                 <a:solidFill>
                   <a:srgbClr val="8A6D1E"/>
                 </a:solidFill>
-                <a:latin typeface="Amiri" pitchFamily="34" charset="0"/>
-                <a:ea typeface="Amiri" pitchFamily="34" charset="-122"/>
-                <a:cs typeface="Amiri" pitchFamily="34" charset="-120"/>
+                <a:latin typeface="Amiri" pitchFamily="2" charset="-78"/>
+                <a:cs typeface="Amiri" pitchFamily="2" charset="-78"/>
               </a:rPr>
               <a:t>نِظَامُ القَوَاعِدِ</a:t>
             </a:r>
@@ -37533,8 +36840,7 @@
                   <a:srgbClr val="8A93A0"/>
                 </a:solidFill>
                 <a:latin typeface="Calibri" pitchFamily="34" charset="0"/>
-                <a:ea typeface="Calibri" pitchFamily="34" charset="-122"/>
-                <a:cs typeface="Calibri" pitchFamily="34" charset="-120"/>
+                <a:cs typeface="Amiri" pitchFamily="2" charset="-78"/>
               </a:rPr>
               <a:t>Miftah Arabic · Foundation F4 · My School · F4-L12</a:t>
             </a:r>
@@ -37633,8 +36939,7 @@
                   <a:srgbClr val="FFFFFF"/>
                 </a:solidFill>
                 <a:latin typeface="Calibri" pitchFamily="34" charset="0"/>
-                <a:ea typeface="Calibri" pitchFamily="34" charset="-122"/>
-                <a:cs typeface="Calibri" pitchFamily="34" charset="-120"/>
+                <a:cs typeface="Amiri" pitchFamily="2" charset="-78"/>
               </a:rPr>
               <a:t>VERB PERSON</a:t>
             </a:r>
@@ -37671,9 +36976,8 @@
                 <a:solidFill>
                   <a:srgbClr val="8A6D1E"/>
                 </a:solidFill>
-                <a:latin typeface="Amiri" pitchFamily="34" charset="0"/>
-                <a:ea typeface="Amiri" pitchFamily="34" charset="-122"/>
-                <a:cs typeface="Amiri" pitchFamily="34" charset="-120"/>
+                <a:latin typeface="Amiri" pitchFamily="2" charset="-78"/>
+                <a:cs typeface="Amiri" pitchFamily="2" charset="-78"/>
               </a:rPr>
               <a:t>أَنَا أَدْرُسُ · هِيَ تَدْرُسُ</a:t>
             </a:r>
@@ -37710,9 +37014,8 @@
                 <a:solidFill>
                   <a:srgbClr val="1B3B6F"/>
                 </a:solidFill>
-                <a:latin typeface="Amiri" pitchFamily="34" charset="0"/>
-                <a:ea typeface="Amiri" pitchFamily="34" charset="-122"/>
-                <a:cs typeface="Amiri" pitchFamily="34" charset="-120"/>
+                <a:latin typeface="Amiri" pitchFamily="2" charset="-78"/>
+                <a:cs typeface="Amiri" pitchFamily="2" charset="-78"/>
               </a:rPr>
               <a:t>هُوَ يَدْرُسُ التَّارِيخَ.</a:t>
             </a:r>
@@ -37750,8 +37053,7 @@
                   <a:srgbClr val="5A6472"/>
                 </a:solidFill>
                 <a:latin typeface="Calibri" pitchFamily="34" charset="0"/>
-                <a:ea typeface="Calibri" pitchFamily="34" charset="-122"/>
-                <a:cs typeface="Calibri" pitchFamily="34" charset="-120"/>
+                <a:cs typeface="Amiri" pitchFamily="2" charset="-78"/>
               </a:rPr>
               <a:t>He studies history.</a:t>
             </a:r>
@@ -37816,8 +37118,7 @@
                   <a:srgbClr val="1F2A37"/>
                 </a:solidFill>
                 <a:latin typeface="Calibri" pitchFamily="34" charset="0"/>
-                <a:ea typeface="Calibri" pitchFamily="34" charset="-122"/>
-                <a:cs typeface="Calibri" pitchFamily="34" charset="-120"/>
+                <a:cs typeface="Amiri" pitchFamily="2" charset="-78"/>
               </a:rPr>
               <a:t>The prefix shows the person.</a:t>
             </a:r>
@@ -37916,8 +37217,7 @@
                   <a:srgbClr val="FFFFFF"/>
                 </a:solidFill>
                 <a:latin typeface="Calibri" pitchFamily="34" charset="0"/>
-                <a:ea typeface="Calibri" pitchFamily="34" charset="-122"/>
-                <a:cs typeface="Calibri" pitchFamily="34" charset="-120"/>
+                <a:cs typeface="Amiri" pitchFamily="2" charset="-78"/>
               </a:rPr>
               <a:t>REASON AGREEMENT</a:t>
             </a:r>
@@ -37954,9 +37254,8 @@
                 <a:solidFill>
                   <a:srgbClr val="8A6D1E"/>
                 </a:solidFill>
-                <a:latin typeface="Amiri" pitchFamily="34" charset="0"/>
-                <a:ea typeface="Amiri" pitchFamily="34" charset="-122"/>
-                <a:cs typeface="Amiri" pitchFamily="34" charset="-120"/>
+                <a:latin typeface="Amiri" pitchFamily="2" charset="-78"/>
+                <a:cs typeface="Amiri" pitchFamily="2" charset="-78"/>
               </a:rPr>
               <a:t>لِأَنَّهُ · لِأَنَّهَا</a:t>
             </a:r>
@@ -37993,9 +37292,8 @@
                 <a:solidFill>
                   <a:srgbClr val="1B3B6F"/>
                 </a:solidFill>
-                <a:latin typeface="Amiri" pitchFamily="34" charset="0"/>
-                <a:ea typeface="Amiri" pitchFamily="34" charset="-122"/>
-                <a:cs typeface="Amiri" pitchFamily="34" charset="-120"/>
+                <a:latin typeface="Amiri" pitchFamily="2" charset="-78"/>
+                <a:cs typeface="Amiri" pitchFamily="2" charset="-78"/>
               </a:rPr>
               <a:t>أُحِبُّ العَرَبِيَّةَ لِأَنَّهَا مُمْتِعَةٌ.</a:t>
             </a:r>
@@ -38033,8 +37331,7 @@
                   <a:srgbClr val="5A6472"/>
                 </a:solidFill>
                 <a:latin typeface="Calibri" pitchFamily="34" charset="0"/>
-                <a:ea typeface="Calibri" pitchFamily="34" charset="-122"/>
-                <a:cs typeface="Calibri" pitchFamily="34" charset="-120"/>
+                <a:cs typeface="Amiri" pitchFamily="2" charset="-78"/>
               </a:rPr>
               <a:t>I like Arabic because it is enjoyable.</a:t>
             </a:r>
@@ -38099,8 +37396,7 @@
                   <a:srgbClr val="1F2A37"/>
                 </a:solidFill>
                 <a:latin typeface="Calibri" pitchFamily="34" charset="0"/>
-                <a:ea typeface="Calibri" pitchFamily="34" charset="-122"/>
-                <a:cs typeface="Calibri" pitchFamily="34" charset="-120"/>
+                <a:cs typeface="Amiri" pitchFamily="2" charset="-78"/>
               </a:rPr>
               <a:t>Pronoun + adjective agree.</a:t>
             </a:r>
@@ -38199,8 +37495,7 @@
                   <a:srgbClr val="FFFFFF"/>
                 </a:solidFill>
                 <a:latin typeface="Calibri" pitchFamily="34" charset="0"/>
-                <a:ea typeface="Calibri" pitchFamily="34" charset="-122"/>
-                <a:cs typeface="Calibri" pitchFamily="34" charset="-120"/>
+                <a:cs typeface="Amiri" pitchFamily="2" charset="-78"/>
               </a:rPr>
               <a:t>RULES</a:t>
             </a:r>
@@ -38237,9 +37532,8 @@
                 <a:solidFill>
                   <a:srgbClr val="8A6D1E"/>
                 </a:solidFill>
-                <a:latin typeface="Amiri" pitchFamily="34" charset="0"/>
-                <a:ea typeface="Amiri" pitchFamily="34" charset="-122"/>
-                <a:cs typeface="Amiri" pitchFamily="34" charset="-120"/>
+                <a:latin typeface="Amiri" pitchFamily="2" charset="-78"/>
+                <a:cs typeface="Amiri" pitchFamily="2" charset="-78"/>
               </a:rPr>
               <a:t>يَجِبُ أَنْ · لَا يَجُوزُ</a:t>
             </a:r>
@@ -38276,9 +37570,8 @@
                 <a:solidFill>
                   <a:srgbClr val="1B3B6F"/>
                 </a:solidFill>
-                <a:latin typeface="Amiri" pitchFamily="34" charset="0"/>
-                <a:ea typeface="Amiri" pitchFamily="34" charset="-122"/>
-                <a:cs typeface="Amiri" pitchFamily="34" charset="-120"/>
+                <a:latin typeface="Amiri" pitchFamily="2" charset="-78"/>
+                <a:cs typeface="Amiri" pitchFamily="2" charset="-78"/>
               </a:rPr>
               <a:t>يَجِبُ أَنْ نَصِلَ فِي الوَقْتِ.</a:t>
             </a:r>
@@ -38316,8 +37609,7 @@
                   <a:srgbClr val="5A6472"/>
                 </a:solidFill>
                 <a:latin typeface="Calibri" pitchFamily="34" charset="0"/>
-                <a:ea typeface="Calibri" pitchFamily="34" charset="-122"/>
-                <a:cs typeface="Calibri" pitchFamily="34" charset="-120"/>
+                <a:cs typeface="Amiri" pitchFamily="2" charset="-78"/>
               </a:rPr>
               <a:t>We must arrive on time.</a:t>
             </a:r>
@@ -38382,8 +37674,7 @@
                   <a:srgbClr val="1F2A37"/>
                 </a:solidFill>
                 <a:latin typeface="Calibri" pitchFamily="34" charset="0"/>
-                <a:ea typeface="Calibri" pitchFamily="34" charset="-122"/>
-                <a:cs typeface="Calibri" pitchFamily="34" charset="-120"/>
+                <a:cs typeface="Amiri" pitchFamily="2" charset="-78"/>
               </a:rPr>
               <a:t>Obligation + an + verb.</a:t>
             </a:r>
@@ -38455,8 +37746,7 @@
                   <a:srgbClr val="B83227"/>
                 </a:solidFill>
                 <a:latin typeface="Calibri" pitchFamily="34" charset="0"/>
-                <a:ea typeface="Calibri" pitchFamily="34" charset="-122"/>
-                <a:cs typeface="Calibri" pitchFamily="34" charset="-120"/>
+                <a:cs typeface="Amiri" pitchFamily="2" charset="-78"/>
               </a:rPr>
               <a:t>COMMON ERROR</a:t>
             </a:r>
@@ -38494,8 +37784,7 @@
                   <a:srgbClr val="1F2A37"/>
                 </a:solidFill>
                 <a:latin typeface="Calibri" pitchFamily="34" charset="0"/>
-                <a:ea typeface="Calibri" pitchFamily="34" charset="-122"/>
-                <a:cs typeface="Calibri" pitchFamily="34" charset="-120"/>
+                <a:cs typeface="Amiri" pitchFamily="2" charset="-78"/>
               </a:rPr>
               <a:t>Website: do not keep the first-person form when the subject changes.</a:t>
             </a:r>
@@ -38532,9 +37821,8 @@
                 <a:solidFill>
                   <a:srgbClr val="1B3B6F"/>
                 </a:solidFill>
-                <a:latin typeface="Amiri" pitchFamily="34" charset="0"/>
-                <a:ea typeface="Amiri" pitchFamily="34" charset="-122"/>
-                <a:cs typeface="Amiri" pitchFamily="34" charset="-120"/>
+                <a:latin typeface="Amiri" pitchFamily="2" charset="-78"/>
+                <a:cs typeface="Amiri" pitchFamily="2" charset="-78"/>
               </a:rPr>
               <a:t>هِيَ تَدْرُسُ التَّارِيخَ.</a:t>
             </a:r>
@@ -38572,8 +37860,7 @@
                   <a:srgbClr val="5A6472"/>
                 </a:solidFill>
                 <a:latin typeface="Calibri" pitchFamily="34" charset="0"/>
-                <a:ea typeface="Calibri" pitchFamily="34" charset="-122"/>
-                <a:cs typeface="Calibri" pitchFamily="34" charset="-120"/>
+                <a:cs typeface="Amiri" pitchFamily="2" charset="-78"/>
               </a:rPr>
               <a:t>→</a:t>
             </a:r>
@@ -38610,9 +37897,8 @@
                 <a:solidFill>
                   <a:srgbClr val="B83227"/>
                 </a:solidFill>
-                <a:latin typeface="Amiri" pitchFamily="34" charset="0"/>
-                <a:ea typeface="Amiri" pitchFamily="34" charset="-122"/>
-                <a:cs typeface="Amiri" pitchFamily="34" charset="-120"/>
+                <a:latin typeface="Amiri" pitchFamily="2" charset="-78"/>
+                <a:cs typeface="Amiri" pitchFamily="2" charset="-78"/>
               </a:rPr>
               <a:t>هِيَ أَدْرُسُ التَّارِيخَ.</a:t>
             </a:r>
@@ -38673,8 +37959,7 @@
                   <a:srgbClr val="8A93A0"/>
                 </a:solidFill>
                 <a:latin typeface="Calibri" pitchFamily="34" charset="0"/>
-                <a:ea typeface="Calibri" pitchFamily="34" charset="-122"/>
-                <a:cs typeface="Calibri" pitchFamily="34" charset="-120"/>
+                <a:cs typeface="Amiri" pitchFamily="2" charset="-78"/>
               </a:rPr>
               <a:t>6 / 23</a:t>
             </a:r>
@@ -38768,9 +38053,8 @@
                 <a:solidFill>
                   <a:srgbClr val="D4AF37"/>
                 </a:solidFill>
-                <a:latin typeface="Amiri" pitchFamily="34" charset="0"/>
-                <a:ea typeface="Amiri" pitchFamily="34" charset="-122"/>
-                <a:cs typeface="Amiri" pitchFamily="34" charset="-120"/>
+                <a:latin typeface="Amiri" pitchFamily="2" charset="-78"/>
+                <a:cs typeface="Amiri" pitchFamily="2" charset="-78"/>
               </a:rPr>
               <a:t>م</a:t>
             </a:r>
@@ -38808,8 +38092,7 @@
                   <a:srgbClr val="1B3B6F"/>
                 </a:solidFill>
                 <a:latin typeface="Cambria" pitchFamily="34" charset="0"/>
-                <a:ea typeface="Cambria" pitchFamily="34" charset="-122"/>
-                <a:cs typeface="Cambria" pitchFamily="34" charset="-120"/>
+                <a:cs typeface="Amiri" pitchFamily="2" charset="-78"/>
               </a:rPr>
               <a:t>Al Madina Online School</a:t>
             </a:r>
@@ -38847,8 +38130,7 @@
                   <a:srgbClr val="8A6D1E"/>
                 </a:solidFill>
                 <a:latin typeface="Calibri" pitchFamily="34" charset="0"/>
-                <a:ea typeface="Calibri" pitchFamily="34" charset="-122"/>
-                <a:cs typeface="Calibri" pitchFamily="34" charset="-120"/>
+                <a:cs typeface="Amiri" pitchFamily="2" charset="-78"/>
               </a:rPr>
               <a:t>ARABIC DEPARTMENT · MIFTAH ARABIC · IGCSE 0544</a:t>
             </a:r>
@@ -38913,8 +38195,7 @@
                   <a:srgbClr val="FFFFFF"/>
                 </a:solidFill>
                 <a:latin typeface="Calibri" pitchFamily="34" charset="0"/>
-                <a:ea typeface="Calibri" pitchFamily="34" charset="-122"/>
-                <a:cs typeface="Calibri" pitchFamily="34" charset="-120"/>
+                <a:cs typeface="Amiri" pitchFamily="2" charset="-78"/>
               </a:rPr>
               <a:t>F4-L12 · F4 Assessment</a:t>
             </a:r>
@@ -38979,8 +38260,7 @@
                   <a:srgbClr val="FFFFFF"/>
                 </a:solidFill>
                 <a:latin typeface="Calibri" pitchFamily="34" charset="0"/>
-                <a:ea typeface="Calibri" pitchFamily="34" charset="-122"/>
-                <a:cs typeface="Calibri" pitchFamily="34" charset="-120"/>
+                <a:cs typeface="Amiri" pitchFamily="2" charset="-78"/>
               </a:rPr>
               <a:t>TEACHER INSTRUCTION · 1 MIN</a:t>
             </a:r>
@@ -39018,8 +38298,7 @@
                   <a:srgbClr val="1B3B6F"/>
                 </a:solidFill>
                 <a:latin typeface="Calibri" pitchFamily="34" charset="0"/>
-                <a:ea typeface="Calibri" pitchFamily="34" charset="-122"/>
-                <a:cs typeface="Calibri" pitchFamily="34" charset="-120"/>
+                <a:cs typeface="Amiri" pitchFamily="2" charset="-78"/>
               </a:rPr>
               <a:t>ASSESSMENT MAP (WEBSITE) · 60 MARKS IN TOTAL</a:t>
             </a:r>
@@ -39057,8 +38336,7 @@
                   <a:srgbClr val="1B3B6F"/>
                 </a:solidFill>
                 <a:latin typeface="Cambria" pitchFamily="34" charset="0"/>
-                <a:ea typeface="Cambria" pitchFamily="34" charset="-122"/>
-                <a:cs typeface="Cambria" pitchFamily="34" charset="-120"/>
+                <a:cs typeface="Amiri" pitchFamily="2" charset="-78"/>
               </a:rPr>
               <a:t>Four sections, sixty marks</a:t>
             </a:r>
@@ -39095,9 +38373,8 @@
                 <a:solidFill>
                   <a:srgbClr val="8A6D1E"/>
                 </a:solidFill>
-                <a:latin typeface="Amiri" pitchFamily="34" charset="0"/>
-                <a:ea typeface="Amiri" pitchFamily="34" charset="-122"/>
-                <a:cs typeface="Amiri" pitchFamily="34" charset="-120"/>
+                <a:latin typeface="Amiri" pitchFamily="2" charset="-78"/>
+                <a:cs typeface="Amiri" pitchFamily="2" charset="-78"/>
               </a:rPr>
               <a:t>خُطَّةُ التَّقْيِيمِ</a:t>
             </a:r>
@@ -39135,8 +38412,7 @@
                   <a:srgbClr val="8A93A0"/>
                 </a:solidFill>
                 <a:latin typeface="Calibri" pitchFamily="34" charset="0"/>
-                <a:ea typeface="Calibri" pitchFamily="34" charset="-122"/>
-                <a:cs typeface="Calibri" pitchFamily="34" charset="-120"/>
+                <a:cs typeface="Amiri" pitchFamily="2" charset="-78"/>
               </a:rPr>
               <a:t>Miftah Arabic · Foundation F4 · My School · F4-L12</a:t>
             </a:r>
@@ -39199,8 +38475,7 @@
                   <a:srgbClr val="FFFFFF"/>
                 </a:solidFill>
                 <a:latin typeface="Calibri" pitchFamily="34" charset="0"/>
-                <a:ea typeface="Calibri" pitchFamily="34" charset="-122"/>
-                <a:cs typeface="Calibri" pitchFamily="34" charset="-120"/>
+                <a:cs typeface="Amiri" pitchFamily="2" charset="-78"/>
               </a:rPr>
               <a:t>Section</a:t>
             </a:r>
@@ -39238,8 +38513,7 @@
                   <a:srgbClr val="FFFFFF"/>
                 </a:solidFill>
                 <a:latin typeface="Calibri" pitchFamily="34" charset="0"/>
-                <a:ea typeface="Calibri" pitchFamily="34" charset="-122"/>
-                <a:cs typeface="Calibri" pitchFamily="34" charset="-120"/>
+                <a:cs typeface="Amiri" pitchFamily="2" charset="-78"/>
               </a:rPr>
               <a:t>What you do</a:t>
             </a:r>
@@ -39277,8 +38551,7 @@
                   <a:srgbClr val="FFFFFF"/>
                 </a:solidFill>
                 <a:latin typeface="Calibri" pitchFamily="34" charset="0"/>
-                <a:ea typeface="Calibri" pitchFamily="34" charset="-122"/>
-                <a:cs typeface="Calibri" pitchFamily="34" charset="-120"/>
+                <a:cs typeface="Amiri" pitchFamily="2" charset="-78"/>
               </a:rPr>
               <a:t>Marks</a:t>
             </a:r>
@@ -39343,8 +38616,7 @@
                   <a:srgbClr val="5A6472"/>
                 </a:solidFill>
                 <a:latin typeface="Calibri" pitchFamily="34" charset="0"/>
-                <a:ea typeface="Calibri" pitchFamily="34" charset="-122"/>
-                <a:cs typeface="Calibri" pitchFamily="34" charset="-120"/>
+                <a:cs typeface="Amiri" pitchFamily="2" charset="-78"/>
               </a:rPr>
               <a:t>A · Listening</a:t>
             </a:r>
@@ -39382,8 +38654,7 @@
                   <a:srgbClr val="5A6472"/>
                 </a:solidFill>
                 <a:latin typeface="Calibri" pitchFamily="34" charset="0"/>
-                <a:ea typeface="Calibri" pitchFamily="34" charset="-122"/>
-                <a:cs typeface="Calibri" pitchFamily="34" charset="-120"/>
+                <a:cs typeface="Amiri" pitchFamily="2" charset="-78"/>
               </a:rPr>
               <a:t>Two texts: school description (8 multiple-choice) · two timetables (8 matches + 4 true / false)</a:t>
             </a:r>
@@ -39421,8 +38692,7 @@
                   <a:srgbClr val="5A6472"/>
                 </a:solidFill>
                 <a:latin typeface="Calibri" pitchFamily="34" charset="0"/>
-                <a:ea typeface="Calibri" pitchFamily="34" charset="-122"/>
-                <a:cs typeface="Calibri" pitchFamily="34" charset="-120"/>
+                <a:cs typeface="Amiri" pitchFamily="2" charset="-78"/>
               </a:rPr>
               <a:t>20</a:t>
             </a:r>
@@ -39487,8 +38757,7 @@
                   <a:srgbClr val="FFFFFF"/>
                 </a:solidFill>
                 <a:latin typeface="Calibri" pitchFamily="34" charset="0"/>
-                <a:ea typeface="Calibri" pitchFamily="34" charset="-122"/>
-                <a:cs typeface="Calibri" pitchFamily="34" charset="-120"/>
+                <a:cs typeface="Amiri" pitchFamily="2" charset="-78"/>
               </a:rPr>
               <a:t>CORE</a:t>
             </a:r>
@@ -39553,8 +38822,7 @@
                   <a:srgbClr val="5A6472"/>
                 </a:solidFill>
                 <a:latin typeface="Calibri" pitchFamily="34" charset="0"/>
-                <a:ea typeface="Calibri" pitchFamily="34" charset="-122"/>
-                <a:cs typeface="Calibri" pitchFamily="34" charset="-120"/>
+                <a:cs typeface="Amiri" pitchFamily="2" charset="-78"/>
               </a:rPr>
               <a:t>B · Reading</a:t>
             </a:r>
@@ -39592,8 +38860,7 @@
                   <a:srgbClr val="5A6472"/>
                 </a:solidFill>
                 <a:latin typeface="Calibri" pitchFamily="34" charset="0"/>
-                <a:ea typeface="Calibri" pitchFamily="34" charset="-122"/>
-                <a:cs typeface="Calibri" pitchFamily="34" charset="-120"/>
+                <a:cs typeface="Amiri" pitchFamily="2" charset="-78"/>
               </a:rPr>
               <a:t>A short school article: detail, evidence and inference questions</a:t>
             </a:r>
@@ -39631,8 +38898,7 @@
                   <a:srgbClr val="5A6472"/>
                 </a:solidFill>
                 <a:latin typeface="Calibri" pitchFamily="34" charset="0"/>
-                <a:ea typeface="Calibri" pitchFamily="34" charset="-122"/>
-                <a:cs typeface="Calibri" pitchFamily="34" charset="-120"/>
+                <a:cs typeface="Amiri" pitchFamily="2" charset="-78"/>
               </a:rPr>
               <a:t>10</a:t>
             </a:r>
@@ -39697,8 +38963,7 @@
                   <a:srgbClr val="FFFFFF"/>
                 </a:solidFill>
                 <a:latin typeface="Calibri" pitchFamily="34" charset="0"/>
-                <a:ea typeface="Calibri" pitchFamily="34" charset="-122"/>
-                <a:cs typeface="Calibri" pitchFamily="34" charset="-120"/>
+                <a:cs typeface="Amiri" pitchFamily="2" charset="-78"/>
               </a:rPr>
               <a:t>CORE</a:t>
             </a:r>
@@ -39763,8 +39028,7 @@
                   <a:srgbClr val="5A6472"/>
                 </a:solidFill>
                 <a:latin typeface="Calibri" pitchFamily="34" charset="0"/>
-                <a:ea typeface="Calibri" pitchFamily="34" charset="-122"/>
-                <a:cs typeface="Calibri" pitchFamily="34" charset="-120"/>
+                <a:cs typeface="Amiri" pitchFamily="2" charset="-78"/>
               </a:rPr>
               <a:t>C · Writing</a:t>
             </a:r>
@@ -39802,8 +39066,7 @@
                   <a:srgbClr val="5A6472"/>
                 </a:solidFill>
                 <a:latin typeface="Calibri" pitchFamily="34" charset="0"/>
-                <a:ea typeface="Calibri" pitchFamily="34" charset="-122"/>
-                <a:cs typeface="Calibri" pitchFamily="34" charset="-120"/>
+                <a:cs typeface="Amiri" pitchFamily="2" charset="-78"/>
               </a:rPr>
               <a:t>A five-line registration form (5) · a 70–90-word email to a new student (15)</a:t>
             </a:r>
@@ -39841,8 +39104,7 @@
                   <a:srgbClr val="5A6472"/>
                 </a:solidFill>
                 <a:latin typeface="Calibri" pitchFamily="34" charset="0"/>
-                <a:ea typeface="Calibri" pitchFamily="34" charset="-122"/>
-                <a:cs typeface="Calibri" pitchFamily="34" charset="-120"/>
+                <a:cs typeface="Amiri" pitchFamily="2" charset="-78"/>
               </a:rPr>
               <a:t>20</a:t>
             </a:r>
@@ -39907,8 +39169,7 @@
                   <a:srgbClr val="FFFFFF"/>
                 </a:solidFill>
                 <a:latin typeface="Calibri" pitchFamily="34" charset="0"/>
-                <a:ea typeface="Calibri" pitchFamily="34" charset="-122"/>
-                <a:cs typeface="Calibri" pitchFamily="34" charset="-120"/>
+                <a:cs typeface="Amiri" pitchFamily="2" charset="-78"/>
               </a:rPr>
               <a:t>CORE</a:t>
             </a:r>
@@ -39973,8 +39234,7 @@
                   <a:srgbClr val="5A6472"/>
                 </a:solidFill>
                 <a:latin typeface="Calibri" pitchFamily="34" charset="0"/>
-                <a:ea typeface="Calibri" pitchFamily="34" charset="-122"/>
-                <a:cs typeface="Calibri" pitchFamily="34" charset="-120"/>
+                <a:cs typeface="Amiri" pitchFamily="2" charset="-78"/>
               </a:rPr>
               <a:t>D · Speaking</a:t>
             </a:r>
@@ -40012,8 +39272,7 @@
                   <a:srgbClr val="5A6472"/>
                 </a:solidFill>
                 <a:latin typeface="Calibri" pitchFamily="34" charset="0"/>
-                <a:ea typeface="Calibri" pitchFamily="34" charset="-122"/>
-                <a:cs typeface="Calibri" pitchFamily="34" charset="-120"/>
+                <a:cs typeface="Amiri" pitchFamily="2" charset="-78"/>
               </a:rPr>
               <a:t>A short school role play (6) · one developed opinion response (4)</a:t>
             </a:r>
@@ -40051,8 +39310,7 @@
                   <a:srgbClr val="5A6472"/>
                 </a:solidFill>
                 <a:latin typeface="Calibri" pitchFamily="34" charset="0"/>
-                <a:ea typeface="Calibri" pitchFamily="34" charset="-122"/>
-                <a:cs typeface="Calibri" pitchFamily="34" charset="-120"/>
+                <a:cs typeface="Amiri" pitchFamily="2" charset="-78"/>
               </a:rPr>
               <a:t>10</a:t>
             </a:r>
@@ -40117,8 +39375,7 @@
                   <a:srgbClr val="FFFFFF"/>
                 </a:solidFill>
                 <a:latin typeface="Calibri" pitchFamily="34" charset="0"/>
-                <a:ea typeface="Calibri" pitchFamily="34" charset="-122"/>
-                <a:cs typeface="Calibri" pitchFamily="34" charset="-120"/>
+                <a:cs typeface="Amiri" pitchFamily="2" charset="-78"/>
               </a:rPr>
               <a:t>CORE</a:t>
             </a:r>
@@ -40156,8 +39413,7 @@
                   <a:srgbClr val="8A93A0"/>
                 </a:solidFill>
                 <a:latin typeface="Calibri" pitchFamily="34" charset="0"/>
-                <a:ea typeface="Calibri" pitchFamily="34" charset="-122"/>
-                <a:cs typeface="Calibri" pitchFamily="34" charset="-120"/>
+                <a:cs typeface="Amiri" pitchFamily="2" charset="-78"/>
               </a:rPr>
               <a:t>7 / 23</a:t>
             </a:r>
@@ -40251,9 +39507,8 @@
                 <a:solidFill>
                   <a:srgbClr val="D4AF37"/>
                 </a:solidFill>
-                <a:latin typeface="Amiri" pitchFamily="34" charset="0"/>
-                <a:ea typeface="Amiri" pitchFamily="34" charset="-122"/>
-                <a:cs typeface="Amiri" pitchFamily="34" charset="-120"/>
+                <a:latin typeface="Amiri" pitchFamily="2" charset="-78"/>
+                <a:cs typeface="Amiri" pitchFamily="2" charset="-78"/>
               </a:rPr>
               <a:t>م</a:t>
             </a:r>
@@ -40291,8 +39546,7 @@
                   <a:srgbClr val="1B3B6F"/>
                 </a:solidFill>
                 <a:latin typeface="Cambria" pitchFamily="34" charset="0"/>
-                <a:ea typeface="Cambria" pitchFamily="34" charset="-122"/>
-                <a:cs typeface="Cambria" pitchFamily="34" charset="-120"/>
+                <a:cs typeface="Amiri" pitchFamily="2" charset="-78"/>
               </a:rPr>
               <a:t>Al Madina Online School</a:t>
             </a:r>
@@ -40330,8 +39584,7 @@
                   <a:srgbClr val="8A6D1E"/>
                 </a:solidFill>
                 <a:latin typeface="Calibri" pitchFamily="34" charset="0"/>
-                <a:ea typeface="Calibri" pitchFamily="34" charset="-122"/>
-                <a:cs typeface="Calibri" pitchFamily="34" charset="-120"/>
+                <a:cs typeface="Amiri" pitchFamily="2" charset="-78"/>
               </a:rPr>
               <a:t>ARABIC DEPARTMENT · MIFTAH ARABIC · IGCSE 0544</a:t>
             </a:r>
@@ -40396,8 +39649,7 @@
                   <a:srgbClr val="FFFFFF"/>
                 </a:solidFill>
                 <a:latin typeface="Calibri" pitchFamily="34" charset="0"/>
-                <a:ea typeface="Calibri" pitchFamily="34" charset="-122"/>
-                <a:cs typeface="Calibri" pitchFamily="34" charset="-120"/>
+                <a:cs typeface="Amiri" pitchFamily="2" charset="-78"/>
               </a:rPr>
               <a:t>F4-L12 · F4 Assessment</a:t>
             </a:r>
@@ -40462,8 +39714,7 @@
                   <a:srgbClr val="FFFFFF"/>
                 </a:solidFill>
                 <a:latin typeface="Calibri" pitchFamily="34" charset="0"/>
-                <a:ea typeface="Calibri" pitchFamily="34" charset="-122"/>
-                <a:cs typeface="Calibri" pitchFamily="34" charset="-120"/>
+                <a:cs typeface="Amiri" pitchFamily="2" charset="-78"/>
               </a:rPr>
               <a:t>I DO · 5 MIN</a:t>
             </a:r>
@@ -40501,8 +39752,7 @@
                   <a:srgbClr val="6B4C9A"/>
                 </a:solidFill>
                 <a:latin typeface="Calibri" pitchFamily="34" charset="0"/>
-                <a:ea typeface="Calibri" pitchFamily="34" charset="-122"/>
-                <a:cs typeface="Calibri" pitchFamily="34" charset="-120"/>
+                <a:cs typeface="Amiri" pitchFamily="2" charset="-78"/>
               </a:rPr>
               <a:t>LISTENING · TEXT 1 · SCHOOL DESCRIPTION · 8 MARKS (WEBSITE)</a:t>
             </a:r>
@@ -40540,8 +39790,7 @@
                   <a:srgbClr val="1B3B6F"/>
                 </a:solidFill>
                 <a:latin typeface="Cambria" pitchFamily="34" charset="0"/>
-                <a:ea typeface="Cambria" pitchFamily="34" charset="-122"/>
-                <a:cs typeface="Cambria" pitchFamily="34" charset="-120"/>
+                <a:cs typeface="Amiri" pitchFamily="2" charset="-78"/>
               </a:rPr>
               <a:t>Listening · Text 1</a:t>
             </a:r>
@@ -40578,9 +39827,8 @@
                 <a:solidFill>
                   <a:srgbClr val="8A6D1E"/>
                 </a:solidFill>
-                <a:latin typeface="Amiri" pitchFamily="34" charset="0"/>
-                <a:ea typeface="Amiri" pitchFamily="34" charset="-122"/>
-                <a:cs typeface="Amiri" pitchFamily="34" charset="-120"/>
+                <a:latin typeface="Amiri" pitchFamily="2" charset="-78"/>
+                <a:cs typeface="Amiri" pitchFamily="2" charset="-78"/>
               </a:rPr>
               <a:t>الاِسْتِمَاعُ · النَّصُّ الأَوَّلُ</a:t>
             </a:r>
@@ -40618,8 +39866,7 @@
                   <a:srgbClr val="8A93A0"/>
                 </a:solidFill>
                 <a:latin typeface="Calibri" pitchFamily="34" charset="0"/>
-                <a:ea typeface="Calibri" pitchFamily="34" charset="-122"/>
-                <a:cs typeface="Calibri" pitchFamily="34" charset="-120"/>
+                <a:cs typeface="Amiri" pitchFamily="2" charset="-78"/>
               </a:rPr>
               <a:t>Miftah Arabic · Foundation F4 · My School · F4-L12</a:t>
             </a:r>
@@ -40716,8 +39963,7 @@
                   <a:srgbClr val="FFFFFF"/>
                 </a:solidFill>
                 <a:latin typeface="Calibri" pitchFamily="34" charset="0"/>
-                <a:ea typeface="Calibri" pitchFamily="34" charset="-122"/>
-                <a:cs typeface="Calibri" pitchFamily="34" charset="-120"/>
+                <a:cs typeface="Amiri" pitchFamily="2" charset="-78"/>
               </a:rPr>
               <a:t>1</a:t>
             </a:r>
@@ -40755,8 +40001,7 @@
                   <a:srgbClr val="1B3B6F"/>
                 </a:solidFill>
                 <a:latin typeface="Calibri" pitchFamily="34" charset="0"/>
-                <a:ea typeface="Calibri" pitchFamily="34" charset="-122"/>
-                <a:cs typeface="Calibri" pitchFamily="34" charset="-120"/>
+                <a:cs typeface="Amiri" pitchFamily="2" charset="-78"/>
               </a:rPr>
               <a:t>What is the school called?</a:t>
             </a:r>
@@ -40819,8 +40064,7 @@
                   <a:srgbClr val="1B3B6F"/>
                 </a:solidFill>
                 <a:latin typeface="Calibri" pitchFamily="34" charset="0"/>
-                <a:ea typeface="Calibri" pitchFamily="34" charset="-122"/>
-                <a:cs typeface="Calibri" pitchFamily="34" charset="-120"/>
+                <a:cs typeface="Amiri" pitchFamily="2" charset="-78"/>
               </a:rPr>
               <a:t>A</a:t>
             </a:r>
@@ -40858,8 +40102,7 @@
                   <a:srgbClr val="1F2A37"/>
                 </a:solidFill>
                 <a:latin typeface="Calibri" pitchFamily="34" charset="0"/>
-                <a:ea typeface="Calibri" pitchFamily="34" charset="-122"/>
-                <a:cs typeface="Calibri" pitchFamily="34" charset="-120"/>
+                <a:cs typeface="Amiri" pitchFamily="2" charset="-78"/>
               </a:rPr>
               <a:t>Al-Salam</a:t>
             </a:r>
@@ -40922,8 +40165,7 @@
                   <a:srgbClr val="1B3B6F"/>
                 </a:solidFill>
                 <a:latin typeface="Calibri" pitchFamily="34" charset="0"/>
-                <a:ea typeface="Calibri" pitchFamily="34" charset="-122"/>
-                <a:cs typeface="Calibri" pitchFamily="34" charset="-120"/>
+                <a:cs typeface="Amiri" pitchFamily="2" charset="-78"/>
               </a:rPr>
               <a:t>B</a:t>
             </a:r>
@@ -40961,8 +40203,7 @@
                   <a:srgbClr val="1F2A37"/>
                 </a:solidFill>
                 <a:latin typeface="Calibri" pitchFamily="34" charset="0"/>
-                <a:ea typeface="Calibri" pitchFamily="34" charset="-122"/>
-                <a:cs typeface="Calibri" pitchFamily="34" charset="-120"/>
+                <a:cs typeface="Amiri" pitchFamily="2" charset="-78"/>
               </a:rPr>
               <a:t>Al-Nour</a:t>
             </a:r>
@@ -41025,8 +40266,7 @@
                   <a:srgbClr val="1B3B6F"/>
                 </a:solidFill>
                 <a:latin typeface="Calibri" pitchFamily="34" charset="0"/>
-                <a:ea typeface="Calibri" pitchFamily="34" charset="-122"/>
-                <a:cs typeface="Calibri" pitchFamily="34" charset="-120"/>
+                <a:cs typeface="Amiri" pitchFamily="2" charset="-78"/>
               </a:rPr>
               <a:t>C</a:t>
             </a:r>
@@ -41064,8 +40304,7 @@
                   <a:srgbClr val="1F2A37"/>
                 </a:solidFill>
                 <a:latin typeface="Calibri" pitchFamily="34" charset="0"/>
-                <a:ea typeface="Calibri" pitchFamily="34" charset="-122"/>
-                <a:cs typeface="Calibri" pitchFamily="34" charset="-120"/>
+                <a:cs typeface="Amiri" pitchFamily="2" charset="-78"/>
               </a:rPr>
               <a:t>Al-Amal</a:t>
             </a:r>
@@ -41162,8 +40401,7 @@
                   <a:srgbClr val="FFFFFF"/>
                 </a:solidFill>
                 <a:latin typeface="Calibri" pitchFamily="34" charset="0"/>
-                <a:ea typeface="Calibri" pitchFamily="34" charset="-122"/>
-                <a:cs typeface="Calibri" pitchFamily="34" charset="-120"/>
+                <a:cs typeface="Amiri" pitchFamily="2" charset="-78"/>
               </a:rPr>
               <a:t>2</a:t>
             </a:r>
@@ -41201,8 +40439,7 @@
                   <a:srgbClr val="1B3B6F"/>
                 </a:solidFill>
                 <a:latin typeface="Calibri" pitchFamily="34" charset="0"/>
-                <a:ea typeface="Calibri" pitchFamily="34" charset="-122"/>
-                <a:cs typeface="Calibri" pitchFamily="34" charset="-120"/>
+                <a:cs typeface="Amiri" pitchFamily="2" charset="-78"/>
               </a:rPr>
               <a:t>Approximately how many students attend the school?</a:t>
             </a:r>
@@ -41265,8 +40502,7 @@
                   <a:srgbClr val="1B3B6F"/>
                 </a:solidFill>
                 <a:latin typeface="Calibri" pitchFamily="34" charset="0"/>
-                <a:ea typeface="Calibri" pitchFamily="34" charset="-122"/>
-                <a:cs typeface="Calibri" pitchFamily="34" charset="-120"/>
+                <a:cs typeface="Amiri" pitchFamily="2" charset="-78"/>
               </a:rPr>
               <a:t>A</a:t>
             </a:r>
@@ -41304,8 +40540,7 @@
                   <a:srgbClr val="1F2A37"/>
                 </a:solidFill>
                 <a:latin typeface="Calibri" pitchFamily="34" charset="0"/>
-                <a:ea typeface="Calibri" pitchFamily="34" charset="-122"/>
-                <a:cs typeface="Calibri" pitchFamily="34" charset="-120"/>
+                <a:cs typeface="Amiri" pitchFamily="2" charset="-78"/>
               </a:rPr>
               <a:t>600</a:t>
             </a:r>
@@ -41368,8 +40603,7 @@
                   <a:srgbClr val="1B3B6F"/>
                 </a:solidFill>
                 <a:latin typeface="Calibri" pitchFamily="34" charset="0"/>
-                <a:ea typeface="Calibri" pitchFamily="34" charset="-122"/>
-                <a:cs typeface="Calibri" pitchFamily="34" charset="-120"/>
+                <a:cs typeface="Amiri" pitchFamily="2" charset="-78"/>
               </a:rPr>
               <a:t>B</a:t>
             </a:r>
@@ -41407,8 +40641,7 @@
                   <a:srgbClr val="1F2A37"/>
                 </a:solidFill>
                 <a:latin typeface="Calibri" pitchFamily="34" charset="0"/>
-                <a:ea typeface="Calibri" pitchFamily="34" charset="-122"/>
-                <a:cs typeface="Calibri" pitchFamily="34" charset="-120"/>
+                <a:cs typeface="Amiri" pitchFamily="2" charset="-78"/>
               </a:rPr>
               <a:t>60</a:t>
             </a:r>
@@ -41471,8 +40704,7 @@
                   <a:srgbClr val="1B3B6F"/>
                 </a:solidFill>
                 <a:latin typeface="Calibri" pitchFamily="34" charset="0"/>
-                <a:ea typeface="Calibri" pitchFamily="34" charset="-122"/>
-                <a:cs typeface="Calibri" pitchFamily="34" charset="-120"/>
+                <a:cs typeface="Amiri" pitchFamily="2" charset="-78"/>
               </a:rPr>
               <a:t>C</a:t>
             </a:r>
@@ -41510,8 +40742,7 @@
                   <a:srgbClr val="1F2A37"/>
                 </a:solidFill>
                 <a:latin typeface="Calibri" pitchFamily="34" charset="0"/>
-                <a:ea typeface="Calibri" pitchFamily="34" charset="-122"/>
-                <a:cs typeface="Calibri" pitchFamily="34" charset="-120"/>
+                <a:cs typeface="Amiri" pitchFamily="2" charset="-78"/>
               </a:rPr>
               <a:t>1,600</a:t>
             </a:r>
@@ -41608,8 +40839,7 @@
                   <a:srgbClr val="FFFFFF"/>
                 </a:solidFill>
                 <a:latin typeface="Calibri" pitchFamily="34" charset="0"/>
-                <a:ea typeface="Calibri" pitchFamily="34" charset="-122"/>
-                <a:cs typeface="Calibri" pitchFamily="34" charset="-120"/>
+                <a:cs typeface="Amiri" pitchFamily="2" charset="-78"/>
               </a:rPr>
               <a:t>3</a:t>
             </a:r>
@@ -41647,8 +40877,7 @@
                   <a:srgbClr val="1B3B6F"/>
                 </a:solidFill>
                 <a:latin typeface="Calibri" pitchFamily="34" charset="0"/>
-                <a:ea typeface="Calibri" pitchFamily="34" charset="-122"/>
-                <a:cs typeface="Calibri" pitchFamily="34" charset="-120"/>
+                <a:cs typeface="Amiri" pitchFamily="2" charset="-78"/>
               </a:rPr>
               <a:t>Which subject is mentioned?</a:t>
             </a:r>
@@ -41711,8 +40940,7 @@
                   <a:srgbClr val="1B3B6F"/>
                 </a:solidFill>
                 <a:latin typeface="Calibri" pitchFamily="34" charset="0"/>
-                <a:ea typeface="Calibri" pitchFamily="34" charset="-122"/>
-                <a:cs typeface="Calibri" pitchFamily="34" charset="-120"/>
+                <a:cs typeface="Amiri" pitchFamily="2" charset="-78"/>
               </a:rPr>
               <a:t>A</a:t>
             </a:r>
@@ -41750,8 +40978,7 @@
                   <a:srgbClr val="1F2A37"/>
                 </a:solidFill>
                 <a:latin typeface="Calibri" pitchFamily="34" charset="0"/>
-                <a:ea typeface="Calibri" pitchFamily="34" charset="-122"/>
-                <a:cs typeface="Calibri" pitchFamily="34" charset="-120"/>
+                <a:cs typeface="Amiri" pitchFamily="2" charset="-78"/>
               </a:rPr>
               <a:t>geography</a:t>
             </a:r>
@@ -41814,8 +41041,7 @@
                   <a:srgbClr val="1B3B6F"/>
                 </a:solidFill>
                 <a:latin typeface="Calibri" pitchFamily="34" charset="0"/>
-                <a:ea typeface="Calibri" pitchFamily="34" charset="-122"/>
-                <a:cs typeface="Calibri" pitchFamily="34" charset="-120"/>
+                <a:cs typeface="Amiri" pitchFamily="2" charset="-78"/>
               </a:rPr>
               <a:t>B</a:t>
             </a:r>
@@ -41853,8 +41079,7 @@
                   <a:srgbClr val="1F2A37"/>
                 </a:solidFill>
                 <a:latin typeface="Calibri" pitchFamily="34" charset="0"/>
-                <a:ea typeface="Calibri" pitchFamily="34" charset="-122"/>
-                <a:cs typeface="Calibri" pitchFamily="34" charset="-120"/>
+                <a:cs typeface="Amiri" pitchFamily="2" charset="-78"/>
               </a:rPr>
               <a:t>music</a:t>
             </a:r>
@@ -41917,8 +41142,7 @@
                   <a:srgbClr val="1B3B6F"/>
                 </a:solidFill>
                 <a:latin typeface="Calibri" pitchFamily="34" charset="0"/>
-                <a:ea typeface="Calibri" pitchFamily="34" charset="-122"/>
-                <a:cs typeface="Calibri" pitchFamily="34" charset="-120"/>
+                <a:cs typeface="Amiri" pitchFamily="2" charset="-78"/>
               </a:rPr>
               <a:t>C</a:t>
             </a:r>
@@ -41956,8 +41180,7 @@
                   <a:srgbClr val="1F2A37"/>
                 </a:solidFill>
                 <a:latin typeface="Calibri" pitchFamily="34" charset="0"/>
-                <a:ea typeface="Calibri" pitchFamily="34" charset="-122"/>
-                <a:cs typeface="Calibri" pitchFamily="34" charset="-120"/>
+                <a:cs typeface="Amiri" pitchFamily="2" charset="-78"/>
               </a:rPr>
               <a:t>science</a:t>
             </a:r>
@@ -42054,8 +41277,7 @@
                   <a:srgbClr val="FFFFFF"/>
                 </a:solidFill>
                 <a:latin typeface="Calibri" pitchFamily="34" charset="0"/>
-                <a:ea typeface="Calibri" pitchFamily="34" charset="-122"/>
-                <a:cs typeface="Calibri" pitchFamily="34" charset="-120"/>
+                <a:cs typeface="Amiri" pitchFamily="2" charset="-78"/>
               </a:rPr>
               <a:t>4</a:t>
             </a:r>
@@ -42093,8 +41315,7 @@
                   <a:srgbClr val="1B3B6F"/>
                 </a:solidFill>
                 <a:latin typeface="Calibri" pitchFamily="34" charset="0"/>
-                <a:ea typeface="Calibri" pitchFamily="34" charset="-122"/>
-                <a:cs typeface="Calibri" pitchFamily="34" charset="-120"/>
+                <a:cs typeface="Amiri" pitchFamily="2" charset="-78"/>
               </a:rPr>
               <a:t>What is Salma’s favourite subject?</a:t>
             </a:r>
@@ -42157,8 +41378,7 @@
                   <a:srgbClr val="1B3B6F"/>
                 </a:solidFill>
                 <a:latin typeface="Calibri" pitchFamily="34" charset="0"/>
-                <a:ea typeface="Calibri" pitchFamily="34" charset="-122"/>
-                <a:cs typeface="Calibri" pitchFamily="34" charset="-120"/>
+                <a:cs typeface="Amiri" pitchFamily="2" charset="-78"/>
               </a:rPr>
               <a:t>A</a:t>
             </a:r>
@@ -42196,8 +41416,7 @@
                   <a:srgbClr val="1F2A37"/>
                 </a:solidFill>
                 <a:latin typeface="Calibri" pitchFamily="34" charset="0"/>
-                <a:ea typeface="Calibri" pitchFamily="34" charset="-122"/>
-                <a:cs typeface="Calibri" pitchFamily="34" charset="-120"/>
+                <a:cs typeface="Amiri" pitchFamily="2" charset="-78"/>
               </a:rPr>
               <a:t>history</a:t>
             </a:r>
@@ -42260,8 +41479,7 @@
                   <a:srgbClr val="1B3B6F"/>
                 </a:solidFill>
                 <a:latin typeface="Calibri" pitchFamily="34" charset="0"/>
-                <a:ea typeface="Calibri" pitchFamily="34" charset="-122"/>
-                <a:cs typeface="Calibri" pitchFamily="34" charset="-120"/>
+                <a:cs typeface="Amiri" pitchFamily="2" charset="-78"/>
               </a:rPr>
               <a:t>B</a:t>
             </a:r>
@@ -42299,8 +41517,7 @@
                   <a:srgbClr val="1F2A37"/>
                 </a:solidFill>
                 <a:latin typeface="Calibri" pitchFamily="34" charset="0"/>
-                <a:ea typeface="Calibri" pitchFamily="34" charset="-122"/>
-                <a:cs typeface="Calibri" pitchFamily="34" charset="-120"/>
+                <a:cs typeface="Amiri" pitchFamily="2" charset="-78"/>
               </a:rPr>
               <a:t>science</a:t>
             </a:r>
@@ -42363,8 +41580,7 @@
                   <a:srgbClr val="1B3B6F"/>
                 </a:solidFill>
                 <a:latin typeface="Calibri" pitchFamily="34" charset="0"/>
-                <a:ea typeface="Calibri" pitchFamily="34" charset="-122"/>
-                <a:cs typeface="Calibri" pitchFamily="34" charset="-120"/>
+                <a:cs typeface="Amiri" pitchFamily="2" charset="-78"/>
               </a:rPr>
               <a:t>C</a:t>
             </a:r>
@@ -42402,8 +41618,7 @@
                   <a:srgbClr val="1F2A37"/>
                 </a:solidFill>
                 <a:latin typeface="Calibri" pitchFamily="34" charset="0"/>
-                <a:ea typeface="Calibri" pitchFamily="34" charset="-122"/>
-                <a:cs typeface="Calibri" pitchFamily="34" charset="-120"/>
+                <a:cs typeface="Amiri" pitchFamily="2" charset="-78"/>
               </a:rPr>
               <a:t>Arabic</a:t>
             </a:r>
@@ -42500,8 +41715,7 @@
                   <a:srgbClr val="FFFFFF"/>
                 </a:solidFill>
                 <a:latin typeface="Calibri" pitchFamily="34" charset="0"/>
-                <a:ea typeface="Calibri" pitchFamily="34" charset="-122"/>
-                <a:cs typeface="Calibri" pitchFamily="34" charset="-120"/>
+                <a:cs typeface="Amiri" pitchFamily="2" charset="-78"/>
               </a:rPr>
               <a:t>5</a:t>
             </a:r>
@@ -42539,8 +41753,7 @@
                   <a:srgbClr val="1B3B6F"/>
                 </a:solidFill>
                 <a:latin typeface="Calibri" pitchFamily="34" charset="0"/>
-                <a:ea typeface="Calibri" pitchFamily="34" charset="-122"/>
-                <a:cs typeface="Calibri" pitchFamily="34" charset="-120"/>
+                <a:cs typeface="Amiri" pitchFamily="2" charset="-78"/>
               </a:rPr>
               <a:t>Why does she like it?</a:t>
             </a:r>
@@ -42603,8 +41816,7 @@
                   <a:srgbClr val="1B3B6F"/>
                 </a:solidFill>
                 <a:latin typeface="Calibri" pitchFamily="34" charset="0"/>
-                <a:ea typeface="Calibri" pitchFamily="34" charset="-122"/>
-                <a:cs typeface="Calibri" pitchFamily="34" charset="-120"/>
+                <a:cs typeface="Amiri" pitchFamily="2" charset="-78"/>
               </a:rPr>
               <a:t>A</a:t>
             </a:r>
@@ -42642,8 +41854,7 @@
                   <a:srgbClr val="1F2A37"/>
                 </a:solidFill>
                 <a:latin typeface="Calibri" pitchFamily="34" charset="0"/>
-                <a:ea typeface="Calibri" pitchFamily="34" charset="-122"/>
-                <a:cs typeface="Calibri" pitchFamily="34" charset="-120"/>
+                <a:cs typeface="Amiri" pitchFamily="2" charset="-78"/>
               </a:rPr>
               <a:t>It is easy and short.</a:t>
             </a:r>
@@ -42706,8 +41917,7 @@
                   <a:srgbClr val="1B3B6F"/>
                 </a:solidFill>
                 <a:latin typeface="Calibri" pitchFamily="34" charset="0"/>
-                <a:ea typeface="Calibri" pitchFamily="34" charset="-122"/>
-                <a:cs typeface="Calibri" pitchFamily="34" charset="-120"/>
+                <a:cs typeface="Amiri" pitchFamily="2" charset="-78"/>
               </a:rPr>
               <a:t>B</a:t>
             </a:r>
@@ -42745,8 +41955,7 @@
                   <a:srgbClr val="1F2A37"/>
                 </a:solidFill>
                 <a:latin typeface="Calibri" pitchFamily="34" charset="0"/>
-                <a:ea typeface="Calibri" pitchFamily="34" charset="-122"/>
-                <a:cs typeface="Calibri" pitchFamily="34" charset="-120"/>
+                <a:cs typeface="Amiri" pitchFamily="2" charset="-78"/>
               </a:rPr>
               <a:t>It is useful and enjoyable.</a:t>
             </a:r>
@@ -42809,8 +42018,7 @@
                   <a:srgbClr val="1B3B6F"/>
                 </a:solidFill>
                 <a:latin typeface="Calibri" pitchFamily="34" charset="0"/>
-                <a:ea typeface="Calibri" pitchFamily="34" charset="-122"/>
-                <a:cs typeface="Calibri" pitchFamily="34" charset="-120"/>
+                <a:cs typeface="Amiri" pitchFamily="2" charset="-78"/>
               </a:rPr>
               <a:t>C</a:t>
             </a:r>
@@ -42848,8 +42056,7 @@
                   <a:srgbClr val="1F2A37"/>
                 </a:solidFill>
                 <a:latin typeface="Calibri" pitchFamily="34" charset="0"/>
-                <a:ea typeface="Calibri" pitchFamily="34" charset="-122"/>
-                <a:cs typeface="Calibri" pitchFamily="34" charset="-120"/>
+                <a:cs typeface="Amiri" pitchFamily="2" charset="-78"/>
               </a:rPr>
               <a:t>It is new and important.</a:t>
             </a:r>
@@ -42946,8 +42153,7 @@
                   <a:srgbClr val="FFFFFF"/>
                 </a:solidFill>
                 <a:latin typeface="Calibri" pitchFamily="34" charset="0"/>
-                <a:ea typeface="Calibri" pitchFamily="34" charset="-122"/>
-                <a:cs typeface="Calibri" pitchFamily="34" charset="-120"/>
+                <a:cs typeface="Amiri" pitchFamily="2" charset="-78"/>
               </a:rPr>
               <a:t>6</a:t>
             </a:r>
@@ -42985,8 +42191,7 @@
                   <a:srgbClr val="1B3B6F"/>
                 </a:solidFill>
                 <a:latin typeface="Calibri" pitchFamily="34" charset="0"/>
-                <a:ea typeface="Calibri" pitchFamily="34" charset="-122"/>
-                <a:cs typeface="Calibri" pitchFamily="34" charset="-120"/>
+                <a:cs typeface="Amiri" pitchFamily="2" charset="-78"/>
               </a:rPr>
               <a:t>Which subject does she dislike?</a:t>
             </a:r>
@@ -43049,8 +42254,7 @@
                   <a:srgbClr val="1B3B6F"/>
                 </a:solidFill>
                 <a:latin typeface="Calibri" pitchFamily="34" charset="0"/>
-                <a:ea typeface="Calibri" pitchFamily="34" charset="-122"/>
-                <a:cs typeface="Calibri" pitchFamily="34" charset="-120"/>
+                <a:cs typeface="Amiri" pitchFamily="2" charset="-78"/>
               </a:rPr>
               <a:t>A</a:t>
             </a:r>
@@ -43088,8 +42292,7 @@
                   <a:srgbClr val="1F2A37"/>
                 </a:solidFill>
                 <a:latin typeface="Calibri" pitchFamily="34" charset="0"/>
-                <a:ea typeface="Calibri" pitchFamily="34" charset="-122"/>
-                <a:cs typeface="Calibri" pitchFamily="34" charset="-120"/>
+                <a:cs typeface="Amiri" pitchFamily="2" charset="-78"/>
               </a:rPr>
               <a:t>art</a:t>
             </a:r>
@@ -43152,8 +42355,7 @@
                   <a:srgbClr val="1B3B6F"/>
                 </a:solidFill>
                 <a:latin typeface="Calibri" pitchFamily="34" charset="0"/>
-                <a:ea typeface="Calibri" pitchFamily="34" charset="-122"/>
-                <a:cs typeface="Calibri" pitchFamily="34" charset="-120"/>
+                <a:cs typeface="Amiri" pitchFamily="2" charset="-78"/>
               </a:rPr>
               <a:t>B</a:t>
             </a:r>
@@ -43191,8 +42393,7 @@
                   <a:srgbClr val="1F2A37"/>
                 </a:solidFill>
                 <a:latin typeface="Calibri" pitchFamily="34" charset="0"/>
-                <a:ea typeface="Calibri" pitchFamily="34" charset="-122"/>
-                <a:cs typeface="Calibri" pitchFamily="34" charset="-120"/>
+                <a:cs typeface="Amiri" pitchFamily="2" charset="-78"/>
               </a:rPr>
               <a:t>English</a:t>
             </a:r>
@@ -43255,8 +42456,7 @@
                   <a:srgbClr val="1B3B6F"/>
                 </a:solidFill>
                 <a:latin typeface="Calibri" pitchFamily="34" charset="0"/>
-                <a:ea typeface="Calibri" pitchFamily="34" charset="-122"/>
-                <a:cs typeface="Calibri" pitchFamily="34" charset="-120"/>
+                <a:cs typeface="Amiri" pitchFamily="2" charset="-78"/>
               </a:rPr>
               <a:t>C</a:t>
             </a:r>
@@ -43294,8 +42494,7 @@
                   <a:srgbClr val="1F2A37"/>
                 </a:solidFill>
                 <a:latin typeface="Calibri" pitchFamily="34" charset="0"/>
-                <a:ea typeface="Calibri" pitchFamily="34" charset="-122"/>
-                <a:cs typeface="Calibri" pitchFamily="34" charset="-120"/>
+                <a:cs typeface="Amiri" pitchFamily="2" charset="-78"/>
               </a:rPr>
               <a:t>history</a:t>
             </a:r>
@@ -43392,8 +42591,7 @@
                   <a:srgbClr val="FFFFFF"/>
                 </a:solidFill>
                 <a:latin typeface="Calibri" pitchFamily="34" charset="0"/>
-                <a:ea typeface="Calibri" pitchFamily="34" charset="-122"/>
-                <a:cs typeface="Calibri" pitchFamily="34" charset="-120"/>
+                <a:cs typeface="Amiri" pitchFamily="2" charset="-78"/>
               </a:rPr>
               <a:t>7</a:t>
             </a:r>
@@ -43431,8 +42629,7 @@
                   <a:srgbClr val="1B3B6F"/>
                 </a:solidFill>
                 <a:latin typeface="Calibri" pitchFamily="34" charset="0"/>
-                <a:ea typeface="Calibri" pitchFamily="34" charset="-122"/>
-                <a:cs typeface="Calibri" pitchFamily="34" charset="-120"/>
+                <a:cs typeface="Amiri" pitchFamily="2" charset="-78"/>
               </a:rPr>
               <a:t>What must students do?</a:t>
             </a:r>
@@ -43495,8 +42692,7 @@
                   <a:srgbClr val="1B3B6F"/>
                 </a:solidFill>
                 <a:latin typeface="Calibri" pitchFamily="34" charset="0"/>
-                <a:ea typeface="Calibri" pitchFamily="34" charset="-122"/>
-                <a:cs typeface="Calibri" pitchFamily="34" charset="-120"/>
+                <a:cs typeface="Amiri" pitchFamily="2" charset="-78"/>
               </a:rPr>
               <a:t>A</a:t>
             </a:r>
@@ -43534,8 +42730,7 @@
                   <a:srgbClr val="1F2A37"/>
                 </a:solidFill>
                 <a:latin typeface="Calibri" pitchFamily="34" charset="0"/>
-                <a:ea typeface="Calibri" pitchFamily="34" charset="-122"/>
-                <a:cs typeface="Calibri" pitchFamily="34" charset="-120"/>
+                <a:cs typeface="Amiri" pitchFamily="2" charset="-78"/>
               </a:rPr>
               <a:t>arrive on time</a:t>
             </a:r>
@@ -43598,8 +42793,7 @@
                   <a:srgbClr val="1B3B6F"/>
                 </a:solidFill>
                 <a:latin typeface="Calibri" pitchFamily="34" charset="0"/>
-                <a:ea typeface="Calibri" pitchFamily="34" charset="-122"/>
-                <a:cs typeface="Calibri" pitchFamily="34" charset="-120"/>
+                <a:cs typeface="Amiri" pitchFamily="2" charset="-78"/>
               </a:rPr>
               <a:t>B</a:t>
             </a:r>
@@ -43637,8 +42831,7 @@
                   <a:srgbClr val="1F2A37"/>
                 </a:solidFill>
                 <a:latin typeface="Calibri" pitchFamily="34" charset="0"/>
-                <a:ea typeface="Calibri" pitchFamily="34" charset="-122"/>
-                <a:cs typeface="Calibri" pitchFamily="34" charset="-120"/>
+                <a:cs typeface="Amiri" pitchFamily="2" charset="-78"/>
               </a:rPr>
               <a:t>bring lunch</a:t>
             </a:r>
@@ -43701,8 +42894,7 @@
                   <a:srgbClr val="1B3B6F"/>
                 </a:solidFill>
                 <a:latin typeface="Calibri" pitchFamily="34" charset="0"/>
-                <a:ea typeface="Calibri" pitchFamily="34" charset="-122"/>
-                <a:cs typeface="Calibri" pitchFamily="34" charset="-120"/>
+                <a:cs typeface="Amiri" pitchFamily="2" charset="-78"/>
               </a:rPr>
               <a:t>C</a:t>
             </a:r>
@@ -43740,8 +42932,7 @@
                   <a:srgbClr val="1F2A37"/>
                 </a:solidFill>
                 <a:latin typeface="Calibri" pitchFamily="34" charset="0"/>
-                <a:ea typeface="Calibri" pitchFamily="34" charset="-122"/>
-                <a:cs typeface="Calibri" pitchFamily="34" charset="-120"/>
+                <a:cs typeface="Amiri" pitchFamily="2" charset="-78"/>
               </a:rPr>
               <a:t>wear blue</a:t>
             </a:r>
@@ -43838,8 +43029,7 @@
                   <a:srgbClr val="FFFFFF"/>
                 </a:solidFill>
                 <a:latin typeface="Calibri" pitchFamily="34" charset="0"/>
-                <a:ea typeface="Calibri" pitchFamily="34" charset="-122"/>
-                <a:cs typeface="Calibri" pitchFamily="34" charset="-120"/>
+                <a:cs typeface="Amiri" pitchFamily="2" charset="-78"/>
               </a:rPr>
               <a:t>8</a:t>
             </a:r>
@@ -43877,8 +43067,7 @@
                   <a:srgbClr val="1B3B6F"/>
                 </a:solidFill>
                 <a:latin typeface="Calibri" pitchFamily="34" charset="0"/>
-                <a:ea typeface="Calibri" pitchFamily="34" charset="-122"/>
-                <a:cs typeface="Calibri" pitchFamily="34" charset="-120"/>
+                <a:cs typeface="Amiri" pitchFamily="2" charset="-78"/>
               </a:rPr>
               <a:t>What is not allowed during the lesson?</a:t>
             </a:r>
@@ -43941,8 +43130,7 @@
                   <a:srgbClr val="1B3B6F"/>
                 </a:solidFill>
                 <a:latin typeface="Calibri" pitchFamily="34" charset="0"/>
-                <a:ea typeface="Calibri" pitchFamily="34" charset="-122"/>
-                <a:cs typeface="Calibri" pitchFamily="34" charset="-120"/>
+                <a:cs typeface="Amiri" pitchFamily="2" charset="-78"/>
               </a:rPr>
               <a:t>A</a:t>
             </a:r>
@@ -43980,8 +43168,7 @@
                   <a:srgbClr val="1F2A37"/>
                 </a:solidFill>
                 <a:latin typeface="Calibri" pitchFamily="34" charset="0"/>
-                <a:ea typeface="Calibri" pitchFamily="34" charset="-122"/>
-                <a:cs typeface="Calibri" pitchFamily="34" charset="-120"/>
+                <a:cs typeface="Amiri" pitchFamily="2" charset="-78"/>
               </a:rPr>
               <a:t>books</a:t>
             </a:r>
@@ -44044,8 +43231,7 @@
                   <a:srgbClr val="1B3B6F"/>
                 </a:solidFill>
                 <a:latin typeface="Calibri" pitchFamily="34" charset="0"/>
-                <a:ea typeface="Calibri" pitchFamily="34" charset="-122"/>
-                <a:cs typeface="Calibri" pitchFamily="34" charset="-120"/>
+                <a:cs typeface="Amiri" pitchFamily="2" charset="-78"/>
               </a:rPr>
               <a:t>B</a:t>
             </a:r>
@@ -44083,8 +43269,7 @@
                   <a:srgbClr val="1F2A37"/>
                 </a:solidFill>
                 <a:latin typeface="Calibri" pitchFamily="34" charset="0"/>
-                <a:ea typeface="Calibri" pitchFamily="34" charset="-122"/>
-                <a:cs typeface="Calibri" pitchFamily="34" charset="-120"/>
+                <a:cs typeface="Amiri" pitchFamily="2" charset="-78"/>
               </a:rPr>
               <a:t>phones</a:t>
             </a:r>
@@ -44147,8 +43332,7 @@
                   <a:srgbClr val="1B3B6F"/>
                 </a:solidFill>
                 <a:latin typeface="Calibri" pitchFamily="34" charset="0"/>
-                <a:ea typeface="Calibri" pitchFamily="34" charset="-122"/>
-                <a:cs typeface="Calibri" pitchFamily="34" charset="-120"/>
+                <a:cs typeface="Amiri" pitchFamily="2" charset="-78"/>
               </a:rPr>
               <a:t>C</a:t>
             </a:r>
@@ -44186,8 +43370,7 @@
                   <a:srgbClr val="1F2A37"/>
                 </a:solidFill>
                 <a:latin typeface="Calibri" pitchFamily="34" charset="0"/>
-                <a:ea typeface="Calibri" pitchFamily="34" charset="-122"/>
-                <a:cs typeface="Calibri" pitchFamily="34" charset="-120"/>
+                <a:cs typeface="Amiri" pitchFamily="2" charset="-78"/>
               </a:rPr>
               <a:t>questions</a:t>
             </a:r>
@@ -44225,8 +43408,7 @@
                   <a:srgbClr val="8A93A0"/>
                 </a:solidFill>
                 <a:latin typeface="Calibri" pitchFamily="34" charset="0"/>
-                <a:ea typeface="Calibri" pitchFamily="34" charset="-122"/>
-                <a:cs typeface="Calibri" pitchFamily="34" charset="-120"/>
+                <a:cs typeface="Amiri" pitchFamily="2" charset="-78"/>
               </a:rPr>
               <a:t>8 / 23</a:t>
             </a:r>
@@ -44320,9 +43502,8 @@
                 <a:solidFill>
                   <a:srgbClr val="D4AF37"/>
                 </a:solidFill>
-                <a:latin typeface="Amiri" pitchFamily="34" charset="0"/>
-                <a:ea typeface="Amiri" pitchFamily="34" charset="-122"/>
-                <a:cs typeface="Amiri" pitchFamily="34" charset="-120"/>
+                <a:latin typeface="Amiri" pitchFamily="2" charset="-78"/>
+                <a:cs typeface="Amiri" pitchFamily="2" charset="-78"/>
               </a:rPr>
               <a:t>م</a:t>
             </a:r>
@@ -44360,8 +43541,7 @@
                   <a:srgbClr val="1B3B6F"/>
                 </a:solidFill>
                 <a:latin typeface="Cambria" pitchFamily="34" charset="0"/>
-                <a:ea typeface="Cambria" pitchFamily="34" charset="-122"/>
-                <a:cs typeface="Cambria" pitchFamily="34" charset="-120"/>
+                <a:cs typeface="Amiri" pitchFamily="2" charset="-78"/>
               </a:rPr>
               <a:t>Al Madina Online School</a:t>
             </a:r>
@@ -44399,8 +43579,7 @@
                   <a:srgbClr val="8A6D1E"/>
                 </a:solidFill>
                 <a:latin typeface="Calibri" pitchFamily="34" charset="0"/>
-                <a:ea typeface="Calibri" pitchFamily="34" charset="-122"/>
-                <a:cs typeface="Calibri" pitchFamily="34" charset="-120"/>
+                <a:cs typeface="Amiri" pitchFamily="2" charset="-78"/>
               </a:rPr>
               <a:t>ARABIC DEPARTMENT · MIFTAH ARABIC · IGCSE 0544</a:t>
             </a:r>
@@ -44465,8 +43644,7 @@
                   <a:srgbClr val="FFFFFF"/>
                 </a:solidFill>
                 <a:latin typeface="Calibri" pitchFamily="34" charset="0"/>
-                <a:ea typeface="Calibri" pitchFamily="34" charset="-122"/>
-                <a:cs typeface="Calibri" pitchFamily="34" charset="-120"/>
+                <a:cs typeface="Amiri" pitchFamily="2" charset="-78"/>
               </a:rPr>
               <a:t>F4-L12 · F4 Assessment</a:t>
             </a:r>
@@ -44531,8 +43709,7 @@
                   <a:srgbClr val="FFFFFF"/>
                 </a:solidFill>
                 <a:latin typeface="Calibri" pitchFamily="34" charset="0"/>
-                <a:ea typeface="Calibri" pitchFamily="34" charset="-122"/>
-                <a:cs typeface="Calibri" pitchFamily="34" charset="-120"/>
+                <a:cs typeface="Amiri" pitchFamily="2" charset="-78"/>
               </a:rPr>
               <a:t>I DO</a:t>
             </a:r>
@@ -44570,8 +43747,7 @@
                   <a:srgbClr val="6B4C9A"/>
                 </a:solidFill>
                 <a:latin typeface="Calibri" pitchFamily="34" charset="0"/>
-                <a:ea typeface="Calibri" pitchFamily="34" charset="-122"/>
-                <a:cs typeface="Calibri" pitchFamily="34" charset="-120"/>
+                <a:cs typeface="Amiri" pitchFamily="2" charset="-78"/>
               </a:rPr>
               <a:t>LISTENING · TEXT 1 · ANSWERS</a:t>
             </a:r>
@@ -44609,8 +43785,7 @@
                   <a:srgbClr val="1B3B6F"/>
                 </a:solidFill>
                 <a:latin typeface="Cambria" pitchFamily="34" charset="0"/>
-                <a:ea typeface="Cambria" pitchFamily="34" charset="-122"/>
-                <a:cs typeface="Cambria" pitchFamily="34" charset="-120"/>
+                <a:cs typeface="Amiri" pitchFamily="2" charset="-78"/>
               </a:rPr>
               <a:t>Text 1 · Answers</a:t>
             </a:r>
@@ -44647,9 +43822,8 @@
                 <a:solidFill>
                   <a:srgbClr val="8A6D1E"/>
                 </a:solidFill>
-                <a:latin typeface="Amiri" pitchFamily="34" charset="0"/>
-                <a:ea typeface="Amiri" pitchFamily="34" charset="-122"/>
-                <a:cs typeface="Amiri" pitchFamily="34" charset="-120"/>
+                <a:latin typeface="Amiri" pitchFamily="2" charset="-78"/>
+                <a:cs typeface="Amiri" pitchFamily="2" charset="-78"/>
               </a:rPr>
               <a:t>الإِجَابَاتُ</a:t>
             </a:r>
@@ -44687,8 +43861,7 @@
                   <a:srgbClr val="8A93A0"/>
                 </a:solidFill>
                 <a:latin typeface="Calibri" pitchFamily="34" charset="0"/>
-                <a:ea typeface="Calibri" pitchFamily="34" charset="-122"/>
-                <a:cs typeface="Calibri" pitchFamily="34" charset="-120"/>
+                <a:cs typeface="Amiri" pitchFamily="2" charset="-78"/>
               </a:rPr>
               <a:t>Miftah Arabic · Foundation F4 · My School · F4-L12</a:t>
             </a:r>
@@ -44785,8 +43958,7 @@
                   <a:srgbClr val="FFFFFF"/>
                 </a:solidFill>
                 <a:latin typeface="Calibri" pitchFamily="34" charset="0"/>
-                <a:ea typeface="Calibri" pitchFamily="34" charset="-122"/>
-                <a:cs typeface="Calibri" pitchFamily="34" charset="-120"/>
+                <a:cs typeface="Amiri" pitchFamily="2" charset="-78"/>
               </a:rPr>
               <a:t>1</a:t>
             </a:r>
@@ -44824,8 +43996,7 @@
                   <a:srgbClr val="1B3B6F"/>
                 </a:solidFill>
                 <a:latin typeface="Calibri" pitchFamily="34" charset="0"/>
-                <a:ea typeface="Calibri" pitchFamily="34" charset="-122"/>
-                <a:cs typeface="Calibri" pitchFamily="34" charset="-120"/>
+                <a:cs typeface="Amiri" pitchFamily="2" charset="-78"/>
               </a:rPr>
               <a:t>What is the school called?</a:t>
             </a:r>
@@ -44888,8 +44059,7 @@
                   <a:srgbClr val="1B3B6F"/>
                 </a:solidFill>
                 <a:latin typeface="Calibri" pitchFamily="34" charset="0"/>
-                <a:ea typeface="Calibri" pitchFamily="34" charset="-122"/>
-                <a:cs typeface="Calibri" pitchFamily="34" charset="-120"/>
+                <a:cs typeface="Amiri" pitchFamily="2" charset="-78"/>
               </a:rPr>
               <a:t>A</a:t>
             </a:r>
@@ -44927,8 +44097,7 @@
                   <a:srgbClr val="9AA1AB"/>
                 </a:solidFill>
                 <a:latin typeface="Calibri" pitchFamily="34" charset="0"/>
-                <a:ea typeface="Calibri" pitchFamily="34" charset="-122"/>
-                <a:cs typeface="Calibri" pitchFamily="34" charset="-120"/>
+                <a:cs typeface="Amiri" pitchFamily="2" charset="-78"/>
               </a:rPr>
               <a:t>Al-Salam</a:t>
             </a:r>
@@ -45018,8 +44187,7 @@
                   <a:srgbClr val="FFFFFF"/>
                 </a:solidFill>
                 <a:latin typeface="Calibri" pitchFamily="34" charset="0"/>
-                <a:ea typeface="Calibri" pitchFamily="34" charset="-122"/>
-                <a:cs typeface="Calibri" pitchFamily="34" charset="-120"/>
+                <a:cs typeface="Amiri" pitchFamily="2" charset="-78"/>
               </a:rPr>
               <a:t>B</a:t>
             </a:r>
@@ -45057,8 +44225,7 @@
                   <a:srgbClr val="1F2A37"/>
                 </a:solidFill>
                 <a:latin typeface="Calibri" pitchFamily="34" charset="0"/>
-                <a:ea typeface="Calibri" pitchFamily="34" charset="-122"/>
-                <a:cs typeface="Calibri" pitchFamily="34" charset="-120"/>
+                <a:cs typeface="Amiri" pitchFamily="2" charset="-78"/>
               </a:rPr>
               <a:t>Al-Nour</a:t>
             </a:r>
@@ -45121,8 +44288,7 @@
                   <a:srgbClr val="1B3B6F"/>
                 </a:solidFill>
                 <a:latin typeface="Calibri" pitchFamily="34" charset="0"/>
-                <a:ea typeface="Calibri" pitchFamily="34" charset="-122"/>
-                <a:cs typeface="Calibri" pitchFamily="34" charset="-120"/>
+                <a:cs typeface="Amiri" pitchFamily="2" charset="-78"/>
               </a:rPr>
               <a:t>C</a:t>
             </a:r>
@@ -45160,8 +44326,7 @@
                   <a:srgbClr val="9AA1AB"/>
                 </a:solidFill>
                 <a:latin typeface="Calibri" pitchFamily="34" charset="0"/>
-                <a:ea typeface="Calibri" pitchFamily="34" charset="-122"/>
-                <a:cs typeface="Calibri" pitchFamily="34" charset="-120"/>
+                <a:cs typeface="Amiri" pitchFamily="2" charset="-78"/>
               </a:rPr>
               <a:t>Al-Amal</a:t>
             </a:r>
@@ -45198,9 +44363,8 @@
                 <a:solidFill>
                   <a:srgbClr val="8A6D1E"/>
                 </a:solidFill>
-                <a:latin typeface="Amiri" pitchFamily="34" charset="0"/>
-                <a:ea typeface="Amiri" pitchFamily="34" charset="-122"/>
-                <a:cs typeface="Amiri" pitchFamily="34" charset="-120"/>
+                <a:latin typeface="Amiri" pitchFamily="2" charset="-78"/>
+                <a:cs typeface="Amiri" pitchFamily="2" charset="-78"/>
               </a:rPr>
               <a:t>مَدْرَسَةِ النُّورِ</a:t>
             </a:r>
@@ -45297,8 +44461,7 @@
                   <a:srgbClr val="FFFFFF"/>
                 </a:solidFill>
                 <a:latin typeface="Calibri" pitchFamily="34" charset="0"/>
-                <a:ea typeface="Calibri" pitchFamily="34" charset="-122"/>
-                <a:cs typeface="Calibri" pitchFamily="34" charset="-120"/>
+                <a:cs typeface="Amiri" pitchFamily="2" charset="-78"/>
               </a:rPr>
               <a:t>2</a:t>
             </a:r>
@@ -45336,8 +44499,7 @@
                   <a:srgbClr val="1B3B6F"/>
                 </a:solidFill>
                 <a:latin typeface="Calibri" pitchFamily="34" charset="0"/>
-                <a:ea typeface="Calibri" pitchFamily="34" charset="-122"/>
-                <a:cs typeface="Calibri" pitchFamily="34" charset="-120"/>
+                <a:cs typeface="Amiri" pitchFamily="2" charset="-78"/>
               </a:rPr>
               <a:t>Approximately how many students attend the school?</a:t>
             </a:r>
@@ -45427,8 +44589,7 @@
                   <a:srgbClr val="FFFFFF"/>
                 </a:solidFill>
                 <a:latin typeface="Calibri" pitchFamily="34" charset="0"/>
-                <a:ea typeface="Calibri" pitchFamily="34" charset="-122"/>
-                <a:cs typeface="Calibri" pitchFamily="34" charset="-120"/>
+                <a:cs typeface="Amiri" pitchFamily="2" charset="-78"/>
               </a:rPr>
               <a:t>A</a:t>
             </a:r>
@@ -45466,8 +44627,7 @@
                   <a:srgbClr val="1F2A37"/>
                 </a:solidFill>
                 <a:latin typeface="Calibri" pitchFamily="34" charset="0"/>
-                <a:ea typeface="Calibri" pitchFamily="34" charset="-122"/>
-                <a:cs typeface="Calibri" pitchFamily="34" charset="-120"/>
+                <a:cs typeface="Amiri" pitchFamily="2" charset="-78"/>
               </a:rPr>
               <a:t>600</a:t>
             </a:r>
@@ -45530,8 +44690,7 @@
                   <a:srgbClr val="1B3B6F"/>
                 </a:solidFill>
                 <a:latin typeface="Calibri" pitchFamily="34" charset="0"/>
-                <a:ea typeface="Calibri" pitchFamily="34" charset="-122"/>
-                <a:cs typeface="Calibri" pitchFamily="34" charset="-120"/>
+                <a:cs typeface="Amiri" pitchFamily="2" charset="-78"/>
               </a:rPr>
               <a:t>B</a:t>
             </a:r>
@@ -45569,8 +44728,7 @@
                   <a:srgbClr val="9AA1AB"/>
                 </a:solidFill>
                 <a:latin typeface="Calibri" pitchFamily="34" charset="0"/>
-                <a:ea typeface="Calibri" pitchFamily="34" charset="-122"/>
-                <a:cs typeface="Calibri" pitchFamily="34" charset="-120"/>
+                <a:cs typeface="Amiri" pitchFamily="2" charset="-78"/>
               </a:rPr>
               <a:t>60</a:t>
             </a:r>
@@ -45633,8 +44791,7 @@
                   <a:srgbClr val="1B3B6F"/>
                 </a:solidFill>
                 <a:latin typeface="Calibri" pitchFamily="34" charset="0"/>
-                <a:ea typeface="Calibri" pitchFamily="34" charset="-122"/>
-                <a:cs typeface="Calibri" pitchFamily="34" charset="-120"/>
+                <a:cs typeface="Amiri" pitchFamily="2" charset="-78"/>
               </a:rPr>
               <a:t>C</a:t>
             </a:r>
@@ -45672,8 +44829,7 @@
                   <a:srgbClr val="9AA1AB"/>
                 </a:solidFill>
                 <a:latin typeface="Calibri" pitchFamily="34" charset="0"/>
-                <a:ea typeface="Calibri" pitchFamily="34" charset="-122"/>
-                <a:cs typeface="Calibri" pitchFamily="34" charset="-120"/>
+                <a:cs typeface="Amiri" pitchFamily="2" charset="-78"/>
               </a:rPr>
               <a:t>1,600</a:t>
             </a:r>
@@ -45710,9 +44866,8 @@
                 <a:solidFill>
                   <a:srgbClr val="8A6D1E"/>
                 </a:solidFill>
-                <a:latin typeface="Amiri" pitchFamily="34" charset="0"/>
-                <a:ea typeface="Amiri" pitchFamily="34" charset="-122"/>
-                <a:cs typeface="Amiri" pitchFamily="34" charset="-120"/>
+                <a:latin typeface="Amiri" pitchFamily="2" charset="-78"/>
+                <a:cs typeface="Amiri" pitchFamily="2" charset="-78"/>
               </a:rPr>
               <a:t>نَحْوُ سِتِّمِئَةِ طَالِبٍ وَطَالِبَةٍ</a:t>
             </a:r>
@@ -45809,8 +44964,7 @@
                   <a:srgbClr val="FFFFFF"/>
                 </a:solidFill>
                 <a:latin typeface="Calibri" pitchFamily="34" charset="0"/>
-                <a:ea typeface="Calibri" pitchFamily="34" charset="-122"/>
-                <a:cs typeface="Calibri" pitchFamily="34" charset="-120"/>
+                <a:cs typeface="Amiri" pitchFamily="2" charset="-78"/>
               </a:rPr>
               <a:t>3</a:t>
             </a:r>
@@ -45848,8 +45002,7 @@
                   <a:srgbClr val="1B3B6F"/>
                 </a:solidFill>
                 <a:latin typeface="Calibri" pitchFamily="34" charset="0"/>
-                <a:ea typeface="Calibri" pitchFamily="34" charset="-122"/>
-                <a:cs typeface="Calibri" pitchFamily="34" charset="-120"/>
+                <a:cs typeface="Amiri" pitchFamily="2" charset="-78"/>
               </a:rPr>
               <a:t>Which subject is mentioned?</a:t>
             </a:r>
@@ -45912,8 +45065,7 @@
                   <a:srgbClr val="1B3B6F"/>
                 </a:solidFill>
                 <a:latin typeface="Calibri" pitchFamily="34" charset="0"/>
-                <a:ea typeface="Calibri" pitchFamily="34" charset="-122"/>
-                <a:cs typeface="Calibri" pitchFamily="34" charset="-120"/>
+                <a:cs typeface="Amiri" pitchFamily="2" charset="-78"/>
               </a:rPr>
               <a:t>A</a:t>
             </a:r>
@@ -45951,8 +45103,7 @@
                   <a:srgbClr val="9AA1AB"/>
                 </a:solidFill>
                 <a:latin typeface="Calibri" pitchFamily="34" charset="0"/>
-                <a:ea typeface="Calibri" pitchFamily="34" charset="-122"/>
-                <a:cs typeface="Calibri" pitchFamily="34" charset="-120"/>
+                <a:cs typeface="Amiri" pitchFamily="2" charset="-78"/>
               </a:rPr>
               <a:t>geography</a:t>
             </a:r>
@@ -46015,8 +45166,7 @@
                   <a:srgbClr val="1B3B6F"/>
                 </a:solidFill>
                 <a:latin typeface="Calibri" pitchFamily="34" charset="0"/>
-                <a:ea typeface="Calibri" pitchFamily="34" charset="-122"/>
-                <a:cs typeface="Calibri" pitchFamily="34" charset="-120"/>
+                <a:cs typeface="Amiri" pitchFamily="2" charset="-78"/>
               </a:rPr>
               <a:t>B</a:t>
             </a:r>
@@ -46054,8 +45204,7 @@
                   <a:srgbClr val="9AA1AB"/>
                 </a:solidFill>
                 <a:latin typeface="Calibri" pitchFamily="34" charset="0"/>
-                <a:ea typeface="Calibri" pitchFamily="34" charset="-122"/>
-                <a:cs typeface="Calibri" pitchFamily="34" charset="-120"/>
+                <a:cs typeface="Amiri" pitchFamily="2" charset="-78"/>
               </a:rPr>
               <a:t>music</a:t>
             </a:r>
@@ -46145,8 +45294,7 @@
                   <a:srgbClr val="FFFFFF"/>
                 </a:solidFill>
                 <a:latin typeface="Calibri" pitchFamily="34" charset="0"/>
-                <a:ea typeface="Calibri" pitchFamily="34" charset="-122"/>
-                <a:cs typeface="Calibri" pitchFamily="34" charset="-120"/>
+                <a:cs typeface="Amiri" pitchFamily="2" charset="-78"/>
               </a:rPr>
               <a:t>C</a:t>
             </a:r>
@@ -46184,8 +45332,7 @@
                   <a:srgbClr val="1F2A37"/>
                 </a:solidFill>
                 <a:latin typeface="Calibri" pitchFamily="34" charset="0"/>
-                <a:ea typeface="Calibri" pitchFamily="34" charset="-122"/>
-                <a:cs typeface="Calibri" pitchFamily="34" charset="-120"/>
+                <a:cs typeface="Amiri" pitchFamily="2" charset="-78"/>
               </a:rPr>
               <a:t>science</a:t>
             </a:r>
@@ -46222,9 +45369,8 @@
                 <a:solidFill>
                   <a:srgbClr val="8A6D1E"/>
                 </a:solidFill>
-                <a:latin typeface="Amiri" pitchFamily="34" charset="0"/>
-                <a:ea typeface="Amiri" pitchFamily="34" charset="-122"/>
-                <a:cs typeface="Amiri" pitchFamily="34" charset="-120"/>
+                <a:latin typeface="Amiri" pitchFamily="2" charset="-78"/>
+                <a:cs typeface="Amiri" pitchFamily="2" charset="-78"/>
               </a:rPr>
               <a:t>وَالعُلُومَ</a:t>
             </a:r>
@@ -46321,8 +45467,7 @@
                   <a:srgbClr val="FFFFFF"/>
                 </a:solidFill>
                 <a:latin typeface="Calibri" pitchFamily="34" charset="0"/>
-                <a:ea typeface="Calibri" pitchFamily="34" charset="-122"/>
-                <a:cs typeface="Calibri" pitchFamily="34" charset="-120"/>
+                <a:cs typeface="Amiri" pitchFamily="2" charset="-78"/>
               </a:rPr>
               <a:t>4</a:t>
             </a:r>
@@ -46360,8 +45505,7 @@
                   <a:srgbClr val="1B3B6F"/>
                 </a:solidFill>
                 <a:latin typeface="Calibri" pitchFamily="34" charset="0"/>
-                <a:ea typeface="Calibri" pitchFamily="34" charset="-122"/>
-                <a:cs typeface="Calibri" pitchFamily="34" charset="-120"/>
+                <a:cs typeface="Amiri" pitchFamily="2" charset="-78"/>
               </a:rPr>
               <a:t>What is Salma’s favourite subject?</a:t>
             </a:r>
@@ -46424,8 +45568,7 @@
                   <a:srgbClr val="1B3B6F"/>
                 </a:solidFill>
                 <a:latin typeface="Calibri" pitchFamily="34" charset="0"/>
-                <a:ea typeface="Calibri" pitchFamily="34" charset="-122"/>
-                <a:cs typeface="Calibri" pitchFamily="34" charset="-120"/>
+                <a:cs typeface="Amiri" pitchFamily="2" charset="-78"/>
               </a:rPr>
               <a:t>A</a:t>
             </a:r>
@@ -46463,8 +45606,7 @@
                   <a:srgbClr val="9AA1AB"/>
                 </a:solidFill>
                 <a:latin typeface="Calibri" pitchFamily="34" charset="0"/>
-                <a:ea typeface="Calibri" pitchFamily="34" charset="-122"/>
-                <a:cs typeface="Calibri" pitchFamily="34" charset="-120"/>
+                <a:cs typeface="Amiri" pitchFamily="2" charset="-78"/>
               </a:rPr>
               <a:t>history</a:t>
             </a:r>
@@ -46554,8 +45696,7 @@
                   <a:srgbClr val="FFFFFF"/>
                 </a:solidFill>
                 <a:latin typeface="Calibri" pitchFamily="34" charset="0"/>
-                <a:ea typeface="Calibri" pitchFamily="34" charset="-122"/>
-                <a:cs typeface="Calibri" pitchFamily="34" charset="-120"/>
+                <a:cs typeface="Amiri" pitchFamily="2" charset="-78"/>
               </a:rPr>
               <a:t>B</a:t>
             </a:r>
@@ -46593,8 +45734,7 @@
                   <a:srgbClr val="1F2A37"/>
                 </a:solidFill>
                 <a:latin typeface="Calibri" pitchFamily="34" charset="0"/>
-                <a:ea typeface="Calibri" pitchFamily="34" charset="-122"/>
-                <a:cs typeface="Calibri" pitchFamily="34" charset="-120"/>
+                <a:cs typeface="Amiri" pitchFamily="2" charset="-78"/>
               </a:rPr>
               <a:t>science</a:t>
             </a:r>
@@ -46657,8 +45797,7 @@
                   <a:srgbClr val="1B3B6F"/>
                 </a:solidFill>
                 <a:latin typeface="Calibri" pitchFamily="34" charset="0"/>
-                <a:ea typeface="Calibri" pitchFamily="34" charset="-122"/>
-                <a:cs typeface="Calibri" pitchFamily="34" charset="-120"/>
+                <a:cs typeface="Amiri" pitchFamily="2" charset="-78"/>
               </a:rPr>
               <a:t>C</a:t>
             </a:r>
@@ -46696,8 +45835,7 @@
                   <a:srgbClr val="9AA1AB"/>
                 </a:solidFill>
                 <a:latin typeface="Calibri" pitchFamily="34" charset="0"/>
-                <a:ea typeface="Calibri" pitchFamily="34" charset="-122"/>
-                <a:cs typeface="Calibri" pitchFamily="34" charset="-120"/>
+                <a:cs typeface="Amiri" pitchFamily="2" charset="-78"/>
               </a:rPr>
               <a:t>Arabic</a:t>
             </a:r>
@@ -46734,9 +45872,8 @@
                 <a:solidFill>
                   <a:srgbClr val="8A6D1E"/>
                 </a:solidFill>
-                <a:latin typeface="Amiri" pitchFamily="34" charset="0"/>
-                <a:ea typeface="Amiri" pitchFamily="34" charset="-122"/>
-                <a:cs typeface="Amiri" pitchFamily="34" charset="-120"/>
+                <a:latin typeface="Amiri" pitchFamily="2" charset="-78"/>
+                <a:cs typeface="Amiri" pitchFamily="2" charset="-78"/>
               </a:rPr>
               <a:t>مَادَّتِي المُفَضَّلَةُ هِيَ العُلُومُ</a:t>
             </a:r>
@@ -46833,8 +45970,7 @@
                   <a:srgbClr val="FFFFFF"/>
                 </a:solidFill>
                 <a:latin typeface="Calibri" pitchFamily="34" charset="0"/>
-                <a:ea typeface="Calibri" pitchFamily="34" charset="-122"/>
-                <a:cs typeface="Calibri" pitchFamily="34" charset="-120"/>
+                <a:cs typeface="Amiri" pitchFamily="2" charset="-78"/>
               </a:rPr>
               <a:t>5</a:t>
             </a:r>
@@ -46872,8 +46008,7 @@
                   <a:srgbClr val="1B3B6F"/>
                 </a:solidFill>
                 <a:latin typeface="Calibri" pitchFamily="34" charset="0"/>
-                <a:ea typeface="Calibri" pitchFamily="34" charset="-122"/>
-                <a:cs typeface="Calibri" pitchFamily="34" charset="-120"/>
+                <a:cs typeface="Amiri" pitchFamily="2" charset="-78"/>
               </a:rPr>
               <a:t>Why does she like it?</a:t>
             </a:r>
@@ -46936,8 +46071,7 @@
                   <a:srgbClr val="1B3B6F"/>
                 </a:solidFill>
                 <a:latin typeface="Calibri" pitchFamily="34" charset="0"/>
-                <a:ea typeface="Calibri" pitchFamily="34" charset="-122"/>
-                <a:cs typeface="Calibri" pitchFamily="34" charset="-120"/>
+                <a:cs typeface="Amiri" pitchFamily="2" charset="-78"/>
               </a:rPr>
               <a:t>A</a:t>
             </a:r>
@@ -46975,8 +46109,7 @@
                   <a:srgbClr val="9AA1AB"/>
                 </a:solidFill>
                 <a:latin typeface="Calibri" pitchFamily="34" charset="0"/>
-                <a:ea typeface="Calibri" pitchFamily="34" charset="-122"/>
-                <a:cs typeface="Calibri" pitchFamily="34" charset="-120"/>
+                <a:cs typeface="Amiri" pitchFamily="2" charset="-78"/>
               </a:rPr>
               <a:t>It is easy and short.</a:t>
             </a:r>
@@ -47066,8 +46199,7 @@
                   <a:srgbClr val="FFFFFF"/>
                 </a:solidFill>
                 <a:latin typeface="Calibri" pitchFamily="34" charset="0"/>
-                <a:ea typeface="Calibri" pitchFamily="34" charset="-122"/>
-                <a:cs typeface="Calibri" pitchFamily="34" charset="-120"/>
+                <a:cs typeface="Amiri" pitchFamily="2" charset="-78"/>
               </a:rPr>
               <a:t>B</a:t>
             </a:r>
@@ -47105,8 +46237,7 @@
                   <a:srgbClr val="1F2A37"/>
                 </a:solidFill>
                 <a:latin typeface="Calibri" pitchFamily="34" charset="0"/>
-                <a:ea typeface="Calibri" pitchFamily="34" charset="-122"/>
-                <a:cs typeface="Calibri" pitchFamily="34" charset="-120"/>
+                <a:cs typeface="Amiri" pitchFamily="2" charset="-78"/>
               </a:rPr>
               <a:t>It is useful and enjoyable.</a:t>
             </a:r>
@@ -47169,8 +46300,7 @@
                   <a:srgbClr val="1B3B6F"/>
                 </a:solidFill>
                 <a:latin typeface="Calibri" pitchFamily="34" charset="0"/>
-                <a:ea typeface="Calibri" pitchFamily="34" charset="-122"/>
-                <a:cs typeface="Calibri" pitchFamily="34" charset="-120"/>
+                <a:cs typeface="Amiri" pitchFamily="2" charset="-78"/>
               </a:rPr>
               <a:t>C</a:t>
             </a:r>
@@ -47208,8 +46338,7 @@
                   <a:srgbClr val="9AA1AB"/>
                 </a:solidFill>
                 <a:latin typeface="Calibri" pitchFamily="34" charset="0"/>
-                <a:ea typeface="Calibri" pitchFamily="34" charset="-122"/>
-                <a:cs typeface="Calibri" pitchFamily="34" charset="-120"/>
+                <a:cs typeface="Amiri" pitchFamily="2" charset="-78"/>
               </a:rPr>
               <a:t>It is new and important.</a:t>
             </a:r>
@@ -47246,9 +46375,8 @@
                 <a:solidFill>
                   <a:srgbClr val="8A6D1E"/>
                 </a:solidFill>
-                <a:latin typeface="Amiri" pitchFamily="34" charset="0"/>
-                <a:ea typeface="Amiri" pitchFamily="34" charset="-122"/>
-                <a:cs typeface="Amiri" pitchFamily="34" charset="-120"/>
+                <a:latin typeface="Amiri" pitchFamily="2" charset="-78"/>
+                <a:cs typeface="Amiri" pitchFamily="2" charset="-78"/>
               </a:rPr>
               <a:t>لِأَنَّهَا مُفِيدَةٌ وَمُمْتِعَةٌ</a:t>
             </a:r>
@@ -47345,8 +46473,7 @@
                   <a:srgbClr val="FFFFFF"/>
                 </a:solidFill>
                 <a:latin typeface="Calibri" pitchFamily="34" charset="0"/>
-                <a:ea typeface="Calibri" pitchFamily="34" charset="-122"/>
-                <a:cs typeface="Calibri" pitchFamily="34" charset="-120"/>
+                <a:cs typeface="Amiri" pitchFamily="2" charset="-78"/>
               </a:rPr>
               <a:t>6</a:t>
             </a:r>
@@ -47384,8 +46511,7 @@
                   <a:srgbClr val="1B3B6F"/>
                 </a:solidFill>
                 <a:latin typeface="Calibri" pitchFamily="34" charset="0"/>
-                <a:ea typeface="Calibri" pitchFamily="34" charset="-122"/>
-                <a:cs typeface="Calibri" pitchFamily="34" charset="-120"/>
+                <a:cs typeface="Amiri" pitchFamily="2" charset="-78"/>
               </a:rPr>
               <a:t>Which subject does she dislike?</a:t>
             </a:r>
@@ -47448,8 +46574,7 @@
                   <a:srgbClr val="1B3B6F"/>
                 </a:solidFill>
                 <a:latin typeface="Calibri" pitchFamily="34" charset="0"/>
-                <a:ea typeface="Calibri" pitchFamily="34" charset="-122"/>
-                <a:cs typeface="Calibri" pitchFamily="34" charset="-120"/>
+                <a:cs typeface="Amiri" pitchFamily="2" charset="-78"/>
               </a:rPr>
               <a:t>A</a:t>
             </a:r>
@@ -47487,8 +46612,7 @@
                   <a:srgbClr val="9AA1AB"/>
                 </a:solidFill>
                 <a:latin typeface="Calibri" pitchFamily="34" charset="0"/>
-                <a:ea typeface="Calibri" pitchFamily="34" charset="-122"/>
-                <a:cs typeface="Calibri" pitchFamily="34" charset="-120"/>
+                <a:cs typeface="Amiri" pitchFamily="2" charset="-78"/>
               </a:rPr>
               <a:t>art</a:t>
             </a:r>
@@ -47551,8 +46675,7 @@
                   <a:srgbClr val="1B3B6F"/>
                 </a:solidFill>
                 <a:latin typeface="Calibri" pitchFamily="34" charset="0"/>
-                <a:ea typeface="Calibri" pitchFamily="34" charset="-122"/>
-                <a:cs typeface="Calibri" pitchFamily="34" charset="-120"/>
+                <a:cs typeface="Amiri" pitchFamily="2" charset="-78"/>
               </a:rPr>
               <a:t>B</a:t>
             </a:r>
@@ -47590,8 +46713,7 @@
                   <a:srgbClr val="9AA1AB"/>
                 </a:solidFill>
                 <a:latin typeface="Calibri" pitchFamily="34" charset="0"/>
-                <a:ea typeface="Calibri" pitchFamily="34" charset="-122"/>
-                <a:cs typeface="Calibri" pitchFamily="34" charset="-120"/>
+                <a:cs typeface="Amiri" pitchFamily="2" charset="-78"/>
               </a:rPr>
               <a:t>English</a:t>
             </a:r>
@@ -47681,8 +46803,7 @@
                   <a:srgbClr val="FFFFFF"/>
                 </a:solidFill>
                 <a:latin typeface="Calibri" pitchFamily="34" charset="0"/>
-                <a:ea typeface="Calibri" pitchFamily="34" charset="-122"/>
-                <a:cs typeface="Calibri" pitchFamily="34" charset="-120"/>
+                <a:cs typeface="Amiri" pitchFamily="2" charset="-78"/>
               </a:rPr>
               <a:t>C</a:t>
             </a:r>
@@ -47720,8 +46841,7 @@
                   <a:srgbClr val="1F2A37"/>
                 </a:solidFill>
                 <a:latin typeface="Calibri" pitchFamily="34" charset="0"/>
-                <a:ea typeface="Calibri" pitchFamily="34" charset="-122"/>
-                <a:cs typeface="Calibri" pitchFamily="34" charset="-120"/>
+                <a:cs typeface="Amiri" pitchFamily="2" charset="-78"/>
               </a:rPr>
               <a:t>history</a:t>
             </a:r>
@@ -47758,9 +46878,8 @@
                 <a:solidFill>
                   <a:srgbClr val="8A6D1E"/>
                 </a:solidFill>
-                <a:latin typeface="Amiri" pitchFamily="34" charset="0"/>
-                <a:ea typeface="Amiri" pitchFamily="34" charset="-122"/>
-                <a:cs typeface="Amiri" pitchFamily="34" charset="-120"/>
+                <a:latin typeface="Amiri" pitchFamily="2" charset="-78"/>
+                <a:cs typeface="Amiri" pitchFamily="2" charset="-78"/>
               </a:rPr>
               <a:t>لَا أُحِبُّ التَّارِيخَ</a:t>
             </a:r>
@@ -47857,8 +46976,7 @@
                   <a:srgbClr val="FFFFFF"/>
                 </a:solidFill>
                 <a:latin typeface="Calibri" pitchFamily="34" charset="0"/>
-                <a:ea typeface="Calibri" pitchFamily="34" charset="-122"/>
-                <a:cs typeface="Calibri" pitchFamily="34" charset="-120"/>
+                <a:cs typeface="Amiri" pitchFamily="2" charset="-78"/>
               </a:rPr>
               <a:t>7</a:t>
             </a:r>
@@ -47896,8 +47014,7 @@
                   <a:srgbClr val="1B3B6F"/>
                 </a:solidFill>
                 <a:latin typeface="Calibri" pitchFamily="34" charset="0"/>
-                <a:ea typeface="Calibri" pitchFamily="34" charset="-122"/>
-                <a:cs typeface="Calibri" pitchFamily="34" charset="-120"/>
+                <a:cs typeface="Amiri" pitchFamily="2" charset="-78"/>
               </a:rPr>
               <a:t>What must students do?</a:t>
             </a:r>
@@ -47987,8 +47104,7 @@
                   <a:srgbClr val="FFFFFF"/>
                 </a:solidFill>
                 <a:latin typeface="Calibri" pitchFamily="34" charset="0"/>
-                <a:ea typeface="Calibri" pitchFamily="34" charset="-122"/>
-                <a:cs typeface="Calibri" pitchFamily="34" charset="-120"/>
+                <a:cs typeface="Amiri" pitchFamily="2" charset="-78"/>
               </a:rPr>
               <a:t>A</a:t>
             </a:r>
@@ -48026,8 +47142,7 @@
                   <a:srgbClr val="1F2A37"/>
                 </a:solidFill>
                 <a:latin typeface="Calibri" pitchFamily="34" charset="0"/>
-                <a:ea typeface="Calibri" pitchFamily="34" charset="-122"/>
-                <a:cs typeface="Calibri" pitchFamily="34" charset="-120"/>
+                <a:cs typeface="Amiri" pitchFamily="2" charset="-78"/>
               </a:rPr>
               <a:t>arrive on time</a:t>
             </a:r>
@@ -48090,8 +47205,7 @@
                   <a:srgbClr val="1B3B6F"/>
                 </a:solidFill>
                 <a:latin typeface="Calibri" pitchFamily="34" charset="0"/>
-                <a:ea typeface="Calibri" pitchFamily="34" charset="-122"/>
-                <a:cs typeface="Calibri" pitchFamily="34" charset="-120"/>
+                <a:cs typeface="Amiri" pitchFamily="2" charset="-78"/>
               </a:rPr>
               <a:t>B</a:t>
             </a:r>
@@ -48129,8 +47243,7 @@
                   <a:srgbClr val="9AA1AB"/>
                 </a:solidFill>
                 <a:latin typeface="Calibri" pitchFamily="34" charset="0"/>
-                <a:ea typeface="Calibri" pitchFamily="34" charset="-122"/>
-                <a:cs typeface="Calibri" pitchFamily="34" charset="-120"/>
+                <a:cs typeface="Amiri" pitchFamily="2" charset="-78"/>
               </a:rPr>
               <a:t>bring lunch</a:t>
             </a:r>
@@ -48193,8 +47306,7 @@
                   <a:srgbClr val="1B3B6F"/>
                 </a:solidFill>
                 <a:latin typeface="Calibri" pitchFamily="34" charset="0"/>
-                <a:ea typeface="Calibri" pitchFamily="34" charset="-122"/>
-                <a:cs typeface="Calibri" pitchFamily="34" charset="-120"/>
+                <a:cs typeface="Amiri" pitchFamily="2" charset="-78"/>
               </a:rPr>
               <a:t>C</a:t>
             </a:r>
@@ -48232,8 +47344,7 @@
                   <a:srgbClr val="9AA1AB"/>
                 </a:solidFill>
                 <a:latin typeface="Calibri" pitchFamily="34" charset="0"/>
-                <a:ea typeface="Calibri" pitchFamily="34" charset="-122"/>
-                <a:cs typeface="Calibri" pitchFamily="34" charset="-120"/>
+                <a:cs typeface="Amiri" pitchFamily="2" charset="-78"/>
               </a:rPr>
               <a:t>wear blue</a:t>
             </a:r>
@@ -48270,9 +47381,8 @@
                 <a:solidFill>
                   <a:srgbClr val="8A6D1E"/>
                 </a:solidFill>
-                <a:latin typeface="Amiri" pitchFamily="34" charset="0"/>
-                <a:ea typeface="Amiri" pitchFamily="34" charset="-122"/>
-                <a:cs typeface="Amiri" pitchFamily="34" charset="-120"/>
+                <a:latin typeface="Amiri" pitchFamily="2" charset="-78"/>
+                <a:cs typeface="Amiri" pitchFamily="2" charset="-78"/>
               </a:rPr>
               <a:t>أَنْ يَصِلُوا فِي الوَقْتِ</a:t>
             </a:r>
@@ -48369,8 +47479,7 @@
                   <a:srgbClr val="FFFFFF"/>
                 </a:solidFill>
                 <a:latin typeface="Calibri" pitchFamily="34" charset="0"/>
-                <a:ea typeface="Calibri" pitchFamily="34" charset="-122"/>
-                <a:cs typeface="Calibri" pitchFamily="34" charset="-120"/>
+                <a:cs typeface="Amiri" pitchFamily="2" charset="-78"/>
               </a:rPr>
               <a:t>8</a:t>
             </a:r>
@@ -48408,8 +47517,7 @@
                   <a:srgbClr val="1B3B6F"/>
                 </a:solidFill>
                 <a:latin typeface="Calibri" pitchFamily="34" charset="0"/>
-                <a:ea typeface="Calibri" pitchFamily="34" charset="-122"/>
-                <a:cs typeface="Calibri" pitchFamily="34" charset="-120"/>
+                <a:cs typeface="Amiri" pitchFamily="2" charset="-78"/>
               </a:rPr>
               <a:t>What is not allowed during the lesson?</a:t>
             </a:r>
@@ -48472,8 +47580,7 @@
                   <a:srgbClr val="1B3B6F"/>
                 </a:solidFill>
                 <a:latin typeface="Calibri" pitchFamily="34" charset="0"/>
-                <a:ea typeface="Calibri" pitchFamily="34" charset="-122"/>
-                <a:cs typeface="Calibri" pitchFamily="34" charset="-120"/>
+                <a:cs typeface="Amiri" pitchFamily="2" charset="-78"/>
               </a:rPr>
               <a:t>A</a:t>
             </a:r>
@@ -48511,8 +47618,7 @@
                   <a:srgbClr val="9AA1AB"/>
                 </a:solidFill>
                 <a:latin typeface="Calibri" pitchFamily="34" charset="0"/>
-                <a:ea typeface="Calibri" pitchFamily="34" charset="-122"/>
-                <a:cs typeface="Calibri" pitchFamily="34" charset="-120"/>
+                <a:cs typeface="Amiri" pitchFamily="2" charset="-78"/>
               </a:rPr>
               <a:t>books</a:t>
             </a:r>
@@ -48602,8 +47708,7 @@
                   <a:srgbClr val="FFFFFF"/>
                 </a:solidFill>
                 <a:latin typeface="Calibri" pitchFamily="34" charset="0"/>
-                <a:ea typeface="Calibri" pitchFamily="34" charset="-122"/>
-                <a:cs typeface="Calibri" pitchFamily="34" charset="-120"/>
+                <a:cs typeface="Amiri" pitchFamily="2" charset="-78"/>
               </a:rPr>
               <a:t>B</a:t>
             </a:r>
@@ -48641,8 +47746,7 @@
                   <a:srgbClr val="1F2A37"/>
                 </a:solidFill>
                 <a:latin typeface="Calibri" pitchFamily="34" charset="0"/>
-                <a:ea typeface="Calibri" pitchFamily="34" charset="-122"/>
-                <a:cs typeface="Calibri" pitchFamily="34" charset="-120"/>
+                <a:cs typeface="Amiri" pitchFamily="2" charset="-78"/>
               </a:rPr>
               <a:t>phones</a:t>
             </a:r>
@@ -48705,8 +47809,7 @@
                   <a:srgbClr val="1B3B6F"/>
                 </a:solidFill>
                 <a:latin typeface="Calibri" pitchFamily="34" charset="0"/>
-                <a:ea typeface="Calibri" pitchFamily="34" charset="-122"/>
-                <a:cs typeface="Calibri" pitchFamily="34" charset="-120"/>
+                <a:cs typeface="Amiri" pitchFamily="2" charset="-78"/>
               </a:rPr>
               <a:t>C</a:t>
             </a:r>
@@ -48744,8 +47847,7 @@
                   <a:srgbClr val="9AA1AB"/>
                 </a:solidFill>
                 <a:latin typeface="Calibri" pitchFamily="34" charset="0"/>
-                <a:ea typeface="Calibri" pitchFamily="34" charset="-122"/>
-                <a:cs typeface="Calibri" pitchFamily="34" charset="-120"/>
+                <a:cs typeface="Amiri" pitchFamily="2" charset="-78"/>
               </a:rPr>
               <a:t>questions</a:t>
             </a:r>
@@ -48782,9 +47884,8 @@
                 <a:solidFill>
                   <a:srgbClr val="8A6D1E"/>
                 </a:solidFill>
-                <a:latin typeface="Amiri" pitchFamily="34" charset="0"/>
-                <a:ea typeface="Amiri" pitchFamily="34" charset="-122"/>
-                <a:cs typeface="Amiri" pitchFamily="34" charset="-120"/>
+                <a:latin typeface="Amiri" pitchFamily="2" charset="-78"/>
+                <a:cs typeface="Amiri" pitchFamily="2" charset="-78"/>
               </a:rPr>
               <a:t>الهَوَاتِفَ أَثْنَاءَ الدَّرْسِ</a:t>
             </a:r>
@@ -48822,8 +47923,7 @@
                   <a:srgbClr val="8A93A0"/>
                 </a:solidFill>
                 <a:latin typeface="Calibri" pitchFamily="34" charset="0"/>
-                <a:ea typeface="Calibri" pitchFamily="34" charset="-122"/>
-                <a:cs typeface="Calibri" pitchFamily="34" charset="-120"/>
+                <a:cs typeface="Amiri" pitchFamily="2" charset="-78"/>
               </a:rPr>
               <a:t>9 / 23</a:t>
             </a:r>

--- a/Foundation_F4/F4-L12_Review_and_Unit_Assessment_School_Life.pptx
+++ b/Foundation_F4/F4-L12_Review_and_Unit_Assessment_School_Life.pptx
@@ -622,7 +622,11 @@
           <a:lstStyle/>
           <a:p>
             <a:r>
-              <a:rPr lang="en-US" dirty="0"/>
+              <a:rPr lang="ar-SA" dirty="0">
+                <a:latin typeface="Amiri" pitchFamily="2" charset="-78"/>
+                <a:ea typeface="Amiri" pitchFamily="2" charset="-78"/>
+                <a:cs typeface="Amiri" pitchFamily="2" charset="-78"/>
+              </a:rPr>
               <a:t>LISTENING TEXT 2 (website, 12 marks: 8 matches + 4 true / false). Read twice — use two voices if possible.
 SCRIPT: فِي يَوْمِ الاِثْنَيْنِ تَدْرُسُ مَرْيَمُ اللُّغَةَ العَرَبِيَّةَ وَاللُّغَةَ الإِنْجِلِيزِيَّةَ، أَمَّا يُوسُفُ فَيَدْرُسُ الرِّيَاضِيَّاتِ وَالجُغْرَافِيَا. وَفِي يَوْمِ الأَرْبِعَاءِ يَدْرُسُ كِلَاهُمَا الفَنَّ، وَلَكِنَّ يُوسُفَ يَدْرُسُ العُلُومَ أَيْضًا. وَفِي يَوْمِ الخَمِيسِ يَدْرُسُ كِلَاهُمَا اللُّغَةَ العَرَبِيَّةَ، وَتَدْرُسُ مَرْيَمُ العُلُومَ بَيْنَمَا يَدْرُسُ يُوسُفُ التَّرْبِيَةَ البَدَنِيَّةَ. تَنْتَهِي دِرَاسَةُ مَرْيَمَ فِي السَّاعَةِ الثَّالِثَةِ، وَتَنْتَهِي دِرَاسَةُ يُوسُفَ فِي السَّاعَةِ الثَّالِثَةِ وَالنِّصْفِ.
 ANSWERS 1–6: 1 Mariam · 2 Yusuf · 3 Both · 4 Both · 5 Yusuf · 6 Mariam.</a:t>
@@ -712,7 +716,11 @@
           <a:lstStyle/>
           <a:p>
             <a:r>
-              <a:rPr lang="en-US" dirty="0"/>
+              <a:rPr lang="ar-SA" dirty="0">
+                <a:latin typeface="Amiri" pitchFamily="2" charset="-78"/>
+                <a:ea typeface="Amiri" pitchFamily="2" charset="-78"/>
+                <a:cs typeface="Amiri" pitchFamily="2" charset="-78"/>
+              </a:rPr>
               <a:t>ANSWERS 7–12: 7 Mariam · 8 Yusuf · 9 True · 10 False (Yusuf studies maths on Monday) · 11 True · 12 False (3:00 and 3:30).
 Website after both texts: reveal the script, compare the exact wording with your answers, then identify one listening cue to remember (e.g. أَمَّا … فَـ introduces a contrast between two people; كِلَاهُمَا = both of them).</a:t>
             </a:r>
@@ -978,7 +986,11 @@
           <a:lstStyle/>
           <a:p>
             <a:r>
-              <a:rPr lang="en-US" dirty="0"/>
+              <a:rPr lang="ar-SA" dirty="0">
+                <a:latin typeface="Amiri" pitchFamily="2" charset="-78"/>
+                <a:ea typeface="Amiri" pitchFamily="2" charset="-78"/>
+                <a:cs typeface="Amiri" pitchFamily="2" charset="-78"/>
+              </a:rPr>
               <a:t>Mark /10. Ask Stretch students which phrase shows Omar keeps trying (وَلَكِنِّي أُحَاوِلُ كُلَّ يَوْمٍ).</a:t>
             </a:r>
             <a:endParaRPr lang="en-US" dirty="0"/>
@@ -1066,7 +1078,11 @@
           <a:lstStyle/>
           <a:p>
             <a:r>
-              <a:rPr lang="en-US" dirty="0"/>
+              <a:rPr lang="ar-SA" dirty="0">
+                <a:latin typeface="Amiri" pitchFamily="2" charset="-78"/>
+                <a:ea typeface="Amiri" pitchFamily="2" charset="-78"/>
+                <a:cs typeface="Amiri" pitchFamily="2" charset="-78"/>
+              </a:rPr>
               <a:t>WRITING QUESTION 1 (website, 5 marks). Example answers: الاِسْمُ: مَرْيَمُ · العُمْرُ: اِثْنَتَا عَشْرَةَ سَنَةً / ١٢ · الجِنْسِيَّةُ: بِرِيطَانِيَّةٌ · المَوَادُّ: العَرَبِيَّةُ وَالعُلُومُ وَالتَّارِيخُ · المَادَّةُ المُفَضَّلَةُ: العُلُومُ.
 Accept numerals for age; accept masculine or feminine nationality matching the writer.</a:t>
             </a:r>
@@ -1245,7 +1261,11 @@
           <a:lstStyle/>
           <a:p>
             <a:r>
-              <a:rPr lang="en-US" dirty="0"/>
+              <a:rPr lang="ar-SA" dirty="0">
+                <a:latin typeface="Amiri" pitchFamily="2" charset="-78"/>
+                <a:ea typeface="Amiri" pitchFamily="2" charset="-78"/>
+                <a:cs typeface="Amiri" pitchFamily="2" charset="-78"/>
+              </a:rPr>
               <a:t>TEACHER-WRITTEN FULL-MARK MODEL (about 75 words). Students compare and add ONE improvement in green pen (self-assessment only — the mark stands). Point out: three connectives (ثُمَّ، وَلَكِنَّ، وَ), a masculine reason (لِأَنَّهُ مُمْتِعٌ), a feminine adjective (صَعْبَةٌ), a timetable detail and two rules with أَنْ.</a:t>
             </a:r>
             <a:endParaRPr lang="en-US" dirty="0"/>
@@ -1511,7 +1531,11 @@
           <a:lstStyle/>
           <a:p>
             <a:r>
-              <a:rPr lang="en-US" dirty="0"/>
+              <a:rPr lang="ar-SA" dirty="0">
+                <a:latin typeface="Amiri" pitchFamily="2" charset="-78"/>
+                <a:ea typeface="Amiri" pitchFamily="2" charset="-78"/>
+                <a:cs typeface="Amiri" pitchFamily="2" charset="-78"/>
+              </a:rPr>
               <a:t>WELCOME (1 min) — while students join.
 • Greet each student by name as they arrive: السَّلَامُ عَلَيْكُمْ. Take the register (Pastoral Tracker: attendance 0/1).
 • 2-MINUTE CHECK-IN (SEND training): a private chat to any student who seemed unsettled last lesson — “Are you okay today? 👍 / 👎”.
@@ -2231,7 +2255,11 @@
           <a:lstStyle/>
           <a:p>
             <a:r>
-              <a:rPr lang="en-US" dirty="0"/>
+              <a:rPr lang="ar-SA" dirty="0">
+                <a:latin typeface="Amiri" pitchFamily="2" charset="-78"/>
+                <a:ea typeface="Amiri" pitchFamily="2" charset="-78"/>
+                <a:cs typeface="Amiri" pitchFamily="2" charset="-78"/>
+              </a:rPr>
               <a:t>REVIEW (website “F4 grammar system and sentence builders”): Present-tense person — أَنَا أَدْرُسُ · هُوَ يَدْرُسُ · هِيَ تَدْرُسُ. Days and time — فِي يَوْمِ + day · عِنْدَ السَّاعَةِ + time. Reasons — لِأَنَّهُ + masculine · لِأَنَّهَا + feminine. Rules — يَجِبُ أَنْ + verb · لَا يَجُوزُ + verbal noun.
 Website sentence builders (correct choices): أُفَضِّلُ العُلُومَ لِأَنَّهَا مُفِيدَةٌ. · فِي يَوْمِ الاِثْنَيْنِ عِنْدِي اللُّغَةُ العَرَبِيَّةُ عِنْدَ السَّاعَةِ التَّاسِعَةِ. · يَجِبُ أَنْ نَصِلَ فِي الوَقْتِ.
 The website language vault (places and people, subjects, timetable, classroom objects and routines, opinions, rules and connectives) is for revision BEFORE the assessment — close it during each section.</a:t>
@@ -2409,7 +2437,11 @@
           <a:lstStyle/>
           <a:p>
             <a:r>
-              <a:rPr lang="en-US" dirty="0"/>
+              <a:rPr lang="ar-SA" dirty="0">
+                <a:latin typeface="Amiri" pitchFamily="2" charset="-78"/>
+                <a:ea typeface="Amiri" pitchFamily="2" charset="-78"/>
+                <a:cs typeface="Amiri" pitchFamily="2" charset="-78"/>
+              </a:rPr>
               <a:t>LISTENING TEXT 1 (website, 8 marks). Read twice at natural pace; students answer after the second reading.
 SCRIPT: اِسْمِي سَلْمَى، وَأَدْرُسُ فِي مَدْرَسَةِ النُّورِ. فِي مَدْرَسَتِنَا نَحْوُ سِتِّمِئَةِ طَالِبٍ وَطَالِبَةٍ. أَدْرُسُ اللُّغَةَ العَرَبِيَّةَ وَاللُّغَةَ الإِنْجِلِيزِيَّةَ وَالرِّيَاضِيَّاتِ وَالعُلُومَ وَالتَّارِيخَ. مَادَّتِي المُفَضَّلَةُ هِيَ العُلُومُ لِأَنَّهَا مُفِيدَةٌ وَمُمْتِعَةٌ. لَا أُحِبُّ التَّارِيخَ لِأَنَّهُ طَوِيلٌ وَصَعْبٌ. يَجِبُ عَلَى الطُّلَّابِ أَنْ يَصِلُوا فِي الوَقْتِ، وَلَا يَجُوزُ لَهُمْ أَنْ يَسْتَخْدِمُوا الهَوَاتِفَ أَثْنَاءَ الدَّرْسِ.
 Private chat: 1_ 2_ 3_ 4_ 5_ 6_ 7_ 8_</a:t>
@@ -2983,6 +3015,7 @@
                   <a:srgbClr val="D4AF37"/>
                 </a:solidFill>
                 <a:latin typeface="Amiri" pitchFamily="2" charset="-78"/>
+                <a:ea typeface="Amiri" pitchFamily="2" charset="-78"/>
                 <a:cs typeface="Amiri" pitchFamily="2" charset="-78"/>
               </a:rPr>
               <a:t>م</a:t>
@@ -3189,6 +3222,7 @@
                   <a:srgbClr val="D4AF37"/>
                 </a:solidFill>
                 <a:latin typeface="Amiri" pitchFamily="2" charset="-78"/>
+                <a:ea typeface="Amiri" pitchFamily="2" charset="-78"/>
                 <a:cs typeface="Amiri" pitchFamily="2" charset="-78"/>
               </a:rPr>
               <a:t>المُرَاجَعَةُ وَتَقْيِيمُ الوَحْدَةِ — الحَيَاةُ المَدْرَسِيَّةُ</a:t>
@@ -3646,6 +3680,7 @@
                   <a:srgbClr val="D4AF37"/>
                 </a:solidFill>
                 <a:latin typeface="Amiri" pitchFamily="2" charset="-78"/>
+                <a:ea typeface="Amiri" pitchFamily="2" charset="-78"/>
                 <a:cs typeface="Amiri" pitchFamily="2" charset="-78"/>
               </a:rPr>
               <a:t>م</a:t>
@@ -3966,6 +4001,7 @@
                   <a:srgbClr val="8A6D1E"/>
                 </a:solidFill>
                 <a:latin typeface="Amiri" pitchFamily="2" charset="-78"/>
+                <a:ea typeface="Amiri" pitchFamily="2" charset="-78"/>
                 <a:cs typeface="Amiri" pitchFamily="2" charset="-78"/>
               </a:rPr>
               <a:t>النَّصُّ الثَّانِي</a:t>
@@ -5355,6 +5391,7 @@
                   <a:srgbClr val="D4AF37"/>
                 </a:solidFill>
                 <a:latin typeface="Amiri" pitchFamily="2" charset="-78"/>
+                <a:ea typeface="Amiri" pitchFamily="2" charset="-78"/>
                 <a:cs typeface="Amiri" pitchFamily="2" charset="-78"/>
               </a:rPr>
               <a:t>م</a:t>
@@ -5675,6 +5712,7 @@
                   <a:srgbClr val="8A6D1E"/>
                 </a:solidFill>
                 <a:latin typeface="Amiri" pitchFamily="2" charset="-78"/>
+                <a:ea typeface="Amiri" pitchFamily="2" charset="-78"/>
                 <a:cs typeface="Amiri" pitchFamily="2" charset="-78"/>
               </a:rPr>
               <a:t>النَّصُّ الثَّانِي</a:t>
@@ -7064,6 +7102,7 @@
                   <a:srgbClr val="D4AF37"/>
                 </a:solidFill>
                 <a:latin typeface="Amiri" pitchFamily="2" charset="-78"/>
+                <a:ea typeface="Amiri" pitchFamily="2" charset="-78"/>
                 <a:cs typeface="Amiri" pitchFamily="2" charset="-78"/>
               </a:rPr>
               <a:t>م</a:t>
@@ -7384,6 +7423,7 @@
                   <a:srgbClr val="8A6D1E"/>
                 </a:solidFill>
                 <a:latin typeface="Amiri" pitchFamily="2" charset="-78"/>
+                <a:ea typeface="Amiri" pitchFamily="2" charset="-78"/>
                 <a:cs typeface="Amiri" pitchFamily="2" charset="-78"/>
               </a:rPr>
               <a:t>حَيَاتِي المَدْرَسِيَّةُ</a:t>
@@ -7497,6 +7537,7 @@
                   <a:srgbClr val="1F2A37"/>
                 </a:solidFill>
                 <a:latin typeface="Amiri" pitchFamily="2" charset="-78"/>
+                <a:ea typeface="Amiri" pitchFamily="2" charset="-78"/>
                 <a:cs typeface="Amiri" pitchFamily="2" charset="-78"/>
               </a:rPr>
               <a:t>أَنَا عُمَرُ، وَأَدْرُسُ فِي مَدْرَسَةٍ كَبِيرَةٍ قَرِيبَةٍ مِنْ بَيْتِي. تَبْدَأُ الدِّرَاسَةُ فِي السَّاعَةِ الثَّامِنَةِ، وَتَنْتَهِي فِي السَّاعَةِ الثَّالِثَةِ. أَدْرُسُ سِتَّ مَوَادَّ، وَأُفَضِّلُ الحَاسُوبَ لِأَنَّهُ مُفِيدٌ وَمُمْتِعٌ. مُعَلِّمُ الحَاسُوبِ صَبُورٌ وَيَشْرَحُ الدَّرْسَ بِوُضُوحٍ. لَا أُحِبُّ الرِّيَاضِيَّاتِ كَثِيرًا لِأَنَّهَا صَعْبَةٌ، وَلَكِنِّي أُحَاوِلُ كُلَّ يَوْمٍ. فِي مَدْرَسَتِنَا مَكْتَبَةٌ جَيِّدَةٌ وَمَلْعَبٌ وَاسِعٌ. يَجِبُ أَنْ نَحْتَرِمَ المُعَلِّمِينَ، وَلَا يَجُوزُ الأَكْلُ فِي المَكْتَبَةِ.</a:t>
@@ -7630,6 +7671,7 @@
                   <a:srgbClr val="D4AF37"/>
                 </a:solidFill>
                 <a:latin typeface="Amiri" pitchFamily="2" charset="-78"/>
+                <a:ea typeface="Amiri" pitchFamily="2" charset="-78"/>
                 <a:cs typeface="Amiri" pitchFamily="2" charset="-78"/>
               </a:rPr>
               <a:t>م</a:t>
@@ -7950,6 +7992,7 @@
                   <a:srgbClr val="8A6D1E"/>
                 </a:solidFill>
                 <a:latin typeface="Amiri" pitchFamily="2" charset="-78"/>
+                <a:ea typeface="Amiri" pitchFamily="2" charset="-78"/>
                 <a:cs typeface="Amiri" pitchFamily="2" charset="-78"/>
               </a:rPr>
               <a:t>أَسْئِلَةُ القِرَاءَةِ</a:t>
@@ -10749,6 +10792,7 @@
                   <a:srgbClr val="D4AF37"/>
                 </a:solidFill>
                 <a:latin typeface="Amiri" pitchFamily="2" charset="-78"/>
+                <a:ea typeface="Amiri" pitchFamily="2" charset="-78"/>
                 <a:cs typeface="Amiri" pitchFamily="2" charset="-78"/>
               </a:rPr>
               <a:t>م</a:t>
@@ -11069,6 +11113,7 @@
                   <a:srgbClr val="8A6D1E"/>
                 </a:solidFill>
                 <a:latin typeface="Amiri" pitchFamily="2" charset="-78"/>
+                <a:ea typeface="Amiri" pitchFamily="2" charset="-78"/>
                 <a:cs typeface="Amiri" pitchFamily="2" charset="-78"/>
               </a:rPr>
               <a:t>الإِجَابَاتُ</a:t>
@@ -11610,6 +11655,7 @@
                   <a:srgbClr val="8A6D1E"/>
                 </a:solidFill>
                 <a:latin typeface="Amiri" pitchFamily="2" charset="-78"/>
+                <a:ea typeface="Amiri" pitchFamily="2" charset="-78"/>
                 <a:cs typeface="Amiri" pitchFamily="2" charset="-78"/>
               </a:rPr>
               <a:t>قَرِيبَةٍ مِنْ بَيْتِي</a:t>
@@ -12113,6 +12159,7 @@
                   <a:srgbClr val="8A6D1E"/>
                 </a:solidFill>
                 <a:latin typeface="Amiri" pitchFamily="2" charset="-78"/>
+                <a:ea typeface="Amiri" pitchFamily="2" charset="-78"/>
                 <a:cs typeface="Amiri" pitchFamily="2" charset="-78"/>
               </a:rPr>
               <a:t>فِي السَّاعَةِ الثَّامِنَةِ … فِي السَّاعَةِ الثَّالِثَةِ</a:t>
@@ -12616,6 +12663,7 @@
                   <a:srgbClr val="8A6D1E"/>
                 </a:solidFill>
                 <a:latin typeface="Amiri" pitchFamily="2" charset="-78"/>
+                <a:ea typeface="Amiri" pitchFamily="2" charset="-78"/>
                 <a:cs typeface="Amiri" pitchFamily="2" charset="-78"/>
               </a:rPr>
               <a:t>أُفَضِّلُ الحَاسُوبَ لِأَنَّهُ مُفِيدٌ وَمُمْتِعٌ</a:t>
@@ -13119,6 +13167,7 @@
                   <a:srgbClr val="8A6D1E"/>
                 </a:solidFill>
                 <a:latin typeface="Amiri" pitchFamily="2" charset="-78"/>
+                <a:ea typeface="Amiri" pitchFamily="2" charset="-78"/>
                 <a:cs typeface="Amiri" pitchFamily="2" charset="-78"/>
               </a:rPr>
               <a:t>صَبُورٌ وَيَشْرَحُ الدَّرْسَ بِوُضُوحٍ</a:t>
@@ -13622,6 +13671,7 @@
                   <a:srgbClr val="8A6D1E"/>
                 </a:solidFill>
                 <a:latin typeface="Amiri" pitchFamily="2" charset="-78"/>
+                <a:ea typeface="Amiri" pitchFamily="2" charset="-78"/>
                 <a:cs typeface="Amiri" pitchFamily="2" charset="-78"/>
               </a:rPr>
               <a:t>مَكْتَبَةٌ جَيِّدَةٌ وَمَلْعَبٌ وَاسِعٌ</a:t>
@@ -14125,6 +14175,7 @@
                   <a:srgbClr val="8A6D1E"/>
                 </a:solidFill>
                 <a:latin typeface="Amiri" pitchFamily="2" charset="-78"/>
+                <a:ea typeface="Amiri" pitchFamily="2" charset="-78"/>
                 <a:cs typeface="Amiri" pitchFamily="2" charset="-78"/>
               </a:rPr>
               <a:t>نَحْتَرِمَ المُعَلِّمِينَ … لَا يَجُوزُ الأَكْلُ فِي المَكْتَبَةِ</a:t>
@@ -14258,6 +14309,7 @@
                   <a:srgbClr val="D4AF37"/>
                 </a:solidFill>
                 <a:latin typeface="Amiri" pitchFamily="2" charset="-78"/>
+                <a:ea typeface="Amiri" pitchFamily="2" charset="-78"/>
                 <a:cs typeface="Amiri" pitchFamily="2" charset="-78"/>
               </a:rPr>
               <a:t>م</a:t>
@@ -14578,6 +14630,7 @@
                   <a:srgbClr val="8A6D1E"/>
                 </a:solidFill>
                 <a:latin typeface="Amiri" pitchFamily="2" charset="-78"/>
+                <a:ea typeface="Amiri" pitchFamily="2" charset="-78"/>
                 <a:cs typeface="Amiri" pitchFamily="2" charset="-78"/>
               </a:rPr>
               <a:t>اِسْتِمَارَةُ التَّسْجِيلِ</a:t>
@@ -14858,6 +14911,7 @@
                   <a:srgbClr val="1B3B6F"/>
                 </a:solidFill>
                 <a:latin typeface="Amiri" pitchFamily="2" charset="-78"/>
+                <a:ea typeface="Amiri" pitchFamily="2" charset="-78"/>
                 <a:cs typeface="Amiri" pitchFamily="2" charset="-78"/>
               </a:rPr>
               <a:t>الاِسْمُ</a:t>
@@ -15064,6 +15118,7 @@
                   <a:srgbClr val="1B3B6F"/>
                 </a:solidFill>
                 <a:latin typeface="Amiri" pitchFamily="2" charset="-78"/>
+                <a:ea typeface="Amiri" pitchFamily="2" charset="-78"/>
                 <a:cs typeface="Amiri" pitchFamily="2" charset="-78"/>
               </a:rPr>
               <a:t>العُمْرُ</a:t>
@@ -15270,6 +15325,7 @@
                   <a:srgbClr val="1B3B6F"/>
                 </a:solidFill>
                 <a:latin typeface="Amiri" pitchFamily="2" charset="-78"/>
+                <a:ea typeface="Amiri" pitchFamily="2" charset="-78"/>
                 <a:cs typeface="Amiri" pitchFamily="2" charset="-78"/>
               </a:rPr>
               <a:t>الجِنْسِيَّةُ</a:t>
@@ -15476,6 +15532,7 @@
                   <a:srgbClr val="1B3B6F"/>
                 </a:solidFill>
                 <a:latin typeface="Amiri" pitchFamily="2" charset="-78"/>
+                <a:ea typeface="Amiri" pitchFamily="2" charset="-78"/>
                 <a:cs typeface="Amiri" pitchFamily="2" charset="-78"/>
               </a:rPr>
               <a:t>المَوَادُّ</a:t>
@@ -15682,6 +15739,7 @@
                   <a:srgbClr val="1B3B6F"/>
                 </a:solidFill>
                 <a:latin typeface="Amiri" pitchFamily="2" charset="-78"/>
+                <a:ea typeface="Amiri" pitchFamily="2" charset="-78"/>
                 <a:cs typeface="Amiri" pitchFamily="2" charset="-78"/>
               </a:rPr>
               <a:t>المَادَّةُ المُفَضَّلَةُ</a:t>
@@ -15956,6 +16014,7 @@
                   <a:srgbClr val="D4AF37"/>
                 </a:solidFill>
                 <a:latin typeface="Amiri" pitchFamily="2" charset="-78"/>
+                <a:ea typeface="Amiri" pitchFamily="2" charset="-78"/>
                 <a:cs typeface="Amiri" pitchFamily="2" charset="-78"/>
               </a:rPr>
               <a:t>م</a:t>
@@ -16276,6 +16335,7 @@
                   <a:srgbClr val="8A6D1E"/>
                 </a:solidFill>
                 <a:latin typeface="Amiri" pitchFamily="2" charset="-78"/>
+                <a:ea typeface="Amiri" pitchFamily="2" charset="-78"/>
                 <a:cs typeface="Amiri" pitchFamily="2" charset="-78"/>
               </a:rPr>
               <a:t>رِسَالَةٌ إِلَى طَالِبٍ جَدِيدٍ</a:t>
@@ -17426,6 +17486,7 @@
                   <a:srgbClr val="D4AF37"/>
                 </a:solidFill>
                 <a:latin typeface="Amiri" pitchFamily="2" charset="-78"/>
+                <a:ea typeface="Amiri" pitchFamily="2" charset="-78"/>
                 <a:cs typeface="Amiri" pitchFamily="2" charset="-78"/>
               </a:rPr>
               <a:t>م</a:t>
@@ -17746,6 +17807,7 @@
                   <a:srgbClr val="8A6D1E"/>
                 </a:solidFill>
                 <a:latin typeface="Amiri" pitchFamily="2" charset="-78"/>
+                <a:ea typeface="Amiri" pitchFamily="2" charset="-78"/>
                 <a:cs typeface="Amiri" pitchFamily="2" charset="-78"/>
               </a:rPr>
               <a:t>نَمُوذَجُ الدَّرَجَةِ الكَامِلَةِ</a:t>
@@ -17849,6 +17911,7 @@
                   <a:srgbClr val="1B3B6F"/>
                 </a:solidFill>
                 <a:latin typeface="Amiri" pitchFamily="2" charset="-78"/>
+                <a:ea typeface="Amiri" pitchFamily="2" charset="-78"/>
                 <a:cs typeface="Amiri" pitchFamily="2" charset="-78"/>
               </a:rPr>
               <a:t>عَزِيزِي آدَمُ، أَهْلًا وَسَهْلًا فِي مَدْرَسَتِنَا! مَدْرَسَتُنَا كَبِيرَةٌ، وَفِيهَا مَكْتَبَةٌ وَمُخْتَبَرٌ.</a:t>
@@ -17955,6 +18018,7 @@
                   <a:srgbClr val="1B3B6F"/>
                 </a:solidFill>
                 <a:latin typeface="Amiri" pitchFamily="2" charset="-78"/>
+                <a:ea typeface="Amiri" pitchFamily="2" charset="-78"/>
                 <a:cs typeface="Amiri" pitchFamily="2" charset="-78"/>
               </a:rPr>
               <a:t>نَدْرُسُ ثَمَانِيَ مَوَادَّ. فِي يَوْمِ الاِثْنَيْنِ عِنْدَنَا العَرَبِيَّةُ عِنْدَ السَّاعَةِ التَّاسِعَةِ، ثُمَّ العُلُومُ.</a:t>
@@ -18058,6 +18122,7 @@
                   <a:srgbClr val="1B3B6F"/>
                 </a:solidFill>
                 <a:latin typeface="Amiri" pitchFamily="2" charset="-78"/>
+                <a:ea typeface="Amiri" pitchFamily="2" charset="-78"/>
                 <a:cs typeface="Amiri" pitchFamily="2" charset="-78"/>
               </a:rPr>
               <a:t>يَجِبُ أَنْ نَصِلَ فِي الوَقْتِ، وَلَا يَجُوزُ أَنْ نَسْتَعْمِلَ الهَاتِفَ فِي الدَّرْسِ.</a:t>
@@ -18161,6 +18226,7 @@
                   <a:srgbClr val="1B3B6F"/>
                 </a:solidFill>
                 <a:latin typeface="Amiri" pitchFamily="2" charset="-78"/>
+                <a:ea typeface="Amiri" pitchFamily="2" charset="-78"/>
                 <a:cs typeface="Amiri" pitchFamily="2" charset="-78"/>
               </a:rPr>
               <a:t>أُفَضِّلُ التَّارِيخَ لِأَنَّهُ مُمْتِعٌ، وَلَكِنَّ الرِّيَاضِيَّاتِ صَعْبَةٌ قَلِيلًا. المُعَلِّمُونَ صَبُورُونَ.</a:t>
@@ -18264,6 +18330,7 @@
                   <a:srgbClr val="1B3B6F"/>
                 </a:solidFill>
                 <a:latin typeface="Amiri" pitchFamily="2" charset="-78"/>
+                <a:ea typeface="Amiri" pitchFamily="2" charset="-78"/>
                 <a:cs typeface="Amiri" pitchFamily="2" charset="-78"/>
               </a:rPr>
               <a:t>أَتَمَنَّى أَنْ تُحِبَّ المَدْرَسَةَ. إِلَى اللِّقَاءِ! صَدِيقُكَ، يُوسُفُ</a:t>
@@ -18435,6 +18502,7 @@
                   <a:srgbClr val="D4AF37"/>
                 </a:solidFill>
                 <a:latin typeface="Amiri" pitchFamily="2" charset="-78"/>
+                <a:ea typeface="Amiri" pitchFamily="2" charset="-78"/>
                 <a:cs typeface="Amiri" pitchFamily="2" charset="-78"/>
               </a:rPr>
               <a:t>م</a:t>
@@ -18755,6 +18823,7 @@
                   <a:srgbClr val="8A6D1E"/>
                 </a:solidFill>
                 <a:latin typeface="Amiri" pitchFamily="2" charset="-78"/>
+                <a:ea typeface="Amiri" pitchFamily="2" charset="-78"/>
                 <a:cs typeface="Amiri" pitchFamily="2" charset="-78"/>
               </a:rPr>
               <a:t>تَمْثِيلُ الدَّوْرِ</a:t>
@@ -18959,6 +19028,7 @@
                   <a:srgbClr val="1B3B6F"/>
                 </a:solidFill>
                 <a:latin typeface="Amiri" pitchFamily="2" charset="-78"/>
+                <a:ea typeface="Amiri" pitchFamily="2" charset="-78"/>
                 <a:cs typeface="Amiri" pitchFamily="2" charset="-78"/>
               </a:rPr>
               <a:t>السَّلَامُ عَلَيْكُمْ. اِسْمِي …</a:t>
@@ -19127,6 +19197,7 @@
                   <a:srgbClr val="1B3B6F"/>
                 </a:solidFill>
                 <a:latin typeface="Amiri" pitchFamily="2" charset="-78"/>
+                <a:ea typeface="Amiri" pitchFamily="2" charset="-78"/>
                 <a:cs typeface="Amiri" pitchFamily="2" charset="-78"/>
               </a:rPr>
               <a:t>أَدْرُسُ … وَ …</a:t>
@@ -19295,6 +19366,7 @@
                   <a:srgbClr val="1B3B6F"/>
                 </a:solidFill>
                 <a:latin typeface="Amiri" pitchFamily="2" charset="-78"/>
+                <a:ea typeface="Amiri" pitchFamily="2" charset="-78"/>
                 <a:cs typeface="Amiri" pitchFamily="2" charset="-78"/>
               </a:rPr>
               <a:t>عِنْدِي … يَوْمَ …</a:t>
@@ -19463,6 +19535,7 @@
                   <a:srgbClr val="1B3B6F"/>
                 </a:solidFill>
                 <a:latin typeface="Amiri" pitchFamily="2" charset="-78"/>
+                <a:ea typeface="Amiri" pitchFamily="2" charset="-78"/>
                 <a:cs typeface="Amiri" pitchFamily="2" charset="-78"/>
               </a:rPr>
               <a:t>مَادَّتِي المُفَضَّلَةُ … لِأَنَّهَا …</a:t>
@@ -19631,6 +19704,7 @@
                   <a:srgbClr val="1B3B6F"/>
                 </a:solidFill>
                 <a:latin typeface="Amiri" pitchFamily="2" charset="-78"/>
+                <a:ea typeface="Amiri" pitchFamily="2" charset="-78"/>
                 <a:cs typeface="Amiri" pitchFamily="2" charset="-78"/>
               </a:rPr>
               <a:t>يَجِبُ أَنْ …</a:t>
@@ -19905,6 +19979,7 @@
                   <a:srgbClr val="D4AF37"/>
                 </a:solidFill>
                 <a:latin typeface="Amiri" pitchFamily="2" charset="-78"/>
+                <a:ea typeface="Amiri" pitchFamily="2" charset="-78"/>
                 <a:cs typeface="Amiri" pitchFamily="2" charset="-78"/>
               </a:rPr>
               <a:t>م</a:t>
@@ -20225,6 +20300,7 @@
                   <a:srgbClr val="8A6D1E"/>
                 </a:solidFill>
                 <a:latin typeface="Amiri" pitchFamily="2" charset="-78"/>
+                <a:ea typeface="Amiri" pitchFamily="2" charset="-78"/>
                 <a:cs typeface="Amiri" pitchFamily="2" charset="-78"/>
               </a:rPr>
               <a:t>مَا رَأْيُكَ فِي مَدْرَسَتِكَ؟</a:t>
@@ -20328,6 +20404,7 @@
                   <a:srgbClr val="1B3B6F"/>
                 </a:solidFill>
                 <a:latin typeface="Amiri" pitchFamily="2" charset="-78"/>
+                <a:ea typeface="Amiri" pitchFamily="2" charset="-78"/>
                 <a:cs typeface="Amiri" pitchFamily="2" charset="-78"/>
               </a:rPr>
               <a:t>مَا رَأْيُكَ فِي مَدْرَسَتِكَ؟ هَلْ تُحِبُّ المَدْرَسَةَ؟ لِمَاذَا؟</a:t>
@@ -20431,6 +20508,7 @@
                   <a:srgbClr val="1B3B6F"/>
                 </a:solidFill>
                 <a:latin typeface="Amiri" pitchFamily="2" charset="-78"/>
+                <a:ea typeface="Amiri" pitchFamily="2" charset="-78"/>
                 <a:cs typeface="Amiri" pitchFamily="2" charset="-78"/>
               </a:rPr>
               <a:t>أُحِبُّ مَدْرَسَتِي لِأَنَّ المُعَلِّمِينَ صَبُورُونَ.</a:t>
@@ -20534,6 +20612,7 @@
                   <a:srgbClr val="1B3B6F"/>
                 </a:solidFill>
                 <a:latin typeface="Amiri" pitchFamily="2" charset="-78"/>
+                <a:ea typeface="Amiri" pitchFamily="2" charset="-78"/>
                 <a:cs typeface="Amiri" pitchFamily="2" charset="-78"/>
               </a:rPr>
               <a:t>مَدْرَسَتِي كَبِيرَةٌ، وَفِيهَا مَلْعَبٌ. أُحِبُّ العُلُومَ، وَلَكِنَّ اليَوْمَ طَوِيلٌ.</a:t>
@@ -20640,6 +20719,7 @@
                   <a:srgbClr val="1B3B6F"/>
                 </a:solidFill>
                 <a:latin typeface="Amiri" pitchFamily="2" charset="-78"/>
+                <a:ea typeface="Amiri" pitchFamily="2" charset="-78"/>
                 <a:cs typeface="Amiri" pitchFamily="2" charset="-78"/>
               </a:rPr>
               <a:t>فِي رَأْيِي، مَدْرَسَتِي جَيِّدَةٌ لِأَنَّنِي أَتَعَلَّمُ كَثِيرًا، وَلَكِنَّ الوَاجِبَاتِ كَثِيرَةٌ أَحْيَانًا.</a:t>
@@ -20811,6 +20891,7 @@
                   <a:srgbClr val="D4AF37"/>
                 </a:solidFill>
                 <a:latin typeface="Amiri" pitchFamily="2" charset="-78"/>
+                <a:ea typeface="Amiri" pitchFamily="2" charset="-78"/>
                 <a:cs typeface="Amiri" pitchFamily="2" charset="-78"/>
               </a:rPr>
               <a:t>م</a:t>
@@ -21131,6 +21212,7 @@
                   <a:srgbClr val="8A6D1E"/>
                 </a:solidFill>
                 <a:latin typeface="Amiri" pitchFamily="2" charset="-78"/>
+                <a:ea typeface="Amiri" pitchFamily="2" charset="-78"/>
                 <a:cs typeface="Amiri" pitchFamily="2" charset="-78"/>
               </a:rPr>
               <a:t>آدَابُ الصَّفِّ</a:t>
@@ -22662,6 +22744,7 @@
                   <a:srgbClr val="D4AF37"/>
                 </a:solidFill>
                 <a:latin typeface="Amiri" pitchFamily="2" charset="-78"/>
+                <a:ea typeface="Amiri" pitchFamily="2" charset="-78"/>
                 <a:cs typeface="Amiri" pitchFamily="2" charset="-78"/>
               </a:rPr>
               <a:t>م</a:t>
@@ -22982,6 +23065,7 @@
                   <a:srgbClr val="8A6D1E"/>
                 </a:solidFill>
                 <a:latin typeface="Amiri" pitchFamily="2" charset="-78"/>
+                <a:ea typeface="Amiri" pitchFamily="2" charset="-78"/>
                 <a:cs typeface="Amiri" pitchFamily="2" charset="-78"/>
               </a:rPr>
               <a:t>مِلَفُّ التَّقْيِيمِ</a:t>
@@ -24154,6 +24238,7 @@
                   <a:srgbClr val="D4AF37"/>
                 </a:solidFill>
                 <a:latin typeface="Amiri" pitchFamily="2" charset="-78"/>
+                <a:ea typeface="Amiri" pitchFamily="2" charset="-78"/>
                 <a:cs typeface="Amiri" pitchFamily="2" charset="-78"/>
               </a:rPr>
               <a:t>م</a:t>
@@ -24474,6 +24559,7 @@
                   <a:srgbClr val="8A6D1E"/>
                 </a:solidFill>
                 <a:latin typeface="Amiri" pitchFamily="2" charset="-78"/>
+                <a:ea typeface="Amiri" pitchFamily="2" charset="-78"/>
                 <a:cs typeface="Amiri" pitchFamily="2" charset="-78"/>
               </a:rPr>
               <a:t>قَيِّمْ عَمَلَكَ</a:t>
@@ -25631,6 +25717,7 @@
                   <a:srgbClr val="D4AF37"/>
                 </a:solidFill>
                 <a:latin typeface="Amiri" pitchFamily="2" charset="-78"/>
+                <a:ea typeface="Amiri" pitchFamily="2" charset="-78"/>
                 <a:cs typeface="Amiri" pitchFamily="2" charset="-78"/>
               </a:rPr>
               <a:t>م</a:t>
@@ -25951,6 +26038,7 @@
                   <a:srgbClr val="8A6D1E"/>
                 </a:solidFill>
                 <a:latin typeface="Amiri" pitchFamily="2" charset="-78"/>
+                <a:ea typeface="Amiri" pitchFamily="2" charset="-78"/>
                 <a:cs typeface="Amiri" pitchFamily="2" charset="-78"/>
               </a:rPr>
               <a:t>التَّحْضِيرُ لِلدَّرْسِ القَادِمِ</a:t>
@@ -26164,6 +26252,7 @@
                   <a:srgbClr val="1B3B6F"/>
                 </a:solidFill>
                 <a:latin typeface="Amiri" pitchFamily="2" charset="-78"/>
+                <a:ea typeface="Amiri" pitchFamily="2" charset="-78"/>
                 <a:cs typeface="Amiri" pitchFamily="2" charset="-78"/>
               </a:rPr>
               <a:t>خُبْزٌ</a:t>
@@ -26253,6 +26342,7 @@
                   <a:srgbClr val="1B3B6F"/>
                 </a:solidFill>
                 <a:latin typeface="Amiri" pitchFamily="2" charset="-78"/>
+                <a:ea typeface="Amiri" pitchFamily="2" charset="-78"/>
                 <a:cs typeface="Amiri" pitchFamily="2" charset="-78"/>
               </a:rPr>
               <a:t>أَرُزٌّ</a:t>
@@ -26342,6 +26432,7 @@
                   <a:srgbClr val="1B3B6F"/>
                 </a:solidFill>
                 <a:latin typeface="Amiri" pitchFamily="2" charset="-78"/>
+                <a:ea typeface="Amiri" pitchFamily="2" charset="-78"/>
                 <a:cs typeface="Amiri" pitchFamily="2" charset="-78"/>
               </a:rPr>
               <a:t>دَجَاجٌ</a:t>
@@ -26431,6 +26522,7 @@
                   <a:srgbClr val="1B3B6F"/>
                 </a:solidFill>
                 <a:latin typeface="Amiri" pitchFamily="2" charset="-78"/>
+                <a:ea typeface="Amiri" pitchFamily="2" charset="-78"/>
                 <a:cs typeface="Amiri" pitchFamily="2" charset="-78"/>
               </a:rPr>
               <a:t>تُفَّاحٌ</a:t>
@@ -26520,6 +26612,7 @@
                   <a:srgbClr val="1B3B6F"/>
                 </a:solidFill>
                 <a:latin typeface="Amiri" pitchFamily="2" charset="-78"/>
+                <a:ea typeface="Amiri" pitchFamily="2" charset="-78"/>
                 <a:cs typeface="Amiri" pitchFamily="2" charset="-78"/>
               </a:rPr>
               <a:t>مَاءٌ</a:t>
@@ -26685,6 +26778,7 @@
                   <a:srgbClr val="1B3B6F"/>
                 </a:solidFill>
                 <a:latin typeface="Amiri" pitchFamily="2" charset="-78"/>
+                <a:ea typeface="Amiri" pitchFamily="2" charset="-78"/>
                 <a:cs typeface="Amiri" pitchFamily="2" charset="-78"/>
               </a:rPr>
               <a:t>عَادَتِي الأُولَى</a:t>
@@ -27354,6 +27448,7 @@
                   <a:srgbClr val="FFFFFF"/>
                 </a:solidFill>
                 <a:latin typeface="Amiri" pitchFamily="2" charset="-78"/>
+                <a:ea typeface="Amiri" pitchFamily="2" charset="-78"/>
                 <a:cs typeface="Amiri" pitchFamily="2" charset="-78"/>
               </a:rPr>
               <a:t>أَحْسَنْتُمْ! إِلَى اللِّقَاءِ</a:t>
@@ -27506,6 +27601,7 @@
                   <a:srgbClr val="D4AF37"/>
                 </a:solidFill>
                 <a:latin typeface="Amiri" pitchFamily="2" charset="-78"/>
+                <a:ea typeface="Amiri" pitchFamily="2" charset="-78"/>
                 <a:cs typeface="Amiri" pitchFamily="2" charset="-78"/>
               </a:rPr>
               <a:t>الطَّعَامُ وَالشَّرَابُ</a:t>
@@ -27639,6 +27735,7 @@
                   <a:srgbClr val="D4AF37"/>
                 </a:solidFill>
                 <a:latin typeface="Amiri" pitchFamily="2" charset="-78"/>
+                <a:ea typeface="Amiri" pitchFamily="2" charset="-78"/>
                 <a:cs typeface="Amiri" pitchFamily="2" charset="-78"/>
               </a:rPr>
               <a:t>م</a:t>
@@ -27959,6 +28056,7 @@
                   <a:srgbClr val="8A6D1E"/>
                 </a:solidFill>
                 <a:latin typeface="Amiri" pitchFamily="2" charset="-78"/>
+                <a:ea typeface="Amiri" pitchFamily="2" charset="-78"/>
                 <a:cs typeface="Amiri" pitchFamily="2" charset="-78"/>
               </a:rPr>
               <a:t>خَرِيطَةُ الدَّرْسِ</a:t>
@@ -28273,6 +28371,7 @@
                   <a:srgbClr val="0E7C86"/>
                 </a:solidFill>
                 <a:latin typeface="Amiri" pitchFamily="2" charset="-78"/>
+                <a:ea typeface="Amiri" pitchFamily="2" charset="-78"/>
                 <a:cs typeface="Amiri" pitchFamily="2" charset="-78"/>
               </a:rPr>
               <a:t>تَهْيِئَةٌ</a:t>
@@ -28549,6 +28648,7 @@
                   <a:srgbClr val="1B3B6F"/>
                 </a:solidFill>
                 <a:latin typeface="Amiri" pitchFamily="2" charset="-78"/>
+                <a:ea typeface="Amiri" pitchFamily="2" charset="-78"/>
                 <a:cs typeface="Amiri" pitchFamily="2" charset="-78"/>
               </a:rPr>
               <a:t>خُطَّةُ التَّقْيِيمِ</a:t>
@@ -28825,6 +28925,7 @@
                   <a:srgbClr val="6B4C9A"/>
                 </a:solidFill>
                 <a:latin typeface="Amiri" pitchFamily="2" charset="-78"/>
+                <a:ea typeface="Amiri" pitchFamily="2" charset="-78"/>
                 <a:cs typeface="Amiri" pitchFamily="2" charset="-78"/>
               </a:rPr>
               <a:t>الاِسْتِمَاعُ</a:t>
@@ -29101,6 +29202,7 @@
                   <a:srgbClr val="2F6FB0"/>
                 </a:solidFill>
                 <a:latin typeface="Amiri" pitchFamily="2" charset="-78"/>
+                <a:ea typeface="Amiri" pitchFamily="2" charset="-78"/>
                 <a:cs typeface="Amiri" pitchFamily="2" charset="-78"/>
               </a:rPr>
               <a:t>القِرَاءَةُ</a:t>
@@ -29377,6 +29479,7 @@
                   <a:srgbClr val="1E6B52"/>
                 </a:solidFill>
                 <a:latin typeface="Amiri" pitchFamily="2" charset="-78"/>
+                <a:ea typeface="Amiri" pitchFamily="2" charset="-78"/>
                 <a:cs typeface="Amiri" pitchFamily="2" charset="-78"/>
               </a:rPr>
               <a:t>الكِتَابَةُ وَالتَّحَدُّثُ</a:t>
@@ -29653,6 +29756,7 @@
                   <a:srgbClr val="8A6D1E"/>
                 </a:solidFill>
                 <a:latin typeface="Amiri" pitchFamily="2" charset="-78"/>
+                <a:ea typeface="Amiri" pitchFamily="2" charset="-78"/>
                 <a:cs typeface="Amiri" pitchFamily="2" charset="-78"/>
               </a:rPr>
               <a:t>الهَدَفُ</a:t>
@@ -29929,6 +30033,7 @@
                   <a:srgbClr val="C45A3C"/>
                 </a:solidFill>
                 <a:latin typeface="Amiri" pitchFamily="2" charset="-78"/>
+                <a:ea typeface="Amiri" pitchFamily="2" charset="-78"/>
                 <a:cs typeface="Amiri" pitchFamily="2" charset="-78"/>
               </a:rPr>
               <a:t>اِسْتَعِدَّ</a:t>
@@ -30172,6 +30277,7 @@
                   <a:srgbClr val="D4AF37"/>
                 </a:solidFill>
                 <a:latin typeface="Amiri" pitchFamily="2" charset="-78"/>
+                <a:ea typeface="Amiri" pitchFamily="2" charset="-78"/>
                 <a:cs typeface="Amiri" pitchFamily="2" charset="-78"/>
               </a:rPr>
               <a:t>م</a:t>
@@ -30492,6 +30598,7 @@
                   <a:srgbClr val="8A6D1E"/>
                 </a:solidFill>
                 <a:latin typeface="Amiri" pitchFamily="2" charset="-78"/>
+                <a:ea typeface="Amiri" pitchFamily="2" charset="-78"/>
                 <a:cs typeface="Amiri" pitchFamily="2" charset="-78"/>
               </a:rPr>
               <a:t>اِبْدَأِ الآنَ</a:t>
@@ -30678,6 +30785,7 @@
                   <a:srgbClr val="1B3B6F"/>
                 </a:solidFill>
                 <a:latin typeface="Amiri" pitchFamily="2" charset="-78"/>
+                <a:ea typeface="Amiri" pitchFamily="2" charset="-78"/>
                 <a:cs typeface="Amiri" pitchFamily="2" charset="-78"/>
               </a:rPr>
               <a:t>اِخْتِبَارٌ</a:t>
@@ -31142,6 +31250,7 @@
                   <a:srgbClr val="1B3B6F"/>
                 </a:solidFill>
                 <a:latin typeface="Amiri" pitchFamily="2" charset="-78"/>
+                <a:ea typeface="Amiri" pitchFamily="2" charset="-78"/>
                 <a:cs typeface="Amiri" pitchFamily="2" charset="-78"/>
               </a:rPr>
               <a:t>تَعْلِيمَاتٌ</a:t>
@@ -31606,6 +31715,7 @@
                   <a:srgbClr val="1B3B6F"/>
                 </a:solidFill>
                 <a:latin typeface="Amiri" pitchFamily="2" charset="-78"/>
+                <a:ea typeface="Amiri" pitchFamily="2" charset="-78"/>
                 <a:cs typeface="Amiri" pitchFamily="2" charset="-78"/>
               </a:rPr>
               <a:t>أُحِبُّ العُلُومَ</a:t>
@@ -31632,6 +31742,7 @@
                   <a:srgbClr val="1B3B6F"/>
                 </a:solidFill>
                 <a:latin typeface="Amiri" pitchFamily="2" charset="-78"/>
+                <a:ea typeface="Amiri" pitchFamily="2" charset="-78"/>
                 <a:cs typeface="Amiri" pitchFamily="2" charset="-78"/>
               </a:rPr>
               <a:t>مُفِيدَةٌ</a:t>
@@ -31746,6 +31857,7 @@
                   <a:srgbClr val="1F2A37"/>
                 </a:solidFill>
                 <a:latin typeface="Amiri" pitchFamily="2" charset="-78"/>
+                <a:ea typeface="Amiri" pitchFamily="2" charset="-78"/>
                 <a:cs typeface="Amiri" pitchFamily="2" charset="-78"/>
               </a:rPr>
               <a:t>لِأَنَّهُ</a:t>
@@ -31847,6 +31959,7 @@
                   <a:srgbClr val="1F2A37"/>
                 </a:solidFill>
                 <a:latin typeface="Amiri" pitchFamily="2" charset="-78"/>
+                <a:ea typeface="Amiri" pitchFamily="2" charset="-78"/>
                 <a:cs typeface="Amiri" pitchFamily="2" charset="-78"/>
               </a:rPr>
               <a:t>لَكِنَّ</a:t>
@@ -31948,6 +32061,7 @@
                   <a:srgbClr val="1F2A37"/>
                 </a:solidFill>
                 <a:latin typeface="Amiri" pitchFamily="2" charset="-78"/>
+                <a:ea typeface="Amiri" pitchFamily="2" charset="-78"/>
                 <a:cs typeface="Amiri" pitchFamily="2" charset="-78"/>
               </a:rPr>
               <a:t>لِأَنَّهَا</a:t>
@@ -32083,6 +32197,7 @@
                   <a:srgbClr val="1B3B6F"/>
                 </a:solidFill>
                 <a:latin typeface="Amiri" pitchFamily="2" charset="-78"/>
+                <a:ea typeface="Amiri" pitchFamily="2" charset="-78"/>
                 <a:cs typeface="Amiri" pitchFamily="2" charset="-78"/>
               </a:rPr>
               <a:t>لَا يَجُوزُ اسْتِخْدَامُ الهَاتِفِ.</a:t>
@@ -32534,6 +32649,7 @@
                   <a:srgbClr val="1B3B6F"/>
                 </a:solidFill>
                 <a:latin typeface="Amiri" pitchFamily="2" charset="-78"/>
+                <a:ea typeface="Amiri" pitchFamily="2" charset="-78"/>
                 <a:cs typeface="Amiri" pitchFamily="2" charset="-78"/>
               </a:rPr>
               <a:t>مَتَى</a:t>
@@ -33185,6 +33301,7 @@
                   <a:srgbClr val="D4AF37"/>
                 </a:solidFill>
                 <a:latin typeface="Amiri" pitchFamily="2" charset="-78"/>
+                <a:ea typeface="Amiri" pitchFamily="2" charset="-78"/>
                 <a:cs typeface="Amiri" pitchFamily="2" charset="-78"/>
               </a:rPr>
               <a:t>م</a:t>
@@ -33505,6 +33622,7 @@
                   <a:srgbClr val="8A6D1E"/>
                 </a:solidFill>
                 <a:latin typeface="Amiri" pitchFamily="2" charset="-78"/>
+                <a:ea typeface="Amiri" pitchFamily="2" charset="-78"/>
                 <a:cs typeface="Amiri" pitchFamily="2" charset="-78"/>
               </a:rPr>
               <a:t>الإِجَابَاتُ وَالتَّعْلِيلُ</a:t>
@@ -33691,6 +33809,7 @@
                   <a:srgbClr val="1B3B6F"/>
                 </a:solidFill>
                 <a:latin typeface="Amiri" pitchFamily="2" charset="-78"/>
+                <a:ea typeface="Amiri" pitchFamily="2" charset="-78"/>
                 <a:cs typeface="Amiri" pitchFamily="2" charset="-78"/>
               </a:rPr>
               <a:t>اِخْتِبَارٌ</a:t>
@@ -34220,6 +34339,7 @@
                   <a:srgbClr val="1B3B6F"/>
                 </a:solidFill>
                 <a:latin typeface="Amiri" pitchFamily="2" charset="-78"/>
+                <a:ea typeface="Amiri" pitchFamily="2" charset="-78"/>
                 <a:cs typeface="Amiri" pitchFamily="2" charset="-78"/>
               </a:rPr>
               <a:t>تَعْلِيمَاتٌ</a:t>
@@ -34749,6 +34869,7 @@
                   <a:srgbClr val="1B3B6F"/>
                 </a:solidFill>
                 <a:latin typeface="Amiri" pitchFamily="2" charset="-78"/>
+                <a:ea typeface="Amiri" pitchFamily="2" charset="-78"/>
                 <a:cs typeface="Amiri" pitchFamily="2" charset="-78"/>
               </a:rPr>
               <a:t>أُحِبُّ العُلُومَ</a:t>
@@ -34775,6 +34896,7 @@
                   <a:srgbClr val="1B3B6F"/>
                 </a:solidFill>
                 <a:latin typeface="Amiri" pitchFamily="2" charset="-78"/>
+                <a:ea typeface="Amiri" pitchFamily="2" charset="-78"/>
                 <a:cs typeface="Amiri" pitchFamily="2" charset="-78"/>
               </a:rPr>
               <a:t>مُفِيدَةٌ</a:t>
@@ -34889,6 +35011,7 @@
                   <a:srgbClr val="9AA1AB"/>
                 </a:solidFill>
                 <a:latin typeface="Amiri" pitchFamily="2" charset="-78"/>
+                <a:ea typeface="Amiri" pitchFamily="2" charset="-78"/>
                 <a:cs typeface="Amiri" pitchFamily="2" charset="-78"/>
               </a:rPr>
               <a:t>لِأَنَّهُ</a:t>
@@ -34990,6 +35113,7 @@
                   <a:srgbClr val="9AA1AB"/>
                 </a:solidFill>
                 <a:latin typeface="Amiri" pitchFamily="2" charset="-78"/>
+                <a:ea typeface="Amiri" pitchFamily="2" charset="-78"/>
                 <a:cs typeface="Amiri" pitchFamily="2" charset="-78"/>
               </a:rPr>
               <a:t>لَكِنَّ</a:t>
@@ -35118,6 +35242,7 @@
                   <a:srgbClr val="1F2A37"/>
                 </a:solidFill>
                 <a:latin typeface="Amiri" pitchFamily="2" charset="-78"/>
+                <a:ea typeface="Amiri" pitchFamily="2" charset="-78"/>
                 <a:cs typeface="Amiri" pitchFamily="2" charset="-78"/>
               </a:rPr>
               <a:t>لِأَنَّهَا</a:t>
@@ -35156,6 +35281,7 @@
                   <a:srgbClr val="8A6D1E"/>
                 </a:solidFill>
                 <a:latin typeface="Amiri" pitchFamily="2" charset="-78"/>
+                <a:ea typeface="Amiri" pitchFamily="2" charset="-78"/>
                 <a:cs typeface="Amiri" pitchFamily="2" charset="-78"/>
               </a:rPr>
               <a:t>العُلُومُ</a:t>
@@ -35304,6 +35430,7 @@
                   <a:srgbClr val="1B3B6F"/>
                 </a:solidFill>
                 <a:latin typeface="Amiri" pitchFamily="2" charset="-78"/>
+                <a:ea typeface="Amiri" pitchFamily="2" charset="-78"/>
                 <a:cs typeface="Amiri" pitchFamily="2" charset="-78"/>
               </a:rPr>
               <a:t>لَا يَجُوزُ اسْتِخْدَامُ الهَاتِفِ.</a:t>
@@ -35820,6 +35947,7 @@
                   <a:srgbClr val="1B3B6F"/>
                 </a:solidFill>
                 <a:latin typeface="Amiri" pitchFamily="2" charset="-78"/>
+                <a:ea typeface="Amiri" pitchFamily="2" charset="-78"/>
                 <a:cs typeface="Amiri" pitchFamily="2" charset="-78"/>
               </a:rPr>
               <a:t>مَتَى</a:t>
@@ -36349,6 +36477,7 @@
                   <a:srgbClr val="1B3B6F"/>
                 </a:solidFill>
                 <a:latin typeface="Amiri" pitchFamily="2" charset="-78"/>
+                <a:ea typeface="Amiri" pitchFamily="2" charset="-78"/>
                 <a:cs typeface="Amiri" pitchFamily="2" charset="-78"/>
               </a:rPr>
               <a:t>اِقْرَأْ · اِبْحَثْ عَنِ الدَّلِيلِ · أَجِبْ</a:t>
@@ -36482,6 +36611,7 @@
                   <a:srgbClr val="D4AF37"/>
                 </a:solidFill>
                 <a:latin typeface="Amiri" pitchFamily="2" charset="-78"/>
+                <a:ea typeface="Amiri" pitchFamily="2" charset="-78"/>
                 <a:cs typeface="Amiri" pitchFamily="2" charset="-78"/>
               </a:rPr>
               <a:t>م</a:t>
@@ -36802,6 +36932,7 @@
                   <a:srgbClr val="8A6D1E"/>
                 </a:solidFill>
                 <a:latin typeface="Amiri" pitchFamily="2" charset="-78"/>
+                <a:ea typeface="Amiri" pitchFamily="2" charset="-78"/>
                 <a:cs typeface="Amiri" pitchFamily="2" charset="-78"/>
               </a:rPr>
               <a:t>نِظَامُ القَوَاعِدِ</a:t>
@@ -36977,6 +37108,7 @@
                   <a:srgbClr val="8A6D1E"/>
                 </a:solidFill>
                 <a:latin typeface="Amiri" pitchFamily="2" charset="-78"/>
+                <a:ea typeface="Amiri" pitchFamily="2" charset="-78"/>
                 <a:cs typeface="Amiri" pitchFamily="2" charset="-78"/>
               </a:rPr>
               <a:t>أَنَا أَدْرُسُ · هِيَ تَدْرُسُ</a:t>
@@ -37015,6 +37147,7 @@
                   <a:srgbClr val="1B3B6F"/>
                 </a:solidFill>
                 <a:latin typeface="Amiri" pitchFamily="2" charset="-78"/>
+                <a:ea typeface="Amiri" pitchFamily="2" charset="-78"/>
                 <a:cs typeface="Amiri" pitchFamily="2" charset="-78"/>
               </a:rPr>
               <a:t>هُوَ يَدْرُسُ التَّارِيخَ.</a:t>
@@ -37255,6 +37388,7 @@
                   <a:srgbClr val="8A6D1E"/>
                 </a:solidFill>
                 <a:latin typeface="Amiri" pitchFamily="2" charset="-78"/>
+                <a:ea typeface="Amiri" pitchFamily="2" charset="-78"/>
                 <a:cs typeface="Amiri" pitchFamily="2" charset="-78"/>
               </a:rPr>
               <a:t>لِأَنَّهُ · لِأَنَّهَا</a:t>
@@ -37293,6 +37427,7 @@
                   <a:srgbClr val="1B3B6F"/>
                 </a:solidFill>
                 <a:latin typeface="Amiri" pitchFamily="2" charset="-78"/>
+                <a:ea typeface="Amiri" pitchFamily="2" charset="-78"/>
                 <a:cs typeface="Amiri" pitchFamily="2" charset="-78"/>
               </a:rPr>
               <a:t>أُحِبُّ العَرَبِيَّةَ لِأَنَّهَا مُمْتِعَةٌ.</a:t>
@@ -37533,6 +37668,7 @@
                   <a:srgbClr val="8A6D1E"/>
                 </a:solidFill>
                 <a:latin typeface="Amiri" pitchFamily="2" charset="-78"/>
+                <a:ea typeface="Amiri" pitchFamily="2" charset="-78"/>
                 <a:cs typeface="Amiri" pitchFamily="2" charset="-78"/>
               </a:rPr>
               <a:t>يَجِبُ أَنْ · لَا يَجُوزُ</a:t>
@@ -37571,6 +37707,7 @@
                   <a:srgbClr val="1B3B6F"/>
                 </a:solidFill>
                 <a:latin typeface="Amiri" pitchFamily="2" charset="-78"/>
+                <a:ea typeface="Amiri" pitchFamily="2" charset="-78"/>
                 <a:cs typeface="Amiri" pitchFamily="2" charset="-78"/>
               </a:rPr>
               <a:t>يَجِبُ أَنْ نَصِلَ فِي الوَقْتِ.</a:t>
@@ -37822,6 +37959,7 @@
                   <a:srgbClr val="1B3B6F"/>
                 </a:solidFill>
                 <a:latin typeface="Amiri" pitchFamily="2" charset="-78"/>
+                <a:ea typeface="Amiri" pitchFamily="2" charset="-78"/>
                 <a:cs typeface="Amiri" pitchFamily="2" charset="-78"/>
               </a:rPr>
               <a:t>هِيَ تَدْرُسُ التَّارِيخَ.</a:t>
@@ -37898,6 +38036,7 @@
                   <a:srgbClr val="B83227"/>
                 </a:solidFill>
                 <a:latin typeface="Amiri" pitchFamily="2" charset="-78"/>
+                <a:ea typeface="Amiri" pitchFamily="2" charset="-78"/>
                 <a:cs typeface="Amiri" pitchFamily="2" charset="-78"/>
               </a:rPr>
               <a:t>هِيَ أَدْرُسُ التَّارِيخَ.</a:t>
@@ -38054,6 +38193,7 @@
                   <a:srgbClr val="D4AF37"/>
                 </a:solidFill>
                 <a:latin typeface="Amiri" pitchFamily="2" charset="-78"/>
+                <a:ea typeface="Amiri" pitchFamily="2" charset="-78"/>
                 <a:cs typeface="Amiri" pitchFamily="2" charset="-78"/>
               </a:rPr>
               <a:t>م</a:t>
@@ -38374,6 +38514,7 @@
                   <a:srgbClr val="8A6D1E"/>
                 </a:solidFill>
                 <a:latin typeface="Amiri" pitchFamily="2" charset="-78"/>
+                <a:ea typeface="Amiri" pitchFamily="2" charset="-78"/>
                 <a:cs typeface="Amiri" pitchFamily="2" charset="-78"/>
               </a:rPr>
               <a:t>خُطَّةُ التَّقْيِيمِ</a:t>
@@ -39508,6 +39649,7 @@
                   <a:srgbClr val="D4AF37"/>
                 </a:solidFill>
                 <a:latin typeface="Amiri" pitchFamily="2" charset="-78"/>
+                <a:ea typeface="Amiri" pitchFamily="2" charset="-78"/>
                 <a:cs typeface="Amiri" pitchFamily="2" charset="-78"/>
               </a:rPr>
               <a:t>م</a:t>
@@ -39828,6 +39970,7 @@
                   <a:srgbClr val="8A6D1E"/>
                 </a:solidFill>
                 <a:latin typeface="Amiri" pitchFamily="2" charset="-78"/>
+                <a:ea typeface="Amiri" pitchFamily="2" charset="-78"/>
                 <a:cs typeface="Amiri" pitchFamily="2" charset="-78"/>
               </a:rPr>
               <a:t>الاِسْتِمَاعُ · النَّصُّ الأَوَّلُ</a:t>
@@ -43503,6 +43646,7 @@
                   <a:srgbClr val="D4AF37"/>
                 </a:solidFill>
                 <a:latin typeface="Amiri" pitchFamily="2" charset="-78"/>
+                <a:ea typeface="Amiri" pitchFamily="2" charset="-78"/>
                 <a:cs typeface="Amiri" pitchFamily="2" charset="-78"/>
               </a:rPr>
               <a:t>م</a:t>
@@ -43823,6 +43967,7 @@
                   <a:srgbClr val="8A6D1E"/>
                 </a:solidFill>
                 <a:latin typeface="Amiri" pitchFamily="2" charset="-78"/>
+                <a:ea typeface="Amiri" pitchFamily="2" charset="-78"/>
                 <a:cs typeface="Amiri" pitchFamily="2" charset="-78"/>
               </a:rPr>
               <a:t>الإِجَابَاتُ</a:t>
@@ -44364,6 +44509,7 @@
                   <a:srgbClr val="8A6D1E"/>
                 </a:solidFill>
                 <a:latin typeface="Amiri" pitchFamily="2" charset="-78"/>
+                <a:ea typeface="Amiri" pitchFamily="2" charset="-78"/>
                 <a:cs typeface="Amiri" pitchFamily="2" charset="-78"/>
               </a:rPr>
               <a:t>مَدْرَسَةِ النُّورِ</a:t>
@@ -44867,6 +45013,7 @@
                   <a:srgbClr val="8A6D1E"/>
                 </a:solidFill>
                 <a:latin typeface="Amiri" pitchFamily="2" charset="-78"/>
+                <a:ea typeface="Amiri" pitchFamily="2" charset="-78"/>
                 <a:cs typeface="Amiri" pitchFamily="2" charset="-78"/>
               </a:rPr>
               <a:t>نَحْوُ سِتِّمِئَةِ طَالِبٍ وَطَالِبَةٍ</a:t>
@@ -45370,6 +45517,7 @@
                   <a:srgbClr val="8A6D1E"/>
                 </a:solidFill>
                 <a:latin typeface="Amiri" pitchFamily="2" charset="-78"/>
+                <a:ea typeface="Amiri" pitchFamily="2" charset="-78"/>
                 <a:cs typeface="Amiri" pitchFamily="2" charset="-78"/>
               </a:rPr>
               <a:t>وَالعُلُومَ</a:t>
@@ -45873,6 +46021,7 @@
                   <a:srgbClr val="8A6D1E"/>
                 </a:solidFill>
                 <a:latin typeface="Amiri" pitchFamily="2" charset="-78"/>
+                <a:ea typeface="Amiri" pitchFamily="2" charset="-78"/>
                 <a:cs typeface="Amiri" pitchFamily="2" charset="-78"/>
               </a:rPr>
               <a:t>مَادَّتِي المُفَضَّلَةُ هِيَ العُلُومُ</a:t>
@@ -46376,6 +46525,7 @@
                   <a:srgbClr val="8A6D1E"/>
                 </a:solidFill>
                 <a:latin typeface="Amiri" pitchFamily="2" charset="-78"/>
+                <a:ea typeface="Amiri" pitchFamily="2" charset="-78"/>
                 <a:cs typeface="Amiri" pitchFamily="2" charset="-78"/>
               </a:rPr>
               <a:t>لِأَنَّهَا مُفِيدَةٌ وَمُمْتِعَةٌ</a:t>
@@ -46879,6 +47029,7 @@
                   <a:srgbClr val="8A6D1E"/>
                 </a:solidFill>
                 <a:latin typeface="Amiri" pitchFamily="2" charset="-78"/>
+                <a:ea typeface="Amiri" pitchFamily="2" charset="-78"/>
                 <a:cs typeface="Amiri" pitchFamily="2" charset="-78"/>
               </a:rPr>
               <a:t>لَا أُحِبُّ التَّارِيخَ</a:t>
@@ -47382,6 +47533,7 @@
                   <a:srgbClr val="8A6D1E"/>
                 </a:solidFill>
                 <a:latin typeface="Amiri" pitchFamily="2" charset="-78"/>
+                <a:ea typeface="Amiri" pitchFamily="2" charset="-78"/>
                 <a:cs typeface="Amiri" pitchFamily="2" charset="-78"/>
               </a:rPr>
               <a:t>أَنْ يَصِلُوا فِي الوَقْتِ</a:t>
@@ -47885,6 +48037,7 @@
                   <a:srgbClr val="8A6D1E"/>
                 </a:solidFill>
                 <a:latin typeface="Amiri" pitchFamily="2" charset="-78"/>
+                <a:ea typeface="Amiri" pitchFamily="2" charset="-78"/>
                 <a:cs typeface="Amiri" pitchFamily="2" charset="-78"/>
               </a:rPr>
               <a:t>الهَوَاتِفَ أَثْنَاءَ الدَّرْسِ</a:t>
@@ -47983,13 +48136,9 @@
     <a:fontScheme name="Office">
       <a:majorFont>
         <a:latin typeface="Calibri Light" panose="020F0302020204030204"/>
-        <a:ea typeface=""/>
-        <a:cs typeface=""/>
-        <a:font script="Jpan" typeface="游ゴシック Light"/>
-        <a:font script="Hang" typeface="맑은 고딕"/>
-        <a:font script="Hans" typeface="等线 Light"/>
-        <a:font script="Hant" typeface="新細明體"/>
-        <a:font script="Arab" typeface="Times New Roman"/>
+        <a:ea typeface="Amiri" pitchFamily="2" charset="-78"/>
+        <a:cs typeface="Amiri" pitchFamily="2" charset="-78"/>
+        <a:font script="Arab" typeface="Amiri"/>
         <a:font script="Hebr" typeface="Times New Roman"/>
         <a:font script="Thai" typeface="Angsana New"/>
         <a:font script="Ethi" typeface="Nyala"/>
@@ -48035,13 +48184,9 @@
       </a:majorFont>
       <a:minorFont>
         <a:latin typeface="Calibri" panose="020F0502020204030204"/>
-        <a:ea typeface=""/>
-        <a:cs typeface=""/>
-        <a:font script="Jpan" typeface="游ゴシック"/>
-        <a:font script="Hang" typeface="맑은 고딕"/>
-        <a:font script="Hans" typeface="等线"/>
-        <a:font script="Hant" typeface="新細明體"/>
-        <a:font script="Arab" typeface="Arial"/>
+        <a:ea typeface="Amiri" pitchFamily="2" charset="-78"/>
+        <a:cs typeface="Amiri" pitchFamily="2" charset="-78"/>
+        <a:font script="Arab" typeface="Amiri"/>
         <a:font script="Hebr" typeface="Arial"/>
         <a:font script="Thai" typeface="Cordia New"/>
         <a:font script="Ethi" typeface="Nyala"/>
